--- a/docs/pptx/auc3/jx-auc3-linsubhr-ratio-hosp4.pptx
+++ b/docs/pptx/auc3/jx-auc3-linsubhr-ratio-hosp4.pptx
@@ -2271,7 +2271,7 @@
           </p:nvSpPr>
           <p:spPr>
             <a:xfrm>
-              <a:off x="817517" y="5114368"/>
+              <a:off x="817517" y="5142518"/>
               <a:ext cx="7799693" cy="0"/>
             </a:xfrm>
             <a:custGeom>
@@ -2314,7 +2314,7 @@
           </p:nvSpPr>
           <p:spPr>
             <a:xfrm>
-              <a:off x="817517" y="4244691"/>
+              <a:off x="817517" y="4313054"/>
               <a:ext cx="7799693" cy="0"/>
             </a:xfrm>
             <a:custGeom>
@@ -2357,7 +2357,7 @@
           </p:nvSpPr>
           <p:spPr>
             <a:xfrm>
-              <a:off x="817517" y="3375014"/>
+              <a:off x="817517" y="3483591"/>
               <a:ext cx="7799693" cy="0"/>
             </a:xfrm>
             <a:custGeom>
@@ -2400,7 +2400,7 @@
           </p:nvSpPr>
           <p:spPr>
             <a:xfrm>
-              <a:off x="817517" y="2505337"/>
+              <a:off x="817517" y="2654127"/>
               <a:ext cx="7799693" cy="0"/>
             </a:xfrm>
             <a:custGeom>
@@ -2443,15 +2443,15 @@
           </p:nvSpPr>
           <p:spPr>
             <a:xfrm>
-              <a:off x="1615213" y="1896563"/>
-              <a:ext cx="0" cy="3826579"/>
+              <a:off x="1615213" y="2073503"/>
+              <a:ext cx="0" cy="3649639"/>
             </a:xfrm>
             <a:custGeom>
               <a:avLst/>
               <a:pathLst>
-                <a:path w="0" h="3826579">
+                <a:path w="0" h="3649639">
                   <a:moveTo>
-                    <a:pt x="0" y="3826579"/>
+                    <a:pt x="0" y="3649639"/>
                   </a:moveTo>
                   <a:lnTo>
                     <a:pt x="0" y="0"/>
@@ -2486,15 +2486,15 @@
           </p:nvSpPr>
           <p:spPr>
             <a:xfrm>
-              <a:off x="3387871" y="1896563"/>
-              <a:ext cx="0" cy="3826579"/>
+              <a:off x="3387871" y="2073503"/>
+              <a:ext cx="0" cy="3649639"/>
             </a:xfrm>
             <a:custGeom>
               <a:avLst/>
               <a:pathLst>
-                <a:path w="0" h="3826579">
+                <a:path w="0" h="3649639">
                   <a:moveTo>
-                    <a:pt x="0" y="3826579"/>
+                    <a:pt x="0" y="3649639"/>
                   </a:moveTo>
                   <a:lnTo>
                     <a:pt x="0" y="0"/>
@@ -2529,15 +2529,15 @@
           </p:nvSpPr>
           <p:spPr>
             <a:xfrm>
-              <a:off x="5160528" y="1896563"/>
-              <a:ext cx="0" cy="3826579"/>
+              <a:off x="5160528" y="2073503"/>
+              <a:ext cx="0" cy="3649639"/>
             </a:xfrm>
             <a:custGeom>
               <a:avLst/>
               <a:pathLst>
-                <a:path w="0" h="3826579">
+                <a:path w="0" h="3649639">
                   <a:moveTo>
-                    <a:pt x="0" y="3826579"/>
+                    <a:pt x="0" y="3649639"/>
                   </a:moveTo>
                   <a:lnTo>
                     <a:pt x="0" y="0"/>
@@ -2572,15 +2572,15 @@
           </p:nvSpPr>
           <p:spPr>
             <a:xfrm>
-              <a:off x="6933186" y="1896563"/>
-              <a:ext cx="0" cy="3826579"/>
+              <a:off x="6933186" y="2073503"/>
+              <a:ext cx="0" cy="3649639"/>
             </a:xfrm>
             <a:custGeom>
               <a:avLst/>
               <a:pathLst>
-                <a:path w="0" h="3826579">
+                <a:path w="0" h="3649639">
                   <a:moveTo>
-                    <a:pt x="0" y="3826579"/>
+                    <a:pt x="0" y="3649639"/>
                   </a:moveTo>
                   <a:lnTo>
                     <a:pt x="0" y="0"/>
@@ -2615,7 +2615,7 @@
           </p:nvSpPr>
           <p:spPr>
             <a:xfrm>
-              <a:off x="817517" y="5549207"/>
+              <a:off x="817517" y="5557249"/>
               <a:ext cx="7799693" cy="0"/>
             </a:xfrm>
             <a:custGeom>
@@ -2658,7 +2658,7 @@
           </p:nvSpPr>
           <p:spPr>
             <a:xfrm>
-              <a:off x="817517" y="4679530"/>
+              <a:off x="817517" y="4727786"/>
               <a:ext cx="7799693" cy="0"/>
             </a:xfrm>
             <a:custGeom>
@@ -2701,7 +2701,7 @@
           </p:nvSpPr>
           <p:spPr>
             <a:xfrm>
-              <a:off x="817517" y="3809853"/>
+              <a:off x="817517" y="3898322"/>
               <a:ext cx="7799693" cy="0"/>
             </a:xfrm>
             <a:custGeom>
@@ -2744,7 +2744,7 @@
           </p:nvSpPr>
           <p:spPr>
             <a:xfrm>
-              <a:off x="817517" y="2940175"/>
+              <a:off x="817517" y="3068859"/>
               <a:ext cx="7799693" cy="0"/>
             </a:xfrm>
             <a:custGeom>
@@ -2787,7 +2787,7 @@
           </p:nvSpPr>
           <p:spPr>
             <a:xfrm>
-              <a:off x="817517" y="2070498"/>
+              <a:off x="817517" y="2239395"/>
               <a:ext cx="7799693" cy="0"/>
             </a:xfrm>
             <a:custGeom>
@@ -2830,15 +2830,15 @@
           </p:nvSpPr>
           <p:spPr>
             <a:xfrm>
-              <a:off x="2501542" y="1896563"/>
-              <a:ext cx="0" cy="3826579"/>
+              <a:off x="2501542" y="2073503"/>
+              <a:ext cx="0" cy="3649639"/>
             </a:xfrm>
             <a:custGeom>
               <a:avLst/>
               <a:pathLst>
-                <a:path w="0" h="3826579">
+                <a:path w="0" h="3649639">
                   <a:moveTo>
-                    <a:pt x="0" y="3826579"/>
+                    <a:pt x="0" y="3649639"/>
                   </a:moveTo>
                   <a:lnTo>
                     <a:pt x="0" y="0"/>
@@ -2873,15 +2873,15 @@
           </p:nvSpPr>
           <p:spPr>
             <a:xfrm>
-              <a:off x="4274200" y="1896563"/>
-              <a:ext cx="0" cy="3826579"/>
+              <a:off x="4274200" y="2073503"/>
+              <a:ext cx="0" cy="3649639"/>
             </a:xfrm>
             <a:custGeom>
               <a:avLst/>
               <a:pathLst>
-                <a:path w="0" h="3826579">
+                <a:path w="0" h="3649639">
                   <a:moveTo>
-                    <a:pt x="0" y="3826579"/>
+                    <a:pt x="0" y="3649639"/>
                   </a:moveTo>
                   <a:lnTo>
                     <a:pt x="0" y="0"/>
@@ -2916,15 +2916,15 @@
           </p:nvSpPr>
           <p:spPr>
             <a:xfrm>
-              <a:off x="6046857" y="1896563"/>
-              <a:ext cx="0" cy="3826579"/>
+              <a:off x="6046857" y="2073503"/>
+              <a:ext cx="0" cy="3649639"/>
             </a:xfrm>
             <a:custGeom>
               <a:avLst/>
               <a:pathLst>
-                <a:path w="0" h="3826579">
+                <a:path w="0" h="3649639">
                   <a:moveTo>
-                    <a:pt x="0" y="3826579"/>
+                    <a:pt x="0" y="3649639"/>
                   </a:moveTo>
                   <a:lnTo>
                     <a:pt x="0" y="0"/>
@@ -2959,15 +2959,15 @@
           </p:nvSpPr>
           <p:spPr>
             <a:xfrm>
-              <a:off x="7819515" y="1896563"/>
-              <a:ext cx="0" cy="3826579"/>
+              <a:off x="7819515" y="2073503"/>
+              <a:ext cx="0" cy="3649639"/>
             </a:xfrm>
             <a:custGeom>
               <a:avLst/>
               <a:pathLst>
-                <a:path w="0" h="3826579">
+                <a:path w="0" h="3649639">
                   <a:moveTo>
-                    <a:pt x="0" y="3826579"/>
+                    <a:pt x="0" y="3649639"/>
                   </a:moveTo>
                   <a:lnTo>
                     <a:pt x="0" y="0"/>
@@ -3002,507 +3002,507 @@
           </p:nvSpPr>
           <p:spPr>
             <a:xfrm>
-              <a:off x="817517" y="1896563"/>
-              <a:ext cx="7392041" cy="3649462"/>
+              <a:off x="817517" y="2073503"/>
+              <a:ext cx="7392041" cy="3480712"/>
             </a:xfrm>
             <a:custGeom>
               <a:avLst/>
               <a:pathLst>
-                <a:path w="7392041" h="3649462">
+                <a:path w="7392041" h="3480712">
                   <a:moveTo>
                     <a:pt x="2254356" y="0"/>
                   </a:moveTo>
                   <a:lnTo>
-                    <a:pt x="2293965" y="197921"/>
-                  </a:lnTo>
-                  <a:lnTo>
-                    <a:pt x="2371209" y="545108"/>
-                  </a:lnTo>
-                  <a:lnTo>
-                    <a:pt x="2448452" y="857405"/>
-                  </a:lnTo>
-                  <a:lnTo>
-                    <a:pt x="2525696" y="1138316"/>
-                  </a:lnTo>
-                  <a:lnTo>
-                    <a:pt x="2602939" y="1390997"/>
-                  </a:lnTo>
-                  <a:lnTo>
-                    <a:pt x="2680183" y="1618285"/>
-                  </a:lnTo>
-                  <a:lnTo>
-                    <a:pt x="2757426" y="1822730"/>
-                  </a:lnTo>
-                  <a:lnTo>
-                    <a:pt x="2834670" y="2006630"/>
-                  </a:lnTo>
-                  <a:lnTo>
-                    <a:pt x="2911914" y="2172049"/>
-                  </a:lnTo>
-                  <a:lnTo>
-                    <a:pt x="2989157" y="2320843"/>
-                  </a:lnTo>
-                  <a:lnTo>
-                    <a:pt x="3066401" y="2454684"/>
-                  </a:lnTo>
-                  <a:lnTo>
-                    <a:pt x="3143644" y="2575075"/>
-                  </a:lnTo>
-                  <a:lnTo>
-                    <a:pt x="3220888" y="2683367"/>
-                  </a:lnTo>
-                  <a:lnTo>
-                    <a:pt x="3298131" y="2780776"/>
-                  </a:lnTo>
-                  <a:lnTo>
-                    <a:pt x="3375375" y="2790945"/>
-                  </a:lnTo>
-                  <a:lnTo>
-                    <a:pt x="3452619" y="2799043"/>
-                  </a:lnTo>
-                  <a:lnTo>
-                    <a:pt x="3529862" y="2807064"/>
-                  </a:lnTo>
-                  <a:lnTo>
-                    <a:pt x="3607106" y="2815010"/>
-                  </a:lnTo>
-                  <a:lnTo>
-                    <a:pt x="3684349" y="2822881"/>
-                  </a:lnTo>
-                  <a:lnTo>
-                    <a:pt x="3761593" y="2830678"/>
-                  </a:lnTo>
-                  <a:lnTo>
-                    <a:pt x="3838836" y="2838402"/>
-                  </a:lnTo>
-                  <a:lnTo>
-                    <a:pt x="3916080" y="2846053"/>
-                  </a:lnTo>
-                  <a:lnTo>
-                    <a:pt x="3993324" y="2853633"/>
-                  </a:lnTo>
-                  <a:lnTo>
-                    <a:pt x="4070567" y="2861141"/>
-                  </a:lnTo>
-                  <a:lnTo>
-                    <a:pt x="4147811" y="2868579"/>
-                  </a:lnTo>
-                  <a:lnTo>
-                    <a:pt x="4225054" y="2875947"/>
-                  </a:lnTo>
-                  <a:lnTo>
-                    <a:pt x="4302298" y="2883245"/>
-                  </a:lnTo>
-                  <a:lnTo>
-                    <a:pt x="4379541" y="2890475"/>
-                  </a:lnTo>
-                  <a:lnTo>
-                    <a:pt x="4456785" y="2897637"/>
-                  </a:lnTo>
-                  <a:lnTo>
-                    <a:pt x="4534029" y="2904732"/>
-                  </a:lnTo>
-                  <a:lnTo>
-                    <a:pt x="4611272" y="2911760"/>
-                  </a:lnTo>
-                  <a:lnTo>
-                    <a:pt x="4688516" y="2918722"/>
-                  </a:lnTo>
-                  <a:lnTo>
-                    <a:pt x="4765759" y="2925618"/>
-                  </a:lnTo>
-                  <a:lnTo>
-                    <a:pt x="4843003" y="2932450"/>
-                  </a:lnTo>
-                  <a:lnTo>
-                    <a:pt x="4920246" y="2939218"/>
-                  </a:lnTo>
-                  <a:lnTo>
-                    <a:pt x="4997490" y="2945922"/>
-                  </a:lnTo>
-                  <a:lnTo>
-                    <a:pt x="5074734" y="2952563"/>
-                  </a:lnTo>
-                  <a:lnTo>
-                    <a:pt x="5151977" y="2959141"/>
-                  </a:lnTo>
-                  <a:lnTo>
-                    <a:pt x="5229221" y="2965658"/>
-                  </a:lnTo>
-                  <a:lnTo>
-                    <a:pt x="5306464" y="2972114"/>
-                  </a:lnTo>
-                  <a:lnTo>
-                    <a:pt x="5383708" y="2978509"/>
-                  </a:lnTo>
-                  <a:lnTo>
-                    <a:pt x="5460951" y="2984843"/>
-                  </a:lnTo>
-                  <a:lnTo>
-                    <a:pt x="5538195" y="2991119"/>
-                  </a:lnTo>
-                  <a:lnTo>
-                    <a:pt x="5615439" y="2997335"/>
-                  </a:lnTo>
-                  <a:lnTo>
-                    <a:pt x="5692682" y="3003493"/>
-                  </a:lnTo>
-                  <a:lnTo>
-                    <a:pt x="5769926" y="3009593"/>
-                  </a:lnTo>
-                  <a:lnTo>
-                    <a:pt x="5847169" y="3015636"/>
-                  </a:lnTo>
-                  <a:lnTo>
-                    <a:pt x="5924413" y="3021622"/>
-                  </a:lnTo>
-                  <a:lnTo>
-                    <a:pt x="6001656" y="3027551"/>
-                  </a:lnTo>
-                  <a:lnTo>
-                    <a:pt x="6078900" y="3033425"/>
-                  </a:lnTo>
-                  <a:lnTo>
-                    <a:pt x="6156144" y="3039244"/>
-                  </a:lnTo>
-                  <a:lnTo>
-                    <a:pt x="6233387" y="3045008"/>
-                  </a:lnTo>
-                  <a:lnTo>
-                    <a:pt x="6310631" y="3050718"/>
-                  </a:lnTo>
-                  <a:lnTo>
-                    <a:pt x="6387874" y="3056374"/>
-                  </a:lnTo>
-                  <a:lnTo>
-                    <a:pt x="6465118" y="3061977"/>
-                  </a:lnTo>
-                  <a:lnTo>
-                    <a:pt x="6542361" y="3067528"/>
-                  </a:lnTo>
-                  <a:lnTo>
-                    <a:pt x="6619605" y="3073026"/>
-                  </a:lnTo>
-                  <a:lnTo>
-                    <a:pt x="6696849" y="3078473"/>
-                  </a:lnTo>
-                  <a:lnTo>
-                    <a:pt x="6774092" y="3083868"/>
-                  </a:lnTo>
-                  <a:lnTo>
-                    <a:pt x="6851336" y="3089213"/>
-                  </a:lnTo>
-                  <a:lnTo>
-                    <a:pt x="6928579" y="3094507"/>
-                  </a:lnTo>
-                  <a:lnTo>
-                    <a:pt x="7005823" y="3099752"/>
-                  </a:lnTo>
-                  <a:lnTo>
-                    <a:pt x="7083066" y="3104947"/>
-                  </a:lnTo>
-                  <a:lnTo>
-                    <a:pt x="7160310" y="3110094"/>
-                  </a:lnTo>
-                  <a:lnTo>
-                    <a:pt x="7237554" y="3115192"/>
-                  </a:lnTo>
-                  <a:lnTo>
-                    <a:pt x="7314797" y="3120243"/>
-                  </a:lnTo>
-                  <a:lnTo>
-                    <a:pt x="7392041" y="3125246"/>
-                  </a:lnTo>
-                  <a:lnTo>
-                    <a:pt x="7392041" y="3649462"/>
-                  </a:lnTo>
-                  <a:lnTo>
-                    <a:pt x="7314797" y="3649107"/>
-                  </a:lnTo>
-                  <a:lnTo>
-                    <a:pt x="7237554" y="3648711"/>
-                  </a:lnTo>
-                  <a:lnTo>
-                    <a:pt x="7160310" y="3648272"/>
-                  </a:lnTo>
-                  <a:lnTo>
-                    <a:pt x="7083066" y="3647784"/>
-                  </a:lnTo>
-                  <a:lnTo>
-                    <a:pt x="7005823" y="3647241"/>
-                  </a:lnTo>
-                  <a:lnTo>
-                    <a:pt x="6928579" y="3646637"/>
-                  </a:lnTo>
-                  <a:lnTo>
-                    <a:pt x="6851336" y="3645966"/>
-                  </a:lnTo>
-                  <a:lnTo>
-                    <a:pt x="6774092" y="3645220"/>
-                  </a:lnTo>
-                  <a:lnTo>
-                    <a:pt x="6696849" y="3644391"/>
-                  </a:lnTo>
-                  <a:lnTo>
-                    <a:pt x="6619605" y="3643469"/>
-                  </a:lnTo>
-                  <a:lnTo>
-                    <a:pt x="6542361" y="3642444"/>
-                  </a:lnTo>
-                  <a:lnTo>
-                    <a:pt x="6465118" y="3641304"/>
-                  </a:lnTo>
-                  <a:lnTo>
-                    <a:pt x="6387874" y="3640038"/>
-                  </a:lnTo>
-                  <a:lnTo>
-                    <a:pt x="6310631" y="3638629"/>
-                  </a:lnTo>
-                  <a:lnTo>
-                    <a:pt x="6233387" y="3637064"/>
-                  </a:lnTo>
-                  <a:lnTo>
-                    <a:pt x="6156144" y="3635323"/>
-                  </a:lnTo>
-                  <a:lnTo>
-                    <a:pt x="6078900" y="3633388"/>
-                  </a:lnTo>
-                  <a:lnTo>
-                    <a:pt x="6001656" y="3631237"/>
-                  </a:lnTo>
-                  <a:lnTo>
-                    <a:pt x="5924413" y="3628845"/>
-                  </a:lnTo>
-                  <a:lnTo>
-                    <a:pt x="5847169" y="3626186"/>
-                  </a:lnTo>
-                  <a:lnTo>
-                    <a:pt x="5769926" y="3623230"/>
-                  </a:lnTo>
-                  <a:lnTo>
-                    <a:pt x="5692682" y="3619944"/>
-                  </a:lnTo>
-                  <a:lnTo>
-                    <a:pt x="5615439" y="3616291"/>
-                  </a:lnTo>
-                  <a:lnTo>
-                    <a:pt x="5538195" y="3612229"/>
-                  </a:lnTo>
-                  <a:lnTo>
-                    <a:pt x="5460951" y="3607714"/>
-                  </a:lnTo>
-                  <a:lnTo>
-                    <a:pt x="5383708" y="3602694"/>
-                  </a:lnTo>
-                  <a:lnTo>
-                    <a:pt x="5306464" y="3597114"/>
-                  </a:lnTo>
-                  <a:lnTo>
-                    <a:pt x="5229221" y="3590910"/>
-                  </a:lnTo>
-                  <a:lnTo>
-                    <a:pt x="5151977" y="3584012"/>
-                  </a:lnTo>
-                  <a:lnTo>
-                    <a:pt x="5074734" y="3576345"/>
-                  </a:lnTo>
-                  <a:lnTo>
-                    <a:pt x="4997490" y="3567820"/>
-                  </a:lnTo>
-                  <a:lnTo>
-                    <a:pt x="4920246" y="3558343"/>
-                  </a:lnTo>
-                  <a:lnTo>
-                    <a:pt x="4843003" y="3547808"/>
-                  </a:lnTo>
-                  <a:lnTo>
-                    <a:pt x="4765759" y="3536095"/>
-                  </a:lnTo>
-                  <a:lnTo>
-                    <a:pt x="4688516" y="3523074"/>
-                  </a:lnTo>
-                  <a:lnTo>
-                    <a:pt x="4611272" y="3508598"/>
-                  </a:lnTo>
-                  <a:lnTo>
-                    <a:pt x="4534029" y="3492504"/>
-                  </a:lnTo>
-                  <a:lnTo>
-                    <a:pt x="4456785" y="3474613"/>
-                  </a:lnTo>
-                  <a:lnTo>
-                    <a:pt x="4379541" y="3454723"/>
-                  </a:lnTo>
-                  <a:lnTo>
-                    <a:pt x="4302298" y="3432610"/>
-                  </a:lnTo>
-                  <a:lnTo>
-                    <a:pt x="4225054" y="3408027"/>
-                  </a:lnTo>
-                  <a:lnTo>
-                    <a:pt x="4147811" y="3380698"/>
-                  </a:lnTo>
-                  <a:lnTo>
-                    <a:pt x="4070567" y="3350315"/>
-                  </a:lnTo>
-                  <a:lnTo>
-                    <a:pt x="3993324" y="3316537"/>
-                  </a:lnTo>
-                  <a:lnTo>
-                    <a:pt x="3916080" y="3278986"/>
-                  </a:lnTo>
-                  <a:lnTo>
-                    <a:pt x="3838836" y="3237239"/>
-                  </a:lnTo>
-                  <a:lnTo>
-                    <a:pt x="3761593" y="3190829"/>
-                  </a:lnTo>
-                  <a:lnTo>
-                    <a:pt x="3684349" y="3139233"/>
-                  </a:lnTo>
-                  <a:lnTo>
-                    <a:pt x="3607106" y="3081872"/>
-                  </a:lnTo>
-                  <a:lnTo>
-                    <a:pt x="3529862" y="3018103"/>
-                  </a:lnTo>
-                  <a:lnTo>
-                    <a:pt x="3452619" y="2947209"/>
-                  </a:lnTo>
-                  <a:lnTo>
-                    <a:pt x="3375375" y="2868395"/>
-                  </a:lnTo>
-                  <a:lnTo>
-                    <a:pt x="3298131" y="2782771"/>
-                  </a:lnTo>
-                  <a:lnTo>
-                    <a:pt x="3220888" y="2774519"/>
-                  </a:lnTo>
-                  <a:lnTo>
-                    <a:pt x="3143644" y="2766190"/>
-                  </a:lnTo>
-                  <a:lnTo>
-                    <a:pt x="3066401" y="2757781"/>
-                  </a:lnTo>
-                  <a:lnTo>
-                    <a:pt x="2989157" y="2749292"/>
-                  </a:lnTo>
-                  <a:lnTo>
-                    <a:pt x="2911914" y="2740723"/>
-                  </a:lnTo>
-                  <a:lnTo>
-                    <a:pt x="2834670" y="2732072"/>
-                  </a:lnTo>
-                  <a:lnTo>
-                    <a:pt x="2757426" y="2723340"/>
-                  </a:lnTo>
-                  <a:lnTo>
-                    <a:pt x="2680183" y="2714524"/>
-                  </a:lnTo>
-                  <a:lnTo>
-                    <a:pt x="2602939" y="2705625"/>
-                  </a:lnTo>
-                  <a:lnTo>
-                    <a:pt x="2525696" y="2696642"/>
-                  </a:lnTo>
-                  <a:lnTo>
-                    <a:pt x="2448452" y="2687573"/>
-                  </a:lnTo>
-                  <a:lnTo>
-                    <a:pt x="2371209" y="2678418"/>
-                  </a:lnTo>
-                  <a:lnTo>
-                    <a:pt x="2293965" y="2669177"/>
-                  </a:lnTo>
-                  <a:lnTo>
-                    <a:pt x="2216721" y="2659847"/>
-                  </a:lnTo>
-                  <a:lnTo>
-                    <a:pt x="2139478" y="2650430"/>
-                  </a:lnTo>
-                  <a:lnTo>
-                    <a:pt x="2062234" y="2640923"/>
-                  </a:lnTo>
-                  <a:lnTo>
-                    <a:pt x="1984991" y="2631325"/>
-                  </a:lnTo>
-                  <a:lnTo>
-                    <a:pt x="1907747" y="2621637"/>
-                  </a:lnTo>
-                  <a:lnTo>
-                    <a:pt x="1830504" y="2611857"/>
-                  </a:lnTo>
-                  <a:lnTo>
-                    <a:pt x="1753260" y="2601984"/>
-                  </a:lnTo>
-                  <a:lnTo>
-                    <a:pt x="1676016" y="2592017"/>
-                  </a:lnTo>
-                  <a:lnTo>
-                    <a:pt x="1598773" y="2581956"/>
-                  </a:lnTo>
-                  <a:lnTo>
-                    <a:pt x="1521529" y="2571800"/>
-                  </a:lnTo>
-                  <a:lnTo>
-                    <a:pt x="1444286" y="2561547"/>
-                  </a:lnTo>
-                  <a:lnTo>
-                    <a:pt x="1367042" y="2551196"/>
-                  </a:lnTo>
-                  <a:lnTo>
-                    <a:pt x="1289799" y="2540748"/>
-                  </a:lnTo>
-                  <a:lnTo>
-                    <a:pt x="1212555" y="2530200"/>
-                  </a:lnTo>
-                  <a:lnTo>
-                    <a:pt x="1135311" y="2519553"/>
-                  </a:lnTo>
-                  <a:lnTo>
-                    <a:pt x="1058068" y="2508804"/>
-                  </a:lnTo>
-                  <a:lnTo>
-                    <a:pt x="980824" y="2497954"/>
-                  </a:lnTo>
-                  <a:lnTo>
-                    <a:pt x="903581" y="2487000"/>
-                  </a:lnTo>
-                  <a:lnTo>
-                    <a:pt x="826337" y="2475943"/>
-                  </a:lnTo>
-                  <a:lnTo>
-                    <a:pt x="749094" y="2464781"/>
-                  </a:lnTo>
-                  <a:lnTo>
-                    <a:pt x="671850" y="2453513"/>
-                  </a:lnTo>
-                  <a:lnTo>
-                    <a:pt x="594606" y="2442138"/>
-                  </a:lnTo>
-                  <a:lnTo>
-                    <a:pt x="517363" y="2430655"/>
-                  </a:lnTo>
-                  <a:lnTo>
-                    <a:pt x="440119" y="2419063"/>
-                  </a:lnTo>
-                  <a:lnTo>
-                    <a:pt x="362876" y="2407361"/>
-                  </a:lnTo>
-                  <a:lnTo>
-                    <a:pt x="285632" y="2395548"/>
-                  </a:lnTo>
-                  <a:lnTo>
-                    <a:pt x="208389" y="2383623"/>
-                  </a:lnTo>
-                  <a:lnTo>
-                    <a:pt x="131145" y="2371585"/>
-                  </a:lnTo>
-                  <a:lnTo>
-                    <a:pt x="53901" y="2359433"/>
-                  </a:lnTo>
-                  <a:lnTo>
-                    <a:pt x="0" y="2350873"/>
+                    <a:pt x="2293965" y="188769"/>
+                  </a:lnTo>
+                  <a:lnTo>
+                    <a:pt x="2371209" y="519903"/>
+                  </a:lnTo>
+                  <a:lnTo>
+                    <a:pt x="2448452" y="817759"/>
+                  </a:lnTo>
+                  <a:lnTo>
+                    <a:pt x="2525696" y="1085681"/>
+                  </a:lnTo>
+                  <a:lnTo>
+                    <a:pt x="2602939" y="1326678"/>
+                  </a:lnTo>
+                  <a:lnTo>
+                    <a:pt x="2680183" y="1543456"/>
+                  </a:lnTo>
+                  <a:lnTo>
+                    <a:pt x="2757426" y="1738448"/>
+                  </a:lnTo>
+                  <a:lnTo>
+                    <a:pt x="2834670" y="1913844"/>
+                  </a:lnTo>
+                  <a:lnTo>
+                    <a:pt x="2911914" y="2071614"/>
+                  </a:lnTo>
+                  <a:lnTo>
+                    <a:pt x="2989157" y="2213528"/>
+                  </a:lnTo>
+                  <a:lnTo>
+                    <a:pt x="3066401" y="2341181"/>
+                  </a:lnTo>
+                  <a:lnTo>
+                    <a:pt x="3143644" y="2456004"/>
+                  </a:lnTo>
+                  <a:lnTo>
+                    <a:pt x="3220888" y="2559289"/>
+                  </a:lnTo>
+                  <a:lnTo>
+                    <a:pt x="3298131" y="2652194"/>
+                  </a:lnTo>
+                  <a:lnTo>
+                    <a:pt x="3375375" y="2661893"/>
+                  </a:lnTo>
+                  <a:lnTo>
+                    <a:pt x="3452619" y="2669616"/>
+                  </a:lnTo>
+                  <a:lnTo>
+                    <a:pt x="3529862" y="2677266"/>
+                  </a:lnTo>
+                  <a:lnTo>
+                    <a:pt x="3607106" y="2684845"/>
+                  </a:lnTo>
+                  <a:lnTo>
+                    <a:pt x="3684349" y="2692352"/>
+                  </a:lnTo>
+                  <a:lnTo>
+                    <a:pt x="3761593" y="2699789"/>
+                  </a:lnTo>
+                  <a:lnTo>
+                    <a:pt x="3838836" y="2707155"/>
+                  </a:lnTo>
+                  <a:lnTo>
+                    <a:pt x="3916080" y="2714453"/>
+                  </a:lnTo>
+                  <a:lnTo>
+                    <a:pt x="3993324" y="2721682"/>
+                  </a:lnTo>
+                  <a:lnTo>
+                    <a:pt x="4070567" y="2728843"/>
+                  </a:lnTo>
+                  <a:lnTo>
+                    <a:pt x="4147811" y="2735937"/>
+                  </a:lnTo>
+                  <a:lnTo>
+                    <a:pt x="4225054" y="2742964"/>
+                  </a:lnTo>
+                  <a:lnTo>
+                    <a:pt x="4302298" y="2749925"/>
+                  </a:lnTo>
+                  <a:lnTo>
+                    <a:pt x="4379541" y="2756821"/>
+                  </a:lnTo>
+                  <a:lnTo>
+                    <a:pt x="4456785" y="2763651"/>
+                  </a:lnTo>
+                  <a:lnTo>
+                    <a:pt x="4534029" y="2770418"/>
+                  </a:lnTo>
+                  <a:lnTo>
+                    <a:pt x="4611272" y="2777121"/>
+                  </a:lnTo>
+                  <a:lnTo>
+                    <a:pt x="4688516" y="2783761"/>
+                  </a:lnTo>
+                  <a:lnTo>
+                    <a:pt x="4765759" y="2790339"/>
+                  </a:lnTo>
+                  <a:lnTo>
+                    <a:pt x="4843003" y="2796855"/>
+                  </a:lnTo>
+                  <a:lnTo>
+                    <a:pt x="4920246" y="2803310"/>
+                  </a:lnTo>
+                  <a:lnTo>
+                    <a:pt x="4997490" y="2809704"/>
+                  </a:lnTo>
+                  <a:lnTo>
+                    <a:pt x="5074734" y="2816037"/>
+                  </a:lnTo>
+                  <a:lnTo>
+                    <a:pt x="5151977" y="2822312"/>
+                  </a:lnTo>
+                  <a:lnTo>
+                    <a:pt x="5229221" y="2828527"/>
+                  </a:lnTo>
+                  <a:lnTo>
+                    <a:pt x="5306464" y="2834684"/>
+                  </a:lnTo>
+                  <a:lnTo>
+                    <a:pt x="5383708" y="2840784"/>
+                  </a:lnTo>
+                  <a:lnTo>
+                    <a:pt x="5460951" y="2846825"/>
+                  </a:lnTo>
+                  <a:lnTo>
+                    <a:pt x="5538195" y="2852810"/>
+                  </a:lnTo>
+                  <a:lnTo>
+                    <a:pt x="5615439" y="2858739"/>
+                  </a:lnTo>
+                  <a:lnTo>
+                    <a:pt x="5692682" y="2864612"/>
+                  </a:lnTo>
+                  <a:lnTo>
+                    <a:pt x="5769926" y="2870430"/>
+                  </a:lnTo>
+                  <a:lnTo>
+                    <a:pt x="5847169" y="2876194"/>
+                  </a:lnTo>
+                  <a:lnTo>
+                    <a:pt x="5924413" y="2881903"/>
+                  </a:lnTo>
+                  <a:lnTo>
+                    <a:pt x="6001656" y="2887558"/>
+                  </a:lnTo>
+                  <a:lnTo>
+                    <a:pt x="6078900" y="2893161"/>
+                  </a:lnTo>
+                  <a:lnTo>
+                    <a:pt x="6156144" y="2898710"/>
+                  </a:lnTo>
+                  <a:lnTo>
+                    <a:pt x="6233387" y="2904208"/>
+                  </a:lnTo>
+                  <a:lnTo>
+                    <a:pt x="6310631" y="2909654"/>
+                  </a:lnTo>
+                  <a:lnTo>
+                    <a:pt x="6387874" y="2915048"/>
+                  </a:lnTo>
+                  <a:lnTo>
+                    <a:pt x="6465118" y="2920392"/>
+                  </a:lnTo>
+                  <a:lnTo>
+                    <a:pt x="6542361" y="2925686"/>
+                  </a:lnTo>
+                  <a:lnTo>
+                    <a:pt x="6619605" y="2930930"/>
+                  </a:lnTo>
+                  <a:lnTo>
+                    <a:pt x="6696849" y="2936125"/>
+                  </a:lnTo>
+                  <a:lnTo>
+                    <a:pt x="6774092" y="2941271"/>
+                  </a:lnTo>
+                  <a:lnTo>
+                    <a:pt x="6851336" y="2946369"/>
+                  </a:lnTo>
+                  <a:lnTo>
+                    <a:pt x="6928579" y="2951418"/>
+                  </a:lnTo>
+                  <a:lnTo>
+                    <a:pt x="7005823" y="2956421"/>
+                  </a:lnTo>
+                  <a:lnTo>
+                    <a:pt x="7083066" y="2961376"/>
+                  </a:lnTo>
+                  <a:lnTo>
+                    <a:pt x="7160310" y="2966284"/>
+                  </a:lnTo>
+                  <a:lnTo>
+                    <a:pt x="7237554" y="2971147"/>
+                  </a:lnTo>
+                  <a:lnTo>
+                    <a:pt x="7314797" y="2975964"/>
+                  </a:lnTo>
+                  <a:lnTo>
+                    <a:pt x="7392041" y="2980735"/>
+                  </a:lnTo>
+                  <a:lnTo>
+                    <a:pt x="7392041" y="3480712"/>
+                  </a:lnTo>
+                  <a:lnTo>
+                    <a:pt x="7314797" y="3480373"/>
+                  </a:lnTo>
+                  <a:lnTo>
+                    <a:pt x="7237554" y="3479996"/>
+                  </a:lnTo>
+                  <a:lnTo>
+                    <a:pt x="7160310" y="3479577"/>
+                  </a:lnTo>
+                  <a:lnTo>
+                    <a:pt x="7083066" y="3479112"/>
+                  </a:lnTo>
+                  <a:lnTo>
+                    <a:pt x="7005823" y="3478594"/>
+                  </a:lnTo>
+                  <a:lnTo>
+                    <a:pt x="6928579" y="3478018"/>
+                  </a:lnTo>
+                  <a:lnTo>
+                    <a:pt x="6851336" y="3477378"/>
+                  </a:lnTo>
+                  <a:lnTo>
+                    <a:pt x="6774092" y="3476667"/>
+                  </a:lnTo>
+                  <a:lnTo>
+                    <a:pt x="6696849" y="3475876"/>
+                  </a:lnTo>
+                  <a:lnTo>
+                    <a:pt x="6619605" y="3474996"/>
+                  </a:lnTo>
+                  <a:lnTo>
+                    <a:pt x="6542361" y="3474019"/>
+                  </a:lnTo>
+                  <a:lnTo>
+                    <a:pt x="6465118" y="3472932"/>
+                  </a:lnTo>
+                  <a:lnTo>
+                    <a:pt x="6387874" y="3471724"/>
+                  </a:lnTo>
+                  <a:lnTo>
+                    <a:pt x="6310631" y="3470380"/>
+                  </a:lnTo>
+                  <a:lnTo>
+                    <a:pt x="6233387" y="3468887"/>
+                  </a:lnTo>
+                  <a:lnTo>
+                    <a:pt x="6156144" y="3467227"/>
+                  </a:lnTo>
+                  <a:lnTo>
+                    <a:pt x="6078900" y="3465381"/>
+                  </a:lnTo>
+                  <a:lnTo>
+                    <a:pt x="6001656" y="3463329"/>
+                  </a:lnTo>
+                  <a:lnTo>
+                    <a:pt x="5924413" y="3461048"/>
+                  </a:lnTo>
+                  <a:lnTo>
+                    <a:pt x="5847169" y="3458512"/>
+                  </a:lnTo>
+                  <a:lnTo>
+                    <a:pt x="5769926" y="3455693"/>
+                  </a:lnTo>
+                  <a:lnTo>
+                    <a:pt x="5692682" y="3452559"/>
+                  </a:lnTo>
+                  <a:lnTo>
+                    <a:pt x="5615439" y="3449075"/>
+                  </a:lnTo>
+                  <a:lnTo>
+                    <a:pt x="5538195" y="3445201"/>
+                  </a:lnTo>
+                  <a:lnTo>
+                    <a:pt x="5460951" y="3440894"/>
+                  </a:lnTo>
+                  <a:lnTo>
+                    <a:pt x="5383708" y="3436107"/>
+                  </a:lnTo>
+                  <a:lnTo>
+                    <a:pt x="5306464" y="3430784"/>
+                  </a:lnTo>
+                  <a:lnTo>
+                    <a:pt x="5229221" y="3424867"/>
+                  </a:lnTo>
+                  <a:lnTo>
+                    <a:pt x="5151977" y="3418289"/>
+                  </a:lnTo>
+                  <a:lnTo>
+                    <a:pt x="5074734" y="3410976"/>
+                  </a:lnTo>
+                  <a:lnTo>
+                    <a:pt x="4997490" y="3402846"/>
+                  </a:lnTo>
+                  <a:lnTo>
+                    <a:pt x="4920246" y="3393807"/>
+                  </a:lnTo>
+                  <a:lnTo>
+                    <a:pt x="4843003" y="3383759"/>
+                  </a:lnTo>
+                  <a:lnTo>
+                    <a:pt x="4765759" y="3372587"/>
+                  </a:lnTo>
+                  <a:lnTo>
+                    <a:pt x="4688516" y="3360168"/>
+                  </a:lnTo>
+                  <a:lnTo>
+                    <a:pt x="4611272" y="3346362"/>
+                  </a:lnTo>
+                  <a:lnTo>
+                    <a:pt x="4534029" y="3331012"/>
+                  </a:lnTo>
+                  <a:lnTo>
+                    <a:pt x="4456785" y="3313948"/>
+                  </a:lnTo>
+                  <a:lnTo>
+                    <a:pt x="4379541" y="3294978"/>
+                  </a:lnTo>
+                  <a:lnTo>
+                    <a:pt x="4302298" y="3273888"/>
+                  </a:lnTo>
+                  <a:lnTo>
+                    <a:pt x="4225054" y="3250441"/>
+                  </a:lnTo>
+                  <a:lnTo>
+                    <a:pt x="4147811" y="3224375"/>
+                  </a:lnTo>
+                  <a:lnTo>
+                    <a:pt x="4070567" y="3195397"/>
+                  </a:lnTo>
+                  <a:lnTo>
+                    <a:pt x="3993324" y="3163182"/>
+                  </a:lnTo>
+                  <a:lnTo>
+                    <a:pt x="3916080" y="3127367"/>
+                  </a:lnTo>
+                  <a:lnTo>
+                    <a:pt x="3838836" y="3087550"/>
+                  </a:lnTo>
+                  <a:lnTo>
+                    <a:pt x="3761593" y="3043286"/>
+                  </a:lnTo>
+                  <a:lnTo>
+                    <a:pt x="3684349" y="2994076"/>
+                  </a:lnTo>
+                  <a:lnTo>
+                    <a:pt x="3607106" y="2939367"/>
+                  </a:lnTo>
+                  <a:lnTo>
+                    <a:pt x="3529862" y="2878547"/>
+                  </a:lnTo>
+                  <a:lnTo>
+                    <a:pt x="3452619" y="2810932"/>
+                  </a:lnTo>
+                  <a:lnTo>
+                    <a:pt x="3375375" y="2735762"/>
+                  </a:lnTo>
+                  <a:lnTo>
+                    <a:pt x="3298131" y="2654097"/>
+                  </a:lnTo>
+                  <a:lnTo>
+                    <a:pt x="3220888" y="2646227"/>
+                  </a:lnTo>
+                  <a:lnTo>
+                    <a:pt x="3143644" y="2638282"/>
+                  </a:lnTo>
+                  <a:lnTo>
+                    <a:pt x="3066401" y="2630262"/>
+                  </a:lnTo>
+                  <a:lnTo>
+                    <a:pt x="2989157" y="2622166"/>
+                  </a:lnTo>
+                  <a:lnTo>
+                    <a:pt x="2911914" y="2613993"/>
+                  </a:lnTo>
+                  <a:lnTo>
+                    <a:pt x="2834670" y="2605742"/>
+                  </a:lnTo>
+                  <a:lnTo>
+                    <a:pt x="2757426" y="2597413"/>
+                  </a:lnTo>
+                  <a:lnTo>
+                    <a:pt x="2680183" y="2589005"/>
+                  </a:lnTo>
+                  <a:lnTo>
+                    <a:pt x="2602939" y="2580518"/>
+                  </a:lnTo>
+                  <a:lnTo>
+                    <a:pt x="2525696" y="2571950"/>
+                  </a:lnTo>
+                  <a:lnTo>
+                    <a:pt x="2448452" y="2563300"/>
+                  </a:lnTo>
+                  <a:lnTo>
+                    <a:pt x="2371209" y="2554569"/>
+                  </a:lnTo>
+                  <a:lnTo>
+                    <a:pt x="2293965" y="2545755"/>
+                  </a:lnTo>
+                  <a:lnTo>
+                    <a:pt x="2216721" y="2536857"/>
+                  </a:lnTo>
+                  <a:lnTo>
+                    <a:pt x="2139478" y="2527875"/>
+                  </a:lnTo>
+                  <a:lnTo>
+                    <a:pt x="2062234" y="2518807"/>
+                  </a:lnTo>
+                  <a:lnTo>
+                    <a:pt x="1984991" y="2509654"/>
+                  </a:lnTo>
+                  <a:lnTo>
+                    <a:pt x="1907747" y="2500414"/>
+                  </a:lnTo>
+                  <a:lnTo>
+                    <a:pt x="1830504" y="2491086"/>
+                  </a:lnTo>
+                  <a:lnTo>
+                    <a:pt x="1753260" y="2481669"/>
+                  </a:lnTo>
+                  <a:lnTo>
+                    <a:pt x="1676016" y="2472163"/>
+                  </a:lnTo>
+                  <a:lnTo>
+                    <a:pt x="1598773" y="2462567"/>
+                  </a:lnTo>
+                  <a:lnTo>
+                    <a:pt x="1521529" y="2452880"/>
+                  </a:lnTo>
+                  <a:lnTo>
+                    <a:pt x="1444286" y="2443102"/>
+                  </a:lnTo>
+                  <a:lnTo>
+                    <a:pt x="1367042" y="2433230"/>
+                  </a:lnTo>
+                  <a:lnTo>
+                    <a:pt x="1289799" y="2423265"/>
+                  </a:lnTo>
+                  <a:lnTo>
+                    <a:pt x="1212555" y="2413205"/>
+                  </a:lnTo>
+                  <a:lnTo>
+                    <a:pt x="1135311" y="2403050"/>
+                  </a:lnTo>
+                  <a:lnTo>
+                    <a:pt x="1058068" y="2392798"/>
+                  </a:lnTo>
+                  <a:lnTo>
+                    <a:pt x="980824" y="2382449"/>
+                  </a:lnTo>
+                  <a:lnTo>
+                    <a:pt x="903581" y="2372002"/>
+                  </a:lnTo>
+                  <a:lnTo>
+                    <a:pt x="826337" y="2361456"/>
+                  </a:lnTo>
+                  <a:lnTo>
+                    <a:pt x="749094" y="2350810"/>
+                  </a:lnTo>
+                  <a:lnTo>
+                    <a:pt x="671850" y="2340063"/>
+                  </a:lnTo>
+                  <a:lnTo>
+                    <a:pt x="594606" y="2329214"/>
+                  </a:lnTo>
+                  <a:lnTo>
+                    <a:pt x="517363" y="2318262"/>
+                  </a:lnTo>
+                  <a:lnTo>
+                    <a:pt x="440119" y="2307206"/>
+                  </a:lnTo>
+                  <a:lnTo>
+                    <a:pt x="362876" y="2296046"/>
+                  </a:lnTo>
+                  <a:lnTo>
+                    <a:pt x="285632" y="2284779"/>
+                  </a:lnTo>
+                  <a:lnTo>
+                    <a:pt x="208389" y="2273405"/>
+                  </a:lnTo>
+                  <a:lnTo>
+                    <a:pt x="131145" y="2261924"/>
+                  </a:lnTo>
+                  <a:lnTo>
+                    <a:pt x="53901" y="2250334"/>
+                  </a:lnTo>
+                  <a:lnTo>
+                    <a:pt x="0" y="2242169"/>
                   </a:lnTo>
                   <a:close/>
                 </a:path>
@@ -3528,216 +3528,216 @@
           </p:nvSpPr>
           <p:spPr>
             <a:xfrm>
-              <a:off x="3071874" y="1896563"/>
-              <a:ext cx="5137684" cy="3125246"/>
+              <a:off x="3071874" y="2073503"/>
+              <a:ext cx="5137684" cy="2980735"/>
             </a:xfrm>
             <a:custGeom>
               <a:avLst/>
               <a:pathLst>
-                <a:path w="5137684" h="3125246">
+                <a:path w="5137684" h="2980735">
                   <a:moveTo>
                     <a:pt x="0" y="0"/>
                   </a:moveTo>
                   <a:lnTo>
-                    <a:pt x="39609" y="197921"/>
-                  </a:lnTo>
-                  <a:lnTo>
-                    <a:pt x="116852" y="545108"/>
-                  </a:lnTo>
-                  <a:lnTo>
-                    <a:pt x="194096" y="857405"/>
-                  </a:lnTo>
-                  <a:lnTo>
-                    <a:pt x="271339" y="1138316"/>
-                  </a:lnTo>
-                  <a:lnTo>
-                    <a:pt x="348583" y="1390997"/>
-                  </a:lnTo>
-                  <a:lnTo>
-                    <a:pt x="425826" y="1618285"/>
-                  </a:lnTo>
-                  <a:lnTo>
-                    <a:pt x="503070" y="1822730"/>
-                  </a:lnTo>
-                  <a:lnTo>
-                    <a:pt x="580314" y="2006630"/>
-                  </a:lnTo>
-                  <a:lnTo>
-                    <a:pt x="657557" y="2172049"/>
-                  </a:lnTo>
-                  <a:lnTo>
-                    <a:pt x="734801" y="2320843"/>
-                  </a:lnTo>
-                  <a:lnTo>
-                    <a:pt x="812044" y="2454684"/>
-                  </a:lnTo>
-                  <a:lnTo>
-                    <a:pt x="889288" y="2575075"/>
-                  </a:lnTo>
-                  <a:lnTo>
-                    <a:pt x="966531" y="2683367"/>
-                  </a:lnTo>
-                  <a:lnTo>
-                    <a:pt x="1043775" y="2780776"/>
-                  </a:lnTo>
-                  <a:lnTo>
-                    <a:pt x="1121019" y="2790945"/>
-                  </a:lnTo>
-                  <a:lnTo>
-                    <a:pt x="1198262" y="2799043"/>
-                  </a:lnTo>
-                  <a:lnTo>
-                    <a:pt x="1275506" y="2807064"/>
-                  </a:lnTo>
-                  <a:lnTo>
-                    <a:pt x="1352749" y="2815010"/>
-                  </a:lnTo>
-                  <a:lnTo>
-                    <a:pt x="1429993" y="2822881"/>
-                  </a:lnTo>
-                  <a:lnTo>
-                    <a:pt x="1507236" y="2830678"/>
-                  </a:lnTo>
-                  <a:lnTo>
-                    <a:pt x="1584480" y="2838402"/>
-                  </a:lnTo>
-                  <a:lnTo>
-                    <a:pt x="1661724" y="2846053"/>
-                  </a:lnTo>
-                  <a:lnTo>
-                    <a:pt x="1738967" y="2853633"/>
-                  </a:lnTo>
-                  <a:lnTo>
-                    <a:pt x="1816211" y="2861141"/>
-                  </a:lnTo>
-                  <a:lnTo>
-                    <a:pt x="1893454" y="2868579"/>
-                  </a:lnTo>
-                  <a:lnTo>
-                    <a:pt x="1970698" y="2875947"/>
-                  </a:lnTo>
-                  <a:lnTo>
-                    <a:pt x="2047941" y="2883245"/>
-                  </a:lnTo>
-                  <a:lnTo>
-                    <a:pt x="2125185" y="2890475"/>
-                  </a:lnTo>
-                  <a:lnTo>
-                    <a:pt x="2202429" y="2897637"/>
-                  </a:lnTo>
-                  <a:lnTo>
-                    <a:pt x="2279672" y="2904732"/>
-                  </a:lnTo>
-                  <a:lnTo>
-                    <a:pt x="2356916" y="2911760"/>
-                  </a:lnTo>
-                  <a:lnTo>
-                    <a:pt x="2434159" y="2918722"/>
-                  </a:lnTo>
-                  <a:lnTo>
-                    <a:pt x="2511403" y="2925618"/>
-                  </a:lnTo>
-                  <a:lnTo>
-                    <a:pt x="2588646" y="2932450"/>
-                  </a:lnTo>
-                  <a:lnTo>
-                    <a:pt x="2665890" y="2939218"/>
-                  </a:lnTo>
-                  <a:lnTo>
-                    <a:pt x="2743134" y="2945922"/>
-                  </a:lnTo>
-                  <a:lnTo>
-                    <a:pt x="2820377" y="2952563"/>
-                  </a:lnTo>
-                  <a:lnTo>
-                    <a:pt x="2897621" y="2959141"/>
-                  </a:lnTo>
-                  <a:lnTo>
-                    <a:pt x="2974864" y="2965658"/>
-                  </a:lnTo>
-                  <a:lnTo>
-                    <a:pt x="3052108" y="2972114"/>
-                  </a:lnTo>
-                  <a:lnTo>
-                    <a:pt x="3129351" y="2978509"/>
-                  </a:lnTo>
-                  <a:lnTo>
-                    <a:pt x="3206595" y="2984843"/>
-                  </a:lnTo>
-                  <a:lnTo>
-                    <a:pt x="3283839" y="2991119"/>
-                  </a:lnTo>
-                  <a:lnTo>
-                    <a:pt x="3361082" y="2997335"/>
-                  </a:lnTo>
-                  <a:lnTo>
-                    <a:pt x="3438326" y="3003493"/>
-                  </a:lnTo>
-                  <a:lnTo>
-                    <a:pt x="3515569" y="3009593"/>
-                  </a:lnTo>
-                  <a:lnTo>
-                    <a:pt x="3592813" y="3015636"/>
-                  </a:lnTo>
-                  <a:lnTo>
-                    <a:pt x="3670056" y="3021622"/>
-                  </a:lnTo>
-                  <a:lnTo>
-                    <a:pt x="3747300" y="3027551"/>
-                  </a:lnTo>
-                  <a:lnTo>
-                    <a:pt x="3824544" y="3033425"/>
-                  </a:lnTo>
-                  <a:lnTo>
-                    <a:pt x="3901787" y="3039244"/>
-                  </a:lnTo>
-                  <a:lnTo>
-                    <a:pt x="3979031" y="3045008"/>
-                  </a:lnTo>
-                  <a:lnTo>
-                    <a:pt x="4056274" y="3050718"/>
-                  </a:lnTo>
-                  <a:lnTo>
-                    <a:pt x="4133518" y="3056374"/>
-                  </a:lnTo>
-                  <a:lnTo>
-                    <a:pt x="4210761" y="3061977"/>
-                  </a:lnTo>
-                  <a:lnTo>
-                    <a:pt x="4288005" y="3067528"/>
-                  </a:lnTo>
-                  <a:lnTo>
-                    <a:pt x="4365249" y="3073026"/>
-                  </a:lnTo>
-                  <a:lnTo>
-                    <a:pt x="4442492" y="3078473"/>
-                  </a:lnTo>
-                  <a:lnTo>
-                    <a:pt x="4519736" y="3083868"/>
-                  </a:lnTo>
-                  <a:lnTo>
-                    <a:pt x="4596979" y="3089213"/>
-                  </a:lnTo>
-                  <a:lnTo>
-                    <a:pt x="4674223" y="3094507"/>
-                  </a:lnTo>
-                  <a:lnTo>
-                    <a:pt x="4751466" y="3099752"/>
-                  </a:lnTo>
-                  <a:lnTo>
-                    <a:pt x="4828710" y="3104947"/>
-                  </a:lnTo>
-                  <a:lnTo>
-                    <a:pt x="4905954" y="3110094"/>
-                  </a:lnTo>
-                  <a:lnTo>
-                    <a:pt x="4983197" y="3115192"/>
-                  </a:lnTo>
-                  <a:lnTo>
-                    <a:pt x="5060441" y="3120243"/>
-                  </a:lnTo>
-                  <a:lnTo>
-                    <a:pt x="5137684" y="3125246"/>
+                    <a:pt x="39609" y="188769"/>
+                  </a:lnTo>
+                  <a:lnTo>
+                    <a:pt x="116852" y="519903"/>
+                  </a:lnTo>
+                  <a:lnTo>
+                    <a:pt x="194096" y="817759"/>
+                  </a:lnTo>
+                  <a:lnTo>
+                    <a:pt x="271339" y="1085681"/>
+                  </a:lnTo>
+                  <a:lnTo>
+                    <a:pt x="348583" y="1326678"/>
+                  </a:lnTo>
+                  <a:lnTo>
+                    <a:pt x="425826" y="1543456"/>
+                  </a:lnTo>
+                  <a:lnTo>
+                    <a:pt x="503070" y="1738448"/>
+                  </a:lnTo>
+                  <a:lnTo>
+                    <a:pt x="580314" y="1913844"/>
+                  </a:lnTo>
+                  <a:lnTo>
+                    <a:pt x="657557" y="2071614"/>
+                  </a:lnTo>
+                  <a:lnTo>
+                    <a:pt x="734801" y="2213528"/>
+                  </a:lnTo>
+                  <a:lnTo>
+                    <a:pt x="812044" y="2341181"/>
+                  </a:lnTo>
+                  <a:lnTo>
+                    <a:pt x="889288" y="2456004"/>
+                  </a:lnTo>
+                  <a:lnTo>
+                    <a:pt x="966531" y="2559289"/>
+                  </a:lnTo>
+                  <a:lnTo>
+                    <a:pt x="1043775" y="2652194"/>
+                  </a:lnTo>
+                  <a:lnTo>
+                    <a:pt x="1121019" y="2661893"/>
+                  </a:lnTo>
+                  <a:lnTo>
+                    <a:pt x="1198262" y="2669616"/>
+                  </a:lnTo>
+                  <a:lnTo>
+                    <a:pt x="1275506" y="2677266"/>
+                  </a:lnTo>
+                  <a:lnTo>
+                    <a:pt x="1352749" y="2684845"/>
+                  </a:lnTo>
+                  <a:lnTo>
+                    <a:pt x="1429993" y="2692352"/>
+                  </a:lnTo>
+                  <a:lnTo>
+                    <a:pt x="1507236" y="2699789"/>
+                  </a:lnTo>
+                  <a:lnTo>
+                    <a:pt x="1584480" y="2707155"/>
+                  </a:lnTo>
+                  <a:lnTo>
+                    <a:pt x="1661724" y="2714453"/>
+                  </a:lnTo>
+                  <a:lnTo>
+                    <a:pt x="1738967" y="2721682"/>
+                  </a:lnTo>
+                  <a:lnTo>
+                    <a:pt x="1816211" y="2728843"/>
+                  </a:lnTo>
+                  <a:lnTo>
+                    <a:pt x="1893454" y="2735937"/>
+                  </a:lnTo>
+                  <a:lnTo>
+                    <a:pt x="1970698" y="2742964"/>
+                  </a:lnTo>
+                  <a:lnTo>
+                    <a:pt x="2047941" y="2749925"/>
+                  </a:lnTo>
+                  <a:lnTo>
+                    <a:pt x="2125185" y="2756821"/>
+                  </a:lnTo>
+                  <a:lnTo>
+                    <a:pt x="2202429" y="2763651"/>
+                  </a:lnTo>
+                  <a:lnTo>
+                    <a:pt x="2279672" y="2770418"/>
+                  </a:lnTo>
+                  <a:lnTo>
+                    <a:pt x="2356916" y="2777121"/>
+                  </a:lnTo>
+                  <a:lnTo>
+                    <a:pt x="2434159" y="2783761"/>
+                  </a:lnTo>
+                  <a:lnTo>
+                    <a:pt x="2511403" y="2790339"/>
+                  </a:lnTo>
+                  <a:lnTo>
+                    <a:pt x="2588646" y="2796855"/>
+                  </a:lnTo>
+                  <a:lnTo>
+                    <a:pt x="2665890" y="2803310"/>
+                  </a:lnTo>
+                  <a:lnTo>
+                    <a:pt x="2743134" y="2809704"/>
+                  </a:lnTo>
+                  <a:lnTo>
+                    <a:pt x="2820377" y="2816037"/>
+                  </a:lnTo>
+                  <a:lnTo>
+                    <a:pt x="2897621" y="2822312"/>
+                  </a:lnTo>
+                  <a:lnTo>
+                    <a:pt x="2974864" y="2828527"/>
+                  </a:lnTo>
+                  <a:lnTo>
+                    <a:pt x="3052108" y="2834684"/>
+                  </a:lnTo>
+                  <a:lnTo>
+                    <a:pt x="3129351" y="2840784"/>
+                  </a:lnTo>
+                  <a:lnTo>
+                    <a:pt x="3206595" y="2846825"/>
+                  </a:lnTo>
+                  <a:lnTo>
+                    <a:pt x="3283839" y="2852810"/>
+                  </a:lnTo>
+                  <a:lnTo>
+                    <a:pt x="3361082" y="2858739"/>
+                  </a:lnTo>
+                  <a:lnTo>
+                    <a:pt x="3438326" y="2864612"/>
+                  </a:lnTo>
+                  <a:lnTo>
+                    <a:pt x="3515569" y="2870430"/>
+                  </a:lnTo>
+                  <a:lnTo>
+                    <a:pt x="3592813" y="2876194"/>
+                  </a:lnTo>
+                  <a:lnTo>
+                    <a:pt x="3670056" y="2881903"/>
+                  </a:lnTo>
+                  <a:lnTo>
+                    <a:pt x="3747300" y="2887558"/>
+                  </a:lnTo>
+                  <a:lnTo>
+                    <a:pt x="3824544" y="2893161"/>
+                  </a:lnTo>
+                  <a:lnTo>
+                    <a:pt x="3901787" y="2898710"/>
+                  </a:lnTo>
+                  <a:lnTo>
+                    <a:pt x="3979031" y="2904208"/>
+                  </a:lnTo>
+                  <a:lnTo>
+                    <a:pt x="4056274" y="2909654"/>
+                  </a:lnTo>
+                  <a:lnTo>
+                    <a:pt x="4133518" y="2915048"/>
+                  </a:lnTo>
+                  <a:lnTo>
+                    <a:pt x="4210761" y="2920392"/>
+                  </a:lnTo>
+                  <a:lnTo>
+                    <a:pt x="4288005" y="2925686"/>
+                  </a:lnTo>
+                  <a:lnTo>
+                    <a:pt x="4365249" y="2930930"/>
+                  </a:lnTo>
+                  <a:lnTo>
+                    <a:pt x="4442492" y="2936125"/>
+                  </a:lnTo>
+                  <a:lnTo>
+                    <a:pt x="4519736" y="2941271"/>
+                  </a:lnTo>
+                  <a:lnTo>
+                    <a:pt x="4596979" y="2946369"/>
+                  </a:lnTo>
+                  <a:lnTo>
+                    <a:pt x="4674223" y="2951418"/>
+                  </a:lnTo>
+                  <a:lnTo>
+                    <a:pt x="4751466" y="2956421"/>
+                  </a:lnTo>
+                  <a:lnTo>
+                    <a:pt x="4828710" y="2961376"/>
+                  </a:lnTo>
+                  <a:lnTo>
+                    <a:pt x="4905954" y="2966284"/>
+                  </a:lnTo>
+                  <a:lnTo>
+                    <a:pt x="4983197" y="2971147"/>
+                  </a:lnTo>
+                  <a:lnTo>
+                    <a:pt x="5060441" y="2975964"/>
+                  </a:lnTo>
+                  <a:lnTo>
+                    <a:pt x="5137684" y="2980735"/>
                   </a:lnTo>
                 </a:path>
               </a:pathLst>
@@ -3757,300 +3757,300 @@
           </p:nvSpPr>
           <p:spPr>
             <a:xfrm>
-              <a:off x="817517" y="4247436"/>
-              <a:ext cx="7392041" cy="1298589"/>
+              <a:off x="817517" y="4315672"/>
+              <a:ext cx="7392041" cy="1238543"/>
             </a:xfrm>
             <a:custGeom>
               <a:avLst/>
               <a:pathLst>
-                <a:path w="7392041" h="1298589">
+                <a:path w="7392041" h="1238543">
                   <a:moveTo>
-                    <a:pt x="7392041" y="1298589"/>
+                    <a:pt x="7392041" y="1238543"/>
                   </a:moveTo>
                   <a:lnTo>
-                    <a:pt x="7314797" y="1298233"/>
-                  </a:lnTo>
-                  <a:lnTo>
-                    <a:pt x="7237554" y="1297838"/>
-                  </a:lnTo>
-                  <a:lnTo>
-                    <a:pt x="7160310" y="1297399"/>
-                  </a:lnTo>
-                  <a:lnTo>
-                    <a:pt x="7083066" y="1296911"/>
-                  </a:lnTo>
-                  <a:lnTo>
-                    <a:pt x="7005823" y="1296368"/>
-                  </a:lnTo>
-                  <a:lnTo>
-                    <a:pt x="6928579" y="1295764"/>
-                  </a:lnTo>
-                  <a:lnTo>
-                    <a:pt x="6851336" y="1295093"/>
-                  </a:lnTo>
-                  <a:lnTo>
-                    <a:pt x="6774092" y="1294347"/>
-                  </a:lnTo>
-                  <a:lnTo>
-                    <a:pt x="6696849" y="1293518"/>
-                  </a:lnTo>
-                  <a:lnTo>
-                    <a:pt x="6619605" y="1292596"/>
-                  </a:lnTo>
-                  <a:lnTo>
-                    <a:pt x="6542361" y="1291571"/>
-                  </a:lnTo>
-                  <a:lnTo>
-                    <a:pt x="6465118" y="1290431"/>
-                  </a:lnTo>
-                  <a:lnTo>
-                    <a:pt x="6387874" y="1289164"/>
-                  </a:lnTo>
-                  <a:lnTo>
-                    <a:pt x="6310631" y="1287756"/>
-                  </a:lnTo>
-                  <a:lnTo>
-                    <a:pt x="6233387" y="1286190"/>
-                  </a:lnTo>
-                  <a:lnTo>
-                    <a:pt x="6156144" y="1284450"/>
-                  </a:lnTo>
-                  <a:lnTo>
-                    <a:pt x="6078900" y="1282515"/>
-                  </a:lnTo>
-                  <a:lnTo>
-                    <a:pt x="6001656" y="1280363"/>
-                  </a:lnTo>
-                  <a:lnTo>
-                    <a:pt x="5924413" y="1277972"/>
-                  </a:lnTo>
-                  <a:lnTo>
-                    <a:pt x="5847169" y="1275313"/>
-                  </a:lnTo>
-                  <a:lnTo>
-                    <a:pt x="5769926" y="1272357"/>
-                  </a:lnTo>
-                  <a:lnTo>
-                    <a:pt x="5692682" y="1269071"/>
-                  </a:lnTo>
-                  <a:lnTo>
-                    <a:pt x="5615439" y="1265417"/>
-                  </a:lnTo>
-                  <a:lnTo>
-                    <a:pt x="5538195" y="1261356"/>
-                  </a:lnTo>
-                  <a:lnTo>
-                    <a:pt x="5460951" y="1256841"/>
-                  </a:lnTo>
-                  <a:lnTo>
-                    <a:pt x="5383708" y="1251821"/>
-                  </a:lnTo>
-                  <a:lnTo>
-                    <a:pt x="5306464" y="1246240"/>
-                  </a:lnTo>
-                  <a:lnTo>
-                    <a:pt x="5229221" y="1240036"/>
-                  </a:lnTo>
-                  <a:lnTo>
-                    <a:pt x="5151977" y="1233139"/>
-                  </a:lnTo>
-                  <a:lnTo>
-                    <a:pt x="5074734" y="1225471"/>
-                  </a:lnTo>
-                  <a:lnTo>
-                    <a:pt x="4997490" y="1216947"/>
-                  </a:lnTo>
-                  <a:lnTo>
-                    <a:pt x="4920246" y="1207470"/>
-                  </a:lnTo>
-                  <a:lnTo>
-                    <a:pt x="4843003" y="1196935"/>
-                  </a:lnTo>
-                  <a:lnTo>
-                    <a:pt x="4765759" y="1185222"/>
-                  </a:lnTo>
-                  <a:lnTo>
-                    <a:pt x="4688516" y="1172201"/>
-                  </a:lnTo>
-                  <a:lnTo>
-                    <a:pt x="4611272" y="1157725"/>
-                  </a:lnTo>
-                  <a:lnTo>
-                    <a:pt x="4534029" y="1141631"/>
-                  </a:lnTo>
-                  <a:lnTo>
-                    <a:pt x="4456785" y="1123740"/>
-                  </a:lnTo>
-                  <a:lnTo>
-                    <a:pt x="4379541" y="1103850"/>
-                  </a:lnTo>
-                  <a:lnTo>
-                    <a:pt x="4302298" y="1081737"/>
-                  </a:lnTo>
-                  <a:lnTo>
-                    <a:pt x="4225054" y="1057154"/>
-                  </a:lnTo>
-                  <a:lnTo>
-                    <a:pt x="4147811" y="1029824"/>
-                  </a:lnTo>
-                  <a:lnTo>
-                    <a:pt x="4070567" y="999441"/>
-                  </a:lnTo>
-                  <a:lnTo>
-                    <a:pt x="3993324" y="965664"/>
-                  </a:lnTo>
-                  <a:lnTo>
-                    <a:pt x="3916080" y="928113"/>
-                  </a:lnTo>
-                  <a:lnTo>
-                    <a:pt x="3838836" y="886366"/>
-                  </a:lnTo>
-                  <a:lnTo>
-                    <a:pt x="3761593" y="839955"/>
-                  </a:lnTo>
-                  <a:lnTo>
-                    <a:pt x="3684349" y="788359"/>
-                  </a:lnTo>
-                  <a:lnTo>
-                    <a:pt x="3607106" y="730999"/>
-                  </a:lnTo>
-                  <a:lnTo>
-                    <a:pt x="3529862" y="667230"/>
-                  </a:lnTo>
-                  <a:lnTo>
-                    <a:pt x="3452619" y="596336"/>
-                  </a:lnTo>
-                  <a:lnTo>
-                    <a:pt x="3375375" y="517522"/>
-                  </a:lnTo>
-                  <a:lnTo>
-                    <a:pt x="3298131" y="431898"/>
-                  </a:lnTo>
-                  <a:lnTo>
-                    <a:pt x="3220888" y="423646"/>
-                  </a:lnTo>
-                  <a:lnTo>
-                    <a:pt x="3143644" y="415316"/>
-                  </a:lnTo>
-                  <a:lnTo>
-                    <a:pt x="3066401" y="406907"/>
-                  </a:lnTo>
-                  <a:lnTo>
-                    <a:pt x="2989157" y="398419"/>
-                  </a:lnTo>
-                  <a:lnTo>
-                    <a:pt x="2911914" y="389849"/>
-                  </a:lnTo>
-                  <a:lnTo>
-                    <a:pt x="2834670" y="381199"/>
-                  </a:lnTo>
-                  <a:lnTo>
-                    <a:pt x="2757426" y="372466"/>
-                  </a:lnTo>
-                  <a:lnTo>
-                    <a:pt x="2680183" y="363651"/>
-                  </a:lnTo>
-                  <a:lnTo>
-                    <a:pt x="2602939" y="354752"/>
-                  </a:lnTo>
-                  <a:lnTo>
-                    <a:pt x="2525696" y="345768"/>
-                  </a:lnTo>
-                  <a:lnTo>
-                    <a:pt x="2448452" y="336700"/>
-                  </a:lnTo>
-                  <a:lnTo>
-                    <a:pt x="2371209" y="327545"/>
-                  </a:lnTo>
-                  <a:lnTo>
-                    <a:pt x="2293965" y="318303"/>
-                  </a:lnTo>
-                  <a:lnTo>
-                    <a:pt x="2216721" y="308974"/>
-                  </a:lnTo>
-                  <a:lnTo>
-                    <a:pt x="2139478" y="299556"/>
-                  </a:lnTo>
-                  <a:lnTo>
-                    <a:pt x="2062234" y="290049"/>
-                  </a:lnTo>
-                  <a:lnTo>
-                    <a:pt x="1984991" y="280452"/>
-                  </a:lnTo>
-                  <a:lnTo>
-                    <a:pt x="1907747" y="270764"/>
-                  </a:lnTo>
-                  <a:lnTo>
-                    <a:pt x="1830504" y="260984"/>
-                  </a:lnTo>
-                  <a:lnTo>
-                    <a:pt x="1753260" y="251111"/>
-                  </a:lnTo>
-                  <a:lnTo>
-                    <a:pt x="1676016" y="241144"/>
-                  </a:lnTo>
-                  <a:lnTo>
-                    <a:pt x="1598773" y="231083"/>
-                  </a:lnTo>
-                  <a:lnTo>
-                    <a:pt x="1521529" y="220926"/>
-                  </a:lnTo>
-                  <a:lnTo>
-                    <a:pt x="1444286" y="210673"/>
-                  </a:lnTo>
-                  <a:lnTo>
-                    <a:pt x="1367042" y="200323"/>
-                  </a:lnTo>
-                  <a:lnTo>
-                    <a:pt x="1289799" y="189875"/>
-                  </a:lnTo>
-                  <a:lnTo>
-                    <a:pt x="1212555" y="179327"/>
-                  </a:lnTo>
-                  <a:lnTo>
-                    <a:pt x="1135311" y="168680"/>
-                  </a:lnTo>
-                  <a:lnTo>
-                    <a:pt x="1058068" y="157931"/>
-                  </a:lnTo>
-                  <a:lnTo>
-                    <a:pt x="980824" y="147081"/>
-                  </a:lnTo>
-                  <a:lnTo>
-                    <a:pt x="903581" y="136127"/>
-                  </a:lnTo>
-                  <a:lnTo>
-                    <a:pt x="826337" y="125070"/>
-                  </a:lnTo>
-                  <a:lnTo>
-                    <a:pt x="749094" y="113908"/>
-                  </a:lnTo>
-                  <a:lnTo>
-                    <a:pt x="671850" y="102639"/>
-                  </a:lnTo>
-                  <a:lnTo>
-                    <a:pt x="594606" y="91264"/>
-                  </a:lnTo>
-                  <a:lnTo>
-                    <a:pt x="517363" y="79782"/>
-                  </a:lnTo>
-                  <a:lnTo>
-                    <a:pt x="440119" y="68190"/>
-                  </a:lnTo>
-                  <a:lnTo>
-                    <a:pt x="362876" y="56488"/>
-                  </a:lnTo>
-                  <a:lnTo>
-                    <a:pt x="285632" y="44675"/>
-                  </a:lnTo>
-                  <a:lnTo>
-                    <a:pt x="208389" y="32750"/>
-                  </a:lnTo>
-                  <a:lnTo>
-                    <a:pt x="131145" y="20712"/>
-                  </a:lnTo>
-                  <a:lnTo>
-                    <a:pt x="53901" y="8560"/>
+                    <a:pt x="7314797" y="1238204"/>
+                  </a:lnTo>
+                  <a:lnTo>
+                    <a:pt x="7237554" y="1237827"/>
+                  </a:lnTo>
+                  <a:lnTo>
+                    <a:pt x="7160310" y="1237408"/>
+                  </a:lnTo>
+                  <a:lnTo>
+                    <a:pt x="7083066" y="1236942"/>
+                  </a:lnTo>
+                  <a:lnTo>
+                    <a:pt x="7005823" y="1236424"/>
+                  </a:lnTo>
+                  <a:lnTo>
+                    <a:pt x="6928579" y="1235848"/>
+                  </a:lnTo>
+                  <a:lnTo>
+                    <a:pt x="6851336" y="1235208"/>
+                  </a:lnTo>
+                  <a:lnTo>
+                    <a:pt x="6774092" y="1234497"/>
+                  </a:lnTo>
+                  <a:lnTo>
+                    <a:pt x="6696849" y="1233706"/>
+                  </a:lnTo>
+                  <a:lnTo>
+                    <a:pt x="6619605" y="1232827"/>
+                  </a:lnTo>
+                  <a:lnTo>
+                    <a:pt x="6542361" y="1231849"/>
+                  </a:lnTo>
+                  <a:lnTo>
+                    <a:pt x="6465118" y="1230762"/>
+                  </a:lnTo>
+                  <a:lnTo>
+                    <a:pt x="6387874" y="1229554"/>
+                  </a:lnTo>
+                  <a:lnTo>
+                    <a:pt x="6310631" y="1228211"/>
+                  </a:lnTo>
+                  <a:lnTo>
+                    <a:pt x="6233387" y="1226717"/>
+                  </a:lnTo>
+                  <a:lnTo>
+                    <a:pt x="6156144" y="1225057"/>
+                  </a:lnTo>
+                  <a:lnTo>
+                    <a:pt x="6078900" y="1223212"/>
+                  </a:lnTo>
+                  <a:lnTo>
+                    <a:pt x="6001656" y="1221160"/>
+                  </a:lnTo>
+                  <a:lnTo>
+                    <a:pt x="5924413" y="1218879"/>
+                  </a:lnTo>
+                  <a:lnTo>
+                    <a:pt x="5847169" y="1216343"/>
+                  </a:lnTo>
+                  <a:lnTo>
+                    <a:pt x="5769926" y="1213524"/>
+                  </a:lnTo>
+                  <a:lnTo>
+                    <a:pt x="5692682" y="1210389"/>
+                  </a:lnTo>
+                  <a:lnTo>
+                    <a:pt x="5615439" y="1206905"/>
+                  </a:lnTo>
+                  <a:lnTo>
+                    <a:pt x="5538195" y="1203031"/>
+                  </a:lnTo>
+                  <a:lnTo>
+                    <a:pt x="5460951" y="1198725"/>
+                  </a:lnTo>
+                  <a:lnTo>
+                    <a:pt x="5383708" y="1193937"/>
+                  </a:lnTo>
+                  <a:lnTo>
+                    <a:pt x="5306464" y="1188615"/>
+                  </a:lnTo>
+                  <a:lnTo>
+                    <a:pt x="5229221" y="1182698"/>
+                  </a:lnTo>
+                  <a:lnTo>
+                    <a:pt x="5151977" y="1176119"/>
+                  </a:lnTo>
+                  <a:lnTo>
+                    <a:pt x="5074734" y="1168806"/>
+                  </a:lnTo>
+                  <a:lnTo>
+                    <a:pt x="4997490" y="1160676"/>
+                  </a:lnTo>
+                  <a:lnTo>
+                    <a:pt x="4920246" y="1151637"/>
+                  </a:lnTo>
+                  <a:lnTo>
+                    <a:pt x="4843003" y="1141589"/>
+                  </a:lnTo>
+                  <a:lnTo>
+                    <a:pt x="4765759" y="1130418"/>
+                  </a:lnTo>
+                  <a:lnTo>
+                    <a:pt x="4688516" y="1117999"/>
+                  </a:lnTo>
+                  <a:lnTo>
+                    <a:pt x="4611272" y="1104192"/>
+                  </a:lnTo>
+                  <a:lnTo>
+                    <a:pt x="4534029" y="1088843"/>
+                  </a:lnTo>
+                  <a:lnTo>
+                    <a:pt x="4456785" y="1071779"/>
+                  </a:lnTo>
+                  <a:lnTo>
+                    <a:pt x="4379541" y="1052808"/>
+                  </a:lnTo>
+                  <a:lnTo>
+                    <a:pt x="4302298" y="1031718"/>
+                  </a:lnTo>
+                  <a:lnTo>
+                    <a:pt x="4225054" y="1008272"/>
+                  </a:lnTo>
+                  <a:lnTo>
+                    <a:pt x="4147811" y="982206"/>
+                  </a:lnTo>
+                  <a:lnTo>
+                    <a:pt x="4070567" y="953228"/>
+                  </a:lnTo>
+                  <a:lnTo>
+                    <a:pt x="3993324" y="921012"/>
+                  </a:lnTo>
+                  <a:lnTo>
+                    <a:pt x="3916080" y="885197"/>
+                  </a:lnTo>
+                  <a:lnTo>
+                    <a:pt x="3838836" y="845381"/>
+                  </a:lnTo>
+                  <a:lnTo>
+                    <a:pt x="3761593" y="801116"/>
+                  </a:lnTo>
+                  <a:lnTo>
+                    <a:pt x="3684349" y="751906"/>
+                  </a:lnTo>
+                  <a:lnTo>
+                    <a:pt x="3607106" y="697198"/>
+                  </a:lnTo>
+                  <a:lnTo>
+                    <a:pt x="3529862" y="636377"/>
+                  </a:lnTo>
+                  <a:lnTo>
+                    <a:pt x="3452619" y="568762"/>
+                  </a:lnTo>
+                  <a:lnTo>
+                    <a:pt x="3375375" y="493592"/>
+                  </a:lnTo>
+                  <a:lnTo>
+                    <a:pt x="3298131" y="411927"/>
+                  </a:lnTo>
+                  <a:lnTo>
+                    <a:pt x="3220888" y="404057"/>
+                  </a:lnTo>
+                  <a:lnTo>
+                    <a:pt x="3143644" y="396112"/>
+                  </a:lnTo>
+                  <a:lnTo>
+                    <a:pt x="3066401" y="388092"/>
+                  </a:lnTo>
+                  <a:lnTo>
+                    <a:pt x="2989157" y="379996"/>
+                  </a:lnTo>
+                  <a:lnTo>
+                    <a:pt x="2911914" y="371823"/>
+                  </a:lnTo>
+                  <a:lnTo>
+                    <a:pt x="2834670" y="363572"/>
+                  </a:lnTo>
+                  <a:lnTo>
+                    <a:pt x="2757426" y="355244"/>
+                  </a:lnTo>
+                  <a:lnTo>
+                    <a:pt x="2680183" y="346836"/>
+                  </a:lnTo>
+                  <a:lnTo>
+                    <a:pt x="2602939" y="338348"/>
+                  </a:lnTo>
+                  <a:lnTo>
+                    <a:pt x="2525696" y="329780"/>
+                  </a:lnTo>
+                  <a:lnTo>
+                    <a:pt x="2448452" y="321131"/>
+                  </a:lnTo>
+                  <a:lnTo>
+                    <a:pt x="2371209" y="312399"/>
+                  </a:lnTo>
+                  <a:lnTo>
+                    <a:pt x="2293965" y="303585"/>
+                  </a:lnTo>
+                  <a:lnTo>
+                    <a:pt x="2216721" y="294687"/>
+                  </a:lnTo>
+                  <a:lnTo>
+                    <a:pt x="2139478" y="285705"/>
+                  </a:lnTo>
+                  <a:lnTo>
+                    <a:pt x="2062234" y="276638"/>
+                  </a:lnTo>
+                  <a:lnTo>
+                    <a:pt x="1984991" y="267484"/>
+                  </a:lnTo>
+                  <a:lnTo>
+                    <a:pt x="1907747" y="258244"/>
+                  </a:lnTo>
+                  <a:lnTo>
+                    <a:pt x="1830504" y="248916"/>
+                  </a:lnTo>
+                  <a:lnTo>
+                    <a:pt x="1753260" y="239499"/>
+                  </a:lnTo>
+                  <a:lnTo>
+                    <a:pt x="1676016" y="229994"/>
+                  </a:lnTo>
+                  <a:lnTo>
+                    <a:pt x="1598773" y="220398"/>
+                  </a:lnTo>
+                  <a:lnTo>
+                    <a:pt x="1521529" y="210711"/>
+                  </a:lnTo>
+                  <a:lnTo>
+                    <a:pt x="1444286" y="200932"/>
+                  </a:lnTo>
+                  <a:lnTo>
+                    <a:pt x="1367042" y="191060"/>
+                  </a:lnTo>
+                  <a:lnTo>
+                    <a:pt x="1289799" y="181095"/>
+                  </a:lnTo>
+                  <a:lnTo>
+                    <a:pt x="1212555" y="171035"/>
+                  </a:lnTo>
+                  <a:lnTo>
+                    <a:pt x="1135311" y="160880"/>
+                  </a:lnTo>
+                  <a:lnTo>
+                    <a:pt x="1058068" y="150628"/>
+                  </a:lnTo>
+                  <a:lnTo>
+                    <a:pt x="980824" y="140280"/>
+                  </a:lnTo>
+                  <a:lnTo>
+                    <a:pt x="903581" y="129833"/>
+                  </a:lnTo>
+                  <a:lnTo>
+                    <a:pt x="826337" y="119287"/>
+                  </a:lnTo>
+                  <a:lnTo>
+                    <a:pt x="749094" y="108641"/>
+                  </a:lnTo>
+                  <a:lnTo>
+                    <a:pt x="671850" y="97893"/>
+                  </a:lnTo>
+                  <a:lnTo>
+                    <a:pt x="594606" y="87044"/>
+                  </a:lnTo>
+                  <a:lnTo>
+                    <a:pt x="517363" y="76092"/>
+                  </a:lnTo>
+                  <a:lnTo>
+                    <a:pt x="440119" y="65037"/>
+                  </a:lnTo>
+                  <a:lnTo>
+                    <a:pt x="362876" y="53876"/>
+                  </a:lnTo>
+                  <a:lnTo>
+                    <a:pt x="285632" y="42609"/>
+                  </a:lnTo>
+                  <a:lnTo>
+                    <a:pt x="208389" y="31236"/>
+                  </a:lnTo>
+                  <a:lnTo>
+                    <a:pt x="131145" y="19754"/>
+                  </a:lnTo>
+                  <a:lnTo>
+                    <a:pt x="53901" y="8164"/>
                   </a:lnTo>
                   <a:lnTo>
                     <a:pt x="0" y="0"/>
@@ -4073,249 +4073,249 @@
           </p:nvSpPr>
           <p:spPr>
             <a:xfrm>
-              <a:off x="2195823" y="1896563"/>
-              <a:ext cx="6013735" cy="3611682"/>
+              <a:off x="2195823" y="2073503"/>
+              <a:ext cx="6013735" cy="3444679"/>
             </a:xfrm>
             <a:custGeom>
               <a:avLst/>
               <a:pathLst>
-                <a:path w="6013735" h="3611682">
+                <a:path w="6013735" h="3444679">
                   <a:moveTo>
                     <a:pt x="0" y="0"/>
                   </a:moveTo>
                   <a:lnTo>
-                    <a:pt x="65980" y="176302"/>
-                  </a:lnTo>
-                  <a:lnTo>
-                    <a:pt x="143223" y="371134"/>
-                  </a:lnTo>
-                  <a:lnTo>
-                    <a:pt x="220467" y="555046"/>
-                  </a:lnTo>
-                  <a:lnTo>
-                    <a:pt x="297710" y="728651"/>
-                  </a:lnTo>
-                  <a:lnTo>
-                    <a:pt x="374954" y="892526"/>
-                  </a:lnTo>
-                  <a:lnTo>
-                    <a:pt x="452198" y="1047217"/>
-                  </a:lnTo>
-                  <a:lnTo>
-                    <a:pt x="529441" y="1193239"/>
-                  </a:lnTo>
-                  <a:lnTo>
-                    <a:pt x="606685" y="1331076"/>
-                  </a:lnTo>
-                  <a:lnTo>
-                    <a:pt x="683928" y="1461188"/>
-                  </a:lnTo>
-                  <a:lnTo>
-                    <a:pt x="761172" y="1584008"/>
-                  </a:lnTo>
-                  <a:lnTo>
-                    <a:pt x="838415" y="1699945"/>
-                  </a:lnTo>
-                  <a:lnTo>
-                    <a:pt x="915659" y="1809384"/>
-                  </a:lnTo>
-                  <a:lnTo>
-                    <a:pt x="992903" y="1912690"/>
-                  </a:lnTo>
-                  <a:lnTo>
-                    <a:pt x="1070146" y="2010205"/>
-                  </a:lnTo>
-                  <a:lnTo>
-                    <a:pt x="1147390" y="2102256"/>
-                  </a:lnTo>
-                  <a:lnTo>
-                    <a:pt x="1224633" y="2189147"/>
-                  </a:lnTo>
-                  <a:lnTo>
-                    <a:pt x="1301877" y="2271169"/>
-                  </a:lnTo>
-                  <a:lnTo>
-                    <a:pt x="1379120" y="2348594"/>
-                  </a:lnTo>
-                  <a:lnTo>
-                    <a:pt x="1456364" y="2421679"/>
-                  </a:lnTo>
-                  <a:lnTo>
-                    <a:pt x="1533608" y="2490669"/>
-                  </a:lnTo>
-                  <a:lnTo>
-                    <a:pt x="1610851" y="2555792"/>
-                  </a:lnTo>
-                  <a:lnTo>
-                    <a:pt x="1688095" y="2617265"/>
-                  </a:lnTo>
-                  <a:lnTo>
-                    <a:pt x="1765338" y="2675293"/>
-                  </a:lnTo>
-                  <a:lnTo>
-                    <a:pt x="1842582" y="2730068"/>
-                  </a:lnTo>
-                  <a:lnTo>
-                    <a:pt x="1919825" y="2781774"/>
-                  </a:lnTo>
-                  <a:lnTo>
-                    <a:pt x="1997069" y="2830582"/>
-                  </a:lnTo>
-                  <a:lnTo>
-                    <a:pt x="2074313" y="2876654"/>
-                  </a:lnTo>
-                  <a:lnTo>
-                    <a:pt x="2151556" y="2920145"/>
-                  </a:lnTo>
-                  <a:lnTo>
-                    <a:pt x="2228800" y="2961198"/>
-                  </a:lnTo>
-                  <a:lnTo>
-                    <a:pt x="2306043" y="2999950"/>
-                  </a:lnTo>
-                  <a:lnTo>
-                    <a:pt x="2383287" y="3036530"/>
-                  </a:lnTo>
-                  <a:lnTo>
-                    <a:pt x="2460530" y="3071060"/>
-                  </a:lnTo>
-                  <a:lnTo>
-                    <a:pt x="2537774" y="3103655"/>
-                  </a:lnTo>
-                  <a:lnTo>
-                    <a:pt x="2615018" y="3134423"/>
-                  </a:lnTo>
-                  <a:lnTo>
-                    <a:pt x="2692261" y="3163467"/>
-                  </a:lnTo>
-                  <a:lnTo>
-                    <a:pt x="2769505" y="3190883"/>
-                  </a:lnTo>
-                  <a:lnTo>
-                    <a:pt x="2846748" y="3216762"/>
-                  </a:lnTo>
-                  <a:lnTo>
-                    <a:pt x="2923992" y="3241191"/>
-                  </a:lnTo>
-                  <a:lnTo>
-                    <a:pt x="3001235" y="3264251"/>
-                  </a:lnTo>
-                  <a:lnTo>
-                    <a:pt x="3078479" y="3286018"/>
-                  </a:lnTo>
-                  <a:lnTo>
-                    <a:pt x="3155723" y="3306566"/>
-                  </a:lnTo>
-                  <a:lnTo>
-                    <a:pt x="3232966" y="3325962"/>
-                  </a:lnTo>
-                  <a:lnTo>
-                    <a:pt x="3310210" y="3344271"/>
-                  </a:lnTo>
-                  <a:lnTo>
-                    <a:pt x="3387453" y="3361553"/>
-                  </a:lnTo>
-                  <a:lnTo>
-                    <a:pt x="3464697" y="3377867"/>
-                  </a:lnTo>
-                  <a:lnTo>
-                    <a:pt x="3541940" y="3393267"/>
-                  </a:lnTo>
-                  <a:lnTo>
-                    <a:pt x="3619184" y="3407804"/>
-                  </a:lnTo>
-                  <a:lnTo>
-                    <a:pt x="3696428" y="3421526"/>
-                  </a:lnTo>
-                  <a:lnTo>
-                    <a:pt x="3773671" y="3434479"/>
-                  </a:lnTo>
-                  <a:lnTo>
-                    <a:pt x="3850915" y="3446706"/>
-                  </a:lnTo>
-                  <a:lnTo>
-                    <a:pt x="3928158" y="3458248"/>
-                  </a:lnTo>
-                  <a:lnTo>
-                    <a:pt x="4005402" y="3469143"/>
-                  </a:lnTo>
-                  <a:lnTo>
-                    <a:pt x="4082645" y="3479427"/>
-                  </a:lnTo>
-                  <a:lnTo>
-                    <a:pt x="4159889" y="3489135"/>
-                  </a:lnTo>
-                  <a:lnTo>
-                    <a:pt x="4237133" y="3498299"/>
-                  </a:lnTo>
-                  <a:lnTo>
-                    <a:pt x="4314376" y="3506949"/>
-                  </a:lnTo>
-                  <a:lnTo>
-                    <a:pt x="4391620" y="3515114"/>
-                  </a:lnTo>
-                  <a:lnTo>
-                    <a:pt x="4468863" y="3522822"/>
-                  </a:lnTo>
-                  <a:lnTo>
-                    <a:pt x="4546107" y="3530098"/>
-                  </a:lnTo>
-                  <a:lnTo>
-                    <a:pt x="4623350" y="3536966"/>
-                  </a:lnTo>
-                  <a:lnTo>
-                    <a:pt x="4700594" y="3543449"/>
-                  </a:lnTo>
-                  <a:lnTo>
-                    <a:pt x="4777838" y="3549569"/>
-                  </a:lnTo>
-                  <a:lnTo>
-                    <a:pt x="4855081" y="3555346"/>
-                  </a:lnTo>
-                  <a:lnTo>
-                    <a:pt x="4932325" y="3560799"/>
-                  </a:lnTo>
-                  <a:lnTo>
-                    <a:pt x="5009568" y="3565946"/>
-                  </a:lnTo>
-                  <a:lnTo>
-                    <a:pt x="5086812" y="3570805"/>
-                  </a:lnTo>
-                  <a:lnTo>
-                    <a:pt x="5164055" y="3575392"/>
-                  </a:lnTo>
-                  <a:lnTo>
-                    <a:pt x="5241299" y="3579721"/>
-                  </a:lnTo>
-                  <a:lnTo>
-                    <a:pt x="5318543" y="3583808"/>
-                  </a:lnTo>
-                  <a:lnTo>
-                    <a:pt x="5395786" y="3587666"/>
-                  </a:lnTo>
-                  <a:lnTo>
-                    <a:pt x="5473030" y="3591308"/>
-                  </a:lnTo>
-                  <a:lnTo>
-                    <a:pt x="5550273" y="3594745"/>
-                  </a:lnTo>
-                  <a:lnTo>
-                    <a:pt x="5627517" y="3597990"/>
-                  </a:lnTo>
-                  <a:lnTo>
-                    <a:pt x="5704760" y="3601053"/>
-                  </a:lnTo>
-                  <a:lnTo>
-                    <a:pt x="5782004" y="3603945"/>
-                  </a:lnTo>
-                  <a:lnTo>
-                    <a:pt x="5859248" y="3606674"/>
-                  </a:lnTo>
-                  <a:lnTo>
-                    <a:pt x="5936491" y="3609250"/>
-                  </a:lnTo>
-                  <a:lnTo>
-                    <a:pt x="6013735" y="3611682"/>
+                    <a:pt x="65980" y="168150"/>
+                  </a:lnTo>
+                  <a:lnTo>
+                    <a:pt x="143223" y="353973"/>
+                  </a:lnTo>
+                  <a:lnTo>
+                    <a:pt x="220467" y="529381"/>
+                  </a:lnTo>
+                  <a:lnTo>
+                    <a:pt x="297710" y="694959"/>
+                  </a:lnTo>
+                  <a:lnTo>
+                    <a:pt x="374954" y="851256"/>
+                  </a:lnTo>
+                  <a:lnTo>
+                    <a:pt x="452198" y="998794"/>
+                  </a:lnTo>
+                  <a:lnTo>
+                    <a:pt x="529441" y="1138064"/>
+                  </a:lnTo>
+                  <a:lnTo>
+                    <a:pt x="606685" y="1269527"/>
+                  </a:lnTo>
+                  <a:lnTo>
+                    <a:pt x="683928" y="1393623"/>
+                  </a:lnTo>
+                  <a:lnTo>
+                    <a:pt x="761172" y="1510764"/>
+                  </a:lnTo>
+                  <a:lnTo>
+                    <a:pt x="838415" y="1621340"/>
+                  </a:lnTo>
+                  <a:lnTo>
+                    <a:pt x="915659" y="1725719"/>
+                  </a:lnTo>
+                  <a:lnTo>
+                    <a:pt x="992903" y="1824248"/>
+                  </a:lnTo>
+                  <a:lnTo>
+                    <a:pt x="1070146" y="1917254"/>
+                  </a:lnTo>
+                  <a:lnTo>
+                    <a:pt x="1147390" y="2005048"/>
+                  </a:lnTo>
+                  <a:lnTo>
+                    <a:pt x="1224633" y="2087922"/>
+                  </a:lnTo>
+                  <a:lnTo>
+                    <a:pt x="1301877" y="2166151"/>
+                  </a:lnTo>
+                  <a:lnTo>
+                    <a:pt x="1379120" y="2239996"/>
+                  </a:lnTo>
+                  <a:lnTo>
+                    <a:pt x="1456364" y="2309702"/>
+                  </a:lnTo>
+                  <a:lnTo>
+                    <a:pt x="1533608" y="2375501"/>
+                  </a:lnTo>
+                  <a:lnTo>
+                    <a:pt x="1610851" y="2437613"/>
+                  </a:lnTo>
+                  <a:lnTo>
+                    <a:pt x="1688095" y="2496243"/>
+                  </a:lnTo>
+                  <a:lnTo>
+                    <a:pt x="1765338" y="2551588"/>
+                  </a:lnTo>
+                  <a:lnTo>
+                    <a:pt x="1842582" y="2603831"/>
+                  </a:lnTo>
+                  <a:lnTo>
+                    <a:pt x="1919825" y="2653146"/>
+                  </a:lnTo>
+                  <a:lnTo>
+                    <a:pt x="1997069" y="2699697"/>
+                  </a:lnTo>
+                  <a:lnTo>
+                    <a:pt x="2074313" y="2743639"/>
+                  </a:lnTo>
+                  <a:lnTo>
+                    <a:pt x="2151556" y="2785118"/>
+                  </a:lnTo>
+                  <a:lnTo>
+                    <a:pt x="2228800" y="2824273"/>
+                  </a:lnTo>
+                  <a:lnTo>
+                    <a:pt x="2306043" y="2861233"/>
+                  </a:lnTo>
+                  <a:lnTo>
+                    <a:pt x="2383287" y="2896122"/>
+                  </a:lnTo>
+                  <a:lnTo>
+                    <a:pt x="2460530" y="2929055"/>
+                  </a:lnTo>
+                  <a:lnTo>
+                    <a:pt x="2537774" y="2960143"/>
+                  </a:lnTo>
+                  <a:lnTo>
+                    <a:pt x="2615018" y="2989488"/>
+                  </a:lnTo>
+                  <a:lnTo>
+                    <a:pt x="2692261" y="3017189"/>
+                  </a:lnTo>
+                  <a:lnTo>
+                    <a:pt x="2769505" y="3043337"/>
+                  </a:lnTo>
+                  <a:lnTo>
+                    <a:pt x="2846748" y="3068020"/>
+                  </a:lnTo>
+                  <a:lnTo>
+                    <a:pt x="2923992" y="3091319"/>
+                  </a:lnTo>
+                  <a:lnTo>
+                    <a:pt x="3001235" y="3113313"/>
+                  </a:lnTo>
+                  <a:lnTo>
+                    <a:pt x="3078479" y="3134074"/>
+                  </a:lnTo>
+                  <a:lnTo>
+                    <a:pt x="3155723" y="3153671"/>
+                  </a:lnTo>
+                  <a:lnTo>
+                    <a:pt x="3232966" y="3172170"/>
+                  </a:lnTo>
+                  <a:lnTo>
+                    <a:pt x="3310210" y="3189633"/>
+                  </a:lnTo>
+                  <a:lnTo>
+                    <a:pt x="3387453" y="3206116"/>
+                  </a:lnTo>
+                  <a:lnTo>
+                    <a:pt x="3464697" y="3221676"/>
+                  </a:lnTo>
+                  <a:lnTo>
+                    <a:pt x="3541940" y="3236364"/>
+                  </a:lnTo>
+                  <a:lnTo>
+                    <a:pt x="3619184" y="3250228"/>
+                  </a:lnTo>
+                  <a:lnTo>
+                    <a:pt x="3696428" y="3263316"/>
+                  </a:lnTo>
+                  <a:lnTo>
+                    <a:pt x="3773671" y="3275670"/>
+                  </a:lnTo>
+                  <a:lnTo>
+                    <a:pt x="3850915" y="3287332"/>
+                  </a:lnTo>
+                  <a:lnTo>
+                    <a:pt x="3928158" y="3298340"/>
+                  </a:lnTo>
+                  <a:lnTo>
+                    <a:pt x="4005402" y="3308731"/>
+                  </a:lnTo>
+                  <a:lnTo>
+                    <a:pt x="4082645" y="3318540"/>
+                  </a:lnTo>
+                  <a:lnTo>
+                    <a:pt x="4159889" y="3327799"/>
+                  </a:lnTo>
+                  <a:lnTo>
+                    <a:pt x="4237133" y="3336539"/>
+                  </a:lnTo>
+                  <a:lnTo>
+                    <a:pt x="4314376" y="3344789"/>
+                  </a:lnTo>
+                  <a:lnTo>
+                    <a:pt x="4391620" y="3352577"/>
+                  </a:lnTo>
+                  <a:lnTo>
+                    <a:pt x="4468863" y="3359928"/>
+                  </a:lnTo>
+                  <a:lnTo>
+                    <a:pt x="4546107" y="3366868"/>
+                  </a:lnTo>
+                  <a:lnTo>
+                    <a:pt x="4623350" y="3373418"/>
+                  </a:lnTo>
+                  <a:lnTo>
+                    <a:pt x="4700594" y="3379601"/>
+                  </a:lnTo>
+                  <a:lnTo>
+                    <a:pt x="4777838" y="3385438"/>
+                  </a:lnTo>
+                  <a:lnTo>
+                    <a:pt x="4855081" y="3390948"/>
+                  </a:lnTo>
+                  <a:lnTo>
+                    <a:pt x="4932325" y="3396149"/>
+                  </a:lnTo>
+                  <a:lnTo>
+                    <a:pt x="5009568" y="3401058"/>
+                  </a:lnTo>
+                  <a:lnTo>
+                    <a:pt x="5086812" y="3405693"/>
+                  </a:lnTo>
+                  <a:lnTo>
+                    <a:pt x="5164055" y="3410067"/>
+                  </a:lnTo>
+                  <a:lnTo>
+                    <a:pt x="5241299" y="3414196"/>
+                  </a:lnTo>
+                  <a:lnTo>
+                    <a:pt x="5318543" y="3418094"/>
+                  </a:lnTo>
+                  <a:lnTo>
+                    <a:pt x="5395786" y="3421774"/>
+                  </a:lnTo>
+                  <a:lnTo>
+                    <a:pt x="5473030" y="3425247"/>
+                  </a:lnTo>
+                  <a:lnTo>
+                    <a:pt x="5550273" y="3428526"/>
+                  </a:lnTo>
+                  <a:lnTo>
+                    <a:pt x="5627517" y="3431621"/>
+                  </a:lnTo>
+                  <a:lnTo>
+                    <a:pt x="5704760" y="3434542"/>
+                  </a:lnTo>
+                  <a:lnTo>
+                    <a:pt x="5782004" y="3437300"/>
+                  </a:lnTo>
+                  <a:lnTo>
+                    <a:pt x="5859248" y="3439903"/>
+                  </a:lnTo>
+                  <a:lnTo>
+                    <a:pt x="5936491" y="3442360"/>
+                  </a:lnTo>
+                  <a:lnTo>
+                    <a:pt x="6013735" y="3444679"/>
                   </a:lnTo>
                 </a:path>
               </a:pathLst>
@@ -4344,7 +4344,7 @@
           </p:nvSpPr>
           <p:spPr>
             <a:xfrm>
-              <a:off x="817517" y="4679530"/>
+              <a:off x="817517" y="4727786"/>
               <a:ext cx="7799693" cy="0"/>
             </a:xfrm>
             <a:custGeom>
@@ -4387,15 +4387,15 @@
           </p:nvSpPr>
           <p:spPr>
             <a:xfrm>
-              <a:off x="4117484" y="1896563"/>
-              <a:ext cx="0" cy="3826579"/>
+              <a:off x="4117484" y="2073503"/>
+              <a:ext cx="0" cy="3649639"/>
             </a:xfrm>
             <a:custGeom>
               <a:avLst/>
               <a:pathLst>
-                <a:path w="0" h="3826579">
+                <a:path w="0" h="3649639">
                   <a:moveTo>
-                    <a:pt x="0" y="3826579"/>
+                    <a:pt x="0" y="3649639"/>
                   </a:moveTo>
                   <a:lnTo>
                     <a:pt x="0" y="0"/>
@@ -4430,7 +4430,7 @@
           </p:nvSpPr>
           <p:spPr>
             <a:xfrm>
-              <a:off x="692708" y="5509156"/>
+              <a:off x="692708" y="5517199"/>
               <a:ext cx="62179" cy="80101"/>
             </a:xfrm>
             <a:prstGeom prst="rect">
@@ -4476,7 +4476,7 @@
           </p:nvSpPr>
           <p:spPr>
             <a:xfrm>
-              <a:off x="692708" y="4639479"/>
+              <a:off x="692708" y="4687735"/>
               <a:ext cx="62179" cy="80101"/>
             </a:xfrm>
             <a:prstGeom prst="rect">
@@ -4522,7 +4522,7 @@
           </p:nvSpPr>
           <p:spPr>
             <a:xfrm>
-              <a:off x="692708" y="3769802"/>
+              <a:off x="692708" y="3858272"/>
               <a:ext cx="62179" cy="80101"/>
             </a:xfrm>
             <a:prstGeom prst="rect">
@@ -4568,7 +4568,7 @@
           </p:nvSpPr>
           <p:spPr>
             <a:xfrm>
-              <a:off x="692708" y="2900125"/>
+              <a:off x="692708" y="3028808"/>
               <a:ext cx="62179" cy="80101"/>
             </a:xfrm>
             <a:prstGeom prst="rect">
@@ -4614,7 +4614,7 @@
           </p:nvSpPr>
           <p:spPr>
             <a:xfrm>
-              <a:off x="692708" y="2030448"/>
+              <a:off x="692708" y="2199345"/>
               <a:ext cx="62179" cy="80101"/>
             </a:xfrm>
             <a:prstGeom prst="rect">
@@ -4890,7 +4890,7 @@
           </p:nvSpPr>
           <p:spPr>
             <a:xfrm rot="-5400000">
-              <a:off x="68446" y="3759743"/>
+              <a:off x="68446" y="3848213"/>
               <a:ext cx="1016904" cy="100218"/>
             </a:xfrm>
             <a:prstGeom prst="rect">
@@ -4931,6 +4931,52 @@
         <p:sp>
           <p:nvSpPr>
             <p:cNvPr id="38" name="tx38"/>
+            <p:cNvSpPr/>
+            <p:nvPr/>
+          </p:nvSpPr>
+          <p:spPr>
+            <a:xfrm>
+              <a:off x="817517" y="1896563"/>
+              <a:ext cx="5689762" cy="82021"/>
+            </a:xfrm>
+            <a:prstGeom prst="rect">
+              <a:avLst/>
+            </a:prstGeom>
+            <a:noFill/>
+          </p:spPr>
+          <p:txBody>
+            <a:bodyPr lIns="0" rIns="0" tIns="0" bIns="0" anchorCtr="1" anchor="ctr" wrap="none"/>
+            <a:lstStyle/>
+            <a:p>
+              <a:pPr algn="l" marL="0" marR="0" indent="0">
+                <a:lnSpc>
+                  <a:spcPts val="900"/>
+                </a:lnSpc>
+                <a:spcBef>
+                  <a:spcPts val="0"/>
+                </a:spcBef>
+                <a:spcAft>
+                  <a:spcPts val="0"/>
+                </a:spcAft>
+              </a:pPr>
+              <a:r>
+                <a:rPr sz="900">
+                  <a:solidFill>
+                    <a:srgbClr val="404040">
+                      <a:alpha val="100000"/>
+                    </a:srgbClr>
+                  </a:solidFill>
+                  <a:latin typeface="Helvetica"/>
+                  <a:cs typeface="Helvetica"/>
+                </a:rPr>
+                <a:t>subHR per 0.1 ratio decline: 1.94 (1.11-3.37)  |  per IQR decline (Δ = 0.30): 7.06 (1.38-36.21)  |  IQR: [0.84, 1.14]</a:t>
+              </a:r>
+            </a:p>
+          </p:txBody>
+        </p:sp>
+        <p:sp>
+          <p:nvSpPr>
+            <p:cNvPr id="39" name="tx39"/>
             <p:cNvSpPr/>
             <p:nvPr/>
           </p:nvSpPr>

--- a/docs/pptx/auc3/jx-auc3-linsubhr-ratio-hosp4.pptx
+++ b/docs/pptx/auc3/jx-auc3-linsubhr-ratio-hosp4.pptx
@@ -4937,7 +4937,7 @@
           <p:spPr>
             <a:xfrm>
               <a:off x="817517" y="1896563"/>
-              <a:ext cx="5689762" cy="82021"/>
+              <a:ext cx="6232916" cy="82021"/>
             </a:xfrm>
             <a:prstGeom prst="rect">
               <a:avLst/>
@@ -4969,7 +4969,7 @@
                   <a:latin typeface="Helvetica"/>
                   <a:cs typeface="Helvetica"/>
                 </a:rPr>
-                <a:t>subHR per 0.1 ratio decline: 1.94 (1.11-3.37)  |  per IQR decline (Δ = 0.30): 7.06 (1.38-36.21)  |  IQR: [0.84, 1.14]</a:t>
+                <a:t>subHR per 0.1 ratio decline: 1.94 (1.11-3.37), p = 0.019  |  per IQR decline (Δ = 0.30): 7.06 (1.38-36.21)  |  IQR: [0.84, 1.14]</a:t>
               </a:r>
             </a:p>
           </p:txBody>

--- a/docs/pptx/auc3/jx-auc3-linsubhr-ratio-hosp4.pptx
+++ b/docs/pptx/auc3/jx-auc3-linsubhr-ratio-hosp4.pptx
@@ -2443,7 +2443,7 @@
           </p:nvSpPr>
           <p:spPr>
             <a:xfrm>
-              <a:off x="1615213" y="2073503"/>
+              <a:off x="1531834" y="2073503"/>
               <a:ext cx="0" cy="3649639"/>
             </a:xfrm>
             <a:custGeom>
@@ -2486,7 +2486,7 @@
           </p:nvSpPr>
           <p:spPr>
             <a:xfrm>
-              <a:off x="3387871" y="2073503"/>
+              <a:off x="3586410" y="2073503"/>
               <a:ext cx="0" cy="3649639"/>
             </a:xfrm>
             <a:custGeom>
@@ -2529,7 +2529,7 @@
           </p:nvSpPr>
           <p:spPr>
             <a:xfrm>
-              <a:off x="5160528" y="2073503"/>
+              <a:off x="5640985" y="2073503"/>
               <a:ext cx="0" cy="3649639"/>
             </a:xfrm>
             <a:custGeom>
@@ -2572,7 +2572,7 @@
           </p:nvSpPr>
           <p:spPr>
             <a:xfrm>
-              <a:off x="6933186" y="2073503"/>
+              <a:off x="7695561" y="2073503"/>
               <a:ext cx="0" cy="3649639"/>
             </a:xfrm>
             <a:custGeom>
@@ -2830,7 +2830,7 @@
           </p:nvSpPr>
           <p:spPr>
             <a:xfrm>
-              <a:off x="2501542" y="2073503"/>
+              <a:off x="2559122" y="2073503"/>
               <a:ext cx="0" cy="3649639"/>
             </a:xfrm>
             <a:custGeom>
@@ -2873,7 +2873,7 @@
           </p:nvSpPr>
           <p:spPr>
             <a:xfrm>
-              <a:off x="4274200" y="2073503"/>
+              <a:off x="4613698" y="2073503"/>
               <a:ext cx="0" cy="3649639"/>
             </a:xfrm>
             <a:custGeom>
@@ -2916,7 +2916,7 @@
           </p:nvSpPr>
           <p:spPr>
             <a:xfrm>
-              <a:off x="6046857" y="2073503"/>
+              <a:off x="6668273" y="2073503"/>
               <a:ext cx="0" cy="3649639"/>
             </a:xfrm>
             <a:custGeom>
@@ -2953,556 +2953,525 @@
         </p:sp>
         <p:sp>
           <p:nvSpPr>
-            <p:cNvPr id="20" name="pl20"/>
+            <p:cNvPr id="20" name="pg20"/>
             <p:cNvSpPr/>
             <p:nvPr/>
           </p:nvSpPr>
           <p:spPr>
             <a:xfrm>
-              <a:off x="7819515" y="2073503"/>
-              <a:ext cx="0" cy="3649639"/>
+              <a:off x="1172049" y="2073503"/>
+              <a:ext cx="7090630" cy="3480712"/>
             </a:xfrm>
             <a:custGeom>
               <a:avLst/>
               <a:pathLst>
-                <a:path w="0" h="3649639">
+                <a:path w="7090630" h="3480712">
                   <a:moveTo>
-                    <a:pt x="0" y="3649639"/>
+                    <a:pt x="2326816" y="0"/>
                   </a:moveTo>
                   <a:lnTo>
+                    <a:pt x="2363543" y="188769"/>
+                  </a:lnTo>
+                  <a:lnTo>
+                    <a:pt x="2435165" y="519903"/>
+                  </a:lnTo>
+                  <a:lnTo>
+                    <a:pt x="2506788" y="817759"/>
+                  </a:lnTo>
+                  <a:lnTo>
+                    <a:pt x="2578410" y="1085681"/>
+                  </a:lnTo>
+                  <a:lnTo>
+                    <a:pt x="2650033" y="1326678"/>
+                  </a:lnTo>
+                  <a:lnTo>
+                    <a:pt x="2721655" y="1543456"/>
+                  </a:lnTo>
+                  <a:lnTo>
+                    <a:pt x="2793278" y="1738448"/>
+                  </a:lnTo>
+                  <a:lnTo>
+                    <a:pt x="2864901" y="1913844"/>
+                  </a:lnTo>
+                  <a:lnTo>
+                    <a:pt x="2936523" y="2071614"/>
+                  </a:lnTo>
+                  <a:lnTo>
+                    <a:pt x="3008146" y="2213528"/>
+                  </a:lnTo>
+                  <a:lnTo>
+                    <a:pt x="3079768" y="2341181"/>
+                  </a:lnTo>
+                  <a:lnTo>
+                    <a:pt x="3151391" y="2456004"/>
+                  </a:lnTo>
+                  <a:lnTo>
+                    <a:pt x="3223013" y="2559289"/>
+                  </a:lnTo>
+                  <a:lnTo>
+                    <a:pt x="3294636" y="2652194"/>
+                  </a:lnTo>
+                  <a:lnTo>
+                    <a:pt x="3366258" y="2661893"/>
+                  </a:lnTo>
+                  <a:lnTo>
+                    <a:pt x="3437881" y="2669616"/>
+                  </a:lnTo>
+                  <a:lnTo>
+                    <a:pt x="3509503" y="2677266"/>
+                  </a:lnTo>
+                  <a:lnTo>
+                    <a:pt x="3581126" y="2684845"/>
+                  </a:lnTo>
+                  <a:lnTo>
+                    <a:pt x="3652748" y="2692352"/>
+                  </a:lnTo>
+                  <a:lnTo>
+                    <a:pt x="3724371" y="2699789"/>
+                  </a:lnTo>
+                  <a:lnTo>
+                    <a:pt x="3795993" y="2707155"/>
+                  </a:lnTo>
+                  <a:lnTo>
+                    <a:pt x="3867616" y="2714453"/>
+                  </a:lnTo>
+                  <a:lnTo>
+                    <a:pt x="3939238" y="2721682"/>
+                  </a:lnTo>
+                  <a:lnTo>
+                    <a:pt x="4010861" y="2728843"/>
+                  </a:lnTo>
+                  <a:lnTo>
+                    <a:pt x="4082483" y="2735937"/>
+                  </a:lnTo>
+                  <a:lnTo>
+                    <a:pt x="4154106" y="2742964"/>
+                  </a:lnTo>
+                  <a:lnTo>
+                    <a:pt x="4225729" y="2749925"/>
+                  </a:lnTo>
+                  <a:lnTo>
+                    <a:pt x="4297351" y="2756821"/>
+                  </a:lnTo>
+                  <a:lnTo>
+                    <a:pt x="4368974" y="2763651"/>
+                  </a:lnTo>
+                  <a:lnTo>
+                    <a:pt x="4440596" y="2770418"/>
+                  </a:lnTo>
+                  <a:lnTo>
+                    <a:pt x="4512219" y="2777121"/>
+                  </a:lnTo>
+                  <a:lnTo>
+                    <a:pt x="4583841" y="2783761"/>
+                  </a:lnTo>
+                  <a:lnTo>
+                    <a:pt x="4655464" y="2790339"/>
+                  </a:lnTo>
+                  <a:lnTo>
+                    <a:pt x="4727086" y="2796855"/>
+                  </a:lnTo>
+                  <a:lnTo>
+                    <a:pt x="4798709" y="2803310"/>
+                  </a:lnTo>
+                  <a:lnTo>
+                    <a:pt x="4870331" y="2809704"/>
+                  </a:lnTo>
+                  <a:lnTo>
+                    <a:pt x="4941954" y="2816037"/>
+                  </a:lnTo>
+                  <a:lnTo>
+                    <a:pt x="5013576" y="2822312"/>
+                  </a:lnTo>
+                  <a:lnTo>
+                    <a:pt x="5085199" y="2828527"/>
+                  </a:lnTo>
+                  <a:lnTo>
+                    <a:pt x="5156821" y="2834684"/>
+                  </a:lnTo>
+                  <a:lnTo>
+                    <a:pt x="5228444" y="2840784"/>
+                  </a:lnTo>
+                  <a:lnTo>
+                    <a:pt x="5300066" y="2846825"/>
+                  </a:lnTo>
+                  <a:lnTo>
+                    <a:pt x="5371689" y="2852810"/>
+                  </a:lnTo>
+                  <a:lnTo>
+                    <a:pt x="5443311" y="2858739"/>
+                  </a:lnTo>
+                  <a:lnTo>
+                    <a:pt x="5514934" y="2864612"/>
+                  </a:lnTo>
+                  <a:lnTo>
+                    <a:pt x="5586557" y="2870430"/>
+                  </a:lnTo>
+                  <a:lnTo>
+                    <a:pt x="5658179" y="2876194"/>
+                  </a:lnTo>
+                  <a:lnTo>
+                    <a:pt x="5729802" y="2881903"/>
+                  </a:lnTo>
+                  <a:lnTo>
+                    <a:pt x="5801424" y="2887558"/>
+                  </a:lnTo>
+                  <a:lnTo>
+                    <a:pt x="5873047" y="2893161"/>
+                  </a:lnTo>
+                  <a:lnTo>
+                    <a:pt x="5944669" y="2898710"/>
+                  </a:lnTo>
+                  <a:lnTo>
+                    <a:pt x="6016292" y="2904208"/>
+                  </a:lnTo>
+                  <a:lnTo>
+                    <a:pt x="6087914" y="2909654"/>
+                  </a:lnTo>
+                  <a:lnTo>
+                    <a:pt x="6159537" y="2915048"/>
+                  </a:lnTo>
+                  <a:lnTo>
+                    <a:pt x="6231159" y="2920392"/>
+                  </a:lnTo>
+                  <a:lnTo>
+                    <a:pt x="6302782" y="2925686"/>
+                  </a:lnTo>
+                  <a:lnTo>
+                    <a:pt x="6374404" y="2930930"/>
+                  </a:lnTo>
+                  <a:lnTo>
+                    <a:pt x="6446027" y="2936125"/>
+                  </a:lnTo>
+                  <a:lnTo>
+                    <a:pt x="6517649" y="2941271"/>
+                  </a:lnTo>
+                  <a:lnTo>
+                    <a:pt x="6589272" y="2946369"/>
+                  </a:lnTo>
+                  <a:lnTo>
+                    <a:pt x="6660894" y="2951418"/>
+                  </a:lnTo>
+                  <a:lnTo>
+                    <a:pt x="6732517" y="2956421"/>
+                  </a:lnTo>
+                  <a:lnTo>
+                    <a:pt x="6804139" y="2961376"/>
+                  </a:lnTo>
+                  <a:lnTo>
+                    <a:pt x="6875762" y="2966284"/>
+                  </a:lnTo>
+                  <a:lnTo>
+                    <a:pt x="6947385" y="2971147"/>
+                  </a:lnTo>
+                  <a:lnTo>
+                    <a:pt x="7019007" y="2975964"/>
+                  </a:lnTo>
+                  <a:lnTo>
+                    <a:pt x="7090630" y="2980735"/>
+                  </a:lnTo>
+                  <a:lnTo>
+                    <a:pt x="7090630" y="3480712"/>
+                  </a:lnTo>
+                  <a:lnTo>
+                    <a:pt x="7019007" y="3480373"/>
+                  </a:lnTo>
+                  <a:lnTo>
+                    <a:pt x="6947385" y="3479996"/>
+                  </a:lnTo>
+                  <a:lnTo>
+                    <a:pt x="6875762" y="3479577"/>
+                  </a:lnTo>
+                  <a:lnTo>
+                    <a:pt x="6804139" y="3479112"/>
+                  </a:lnTo>
+                  <a:lnTo>
+                    <a:pt x="6732517" y="3478594"/>
+                  </a:lnTo>
+                  <a:lnTo>
+                    <a:pt x="6660894" y="3478018"/>
+                  </a:lnTo>
+                  <a:lnTo>
+                    <a:pt x="6589272" y="3477378"/>
+                  </a:lnTo>
+                  <a:lnTo>
+                    <a:pt x="6517649" y="3476667"/>
+                  </a:lnTo>
+                  <a:lnTo>
+                    <a:pt x="6446027" y="3475876"/>
+                  </a:lnTo>
+                  <a:lnTo>
+                    <a:pt x="6374404" y="3474996"/>
+                  </a:lnTo>
+                  <a:lnTo>
+                    <a:pt x="6302782" y="3474019"/>
+                  </a:lnTo>
+                  <a:lnTo>
+                    <a:pt x="6231159" y="3472932"/>
+                  </a:lnTo>
+                  <a:lnTo>
+                    <a:pt x="6159537" y="3471724"/>
+                  </a:lnTo>
+                  <a:lnTo>
+                    <a:pt x="6087914" y="3470380"/>
+                  </a:lnTo>
+                  <a:lnTo>
+                    <a:pt x="6016292" y="3468887"/>
+                  </a:lnTo>
+                  <a:lnTo>
+                    <a:pt x="5944669" y="3467227"/>
+                  </a:lnTo>
+                  <a:lnTo>
+                    <a:pt x="5873047" y="3465381"/>
+                  </a:lnTo>
+                  <a:lnTo>
+                    <a:pt x="5801424" y="3463329"/>
+                  </a:lnTo>
+                  <a:lnTo>
+                    <a:pt x="5729802" y="3461048"/>
+                  </a:lnTo>
+                  <a:lnTo>
+                    <a:pt x="5658179" y="3458512"/>
+                  </a:lnTo>
+                  <a:lnTo>
+                    <a:pt x="5586557" y="3455693"/>
+                  </a:lnTo>
+                  <a:lnTo>
+                    <a:pt x="5514934" y="3452559"/>
+                  </a:lnTo>
+                  <a:lnTo>
+                    <a:pt x="5443311" y="3449075"/>
+                  </a:lnTo>
+                  <a:lnTo>
+                    <a:pt x="5371689" y="3445201"/>
+                  </a:lnTo>
+                  <a:lnTo>
+                    <a:pt x="5300066" y="3440894"/>
+                  </a:lnTo>
+                  <a:lnTo>
+                    <a:pt x="5228444" y="3436107"/>
+                  </a:lnTo>
+                  <a:lnTo>
+                    <a:pt x="5156821" y="3430784"/>
+                  </a:lnTo>
+                  <a:lnTo>
+                    <a:pt x="5085199" y="3424867"/>
+                  </a:lnTo>
+                  <a:lnTo>
+                    <a:pt x="5013576" y="3418289"/>
+                  </a:lnTo>
+                  <a:lnTo>
+                    <a:pt x="4941954" y="3410976"/>
+                  </a:lnTo>
+                  <a:lnTo>
+                    <a:pt x="4870331" y="3402846"/>
+                  </a:lnTo>
+                  <a:lnTo>
+                    <a:pt x="4798709" y="3393807"/>
+                  </a:lnTo>
+                  <a:lnTo>
+                    <a:pt x="4727086" y="3383759"/>
+                  </a:lnTo>
+                  <a:lnTo>
+                    <a:pt x="4655464" y="3372587"/>
+                  </a:lnTo>
+                  <a:lnTo>
+                    <a:pt x="4583841" y="3360168"/>
+                  </a:lnTo>
+                  <a:lnTo>
+                    <a:pt x="4512219" y="3346362"/>
+                  </a:lnTo>
+                  <a:lnTo>
+                    <a:pt x="4440596" y="3331012"/>
+                  </a:lnTo>
+                  <a:lnTo>
+                    <a:pt x="4368974" y="3313948"/>
+                  </a:lnTo>
+                  <a:lnTo>
+                    <a:pt x="4297351" y="3294978"/>
+                  </a:lnTo>
+                  <a:lnTo>
+                    <a:pt x="4225729" y="3273888"/>
+                  </a:lnTo>
+                  <a:lnTo>
+                    <a:pt x="4154106" y="3250441"/>
+                  </a:lnTo>
+                  <a:lnTo>
+                    <a:pt x="4082483" y="3224375"/>
+                  </a:lnTo>
+                  <a:lnTo>
+                    <a:pt x="4010861" y="3195397"/>
+                  </a:lnTo>
+                  <a:lnTo>
+                    <a:pt x="3939238" y="3163182"/>
+                  </a:lnTo>
+                  <a:lnTo>
+                    <a:pt x="3867616" y="3127367"/>
+                  </a:lnTo>
+                  <a:lnTo>
+                    <a:pt x="3795993" y="3087550"/>
+                  </a:lnTo>
+                  <a:lnTo>
+                    <a:pt x="3724371" y="3043286"/>
+                  </a:lnTo>
+                  <a:lnTo>
+                    <a:pt x="3652748" y="2994076"/>
+                  </a:lnTo>
+                  <a:lnTo>
+                    <a:pt x="3581126" y="2939367"/>
+                  </a:lnTo>
+                  <a:lnTo>
+                    <a:pt x="3509503" y="2878547"/>
+                  </a:lnTo>
+                  <a:lnTo>
+                    <a:pt x="3437881" y="2810932"/>
+                  </a:lnTo>
+                  <a:lnTo>
+                    <a:pt x="3366258" y="2735762"/>
+                  </a:lnTo>
+                  <a:lnTo>
+                    <a:pt x="3294636" y="2654097"/>
+                  </a:lnTo>
+                  <a:lnTo>
+                    <a:pt x="3223013" y="2646227"/>
+                  </a:lnTo>
+                  <a:lnTo>
+                    <a:pt x="3151391" y="2638282"/>
+                  </a:lnTo>
+                  <a:lnTo>
+                    <a:pt x="3079768" y="2630262"/>
+                  </a:lnTo>
+                  <a:lnTo>
+                    <a:pt x="3008146" y="2622166"/>
+                  </a:lnTo>
+                  <a:lnTo>
+                    <a:pt x="2936523" y="2613993"/>
+                  </a:lnTo>
+                  <a:lnTo>
+                    <a:pt x="2864901" y="2605742"/>
+                  </a:lnTo>
+                  <a:lnTo>
+                    <a:pt x="2793278" y="2597413"/>
+                  </a:lnTo>
+                  <a:lnTo>
+                    <a:pt x="2721655" y="2589005"/>
+                  </a:lnTo>
+                  <a:lnTo>
+                    <a:pt x="2650033" y="2580518"/>
+                  </a:lnTo>
+                  <a:lnTo>
+                    <a:pt x="2578410" y="2571950"/>
+                  </a:lnTo>
+                  <a:lnTo>
+                    <a:pt x="2506788" y="2563300"/>
+                  </a:lnTo>
+                  <a:lnTo>
+                    <a:pt x="2435165" y="2554569"/>
+                  </a:lnTo>
+                  <a:lnTo>
+                    <a:pt x="2363543" y="2545755"/>
+                  </a:lnTo>
+                  <a:lnTo>
+                    <a:pt x="2291920" y="2536857"/>
+                  </a:lnTo>
+                  <a:lnTo>
+                    <a:pt x="2220298" y="2527875"/>
+                  </a:lnTo>
+                  <a:lnTo>
+                    <a:pt x="2148675" y="2518807"/>
+                  </a:lnTo>
+                  <a:lnTo>
+                    <a:pt x="2077053" y="2509654"/>
+                  </a:lnTo>
+                  <a:lnTo>
+                    <a:pt x="2005430" y="2500414"/>
+                  </a:lnTo>
+                  <a:lnTo>
+                    <a:pt x="1933808" y="2491086"/>
+                  </a:lnTo>
+                  <a:lnTo>
+                    <a:pt x="1862185" y="2481669"/>
+                  </a:lnTo>
+                  <a:lnTo>
+                    <a:pt x="1790563" y="2472163"/>
+                  </a:lnTo>
+                  <a:lnTo>
+                    <a:pt x="1718940" y="2462567"/>
+                  </a:lnTo>
+                  <a:lnTo>
+                    <a:pt x="1647318" y="2452880"/>
+                  </a:lnTo>
+                  <a:lnTo>
+                    <a:pt x="1575695" y="2443102"/>
+                  </a:lnTo>
+                  <a:lnTo>
+                    <a:pt x="1504073" y="2433230"/>
+                  </a:lnTo>
+                  <a:lnTo>
+                    <a:pt x="1432450" y="2423265"/>
+                  </a:lnTo>
+                  <a:lnTo>
+                    <a:pt x="1360827" y="2413205"/>
+                  </a:lnTo>
+                  <a:lnTo>
+                    <a:pt x="1289205" y="2403050"/>
+                  </a:lnTo>
+                  <a:lnTo>
+                    <a:pt x="1217582" y="2392798"/>
+                  </a:lnTo>
+                  <a:lnTo>
+                    <a:pt x="1145960" y="2382449"/>
+                  </a:lnTo>
+                  <a:lnTo>
+                    <a:pt x="1074337" y="2372002"/>
+                  </a:lnTo>
+                  <a:lnTo>
+                    <a:pt x="1002715" y="2361456"/>
+                  </a:lnTo>
+                  <a:lnTo>
+                    <a:pt x="931092" y="2350810"/>
+                  </a:lnTo>
+                  <a:lnTo>
+                    <a:pt x="859470" y="2340063"/>
+                  </a:lnTo>
+                  <a:lnTo>
+                    <a:pt x="787847" y="2329214"/>
+                  </a:lnTo>
+                  <a:lnTo>
+                    <a:pt x="716225" y="2318262"/>
+                  </a:lnTo>
+                  <a:lnTo>
+                    <a:pt x="644602" y="2307206"/>
+                  </a:lnTo>
+                  <a:lnTo>
+                    <a:pt x="572980" y="2296046"/>
+                  </a:lnTo>
+                  <a:lnTo>
+                    <a:pt x="501357" y="2284779"/>
+                  </a:lnTo>
+                  <a:lnTo>
+                    <a:pt x="429735" y="2273405"/>
+                  </a:lnTo>
+                  <a:lnTo>
+                    <a:pt x="358112" y="2261924"/>
+                  </a:lnTo>
+                  <a:lnTo>
+                    <a:pt x="286490" y="2250334"/>
+                  </a:lnTo>
+                  <a:lnTo>
+                    <a:pt x="214867" y="2238634"/>
+                  </a:lnTo>
+                  <a:lnTo>
+                    <a:pt x="143245" y="2226822"/>
+                  </a:lnTo>
+                  <a:lnTo>
+                    <a:pt x="71622" y="2214899"/>
+                  </a:lnTo>
+                  <a:lnTo>
+                    <a:pt x="0" y="2202863"/>
+                  </a:lnTo>
+                  <a:lnTo>
                     <a:pt x="0" y="0"/>
-                  </a:lnTo>
-                  <a:lnTo>
-                    <a:pt x="0" y="0"/>
-                  </a:lnTo>
-                </a:path>
-              </a:pathLst>
-            </a:custGeom>
-            <a:ln w="13550" cap="flat">
-              <a:solidFill>
-                <a:srgbClr val="EBEBEB">
-                  <a:alpha val="100000"/>
-                </a:srgbClr>
-              </a:solidFill>
-              <a:prstDash val="solid"/>
-              <a:round/>
-            </a:ln>
-          </p:spPr>
-          <p:txBody>
-            <a:bodyPr/>
-            <a:lstStyle/>
-            <a:p/>
-          </p:txBody>
-        </p:sp>
-        <p:sp>
-          <p:nvSpPr>
-            <p:cNvPr id="21" name="pg21"/>
-            <p:cNvSpPr/>
-            <p:nvPr/>
-          </p:nvSpPr>
-          <p:spPr>
-            <a:xfrm>
-              <a:off x="817517" y="2073503"/>
-              <a:ext cx="7392041" cy="3480712"/>
-            </a:xfrm>
-            <a:custGeom>
-              <a:avLst/>
-              <a:pathLst>
-                <a:path w="7392041" h="3480712">
-                  <a:moveTo>
-                    <a:pt x="2254356" y="0"/>
-                  </a:moveTo>
-                  <a:lnTo>
-                    <a:pt x="2293965" y="188769"/>
-                  </a:lnTo>
-                  <a:lnTo>
-                    <a:pt x="2371209" y="519903"/>
-                  </a:lnTo>
-                  <a:lnTo>
-                    <a:pt x="2448452" y="817759"/>
-                  </a:lnTo>
-                  <a:lnTo>
-                    <a:pt x="2525696" y="1085681"/>
-                  </a:lnTo>
-                  <a:lnTo>
-                    <a:pt x="2602939" y="1326678"/>
-                  </a:lnTo>
-                  <a:lnTo>
-                    <a:pt x="2680183" y="1543456"/>
-                  </a:lnTo>
-                  <a:lnTo>
-                    <a:pt x="2757426" y="1738448"/>
-                  </a:lnTo>
-                  <a:lnTo>
-                    <a:pt x="2834670" y="1913844"/>
-                  </a:lnTo>
-                  <a:lnTo>
-                    <a:pt x="2911914" y="2071614"/>
-                  </a:lnTo>
-                  <a:lnTo>
-                    <a:pt x="2989157" y="2213528"/>
-                  </a:lnTo>
-                  <a:lnTo>
-                    <a:pt x="3066401" y="2341181"/>
-                  </a:lnTo>
-                  <a:lnTo>
-                    <a:pt x="3143644" y="2456004"/>
-                  </a:lnTo>
-                  <a:lnTo>
-                    <a:pt x="3220888" y="2559289"/>
-                  </a:lnTo>
-                  <a:lnTo>
-                    <a:pt x="3298131" y="2652194"/>
-                  </a:lnTo>
-                  <a:lnTo>
-                    <a:pt x="3375375" y="2661893"/>
-                  </a:lnTo>
-                  <a:lnTo>
-                    <a:pt x="3452619" y="2669616"/>
-                  </a:lnTo>
-                  <a:lnTo>
-                    <a:pt x="3529862" y="2677266"/>
-                  </a:lnTo>
-                  <a:lnTo>
-                    <a:pt x="3607106" y="2684845"/>
-                  </a:lnTo>
-                  <a:lnTo>
-                    <a:pt x="3684349" y="2692352"/>
-                  </a:lnTo>
-                  <a:lnTo>
-                    <a:pt x="3761593" y="2699789"/>
-                  </a:lnTo>
-                  <a:lnTo>
-                    <a:pt x="3838836" y="2707155"/>
-                  </a:lnTo>
-                  <a:lnTo>
-                    <a:pt x="3916080" y="2714453"/>
-                  </a:lnTo>
-                  <a:lnTo>
-                    <a:pt x="3993324" y="2721682"/>
-                  </a:lnTo>
-                  <a:lnTo>
-                    <a:pt x="4070567" y="2728843"/>
-                  </a:lnTo>
-                  <a:lnTo>
-                    <a:pt x="4147811" y="2735937"/>
-                  </a:lnTo>
-                  <a:lnTo>
-                    <a:pt x="4225054" y="2742964"/>
-                  </a:lnTo>
-                  <a:lnTo>
-                    <a:pt x="4302298" y="2749925"/>
-                  </a:lnTo>
-                  <a:lnTo>
-                    <a:pt x="4379541" y="2756821"/>
-                  </a:lnTo>
-                  <a:lnTo>
-                    <a:pt x="4456785" y="2763651"/>
-                  </a:lnTo>
-                  <a:lnTo>
-                    <a:pt x="4534029" y="2770418"/>
-                  </a:lnTo>
-                  <a:lnTo>
-                    <a:pt x="4611272" y="2777121"/>
-                  </a:lnTo>
-                  <a:lnTo>
-                    <a:pt x="4688516" y="2783761"/>
-                  </a:lnTo>
-                  <a:lnTo>
-                    <a:pt x="4765759" y="2790339"/>
-                  </a:lnTo>
-                  <a:lnTo>
-                    <a:pt x="4843003" y="2796855"/>
-                  </a:lnTo>
-                  <a:lnTo>
-                    <a:pt x="4920246" y="2803310"/>
-                  </a:lnTo>
-                  <a:lnTo>
-                    <a:pt x="4997490" y="2809704"/>
-                  </a:lnTo>
-                  <a:lnTo>
-                    <a:pt x="5074734" y="2816037"/>
-                  </a:lnTo>
-                  <a:lnTo>
-                    <a:pt x="5151977" y="2822312"/>
-                  </a:lnTo>
-                  <a:lnTo>
-                    <a:pt x="5229221" y="2828527"/>
-                  </a:lnTo>
-                  <a:lnTo>
-                    <a:pt x="5306464" y="2834684"/>
-                  </a:lnTo>
-                  <a:lnTo>
-                    <a:pt x="5383708" y="2840784"/>
-                  </a:lnTo>
-                  <a:lnTo>
-                    <a:pt x="5460951" y="2846825"/>
-                  </a:lnTo>
-                  <a:lnTo>
-                    <a:pt x="5538195" y="2852810"/>
-                  </a:lnTo>
-                  <a:lnTo>
-                    <a:pt x="5615439" y="2858739"/>
-                  </a:lnTo>
-                  <a:lnTo>
-                    <a:pt x="5692682" y="2864612"/>
-                  </a:lnTo>
-                  <a:lnTo>
-                    <a:pt x="5769926" y="2870430"/>
-                  </a:lnTo>
-                  <a:lnTo>
-                    <a:pt x="5847169" y="2876194"/>
-                  </a:lnTo>
-                  <a:lnTo>
-                    <a:pt x="5924413" y="2881903"/>
-                  </a:lnTo>
-                  <a:lnTo>
-                    <a:pt x="6001656" y="2887558"/>
-                  </a:lnTo>
-                  <a:lnTo>
-                    <a:pt x="6078900" y="2893161"/>
-                  </a:lnTo>
-                  <a:lnTo>
-                    <a:pt x="6156144" y="2898710"/>
-                  </a:lnTo>
-                  <a:lnTo>
-                    <a:pt x="6233387" y="2904208"/>
-                  </a:lnTo>
-                  <a:lnTo>
-                    <a:pt x="6310631" y="2909654"/>
-                  </a:lnTo>
-                  <a:lnTo>
-                    <a:pt x="6387874" y="2915048"/>
-                  </a:lnTo>
-                  <a:lnTo>
-                    <a:pt x="6465118" y="2920392"/>
-                  </a:lnTo>
-                  <a:lnTo>
-                    <a:pt x="6542361" y="2925686"/>
-                  </a:lnTo>
-                  <a:lnTo>
-                    <a:pt x="6619605" y="2930930"/>
-                  </a:lnTo>
-                  <a:lnTo>
-                    <a:pt x="6696849" y="2936125"/>
-                  </a:lnTo>
-                  <a:lnTo>
-                    <a:pt x="6774092" y="2941271"/>
-                  </a:lnTo>
-                  <a:lnTo>
-                    <a:pt x="6851336" y="2946369"/>
-                  </a:lnTo>
-                  <a:lnTo>
-                    <a:pt x="6928579" y="2951418"/>
-                  </a:lnTo>
-                  <a:lnTo>
-                    <a:pt x="7005823" y="2956421"/>
-                  </a:lnTo>
-                  <a:lnTo>
-                    <a:pt x="7083066" y="2961376"/>
-                  </a:lnTo>
-                  <a:lnTo>
-                    <a:pt x="7160310" y="2966284"/>
-                  </a:lnTo>
-                  <a:lnTo>
-                    <a:pt x="7237554" y="2971147"/>
-                  </a:lnTo>
-                  <a:lnTo>
-                    <a:pt x="7314797" y="2975964"/>
-                  </a:lnTo>
-                  <a:lnTo>
-                    <a:pt x="7392041" y="2980735"/>
-                  </a:lnTo>
-                  <a:lnTo>
-                    <a:pt x="7392041" y="3480712"/>
-                  </a:lnTo>
-                  <a:lnTo>
-                    <a:pt x="7314797" y="3480373"/>
-                  </a:lnTo>
-                  <a:lnTo>
-                    <a:pt x="7237554" y="3479996"/>
-                  </a:lnTo>
-                  <a:lnTo>
-                    <a:pt x="7160310" y="3479577"/>
-                  </a:lnTo>
-                  <a:lnTo>
-                    <a:pt x="7083066" y="3479112"/>
-                  </a:lnTo>
-                  <a:lnTo>
-                    <a:pt x="7005823" y="3478594"/>
-                  </a:lnTo>
-                  <a:lnTo>
-                    <a:pt x="6928579" y="3478018"/>
-                  </a:lnTo>
-                  <a:lnTo>
-                    <a:pt x="6851336" y="3477378"/>
-                  </a:lnTo>
-                  <a:lnTo>
-                    <a:pt x="6774092" y="3476667"/>
-                  </a:lnTo>
-                  <a:lnTo>
-                    <a:pt x="6696849" y="3475876"/>
-                  </a:lnTo>
-                  <a:lnTo>
-                    <a:pt x="6619605" y="3474996"/>
-                  </a:lnTo>
-                  <a:lnTo>
-                    <a:pt x="6542361" y="3474019"/>
-                  </a:lnTo>
-                  <a:lnTo>
-                    <a:pt x="6465118" y="3472932"/>
-                  </a:lnTo>
-                  <a:lnTo>
-                    <a:pt x="6387874" y="3471724"/>
-                  </a:lnTo>
-                  <a:lnTo>
-                    <a:pt x="6310631" y="3470380"/>
-                  </a:lnTo>
-                  <a:lnTo>
-                    <a:pt x="6233387" y="3468887"/>
-                  </a:lnTo>
-                  <a:lnTo>
-                    <a:pt x="6156144" y="3467227"/>
-                  </a:lnTo>
-                  <a:lnTo>
-                    <a:pt x="6078900" y="3465381"/>
-                  </a:lnTo>
-                  <a:lnTo>
-                    <a:pt x="6001656" y="3463329"/>
-                  </a:lnTo>
-                  <a:lnTo>
-                    <a:pt x="5924413" y="3461048"/>
-                  </a:lnTo>
-                  <a:lnTo>
-                    <a:pt x="5847169" y="3458512"/>
-                  </a:lnTo>
-                  <a:lnTo>
-                    <a:pt x="5769926" y="3455693"/>
-                  </a:lnTo>
-                  <a:lnTo>
-                    <a:pt x="5692682" y="3452559"/>
-                  </a:lnTo>
-                  <a:lnTo>
-                    <a:pt x="5615439" y="3449075"/>
-                  </a:lnTo>
-                  <a:lnTo>
-                    <a:pt x="5538195" y="3445201"/>
-                  </a:lnTo>
-                  <a:lnTo>
-                    <a:pt x="5460951" y="3440894"/>
-                  </a:lnTo>
-                  <a:lnTo>
-                    <a:pt x="5383708" y="3436107"/>
-                  </a:lnTo>
-                  <a:lnTo>
-                    <a:pt x="5306464" y="3430784"/>
-                  </a:lnTo>
-                  <a:lnTo>
-                    <a:pt x="5229221" y="3424867"/>
-                  </a:lnTo>
-                  <a:lnTo>
-                    <a:pt x="5151977" y="3418289"/>
-                  </a:lnTo>
-                  <a:lnTo>
-                    <a:pt x="5074734" y="3410976"/>
-                  </a:lnTo>
-                  <a:lnTo>
-                    <a:pt x="4997490" y="3402846"/>
-                  </a:lnTo>
-                  <a:lnTo>
-                    <a:pt x="4920246" y="3393807"/>
-                  </a:lnTo>
-                  <a:lnTo>
-                    <a:pt x="4843003" y="3383759"/>
-                  </a:lnTo>
-                  <a:lnTo>
-                    <a:pt x="4765759" y="3372587"/>
-                  </a:lnTo>
-                  <a:lnTo>
-                    <a:pt x="4688516" y="3360168"/>
-                  </a:lnTo>
-                  <a:lnTo>
-                    <a:pt x="4611272" y="3346362"/>
-                  </a:lnTo>
-                  <a:lnTo>
-                    <a:pt x="4534029" y="3331012"/>
-                  </a:lnTo>
-                  <a:lnTo>
-                    <a:pt x="4456785" y="3313948"/>
-                  </a:lnTo>
-                  <a:lnTo>
-                    <a:pt x="4379541" y="3294978"/>
-                  </a:lnTo>
-                  <a:lnTo>
-                    <a:pt x="4302298" y="3273888"/>
-                  </a:lnTo>
-                  <a:lnTo>
-                    <a:pt x="4225054" y="3250441"/>
-                  </a:lnTo>
-                  <a:lnTo>
-                    <a:pt x="4147811" y="3224375"/>
-                  </a:lnTo>
-                  <a:lnTo>
-                    <a:pt x="4070567" y="3195397"/>
-                  </a:lnTo>
-                  <a:lnTo>
-                    <a:pt x="3993324" y="3163182"/>
-                  </a:lnTo>
-                  <a:lnTo>
-                    <a:pt x="3916080" y="3127367"/>
-                  </a:lnTo>
-                  <a:lnTo>
-                    <a:pt x="3838836" y="3087550"/>
-                  </a:lnTo>
-                  <a:lnTo>
-                    <a:pt x="3761593" y="3043286"/>
-                  </a:lnTo>
-                  <a:lnTo>
-                    <a:pt x="3684349" y="2994076"/>
-                  </a:lnTo>
-                  <a:lnTo>
-                    <a:pt x="3607106" y="2939367"/>
-                  </a:lnTo>
-                  <a:lnTo>
-                    <a:pt x="3529862" y="2878547"/>
-                  </a:lnTo>
-                  <a:lnTo>
-                    <a:pt x="3452619" y="2810932"/>
-                  </a:lnTo>
-                  <a:lnTo>
-                    <a:pt x="3375375" y="2735762"/>
-                  </a:lnTo>
-                  <a:lnTo>
-                    <a:pt x="3298131" y="2654097"/>
-                  </a:lnTo>
-                  <a:lnTo>
-                    <a:pt x="3220888" y="2646227"/>
-                  </a:lnTo>
-                  <a:lnTo>
-                    <a:pt x="3143644" y="2638282"/>
-                  </a:lnTo>
-                  <a:lnTo>
-                    <a:pt x="3066401" y="2630262"/>
-                  </a:lnTo>
-                  <a:lnTo>
-                    <a:pt x="2989157" y="2622166"/>
-                  </a:lnTo>
-                  <a:lnTo>
-                    <a:pt x="2911914" y="2613993"/>
-                  </a:lnTo>
-                  <a:lnTo>
-                    <a:pt x="2834670" y="2605742"/>
-                  </a:lnTo>
-                  <a:lnTo>
-                    <a:pt x="2757426" y="2597413"/>
-                  </a:lnTo>
-                  <a:lnTo>
-                    <a:pt x="2680183" y="2589005"/>
-                  </a:lnTo>
-                  <a:lnTo>
-                    <a:pt x="2602939" y="2580518"/>
-                  </a:lnTo>
-                  <a:lnTo>
-                    <a:pt x="2525696" y="2571950"/>
-                  </a:lnTo>
-                  <a:lnTo>
-                    <a:pt x="2448452" y="2563300"/>
-                  </a:lnTo>
-                  <a:lnTo>
-                    <a:pt x="2371209" y="2554569"/>
-                  </a:lnTo>
-                  <a:lnTo>
-                    <a:pt x="2293965" y="2545755"/>
-                  </a:lnTo>
-                  <a:lnTo>
-                    <a:pt x="2216721" y="2536857"/>
-                  </a:lnTo>
-                  <a:lnTo>
-                    <a:pt x="2139478" y="2527875"/>
-                  </a:lnTo>
-                  <a:lnTo>
-                    <a:pt x="2062234" y="2518807"/>
-                  </a:lnTo>
-                  <a:lnTo>
-                    <a:pt x="1984991" y="2509654"/>
-                  </a:lnTo>
-                  <a:lnTo>
-                    <a:pt x="1907747" y="2500414"/>
-                  </a:lnTo>
-                  <a:lnTo>
-                    <a:pt x="1830504" y="2491086"/>
-                  </a:lnTo>
-                  <a:lnTo>
-                    <a:pt x="1753260" y="2481669"/>
-                  </a:lnTo>
-                  <a:lnTo>
-                    <a:pt x="1676016" y="2472163"/>
-                  </a:lnTo>
-                  <a:lnTo>
-                    <a:pt x="1598773" y="2462567"/>
-                  </a:lnTo>
-                  <a:lnTo>
-                    <a:pt x="1521529" y="2452880"/>
-                  </a:lnTo>
-                  <a:lnTo>
-                    <a:pt x="1444286" y="2443102"/>
-                  </a:lnTo>
-                  <a:lnTo>
-                    <a:pt x="1367042" y="2433230"/>
-                  </a:lnTo>
-                  <a:lnTo>
-                    <a:pt x="1289799" y="2423265"/>
-                  </a:lnTo>
-                  <a:lnTo>
-                    <a:pt x="1212555" y="2413205"/>
-                  </a:lnTo>
-                  <a:lnTo>
-                    <a:pt x="1135311" y="2403050"/>
-                  </a:lnTo>
-                  <a:lnTo>
-                    <a:pt x="1058068" y="2392798"/>
-                  </a:lnTo>
-                  <a:lnTo>
-                    <a:pt x="980824" y="2382449"/>
-                  </a:lnTo>
-                  <a:lnTo>
-                    <a:pt x="903581" y="2372002"/>
-                  </a:lnTo>
-                  <a:lnTo>
-                    <a:pt x="826337" y="2361456"/>
-                  </a:lnTo>
-                  <a:lnTo>
-                    <a:pt x="749094" y="2350810"/>
-                  </a:lnTo>
-                  <a:lnTo>
-                    <a:pt x="671850" y="2340063"/>
-                  </a:lnTo>
-                  <a:lnTo>
-                    <a:pt x="594606" y="2329214"/>
-                  </a:lnTo>
-                  <a:lnTo>
-                    <a:pt x="517363" y="2318262"/>
-                  </a:lnTo>
-                  <a:lnTo>
-                    <a:pt x="440119" y="2307206"/>
-                  </a:lnTo>
-                  <a:lnTo>
-                    <a:pt x="362876" y="2296046"/>
-                  </a:lnTo>
-                  <a:lnTo>
-                    <a:pt x="285632" y="2284779"/>
-                  </a:lnTo>
-                  <a:lnTo>
-                    <a:pt x="208389" y="2273405"/>
-                  </a:lnTo>
-                  <a:lnTo>
-                    <a:pt x="131145" y="2261924"/>
-                  </a:lnTo>
-                  <a:lnTo>
-                    <a:pt x="53901" y="2250334"/>
-                  </a:lnTo>
-                  <a:lnTo>
-                    <a:pt x="0" y="2242169"/>
                   </a:lnTo>
                   <a:close/>
                 </a:path>
@@ -3522,222 +3491,547 @@
         </p:sp>
         <p:sp>
           <p:nvSpPr>
+            <p:cNvPr id="21" name="pl21"/>
+            <p:cNvSpPr/>
+            <p:nvPr/>
+          </p:nvSpPr>
+          <p:spPr>
+            <a:xfrm>
+              <a:off x="3498866" y="2073503"/>
+              <a:ext cx="4763813" cy="2980735"/>
+            </a:xfrm>
+            <a:custGeom>
+              <a:avLst/>
+              <a:pathLst>
+                <a:path w="4763813" h="2980735">
+                  <a:moveTo>
+                    <a:pt x="0" y="0"/>
+                  </a:moveTo>
+                  <a:lnTo>
+                    <a:pt x="36726" y="188769"/>
+                  </a:lnTo>
+                  <a:lnTo>
+                    <a:pt x="108349" y="519903"/>
+                  </a:lnTo>
+                  <a:lnTo>
+                    <a:pt x="179971" y="817759"/>
+                  </a:lnTo>
+                  <a:lnTo>
+                    <a:pt x="251594" y="1085681"/>
+                  </a:lnTo>
+                  <a:lnTo>
+                    <a:pt x="323216" y="1326678"/>
+                  </a:lnTo>
+                  <a:lnTo>
+                    <a:pt x="394839" y="1543456"/>
+                  </a:lnTo>
+                  <a:lnTo>
+                    <a:pt x="466461" y="1738448"/>
+                  </a:lnTo>
+                  <a:lnTo>
+                    <a:pt x="538084" y="1913844"/>
+                  </a:lnTo>
+                  <a:lnTo>
+                    <a:pt x="609706" y="2071614"/>
+                  </a:lnTo>
+                  <a:lnTo>
+                    <a:pt x="681329" y="2213528"/>
+                  </a:lnTo>
+                  <a:lnTo>
+                    <a:pt x="752951" y="2341181"/>
+                  </a:lnTo>
+                  <a:lnTo>
+                    <a:pt x="824574" y="2456004"/>
+                  </a:lnTo>
+                  <a:lnTo>
+                    <a:pt x="896196" y="2559289"/>
+                  </a:lnTo>
+                  <a:lnTo>
+                    <a:pt x="967819" y="2652194"/>
+                  </a:lnTo>
+                  <a:lnTo>
+                    <a:pt x="1039442" y="2661893"/>
+                  </a:lnTo>
+                  <a:lnTo>
+                    <a:pt x="1111064" y="2669616"/>
+                  </a:lnTo>
+                  <a:lnTo>
+                    <a:pt x="1182687" y="2677266"/>
+                  </a:lnTo>
+                  <a:lnTo>
+                    <a:pt x="1254309" y="2684845"/>
+                  </a:lnTo>
+                  <a:lnTo>
+                    <a:pt x="1325932" y="2692352"/>
+                  </a:lnTo>
+                  <a:lnTo>
+                    <a:pt x="1397554" y="2699789"/>
+                  </a:lnTo>
+                  <a:lnTo>
+                    <a:pt x="1469177" y="2707155"/>
+                  </a:lnTo>
+                  <a:lnTo>
+                    <a:pt x="1540799" y="2714453"/>
+                  </a:lnTo>
+                  <a:lnTo>
+                    <a:pt x="1612422" y="2721682"/>
+                  </a:lnTo>
+                  <a:lnTo>
+                    <a:pt x="1684044" y="2728843"/>
+                  </a:lnTo>
+                  <a:lnTo>
+                    <a:pt x="1755667" y="2735937"/>
+                  </a:lnTo>
+                  <a:lnTo>
+                    <a:pt x="1827289" y="2742964"/>
+                  </a:lnTo>
+                  <a:lnTo>
+                    <a:pt x="1898912" y="2749925"/>
+                  </a:lnTo>
+                  <a:lnTo>
+                    <a:pt x="1970534" y="2756821"/>
+                  </a:lnTo>
+                  <a:lnTo>
+                    <a:pt x="2042157" y="2763651"/>
+                  </a:lnTo>
+                  <a:lnTo>
+                    <a:pt x="2113779" y="2770418"/>
+                  </a:lnTo>
+                  <a:lnTo>
+                    <a:pt x="2185402" y="2777121"/>
+                  </a:lnTo>
+                  <a:lnTo>
+                    <a:pt x="2257024" y="2783761"/>
+                  </a:lnTo>
+                  <a:lnTo>
+                    <a:pt x="2328647" y="2790339"/>
+                  </a:lnTo>
+                  <a:lnTo>
+                    <a:pt x="2400270" y="2796855"/>
+                  </a:lnTo>
+                  <a:lnTo>
+                    <a:pt x="2471892" y="2803310"/>
+                  </a:lnTo>
+                  <a:lnTo>
+                    <a:pt x="2543515" y="2809704"/>
+                  </a:lnTo>
+                  <a:lnTo>
+                    <a:pt x="2615137" y="2816037"/>
+                  </a:lnTo>
+                  <a:lnTo>
+                    <a:pt x="2686760" y="2822312"/>
+                  </a:lnTo>
+                  <a:lnTo>
+                    <a:pt x="2758382" y="2828527"/>
+                  </a:lnTo>
+                  <a:lnTo>
+                    <a:pt x="2830005" y="2834684"/>
+                  </a:lnTo>
+                  <a:lnTo>
+                    <a:pt x="2901627" y="2840784"/>
+                  </a:lnTo>
+                  <a:lnTo>
+                    <a:pt x="2973250" y="2846825"/>
+                  </a:lnTo>
+                  <a:lnTo>
+                    <a:pt x="3044872" y="2852810"/>
+                  </a:lnTo>
+                  <a:lnTo>
+                    <a:pt x="3116495" y="2858739"/>
+                  </a:lnTo>
+                  <a:lnTo>
+                    <a:pt x="3188117" y="2864612"/>
+                  </a:lnTo>
+                  <a:lnTo>
+                    <a:pt x="3259740" y="2870430"/>
+                  </a:lnTo>
+                  <a:lnTo>
+                    <a:pt x="3331362" y="2876194"/>
+                  </a:lnTo>
+                  <a:lnTo>
+                    <a:pt x="3402985" y="2881903"/>
+                  </a:lnTo>
+                  <a:lnTo>
+                    <a:pt x="3474607" y="2887558"/>
+                  </a:lnTo>
+                  <a:lnTo>
+                    <a:pt x="3546230" y="2893161"/>
+                  </a:lnTo>
+                  <a:lnTo>
+                    <a:pt x="3617852" y="2898710"/>
+                  </a:lnTo>
+                  <a:lnTo>
+                    <a:pt x="3689475" y="2904208"/>
+                  </a:lnTo>
+                  <a:lnTo>
+                    <a:pt x="3761098" y="2909654"/>
+                  </a:lnTo>
+                  <a:lnTo>
+                    <a:pt x="3832720" y="2915048"/>
+                  </a:lnTo>
+                  <a:lnTo>
+                    <a:pt x="3904343" y="2920392"/>
+                  </a:lnTo>
+                  <a:lnTo>
+                    <a:pt x="3975965" y="2925686"/>
+                  </a:lnTo>
+                  <a:lnTo>
+                    <a:pt x="4047588" y="2930930"/>
+                  </a:lnTo>
+                  <a:lnTo>
+                    <a:pt x="4119210" y="2936125"/>
+                  </a:lnTo>
+                  <a:lnTo>
+                    <a:pt x="4190833" y="2941271"/>
+                  </a:lnTo>
+                  <a:lnTo>
+                    <a:pt x="4262455" y="2946369"/>
+                  </a:lnTo>
+                  <a:lnTo>
+                    <a:pt x="4334078" y="2951418"/>
+                  </a:lnTo>
+                  <a:lnTo>
+                    <a:pt x="4405700" y="2956421"/>
+                  </a:lnTo>
+                  <a:lnTo>
+                    <a:pt x="4477323" y="2961376"/>
+                  </a:lnTo>
+                  <a:lnTo>
+                    <a:pt x="4548945" y="2966284"/>
+                  </a:lnTo>
+                  <a:lnTo>
+                    <a:pt x="4620568" y="2971147"/>
+                  </a:lnTo>
+                  <a:lnTo>
+                    <a:pt x="4692190" y="2975964"/>
+                  </a:lnTo>
+                  <a:lnTo>
+                    <a:pt x="4763813" y="2980735"/>
+                  </a:lnTo>
+                </a:path>
+              </a:pathLst>
+            </a:custGeom>
+          </p:spPr>
+          <p:txBody>
+            <a:bodyPr/>
+            <a:lstStyle/>
+            <a:p/>
+          </p:txBody>
+        </p:sp>
+        <p:sp>
+          <p:nvSpPr>
             <p:cNvPr id="22" name="pl22"/>
             <p:cNvSpPr/>
             <p:nvPr/>
           </p:nvSpPr>
           <p:spPr>
             <a:xfrm>
-              <a:off x="3071874" y="2073503"/>
-              <a:ext cx="5137684" cy="2980735"/>
+              <a:off x="1172049" y="4276366"/>
+              <a:ext cx="7090630" cy="1277849"/>
             </a:xfrm>
             <a:custGeom>
               <a:avLst/>
               <a:pathLst>
-                <a:path w="5137684" h="2980735">
+                <a:path w="7090630" h="1277849">
                   <a:moveTo>
+                    <a:pt x="7090630" y="1277849"/>
+                  </a:moveTo>
+                  <a:lnTo>
+                    <a:pt x="7019007" y="1277510"/>
+                  </a:lnTo>
+                  <a:lnTo>
+                    <a:pt x="6947385" y="1277133"/>
+                  </a:lnTo>
+                  <a:lnTo>
+                    <a:pt x="6875762" y="1276714"/>
+                  </a:lnTo>
+                  <a:lnTo>
+                    <a:pt x="6804139" y="1276248"/>
+                  </a:lnTo>
+                  <a:lnTo>
+                    <a:pt x="6732517" y="1275731"/>
+                  </a:lnTo>
+                  <a:lnTo>
+                    <a:pt x="6660894" y="1275155"/>
+                  </a:lnTo>
+                  <a:lnTo>
+                    <a:pt x="6589272" y="1274515"/>
+                  </a:lnTo>
+                  <a:lnTo>
+                    <a:pt x="6517649" y="1273803"/>
+                  </a:lnTo>
+                  <a:lnTo>
+                    <a:pt x="6446027" y="1273012"/>
+                  </a:lnTo>
+                  <a:lnTo>
+                    <a:pt x="6374404" y="1272133"/>
+                  </a:lnTo>
+                  <a:lnTo>
+                    <a:pt x="6302782" y="1271155"/>
+                  </a:lnTo>
+                  <a:lnTo>
+                    <a:pt x="6231159" y="1270069"/>
+                  </a:lnTo>
+                  <a:lnTo>
+                    <a:pt x="6159537" y="1268860"/>
+                  </a:lnTo>
+                  <a:lnTo>
+                    <a:pt x="6087914" y="1267517"/>
+                  </a:lnTo>
+                  <a:lnTo>
+                    <a:pt x="6016292" y="1266024"/>
+                  </a:lnTo>
+                  <a:lnTo>
+                    <a:pt x="5944669" y="1264364"/>
+                  </a:lnTo>
+                  <a:lnTo>
+                    <a:pt x="5873047" y="1262518"/>
+                  </a:lnTo>
+                  <a:lnTo>
+                    <a:pt x="5801424" y="1260466"/>
+                  </a:lnTo>
+                  <a:lnTo>
+                    <a:pt x="5729802" y="1258185"/>
+                  </a:lnTo>
+                  <a:lnTo>
+                    <a:pt x="5658179" y="1255649"/>
+                  </a:lnTo>
+                  <a:lnTo>
+                    <a:pt x="5586557" y="1252830"/>
+                  </a:lnTo>
+                  <a:lnTo>
+                    <a:pt x="5514934" y="1249696"/>
+                  </a:lnTo>
+                  <a:lnTo>
+                    <a:pt x="5443311" y="1246211"/>
+                  </a:lnTo>
+                  <a:lnTo>
+                    <a:pt x="5371689" y="1242338"/>
+                  </a:lnTo>
+                  <a:lnTo>
+                    <a:pt x="5300066" y="1238031"/>
+                  </a:lnTo>
+                  <a:lnTo>
+                    <a:pt x="5228444" y="1233244"/>
+                  </a:lnTo>
+                  <a:lnTo>
+                    <a:pt x="5156821" y="1227921"/>
+                  </a:lnTo>
+                  <a:lnTo>
+                    <a:pt x="5085199" y="1222004"/>
+                  </a:lnTo>
+                  <a:lnTo>
+                    <a:pt x="5013576" y="1215426"/>
+                  </a:lnTo>
+                  <a:lnTo>
+                    <a:pt x="4941954" y="1208113"/>
+                  </a:lnTo>
+                  <a:lnTo>
+                    <a:pt x="4870331" y="1199982"/>
+                  </a:lnTo>
+                  <a:lnTo>
+                    <a:pt x="4798709" y="1190944"/>
+                  </a:lnTo>
+                  <a:lnTo>
+                    <a:pt x="4727086" y="1180895"/>
+                  </a:lnTo>
+                  <a:lnTo>
+                    <a:pt x="4655464" y="1169724"/>
+                  </a:lnTo>
+                  <a:lnTo>
+                    <a:pt x="4583841" y="1157305"/>
+                  </a:lnTo>
+                  <a:lnTo>
+                    <a:pt x="4512219" y="1143498"/>
+                  </a:lnTo>
+                  <a:lnTo>
+                    <a:pt x="4440596" y="1128149"/>
+                  </a:lnTo>
+                  <a:lnTo>
+                    <a:pt x="4368974" y="1111085"/>
+                  </a:lnTo>
+                  <a:lnTo>
+                    <a:pt x="4297351" y="1092114"/>
+                  </a:lnTo>
+                  <a:lnTo>
+                    <a:pt x="4225729" y="1071024"/>
+                  </a:lnTo>
+                  <a:lnTo>
+                    <a:pt x="4154106" y="1047578"/>
+                  </a:lnTo>
+                  <a:lnTo>
+                    <a:pt x="4082483" y="1021512"/>
+                  </a:lnTo>
+                  <a:lnTo>
+                    <a:pt x="4010861" y="992534"/>
+                  </a:lnTo>
+                  <a:lnTo>
+                    <a:pt x="3939238" y="960318"/>
+                  </a:lnTo>
+                  <a:lnTo>
+                    <a:pt x="3867616" y="924504"/>
+                  </a:lnTo>
+                  <a:lnTo>
+                    <a:pt x="3795993" y="884687"/>
+                  </a:lnTo>
+                  <a:lnTo>
+                    <a:pt x="3724371" y="840423"/>
+                  </a:lnTo>
+                  <a:lnTo>
+                    <a:pt x="3652748" y="791212"/>
+                  </a:lnTo>
+                  <a:lnTo>
+                    <a:pt x="3581126" y="736504"/>
+                  </a:lnTo>
+                  <a:lnTo>
+                    <a:pt x="3509503" y="675684"/>
+                  </a:lnTo>
+                  <a:lnTo>
+                    <a:pt x="3437881" y="608068"/>
+                  </a:lnTo>
+                  <a:lnTo>
+                    <a:pt x="3366258" y="532898"/>
+                  </a:lnTo>
+                  <a:lnTo>
+                    <a:pt x="3294636" y="451234"/>
+                  </a:lnTo>
+                  <a:lnTo>
+                    <a:pt x="3223013" y="443363"/>
+                  </a:lnTo>
+                  <a:lnTo>
+                    <a:pt x="3151391" y="435419"/>
+                  </a:lnTo>
+                  <a:lnTo>
+                    <a:pt x="3079768" y="427399"/>
+                  </a:lnTo>
+                  <a:lnTo>
+                    <a:pt x="3008146" y="419302"/>
+                  </a:lnTo>
+                  <a:lnTo>
+                    <a:pt x="2936523" y="411129"/>
+                  </a:lnTo>
+                  <a:lnTo>
+                    <a:pt x="2864901" y="402879"/>
+                  </a:lnTo>
+                  <a:lnTo>
+                    <a:pt x="2793278" y="394550"/>
+                  </a:lnTo>
+                  <a:lnTo>
+                    <a:pt x="2721655" y="386142"/>
+                  </a:lnTo>
+                  <a:lnTo>
+                    <a:pt x="2650033" y="377655"/>
+                  </a:lnTo>
+                  <a:lnTo>
+                    <a:pt x="2578410" y="369087"/>
+                  </a:lnTo>
+                  <a:lnTo>
+                    <a:pt x="2506788" y="360437"/>
+                  </a:lnTo>
+                  <a:lnTo>
+                    <a:pt x="2435165" y="351706"/>
+                  </a:lnTo>
+                  <a:lnTo>
+                    <a:pt x="2363543" y="342892"/>
+                  </a:lnTo>
+                  <a:lnTo>
+                    <a:pt x="2291920" y="333994"/>
+                  </a:lnTo>
+                  <a:lnTo>
+                    <a:pt x="2220298" y="325012"/>
+                  </a:lnTo>
+                  <a:lnTo>
+                    <a:pt x="2148675" y="315944"/>
+                  </a:lnTo>
+                  <a:lnTo>
+                    <a:pt x="2077053" y="306791"/>
+                  </a:lnTo>
+                  <a:lnTo>
+                    <a:pt x="2005430" y="297550"/>
+                  </a:lnTo>
+                  <a:lnTo>
+                    <a:pt x="1933808" y="288222"/>
+                  </a:lnTo>
+                  <a:lnTo>
+                    <a:pt x="1862185" y="278806"/>
+                  </a:lnTo>
+                  <a:lnTo>
+                    <a:pt x="1790563" y="269300"/>
+                  </a:lnTo>
+                  <a:lnTo>
+                    <a:pt x="1718940" y="259704"/>
+                  </a:lnTo>
+                  <a:lnTo>
+                    <a:pt x="1647318" y="250017"/>
+                  </a:lnTo>
+                  <a:lnTo>
+                    <a:pt x="1575695" y="240238"/>
+                  </a:lnTo>
+                  <a:lnTo>
+                    <a:pt x="1504073" y="230367"/>
+                  </a:lnTo>
+                  <a:lnTo>
+                    <a:pt x="1432450" y="220401"/>
+                  </a:lnTo>
+                  <a:lnTo>
+                    <a:pt x="1360827" y="210342"/>
+                  </a:lnTo>
+                  <a:lnTo>
+                    <a:pt x="1289205" y="200186"/>
+                  </a:lnTo>
+                  <a:lnTo>
+                    <a:pt x="1217582" y="189935"/>
+                  </a:lnTo>
+                  <a:lnTo>
+                    <a:pt x="1145960" y="179586"/>
+                  </a:lnTo>
+                  <a:lnTo>
+                    <a:pt x="1074337" y="169139"/>
+                  </a:lnTo>
+                  <a:lnTo>
+                    <a:pt x="1002715" y="158593"/>
+                  </a:lnTo>
+                  <a:lnTo>
+                    <a:pt x="931092" y="147947"/>
+                  </a:lnTo>
+                  <a:lnTo>
+                    <a:pt x="859470" y="137200"/>
+                  </a:lnTo>
+                  <a:lnTo>
+                    <a:pt x="787847" y="126351"/>
+                  </a:lnTo>
+                  <a:lnTo>
+                    <a:pt x="716225" y="115399"/>
+                  </a:lnTo>
+                  <a:lnTo>
+                    <a:pt x="644602" y="104343"/>
+                  </a:lnTo>
+                  <a:lnTo>
+                    <a:pt x="572980" y="93182"/>
+                  </a:lnTo>
+                  <a:lnTo>
+                    <a:pt x="501357" y="81916"/>
+                  </a:lnTo>
+                  <a:lnTo>
+                    <a:pt x="429735" y="70542"/>
+                  </a:lnTo>
+                  <a:lnTo>
+                    <a:pt x="358112" y="59061"/>
+                  </a:lnTo>
+                  <a:lnTo>
+                    <a:pt x="286490" y="47471"/>
+                  </a:lnTo>
+                  <a:lnTo>
+                    <a:pt x="214867" y="35770"/>
+                  </a:lnTo>
+                  <a:lnTo>
+                    <a:pt x="143245" y="23959"/>
+                  </a:lnTo>
+                  <a:lnTo>
+                    <a:pt x="71622" y="12036"/>
+                  </a:lnTo>
+                  <a:lnTo>
                     <a:pt x="0" y="0"/>
-                  </a:moveTo>
-                  <a:lnTo>
-                    <a:pt x="39609" y="188769"/>
-                  </a:lnTo>
-                  <a:lnTo>
-                    <a:pt x="116852" y="519903"/>
-                  </a:lnTo>
-                  <a:lnTo>
-                    <a:pt x="194096" y="817759"/>
-                  </a:lnTo>
-                  <a:lnTo>
-                    <a:pt x="271339" y="1085681"/>
-                  </a:lnTo>
-                  <a:lnTo>
-                    <a:pt x="348583" y="1326678"/>
-                  </a:lnTo>
-                  <a:lnTo>
-                    <a:pt x="425826" y="1543456"/>
-                  </a:lnTo>
-                  <a:lnTo>
-                    <a:pt x="503070" y="1738448"/>
-                  </a:lnTo>
-                  <a:lnTo>
-                    <a:pt x="580314" y="1913844"/>
-                  </a:lnTo>
-                  <a:lnTo>
-                    <a:pt x="657557" y="2071614"/>
-                  </a:lnTo>
-                  <a:lnTo>
-                    <a:pt x="734801" y="2213528"/>
-                  </a:lnTo>
-                  <a:lnTo>
-                    <a:pt x="812044" y="2341181"/>
-                  </a:lnTo>
-                  <a:lnTo>
-                    <a:pt x="889288" y="2456004"/>
-                  </a:lnTo>
-                  <a:lnTo>
-                    <a:pt x="966531" y="2559289"/>
-                  </a:lnTo>
-                  <a:lnTo>
-                    <a:pt x="1043775" y="2652194"/>
-                  </a:lnTo>
-                  <a:lnTo>
-                    <a:pt x="1121019" y="2661893"/>
-                  </a:lnTo>
-                  <a:lnTo>
-                    <a:pt x="1198262" y="2669616"/>
-                  </a:lnTo>
-                  <a:lnTo>
-                    <a:pt x="1275506" y="2677266"/>
-                  </a:lnTo>
-                  <a:lnTo>
-                    <a:pt x="1352749" y="2684845"/>
-                  </a:lnTo>
-                  <a:lnTo>
-                    <a:pt x="1429993" y="2692352"/>
-                  </a:lnTo>
-                  <a:lnTo>
-                    <a:pt x="1507236" y="2699789"/>
-                  </a:lnTo>
-                  <a:lnTo>
-                    <a:pt x="1584480" y="2707155"/>
-                  </a:lnTo>
-                  <a:lnTo>
-                    <a:pt x="1661724" y="2714453"/>
-                  </a:lnTo>
-                  <a:lnTo>
-                    <a:pt x="1738967" y="2721682"/>
-                  </a:lnTo>
-                  <a:lnTo>
-                    <a:pt x="1816211" y="2728843"/>
-                  </a:lnTo>
-                  <a:lnTo>
-                    <a:pt x="1893454" y="2735937"/>
-                  </a:lnTo>
-                  <a:lnTo>
-                    <a:pt x="1970698" y="2742964"/>
-                  </a:lnTo>
-                  <a:lnTo>
-                    <a:pt x="2047941" y="2749925"/>
-                  </a:lnTo>
-                  <a:lnTo>
-                    <a:pt x="2125185" y="2756821"/>
-                  </a:lnTo>
-                  <a:lnTo>
-                    <a:pt x="2202429" y="2763651"/>
-                  </a:lnTo>
-                  <a:lnTo>
-                    <a:pt x="2279672" y="2770418"/>
-                  </a:lnTo>
-                  <a:lnTo>
-                    <a:pt x="2356916" y="2777121"/>
-                  </a:lnTo>
-                  <a:lnTo>
-                    <a:pt x="2434159" y="2783761"/>
-                  </a:lnTo>
-                  <a:lnTo>
-                    <a:pt x="2511403" y="2790339"/>
-                  </a:lnTo>
-                  <a:lnTo>
-                    <a:pt x="2588646" y="2796855"/>
-                  </a:lnTo>
-                  <a:lnTo>
-                    <a:pt x="2665890" y="2803310"/>
-                  </a:lnTo>
-                  <a:lnTo>
-                    <a:pt x="2743134" y="2809704"/>
-                  </a:lnTo>
-                  <a:lnTo>
-                    <a:pt x="2820377" y="2816037"/>
-                  </a:lnTo>
-                  <a:lnTo>
-                    <a:pt x="2897621" y="2822312"/>
-                  </a:lnTo>
-                  <a:lnTo>
-                    <a:pt x="2974864" y="2828527"/>
-                  </a:lnTo>
-                  <a:lnTo>
-                    <a:pt x="3052108" y="2834684"/>
-                  </a:lnTo>
-                  <a:lnTo>
-                    <a:pt x="3129351" y="2840784"/>
-                  </a:lnTo>
-                  <a:lnTo>
-                    <a:pt x="3206595" y="2846825"/>
-                  </a:lnTo>
-                  <a:lnTo>
-                    <a:pt x="3283839" y="2852810"/>
-                  </a:lnTo>
-                  <a:lnTo>
-                    <a:pt x="3361082" y="2858739"/>
-                  </a:lnTo>
-                  <a:lnTo>
-                    <a:pt x="3438326" y="2864612"/>
-                  </a:lnTo>
-                  <a:lnTo>
-                    <a:pt x="3515569" y="2870430"/>
-                  </a:lnTo>
-                  <a:lnTo>
-                    <a:pt x="3592813" y="2876194"/>
-                  </a:lnTo>
-                  <a:lnTo>
-                    <a:pt x="3670056" y="2881903"/>
-                  </a:lnTo>
-                  <a:lnTo>
-                    <a:pt x="3747300" y="2887558"/>
-                  </a:lnTo>
-                  <a:lnTo>
-                    <a:pt x="3824544" y="2893161"/>
-                  </a:lnTo>
-                  <a:lnTo>
-                    <a:pt x="3901787" y="2898710"/>
-                  </a:lnTo>
-                  <a:lnTo>
-                    <a:pt x="3979031" y="2904208"/>
-                  </a:lnTo>
-                  <a:lnTo>
-                    <a:pt x="4056274" y="2909654"/>
-                  </a:lnTo>
-                  <a:lnTo>
-                    <a:pt x="4133518" y="2915048"/>
-                  </a:lnTo>
-                  <a:lnTo>
-                    <a:pt x="4210761" y="2920392"/>
-                  </a:lnTo>
-                  <a:lnTo>
-                    <a:pt x="4288005" y="2925686"/>
-                  </a:lnTo>
-                  <a:lnTo>
-                    <a:pt x="4365249" y="2930930"/>
-                  </a:lnTo>
-                  <a:lnTo>
-                    <a:pt x="4442492" y="2936125"/>
-                  </a:lnTo>
-                  <a:lnTo>
-                    <a:pt x="4519736" y="2941271"/>
-                  </a:lnTo>
-                  <a:lnTo>
-                    <a:pt x="4596979" y="2946369"/>
-                  </a:lnTo>
-                  <a:lnTo>
-                    <a:pt x="4674223" y="2951418"/>
-                  </a:lnTo>
-                  <a:lnTo>
-                    <a:pt x="4751466" y="2956421"/>
-                  </a:lnTo>
-                  <a:lnTo>
-                    <a:pt x="4828710" y="2961376"/>
-                  </a:lnTo>
-                  <a:lnTo>
-                    <a:pt x="4905954" y="2966284"/>
-                  </a:lnTo>
-                  <a:lnTo>
-                    <a:pt x="4983197" y="2971147"/>
-                  </a:lnTo>
-                  <a:lnTo>
-                    <a:pt x="5060441" y="2975964"/>
-                  </a:lnTo>
-                  <a:lnTo>
-                    <a:pt x="5137684" y="2980735"/>
                   </a:lnTo>
                 </a:path>
               </a:pathLst>
@@ -3757,565 +4051,249 @@
           </p:nvSpPr>
           <p:spPr>
             <a:xfrm>
-              <a:off x="817517" y="4315672"/>
-              <a:ext cx="7392041" cy="1238543"/>
+              <a:off x="2686566" y="2073503"/>
+              <a:ext cx="5576113" cy="3444679"/>
             </a:xfrm>
             <a:custGeom>
               <a:avLst/>
               <a:pathLst>
-                <a:path w="7392041" h="1238543">
-                  <a:moveTo>
-                    <a:pt x="7392041" y="1238543"/>
-                  </a:moveTo>
-                  <a:lnTo>
-                    <a:pt x="7314797" y="1238204"/>
-                  </a:lnTo>
-                  <a:lnTo>
-                    <a:pt x="7237554" y="1237827"/>
-                  </a:lnTo>
-                  <a:lnTo>
-                    <a:pt x="7160310" y="1237408"/>
-                  </a:lnTo>
-                  <a:lnTo>
-                    <a:pt x="7083066" y="1236942"/>
-                  </a:lnTo>
-                  <a:lnTo>
-                    <a:pt x="7005823" y="1236424"/>
-                  </a:lnTo>
-                  <a:lnTo>
-                    <a:pt x="6928579" y="1235848"/>
-                  </a:lnTo>
-                  <a:lnTo>
-                    <a:pt x="6851336" y="1235208"/>
-                  </a:lnTo>
-                  <a:lnTo>
-                    <a:pt x="6774092" y="1234497"/>
-                  </a:lnTo>
-                  <a:lnTo>
-                    <a:pt x="6696849" y="1233706"/>
-                  </a:lnTo>
-                  <a:lnTo>
-                    <a:pt x="6619605" y="1232827"/>
-                  </a:lnTo>
-                  <a:lnTo>
-                    <a:pt x="6542361" y="1231849"/>
-                  </a:lnTo>
-                  <a:lnTo>
-                    <a:pt x="6465118" y="1230762"/>
-                  </a:lnTo>
-                  <a:lnTo>
-                    <a:pt x="6387874" y="1229554"/>
-                  </a:lnTo>
-                  <a:lnTo>
-                    <a:pt x="6310631" y="1228211"/>
-                  </a:lnTo>
-                  <a:lnTo>
-                    <a:pt x="6233387" y="1226717"/>
-                  </a:lnTo>
-                  <a:lnTo>
-                    <a:pt x="6156144" y="1225057"/>
-                  </a:lnTo>
-                  <a:lnTo>
-                    <a:pt x="6078900" y="1223212"/>
-                  </a:lnTo>
-                  <a:lnTo>
-                    <a:pt x="6001656" y="1221160"/>
-                  </a:lnTo>
-                  <a:lnTo>
-                    <a:pt x="5924413" y="1218879"/>
-                  </a:lnTo>
-                  <a:lnTo>
-                    <a:pt x="5847169" y="1216343"/>
-                  </a:lnTo>
-                  <a:lnTo>
-                    <a:pt x="5769926" y="1213524"/>
-                  </a:lnTo>
-                  <a:lnTo>
-                    <a:pt x="5692682" y="1210389"/>
-                  </a:lnTo>
-                  <a:lnTo>
-                    <a:pt x="5615439" y="1206905"/>
-                  </a:lnTo>
-                  <a:lnTo>
-                    <a:pt x="5538195" y="1203031"/>
-                  </a:lnTo>
-                  <a:lnTo>
-                    <a:pt x="5460951" y="1198725"/>
-                  </a:lnTo>
-                  <a:lnTo>
-                    <a:pt x="5383708" y="1193937"/>
-                  </a:lnTo>
-                  <a:lnTo>
-                    <a:pt x="5306464" y="1188615"/>
-                  </a:lnTo>
-                  <a:lnTo>
-                    <a:pt x="5229221" y="1182698"/>
-                  </a:lnTo>
-                  <a:lnTo>
-                    <a:pt x="5151977" y="1176119"/>
-                  </a:lnTo>
-                  <a:lnTo>
-                    <a:pt x="5074734" y="1168806"/>
-                  </a:lnTo>
-                  <a:lnTo>
-                    <a:pt x="4997490" y="1160676"/>
-                  </a:lnTo>
-                  <a:lnTo>
-                    <a:pt x="4920246" y="1151637"/>
-                  </a:lnTo>
-                  <a:lnTo>
-                    <a:pt x="4843003" y="1141589"/>
-                  </a:lnTo>
-                  <a:lnTo>
-                    <a:pt x="4765759" y="1130418"/>
-                  </a:lnTo>
-                  <a:lnTo>
-                    <a:pt x="4688516" y="1117999"/>
-                  </a:lnTo>
-                  <a:lnTo>
-                    <a:pt x="4611272" y="1104192"/>
-                  </a:lnTo>
-                  <a:lnTo>
-                    <a:pt x="4534029" y="1088843"/>
-                  </a:lnTo>
-                  <a:lnTo>
-                    <a:pt x="4456785" y="1071779"/>
-                  </a:lnTo>
-                  <a:lnTo>
-                    <a:pt x="4379541" y="1052808"/>
-                  </a:lnTo>
-                  <a:lnTo>
-                    <a:pt x="4302298" y="1031718"/>
-                  </a:lnTo>
-                  <a:lnTo>
-                    <a:pt x="4225054" y="1008272"/>
-                  </a:lnTo>
-                  <a:lnTo>
-                    <a:pt x="4147811" y="982206"/>
-                  </a:lnTo>
-                  <a:lnTo>
-                    <a:pt x="4070567" y="953228"/>
-                  </a:lnTo>
-                  <a:lnTo>
-                    <a:pt x="3993324" y="921012"/>
-                  </a:lnTo>
-                  <a:lnTo>
-                    <a:pt x="3916080" y="885197"/>
-                  </a:lnTo>
-                  <a:lnTo>
-                    <a:pt x="3838836" y="845381"/>
-                  </a:lnTo>
-                  <a:lnTo>
-                    <a:pt x="3761593" y="801116"/>
-                  </a:lnTo>
-                  <a:lnTo>
-                    <a:pt x="3684349" y="751906"/>
-                  </a:lnTo>
-                  <a:lnTo>
-                    <a:pt x="3607106" y="697198"/>
-                  </a:lnTo>
-                  <a:lnTo>
-                    <a:pt x="3529862" y="636377"/>
-                  </a:lnTo>
-                  <a:lnTo>
-                    <a:pt x="3452619" y="568762"/>
-                  </a:lnTo>
-                  <a:lnTo>
-                    <a:pt x="3375375" y="493592"/>
-                  </a:lnTo>
-                  <a:lnTo>
-                    <a:pt x="3298131" y="411927"/>
-                  </a:lnTo>
-                  <a:lnTo>
-                    <a:pt x="3220888" y="404057"/>
-                  </a:lnTo>
-                  <a:lnTo>
-                    <a:pt x="3143644" y="396112"/>
-                  </a:lnTo>
-                  <a:lnTo>
-                    <a:pt x="3066401" y="388092"/>
-                  </a:lnTo>
-                  <a:lnTo>
-                    <a:pt x="2989157" y="379996"/>
-                  </a:lnTo>
-                  <a:lnTo>
-                    <a:pt x="2911914" y="371823"/>
-                  </a:lnTo>
-                  <a:lnTo>
-                    <a:pt x="2834670" y="363572"/>
-                  </a:lnTo>
-                  <a:lnTo>
-                    <a:pt x="2757426" y="355244"/>
-                  </a:lnTo>
-                  <a:lnTo>
-                    <a:pt x="2680183" y="346836"/>
-                  </a:lnTo>
-                  <a:lnTo>
-                    <a:pt x="2602939" y="338348"/>
-                  </a:lnTo>
-                  <a:lnTo>
-                    <a:pt x="2525696" y="329780"/>
-                  </a:lnTo>
-                  <a:lnTo>
-                    <a:pt x="2448452" y="321131"/>
-                  </a:lnTo>
-                  <a:lnTo>
-                    <a:pt x="2371209" y="312399"/>
-                  </a:lnTo>
-                  <a:lnTo>
-                    <a:pt x="2293965" y="303585"/>
-                  </a:lnTo>
-                  <a:lnTo>
-                    <a:pt x="2216721" y="294687"/>
-                  </a:lnTo>
-                  <a:lnTo>
-                    <a:pt x="2139478" y="285705"/>
-                  </a:lnTo>
-                  <a:lnTo>
-                    <a:pt x="2062234" y="276638"/>
-                  </a:lnTo>
-                  <a:lnTo>
-                    <a:pt x="1984991" y="267484"/>
-                  </a:lnTo>
-                  <a:lnTo>
-                    <a:pt x="1907747" y="258244"/>
-                  </a:lnTo>
-                  <a:lnTo>
-                    <a:pt x="1830504" y="248916"/>
-                  </a:lnTo>
-                  <a:lnTo>
-                    <a:pt x="1753260" y="239499"/>
-                  </a:lnTo>
-                  <a:lnTo>
-                    <a:pt x="1676016" y="229994"/>
-                  </a:lnTo>
-                  <a:lnTo>
-                    <a:pt x="1598773" y="220398"/>
-                  </a:lnTo>
-                  <a:lnTo>
-                    <a:pt x="1521529" y="210711"/>
-                  </a:lnTo>
-                  <a:lnTo>
-                    <a:pt x="1444286" y="200932"/>
-                  </a:lnTo>
-                  <a:lnTo>
-                    <a:pt x="1367042" y="191060"/>
-                  </a:lnTo>
-                  <a:lnTo>
-                    <a:pt x="1289799" y="181095"/>
-                  </a:lnTo>
-                  <a:lnTo>
-                    <a:pt x="1212555" y="171035"/>
-                  </a:lnTo>
-                  <a:lnTo>
-                    <a:pt x="1135311" y="160880"/>
-                  </a:lnTo>
-                  <a:lnTo>
-                    <a:pt x="1058068" y="150628"/>
-                  </a:lnTo>
-                  <a:lnTo>
-                    <a:pt x="980824" y="140280"/>
-                  </a:lnTo>
-                  <a:lnTo>
-                    <a:pt x="903581" y="129833"/>
-                  </a:lnTo>
-                  <a:lnTo>
-                    <a:pt x="826337" y="119287"/>
-                  </a:lnTo>
-                  <a:lnTo>
-                    <a:pt x="749094" y="108641"/>
-                  </a:lnTo>
-                  <a:lnTo>
-                    <a:pt x="671850" y="97893"/>
-                  </a:lnTo>
-                  <a:lnTo>
-                    <a:pt x="594606" y="87044"/>
-                  </a:lnTo>
-                  <a:lnTo>
-                    <a:pt x="517363" y="76092"/>
-                  </a:lnTo>
-                  <a:lnTo>
-                    <a:pt x="440119" y="65037"/>
-                  </a:lnTo>
-                  <a:lnTo>
-                    <a:pt x="362876" y="53876"/>
-                  </a:lnTo>
-                  <a:lnTo>
-                    <a:pt x="285632" y="42609"/>
-                  </a:lnTo>
-                  <a:lnTo>
-                    <a:pt x="208389" y="31236"/>
-                  </a:lnTo>
-                  <a:lnTo>
-                    <a:pt x="131145" y="19754"/>
-                  </a:lnTo>
-                  <a:lnTo>
-                    <a:pt x="53901" y="8164"/>
-                  </a:lnTo>
-                  <a:lnTo>
-                    <a:pt x="0" y="0"/>
-                  </a:lnTo>
-                </a:path>
-              </a:pathLst>
-            </a:custGeom>
-          </p:spPr>
-          <p:txBody>
-            <a:bodyPr/>
-            <a:lstStyle/>
-            <a:p/>
-          </p:txBody>
-        </p:sp>
-        <p:sp>
-          <p:nvSpPr>
-            <p:cNvPr id="24" name="pl24"/>
-            <p:cNvSpPr/>
-            <p:nvPr/>
-          </p:nvSpPr>
-          <p:spPr>
-            <a:xfrm>
-              <a:off x="2195823" y="2073503"/>
-              <a:ext cx="6013735" cy="3444679"/>
-            </a:xfrm>
-            <a:custGeom>
-              <a:avLst/>
-              <a:pathLst>
-                <a:path w="6013735" h="3444679">
+                <a:path w="5576113" h="3444679">
                   <a:moveTo>
                     <a:pt x="0" y="0"/>
                   </a:moveTo>
                   <a:lnTo>
-                    <a:pt x="65980" y="168150"/>
-                  </a:lnTo>
-                  <a:lnTo>
-                    <a:pt x="143223" y="353973"/>
-                  </a:lnTo>
-                  <a:lnTo>
-                    <a:pt x="220467" y="529381"/>
-                  </a:lnTo>
-                  <a:lnTo>
-                    <a:pt x="297710" y="694959"/>
-                  </a:lnTo>
-                  <a:lnTo>
-                    <a:pt x="374954" y="851256"/>
-                  </a:lnTo>
-                  <a:lnTo>
-                    <a:pt x="452198" y="998794"/>
-                  </a:lnTo>
-                  <a:lnTo>
-                    <a:pt x="529441" y="1138064"/>
-                  </a:lnTo>
-                  <a:lnTo>
-                    <a:pt x="606685" y="1269527"/>
-                  </a:lnTo>
-                  <a:lnTo>
-                    <a:pt x="683928" y="1393623"/>
-                  </a:lnTo>
-                  <a:lnTo>
-                    <a:pt x="761172" y="1510764"/>
-                  </a:lnTo>
-                  <a:lnTo>
-                    <a:pt x="838415" y="1621340"/>
-                  </a:lnTo>
-                  <a:lnTo>
-                    <a:pt x="915659" y="1725719"/>
-                  </a:lnTo>
-                  <a:lnTo>
-                    <a:pt x="992903" y="1824248"/>
-                  </a:lnTo>
-                  <a:lnTo>
-                    <a:pt x="1070146" y="1917254"/>
-                  </a:lnTo>
-                  <a:lnTo>
-                    <a:pt x="1147390" y="2005048"/>
-                  </a:lnTo>
-                  <a:lnTo>
-                    <a:pt x="1224633" y="2087922"/>
-                  </a:lnTo>
-                  <a:lnTo>
-                    <a:pt x="1301877" y="2166151"/>
-                  </a:lnTo>
-                  <a:lnTo>
-                    <a:pt x="1379120" y="2239996"/>
-                  </a:lnTo>
-                  <a:lnTo>
-                    <a:pt x="1456364" y="2309702"/>
-                  </a:lnTo>
-                  <a:lnTo>
-                    <a:pt x="1533608" y="2375501"/>
-                  </a:lnTo>
-                  <a:lnTo>
-                    <a:pt x="1610851" y="2437613"/>
-                  </a:lnTo>
-                  <a:lnTo>
-                    <a:pt x="1688095" y="2496243"/>
-                  </a:lnTo>
-                  <a:lnTo>
-                    <a:pt x="1765338" y="2551588"/>
-                  </a:lnTo>
-                  <a:lnTo>
-                    <a:pt x="1842582" y="2603831"/>
-                  </a:lnTo>
-                  <a:lnTo>
-                    <a:pt x="1919825" y="2653146"/>
-                  </a:lnTo>
-                  <a:lnTo>
-                    <a:pt x="1997069" y="2699697"/>
-                  </a:lnTo>
-                  <a:lnTo>
-                    <a:pt x="2074313" y="2743639"/>
-                  </a:lnTo>
-                  <a:lnTo>
-                    <a:pt x="2151556" y="2785118"/>
-                  </a:lnTo>
-                  <a:lnTo>
-                    <a:pt x="2228800" y="2824273"/>
-                  </a:lnTo>
-                  <a:lnTo>
-                    <a:pt x="2306043" y="2861233"/>
-                  </a:lnTo>
-                  <a:lnTo>
-                    <a:pt x="2383287" y="2896122"/>
-                  </a:lnTo>
-                  <a:lnTo>
-                    <a:pt x="2460530" y="2929055"/>
-                  </a:lnTo>
-                  <a:lnTo>
-                    <a:pt x="2537774" y="2960143"/>
-                  </a:lnTo>
-                  <a:lnTo>
-                    <a:pt x="2615018" y="2989488"/>
-                  </a:lnTo>
-                  <a:lnTo>
-                    <a:pt x="2692261" y="3017189"/>
-                  </a:lnTo>
-                  <a:lnTo>
-                    <a:pt x="2769505" y="3043337"/>
-                  </a:lnTo>
-                  <a:lnTo>
-                    <a:pt x="2846748" y="3068020"/>
-                  </a:lnTo>
-                  <a:lnTo>
-                    <a:pt x="2923992" y="3091319"/>
-                  </a:lnTo>
-                  <a:lnTo>
-                    <a:pt x="3001235" y="3113313"/>
-                  </a:lnTo>
-                  <a:lnTo>
-                    <a:pt x="3078479" y="3134074"/>
-                  </a:lnTo>
-                  <a:lnTo>
-                    <a:pt x="3155723" y="3153671"/>
-                  </a:lnTo>
-                  <a:lnTo>
-                    <a:pt x="3232966" y="3172170"/>
-                  </a:lnTo>
-                  <a:lnTo>
-                    <a:pt x="3310210" y="3189633"/>
-                  </a:lnTo>
-                  <a:lnTo>
-                    <a:pt x="3387453" y="3206116"/>
-                  </a:lnTo>
-                  <a:lnTo>
-                    <a:pt x="3464697" y="3221676"/>
-                  </a:lnTo>
-                  <a:lnTo>
-                    <a:pt x="3541940" y="3236364"/>
-                  </a:lnTo>
-                  <a:lnTo>
-                    <a:pt x="3619184" y="3250228"/>
-                  </a:lnTo>
-                  <a:lnTo>
-                    <a:pt x="3696428" y="3263316"/>
-                  </a:lnTo>
-                  <a:lnTo>
-                    <a:pt x="3773671" y="3275670"/>
-                  </a:lnTo>
-                  <a:lnTo>
-                    <a:pt x="3850915" y="3287332"/>
-                  </a:lnTo>
-                  <a:lnTo>
-                    <a:pt x="3928158" y="3298340"/>
-                  </a:lnTo>
-                  <a:lnTo>
-                    <a:pt x="4005402" y="3308731"/>
-                  </a:lnTo>
-                  <a:lnTo>
-                    <a:pt x="4082645" y="3318540"/>
-                  </a:lnTo>
-                  <a:lnTo>
-                    <a:pt x="4159889" y="3327799"/>
-                  </a:lnTo>
-                  <a:lnTo>
-                    <a:pt x="4237133" y="3336539"/>
-                  </a:lnTo>
-                  <a:lnTo>
-                    <a:pt x="4314376" y="3344789"/>
-                  </a:lnTo>
-                  <a:lnTo>
-                    <a:pt x="4391620" y="3352577"/>
-                  </a:lnTo>
-                  <a:lnTo>
-                    <a:pt x="4468863" y="3359928"/>
-                  </a:lnTo>
-                  <a:lnTo>
-                    <a:pt x="4546107" y="3366868"/>
-                  </a:lnTo>
-                  <a:lnTo>
-                    <a:pt x="4623350" y="3373418"/>
-                  </a:lnTo>
-                  <a:lnTo>
-                    <a:pt x="4700594" y="3379601"/>
-                  </a:lnTo>
-                  <a:lnTo>
-                    <a:pt x="4777838" y="3385438"/>
-                  </a:lnTo>
-                  <a:lnTo>
-                    <a:pt x="4855081" y="3390948"/>
-                  </a:lnTo>
-                  <a:lnTo>
-                    <a:pt x="4932325" y="3396149"/>
-                  </a:lnTo>
-                  <a:lnTo>
-                    <a:pt x="5009568" y="3401058"/>
-                  </a:lnTo>
-                  <a:lnTo>
-                    <a:pt x="5086812" y="3405693"/>
-                  </a:lnTo>
-                  <a:lnTo>
-                    <a:pt x="5164055" y="3410067"/>
-                  </a:lnTo>
-                  <a:lnTo>
-                    <a:pt x="5241299" y="3414196"/>
-                  </a:lnTo>
-                  <a:lnTo>
-                    <a:pt x="5318543" y="3418094"/>
-                  </a:lnTo>
-                  <a:lnTo>
-                    <a:pt x="5395786" y="3421774"/>
-                  </a:lnTo>
-                  <a:lnTo>
-                    <a:pt x="5473030" y="3425247"/>
-                  </a:lnTo>
-                  <a:lnTo>
-                    <a:pt x="5550273" y="3428526"/>
-                  </a:lnTo>
-                  <a:lnTo>
-                    <a:pt x="5627517" y="3431621"/>
-                  </a:lnTo>
-                  <a:lnTo>
-                    <a:pt x="5704760" y="3434542"/>
-                  </a:lnTo>
-                  <a:lnTo>
-                    <a:pt x="5782004" y="3437300"/>
-                  </a:lnTo>
-                  <a:lnTo>
-                    <a:pt x="5859248" y="3439903"/>
-                  </a:lnTo>
-                  <a:lnTo>
-                    <a:pt x="5936491" y="3442360"/>
-                  </a:lnTo>
-                  <a:lnTo>
-                    <a:pt x="6013735" y="3444679"/>
+                    <a:pt x="61178" y="168150"/>
+                  </a:lnTo>
+                  <a:lnTo>
+                    <a:pt x="132801" y="353973"/>
+                  </a:lnTo>
+                  <a:lnTo>
+                    <a:pt x="204423" y="529381"/>
+                  </a:lnTo>
+                  <a:lnTo>
+                    <a:pt x="276046" y="694959"/>
+                  </a:lnTo>
+                  <a:lnTo>
+                    <a:pt x="347668" y="851256"/>
+                  </a:lnTo>
+                  <a:lnTo>
+                    <a:pt x="419291" y="998794"/>
+                  </a:lnTo>
+                  <a:lnTo>
+                    <a:pt x="490913" y="1138064"/>
+                  </a:lnTo>
+                  <a:lnTo>
+                    <a:pt x="562536" y="1269527"/>
+                  </a:lnTo>
+                  <a:lnTo>
+                    <a:pt x="634159" y="1393623"/>
+                  </a:lnTo>
+                  <a:lnTo>
+                    <a:pt x="705781" y="1510764"/>
+                  </a:lnTo>
+                  <a:lnTo>
+                    <a:pt x="777404" y="1621340"/>
+                  </a:lnTo>
+                  <a:lnTo>
+                    <a:pt x="849026" y="1725719"/>
+                  </a:lnTo>
+                  <a:lnTo>
+                    <a:pt x="920649" y="1824248"/>
+                  </a:lnTo>
+                  <a:lnTo>
+                    <a:pt x="992271" y="1917254"/>
+                  </a:lnTo>
+                  <a:lnTo>
+                    <a:pt x="1063894" y="2005048"/>
+                  </a:lnTo>
+                  <a:lnTo>
+                    <a:pt x="1135516" y="2087922"/>
+                  </a:lnTo>
+                  <a:lnTo>
+                    <a:pt x="1207139" y="2166151"/>
+                  </a:lnTo>
+                  <a:lnTo>
+                    <a:pt x="1278761" y="2239996"/>
+                  </a:lnTo>
+                  <a:lnTo>
+                    <a:pt x="1350384" y="2309702"/>
+                  </a:lnTo>
+                  <a:lnTo>
+                    <a:pt x="1422006" y="2375501"/>
+                  </a:lnTo>
+                  <a:lnTo>
+                    <a:pt x="1493629" y="2437613"/>
+                  </a:lnTo>
+                  <a:lnTo>
+                    <a:pt x="1565251" y="2496243"/>
+                  </a:lnTo>
+                  <a:lnTo>
+                    <a:pt x="1636874" y="2551588"/>
+                  </a:lnTo>
+                  <a:lnTo>
+                    <a:pt x="1708496" y="2603831"/>
+                  </a:lnTo>
+                  <a:lnTo>
+                    <a:pt x="1780119" y="2653146"/>
+                  </a:lnTo>
+                  <a:lnTo>
+                    <a:pt x="1851741" y="2699697"/>
+                  </a:lnTo>
+                  <a:lnTo>
+                    <a:pt x="1923364" y="2743639"/>
+                  </a:lnTo>
+                  <a:lnTo>
+                    <a:pt x="1994987" y="2785118"/>
+                  </a:lnTo>
+                  <a:lnTo>
+                    <a:pt x="2066609" y="2824273"/>
+                  </a:lnTo>
+                  <a:lnTo>
+                    <a:pt x="2138232" y="2861233"/>
+                  </a:lnTo>
+                  <a:lnTo>
+                    <a:pt x="2209854" y="2896122"/>
+                  </a:lnTo>
+                  <a:lnTo>
+                    <a:pt x="2281477" y="2929055"/>
+                  </a:lnTo>
+                  <a:lnTo>
+                    <a:pt x="2353099" y="2960143"/>
+                  </a:lnTo>
+                  <a:lnTo>
+                    <a:pt x="2424722" y="2989488"/>
+                  </a:lnTo>
+                  <a:lnTo>
+                    <a:pt x="2496344" y="3017189"/>
+                  </a:lnTo>
+                  <a:lnTo>
+                    <a:pt x="2567967" y="3043337"/>
+                  </a:lnTo>
+                  <a:lnTo>
+                    <a:pt x="2639589" y="3068020"/>
+                  </a:lnTo>
+                  <a:lnTo>
+                    <a:pt x="2711212" y="3091319"/>
+                  </a:lnTo>
+                  <a:lnTo>
+                    <a:pt x="2782834" y="3113313"/>
+                  </a:lnTo>
+                  <a:lnTo>
+                    <a:pt x="2854457" y="3134074"/>
+                  </a:lnTo>
+                  <a:lnTo>
+                    <a:pt x="2926079" y="3153671"/>
+                  </a:lnTo>
+                  <a:lnTo>
+                    <a:pt x="2997702" y="3172170"/>
+                  </a:lnTo>
+                  <a:lnTo>
+                    <a:pt x="3069324" y="3189633"/>
+                  </a:lnTo>
+                  <a:lnTo>
+                    <a:pt x="3140947" y="3206116"/>
+                  </a:lnTo>
+                  <a:lnTo>
+                    <a:pt x="3212569" y="3221676"/>
+                  </a:lnTo>
+                  <a:lnTo>
+                    <a:pt x="3284192" y="3236364"/>
+                  </a:lnTo>
+                  <a:lnTo>
+                    <a:pt x="3355814" y="3250228"/>
+                  </a:lnTo>
+                  <a:lnTo>
+                    <a:pt x="3427437" y="3263316"/>
+                  </a:lnTo>
+                  <a:lnTo>
+                    <a:pt x="3499060" y="3275670"/>
+                  </a:lnTo>
+                  <a:lnTo>
+                    <a:pt x="3570682" y="3287332"/>
+                  </a:lnTo>
+                  <a:lnTo>
+                    <a:pt x="3642305" y="3298340"/>
+                  </a:lnTo>
+                  <a:lnTo>
+                    <a:pt x="3713927" y="3308731"/>
+                  </a:lnTo>
+                  <a:lnTo>
+                    <a:pt x="3785550" y="3318540"/>
+                  </a:lnTo>
+                  <a:lnTo>
+                    <a:pt x="3857172" y="3327799"/>
+                  </a:lnTo>
+                  <a:lnTo>
+                    <a:pt x="3928795" y="3336539"/>
+                  </a:lnTo>
+                  <a:lnTo>
+                    <a:pt x="4000417" y="3344789"/>
+                  </a:lnTo>
+                  <a:lnTo>
+                    <a:pt x="4072040" y="3352577"/>
+                  </a:lnTo>
+                  <a:lnTo>
+                    <a:pt x="4143662" y="3359928"/>
+                  </a:lnTo>
+                  <a:lnTo>
+                    <a:pt x="4215285" y="3366868"/>
+                  </a:lnTo>
+                  <a:lnTo>
+                    <a:pt x="4286907" y="3373418"/>
+                  </a:lnTo>
+                  <a:lnTo>
+                    <a:pt x="4358530" y="3379601"/>
+                  </a:lnTo>
+                  <a:lnTo>
+                    <a:pt x="4430152" y="3385438"/>
+                  </a:lnTo>
+                  <a:lnTo>
+                    <a:pt x="4501775" y="3390948"/>
+                  </a:lnTo>
+                  <a:lnTo>
+                    <a:pt x="4573397" y="3396149"/>
+                  </a:lnTo>
+                  <a:lnTo>
+                    <a:pt x="4645020" y="3401058"/>
+                  </a:lnTo>
+                  <a:lnTo>
+                    <a:pt x="4716642" y="3405693"/>
+                  </a:lnTo>
+                  <a:lnTo>
+                    <a:pt x="4788265" y="3410067"/>
+                  </a:lnTo>
+                  <a:lnTo>
+                    <a:pt x="4859888" y="3414196"/>
+                  </a:lnTo>
+                  <a:lnTo>
+                    <a:pt x="4931510" y="3418094"/>
+                  </a:lnTo>
+                  <a:lnTo>
+                    <a:pt x="5003133" y="3421774"/>
+                  </a:lnTo>
+                  <a:lnTo>
+                    <a:pt x="5074755" y="3425247"/>
+                  </a:lnTo>
+                  <a:lnTo>
+                    <a:pt x="5146378" y="3428526"/>
+                  </a:lnTo>
+                  <a:lnTo>
+                    <a:pt x="5218000" y="3431621"/>
+                  </a:lnTo>
+                  <a:lnTo>
+                    <a:pt x="5289623" y="3434542"/>
+                  </a:lnTo>
+                  <a:lnTo>
+                    <a:pt x="5361245" y="3437300"/>
+                  </a:lnTo>
+                  <a:lnTo>
+                    <a:pt x="5432868" y="3439903"/>
+                  </a:lnTo>
+                  <a:lnTo>
+                    <a:pt x="5504490" y="3442360"/>
+                  </a:lnTo>
+                  <a:lnTo>
+                    <a:pt x="5576113" y="3444679"/>
                   </a:lnTo>
                 </a:path>
               </a:pathLst>
@@ -4338,7 +4316,7 @@
         </p:sp>
         <p:sp>
           <p:nvSpPr>
-            <p:cNvPr id="25" name="pl25"/>
+            <p:cNvPr id="24" name="pl24"/>
             <p:cNvSpPr/>
             <p:nvPr/>
           </p:nvSpPr>
@@ -4381,13 +4359,13 @@
         </p:sp>
         <p:sp>
           <p:nvSpPr>
-            <p:cNvPr id="26" name="pl26"/>
+            <p:cNvPr id="25" name="pl25"/>
             <p:cNvSpPr/>
             <p:nvPr/>
           </p:nvSpPr>
           <p:spPr>
             <a:xfrm>
-              <a:off x="4117484" y="2073503"/>
+              <a:off x="4468386" y="2073503"/>
               <a:ext cx="0" cy="3649639"/>
             </a:xfrm>
             <a:custGeom>
@@ -4424,7 +4402,7 @@
         </p:sp>
         <p:sp>
           <p:nvSpPr>
-            <p:cNvPr id="27" name="tx27"/>
+            <p:cNvPr id="26" name="tx26"/>
             <p:cNvSpPr/>
             <p:nvPr/>
           </p:nvSpPr>
@@ -4470,7 +4448,7 @@
         </p:sp>
         <p:sp>
           <p:nvSpPr>
-            <p:cNvPr id="28" name="tx28"/>
+            <p:cNvPr id="27" name="tx27"/>
             <p:cNvSpPr/>
             <p:nvPr/>
           </p:nvSpPr>
@@ -4516,7 +4494,7 @@
         </p:sp>
         <p:sp>
           <p:nvSpPr>
-            <p:cNvPr id="29" name="tx29"/>
+            <p:cNvPr id="28" name="tx28"/>
             <p:cNvSpPr/>
             <p:nvPr/>
           </p:nvSpPr>
@@ -4562,7 +4540,7 @@
         </p:sp>
         <p:sp>
           <p:nvSpPr>
-            <p:cNvPr id="30" name="tx30"/>
+            <p:cNvPr id="29" name="tx29"/>
             <p:cNvSpPr/>
             <p:nvPr/>
           </p:nvSpPr>
@@ -4608,7 +4586,7 @@
         </p:sp>
         <p:sp>
           <p:nvSpPr>
-            <p:cNvPr id="31" name="tx31"/>
+            <p:cNvPr id="30" name="tx30"/>
             <p:cNvSpPr/>
             <p:nvPr/>
           </p:nvSpPr>
@@ -4654,14 +4632,14 @@
         </p:sp>
         <p:sp>
           <p:nvSpPr>
-            <p:cNvPr id="32" name="tx32"/>
+            <p:cNvPr id="31" name="tx31"/>
             <p:cNvSpPr/>
             <p:nvPr/>
           </p:nvSpPr>
           <p:spPr>
             <a:xfrm>
-              <a:off x="2423864" y="5785772"/>
-              <a:ext cx="155356" cy="80101"/>
+              <a:off x="2478335" y="5785772"/>
+              <a:ext cx="161574" cy="80101"/>
             </a:xfrm>
             <a:prstGeom prst="rect">
               <a:avLst/>
@@ -4693,21 +4671,21 @@
                   <a:latin typeface="Helvetica"/>
                   <a:cs typeface="Helvetica"/>
                 </a:rPr>
-                <a:t>0.8</a:t>
+                <a:t>-25</a:t>
               </a:r>
             </a:p>
           </p:txBody>
         </p:sp>
         <p:sp>
           <p:nvSpPr>
-            <p:cNvPr id="33" name="tx33"/>
+            <p:cNvPr id="32" name="tx32"/>
             <p:cNvSpPr/>
             <p:nvPr/>
           </p:nvSpPr>
           <p:spPr>
             <a:xfrm>
-              <a:off x="4196521" y="5785772"/>
-              <a:ext cx="155356" cy="80101"/>
+              <a:off x="4582608" y="5785772"/>
+              <a:ext cx="62179" cy="80101"/>
             </a:xfrm>
             <a:prstGeom prst="rect">
               <a:avLst/>
@@ -4739,21 +4717,21 @@
                   <a:latin typeface="Helvetica"/>
                   <a:cs typeface="Helvetica"/>
                 </a:rPr>
-                <a:t>1.0</a:t>
+                <a:t>0</a:t>
               </a:r>
             </a:p>
           </p:txBody>
         </p:sp>
         <p:sp>
           <p:nvSpPr>
-            <p:cNvPr id="34" name="tx34"/>
+            <p:cNvPr id="33" name="tx33"/>
             <p:cNvSpPr/>
             <p:nvPr/>
           </p:nvSpPr>
           <p:spPr>
             <a:xfrm>
-              <a:off x="5969179" y="5785772"/>
-              <a:ext cx="155356" cy="80101"/>
+              <a:off x="6606094" y="5785772"/>
+              <a:ext cx="124358" cy="80101"/>
             </a:xfrm>
             <a:prstGeom prst="rect">
               <a:avLst/>
@@ -4785,67 +4763,21 @@
                   <a:latin typeface="Helvetica"/>
                   <a:cs typeface="Helvetica"/>
                 </a:rPr>
-                <a:t>1.2</a:t>
+                <a:t>25</a:t>
               </a:r>
             </a:p>
           </p:txBody>
         </p:sp>
         <p:sp>
           <p:nvSpPr>
-            <p:cNvPr id="35" name="tx35"/>
+            <p:cNvPr id="34" name="tx34"/>
             <p:cNvSpPr/>
             <p:nvPr/>
           </p:nvSpPr>
           <p:spPr>
             <a:xfrm>
-              <a:off x="7741836" y="5785772"/>
-              <a:ext cx="155356" cy="80101"/>
-            </a:xfrm>
-            <a:prstGeom prst="rect">
-              <a:avLst/>
-            </a:prstGeom>
-            <a:noFill/>
-          </p:spPr>
-          <p:txBody>
-            <a:bodyPr lIns="0" rIns="0" tIns="0" bIns="0" anchorCtr="1" anchor="ctr" wrap="none"/>
-            <a:lstStyle/>
-            <a:p>
-              <a:pPr algn="l" marL="0" marR="0" indent="0">
-                <a:lnSpc>
-                  <a:spcPts val="880"/>
-                </a:lnSpc>
-                <a:spcBef>
-                  <a:spcPts val="0"/>
-                </a:spcBef>
-                <a:spcAft>
-                  <a:spcPts val="0"/>
-                </a:spcAft>
-              </a:pPr>
-              <a:r>
-                <a:rPr sz="880">
-                  <a:solidFill>
-                    <a:srgbClr val="4D4D4D">
-                      <a:alpha val="100000"/>
-                    </a:srgbClr>
-                  </a:solidFill>
-                  <a:latin typeface="Helvetica"/>
-                  <a:cs typeface="Helvetica"/>
-                </a:rPr>
-                <a:t>1.4</a:t>
-              </a:r>
-            </a:p>
-          </p:txBody>
-        </p:sp>
-        <p:sp>
-          <p:nvSpPr>
-            <p:cNvPr id="36" name="tx36"/>
-            <p:cNvSpPr/>
-            <p:nvPr/>
-          </p:nvSpPr>
-          <p:spPr>
-            <a:xfrm>
-              <a:off x="3879271" y="5925448"/>
-              <a:ext cx="1676186" cy="100218"/>
+              <a:off x="2928340" y="5925448"/>
+              <a:ext cx="3578047" cy="100218"/>
             </a:xfrm>
             <a:prstGeom prst="rect">
               <a:avLst/>
@@ -4877,14 +4809,14 @@
                   <a:latin typeface="Helvetica"/>
                   <a:cs typeface="Helvetica"/>
                 </a:rPr>
-                <a:t>CKD-EPI Cr-Cys / CG ratio</a:t>
+                <a:t>eGFR difference (%): 100 × (CKD-EPI Cr-Cys − CG) / CG</a:t>
               </a:r>
             </a:p>
           </p:txBody>
         </p:sp>
         <p:sp>
           <p:nvSpPr>
-            <p:cNvPr id="37" name="tx37"/>
+            <p:cNvPr id="35" name="tx35"/>
             <p:cNvSpPr/>
             <p:nvPr/>
           </p:nvSpPr>
@@ -4930,14 +4862,14 @@
         </p:sp>
         <p:sp>
           <p:nvSpPr>
-            <p:cNvPr id="38" name="tx38"/>
+            <p:cNvPr id="36" name="tx36"/>
             <p:cNvSpPr/>
             <p:nvPr/>
           </p:nvSpPr>
           <p:spPr>
             <a:xfrm>
               <a:off x="817517" y="1896563"/>
-              <a:ext cx="6232916" cy="82021"/>
+              <a:ext cx="6385163" cy="82021"/>
             </a:xfrm>
             <a:prstGeom prst="rect">
               <a:avLst/>
@@ -4969,14 +4901,14 @@
                   <a:latin typeface="Helvetica"/>
                   <a:cs typeface="Helvetica"/>
                 </a:rPr>
-                <a:t>subHR per 0.1 ratio decline: 1.94 (1.11-3.37), p = 0.019  |  per IQR decline (Δ = 0.30): 7.06 (1.38-36.21)  |  IQR: [0.84, 1.14]</a:t>
+                <a:t>subHR per 10 % decline: 1.94 (1.11-3.37), p = 0.019  |  per IQR decline (Δ = 29.5 %): 7.06 (1.38-36.21)  |  IQR: [-15.6, 13.9] %</a:t>
               </a:r>
             </a:p>
           </p:txBody>
         </p:sp>
         <p:sp>
           <p:nvSpPr>
-            <p:cNvPr id="39" name="tx39"/>
+            <p:cNvPr id="37" name="tx37"/>
             <p:cNvSpPr/>
             <p:nvPr/>
           </p:nvSpPr>

--- a/docs/pptx/auc3/jx-auc3-linsubhr-ratio-hosp4.pptx
+++ b/docs/pptx/auc3/jx-auc3-linsubhr-ratio-hosp4.pptx
@@ -2265,34 +2265,26 @@
         </p:sp>
         <p:sp>
           <p:nvSpPr>
-            <p:cNvPr id="4" name="pl4"/>
+            <p:cNvPr id="4" name="rc4"/>
             <p:cNvSpPr/>
             <p:nvPr/>
           </p:nvSpPr>
           <p:spPr>
             <a:xfrm>
-              <a:off x="817517" y="5142518"/>
-              <a:ext cx="7799693" cy="0"/>
+              <a:off x="457200" y="1600200"/>
+              <a:ext cx="8229600" cy="4525962"/>
             </a:xfrm>
-            <a:custGeom>
+            <a:prstGeom prst="rect">
               <a:avLst/>
-              <a:pathLst>
-                <a:path w="7799693" h="0">
-                  <a:moveTo>
-                    <a:pt x="0" y="0"/>
-                  </a:moveTo>
-                  <a:lnTo>
-                    <a:pt x="7799693" y="0"/>
-                  </a:lnTo>
-                  <a:lnTo>
-                    <a:pt x="7799693" y="0"/>
-                  </a:lnTo>
-                </a:path>
-              </a:pathLst>
-            </a:custGeom>
-            <a:ln w="6775" cap="flat">
+            </a:prstGeom>
+            <a:solidFill>
+              <a:srgbClr val="FFFFFF">
+                <a:alpha val="100000"/>
+              </a:srgbClr>
+            </a:solidFill>
+            <a:ln w="13550" cap="rnd">
               <a:solidFill>
-                <a:srgbClr val="EBEBEB">
+                <a:srgbClr val="FFFFFF">
                   <a:alpha val="100000"/>
                 </a:srgbClr>
               </a:solidFill>
@@ -2314,21 +2306,21 @@
           </p:nvSpPr>
           <p:spPr>
             <a:xfrm>
-              <a:off x="817517" y="4313054"/>
-              <a:ext cx="7799693" cy="0"/>
+              <a:off x="887106" y="3250627"/>
+              <a:ext cx="7660515" cy="0"/>
             </a:xfrm>
             <a:custGeom>
               <a:avLst/>
               <a:pathLst>
-                <a:path w="7799693" h="0">
+                <a:path w="7660515" h="0">
                   <a:moveTo>
                     <a:pt x="0" y="0"/>
                   </a:moveTo>
                   <a:lnTo>
-                    <a:pt x="7799693" y="0"/>
-                  </a:lnTo>
-                  <a:lnTo>
-                    <a:pt x="7799693" y="0"/>
+                    <a:pt x="7660515" y="0"/>
+                  </a:lnTo>
+                  <a:lnTo>
+                    <a:pt x="7660515" y="0"/>
                   </a:lnTo>
                 </a:path>
               </a:pathLst>
@@ -2357,21 +2349,21 @@
           </p:nvSpPr>
           <p:spPr>
             <a:xfrm>
-              <a:off x="817517" y="3483591"/>
-              <a:ext cx="7799693" cy="0"/>
+              <a:off x="887106" y="2951293"/>
+              <a:ext cx="7660515" cy="0"/>
             </a:xfrm>
             <a:custGeom>
               <a:avLst/>
               <a:pathLst>
-                <a:path w="7799693" h="0">
+                <a:path w="7660515" h="0">
                   <a:moveTo>
                     <a:pt x="0" y="0"/>
                   </a:moveTo>
                   <a:lnTo>
-                    <a:pt x="7799693" y="0"/>
-                  </a:lnTo>
-                  <a:lnTo>
-                    <a:pt x="7799693" y="0"/>
+                    <a:pt x="7660515" y="0"/>
+                  </a:lnTo>
+                  <a:lnTo>
+                    <a:pt x="7660515" y="0"/>
                   </a:lnTo>
                 </a:path>
               </a:pathLst>
@@ -2400,21 +2392,21 @@
           </p:nvSpPr>
           <p:spPr>
             <a:xfrm>
-              <a:off x="817517" y="2654127"/>
-              <a:ext cx="7799693" cy="0"/>
+              <a:off x="887106" y="2651959"/>
+              <a:ext cx="7660515" cy="0"/>
             </a:xfrm>
             <a:custGeom>
               <a:avLst/>
               <a:pathLst>
-                <a:path w="7799693" h="0">
+                <a:path w="7660515" h="0">
                   <a:moveTo>
                     <a:pt x="0" y="0"/>
                   </a:moveTo>
                   <a:lnTo>
-                    <a:pt x="7799693" y="0"/>
-                  </a:lnTo>
-                  <a:lnTo>
-                    <a:pt x="7799693" y="0"/>
+                    <a:pt x="7660515" y="0"/>
+                  </a:lnTo>
+                  <a:lnTo>
+                    <a:pt x="7660515" y="0"/>
                   </a:lnTo>
                 </a:path>
               </a:pathLst>
@@ -2443,21 +2435,21 @@
           </p:nvSpPr>
           <p:spPr>
             <a:xfrm>
-              <a:off x="1531834" y="2073503"/>
-              <a:ext cx="0" cy="3649639"/>
+              <a:off x="887106" y="2352625"/>
+              <a:ext cx="7660515" cy="0"/>
             </a:xfrm>
             <a:custGeom>
               <a:avLst/>
               <a:pathLst>
-                <a:path w="0" h="3649639">
+                <a:path w="7660515" h="0">
                   <a:moveTo>
-                    <a:pt x="0" y="3649639"/>
+                    <a:pt x="0" y="0"/>
                   </a:moveTo>
                   <a:lnTo>
-                    <a:pt x="0" y="0"/>
-                  </a:lnTo>
-                  <a:lnTo>
-                    <a:pt x="0" y="0"/>
+                    <a:pt x="7660515" y="0"/>
+                  </a:lnTo>
+                  <a:lnTo>
+                    <a:pt x="7660515" y="0"/>
                   </a:lnTo>
                 </a:path>
               </a:pathLst>
@@ -2486,15 +2478,15 @@
           </p:nvSpPr>
           <p:spPr>
             <a:xfrm>
-              <a:off x="3586410" y="2073503"/>
-              <a:ext cx="0" cy="3649639"/>
+              <a:off x="1588677" y="2143092"/>
+              <a:ext cx="0" cy="1317069"/>
             </a:xfrm>
             <a:custGeom>
               <a:avLst/>
               <a:pathLst>
-                <a:path w="0" h="3649639">
+                <a:path w="0" h="1317069">
                   <a:moveTo>
-                    <a:pt x="0" y="3649639"/>
+                    <a:pt x="0" y="1317069"/>
                   </a:moveTo>
                   <a:lnTo>
                     <a:pt x="0" y="0"/>
@@ -2529,15 +2521,15 @@
           </p:nvSpPr>
           <p:spPr>
             <a:xfrm>
-              <a:off x="5640985" y="2073503"/>
-              <a:ext cx="0" cy="3649639"/>
+              <a:off x="3606590" y="2143092"/>
+              <a:ext cx="0" cy="1317069"/>
             </a:xfrm>
             <a:custGeom>
               <a:avLst/>
               <a:pathLst>
-                <a:path w="0" h="3649639">
+                <a:path w="0" h="1317069">
                   <a:moveTo>
-                    <a:pt x="0" y="3649639"/>
+                    <a:pt x="0" y="1317069"/>
                   </a:moveTo>
                   <a:lnTo>
                     <a:pt x="0" y="0"/>
@@ -2572,15 +2564,15 @@
           </p:nvSpPr>
           <p:spPr>
             <a:xfrm>
-              <a:off x="7695561" y="2073503"/>
-              <a:ext cx="0" cy="3649639"/>
+              <a:off x="5624504" y="2143092"/>
+              <a:ext cx="0" cy="1317069"/>
             </a:xfrm>
             <a:custGeom>
               <a:avLst/>
               <a:pathLst>
-                <a:path w="0" h="3649639">
+                <a:path w="0" h="1317069">
                   <a:moveTo>
-                    <a:pt x="0" y="3649639"/>
+                    <a:pt x="0" y="1317069"/>
                   </a:moveTo>
                   <a:lnTo>
                     <a:pt x="0" y="0"/>
@@ -2615,26 +2607,26 @@
           </p:nvSpPr>
           <p:spPr>
             <a:xfrm>
-              <a:off x="817517" y="5557249"/>
-              <a:ext cx="7799693" cy="0"/>
+              <a:off x="7642418" y="2143092"/>
+              <a:ext cx="0" cy="1317069"/>
             </a:xfrm>
             <a:custGeom>
               <a:avLst/>
               <a:pathLst>
-                <a:path w="7799693" h="0">
+                <a:path w="0" h="1317069">
                   <a:moveTo>
+                    <a:pt x="0" y="1317069"/>
+                  </a:moveTo>
+                  <a:lnTo>
                     <a:pt x="0" y="0"/>
-                  </a:moveTo>
-                  <a:lnTo>
-                    <a:pt x="7799693" y="0"/>
-                  </a:lnTo>
-                  <a:lnTo>
-                    <a:pt x="7799693" y="0"/>
+                  </a:lnTo>
+                  <a:lnTo>
+                    <a:pt x="0" y="0"/>
                   </a:lnTo>
                 </a:path>
               </a:pathLst>
             </a:custGeom>
-            <a:ln w="13550" cap="flat">
+            <a:ln w="6775" cap="flat">
               <a:solidFill>
                 <a:srgbClr val="EBEBEB">
                   <a:alpha val="100000"/>
@@ -2658,21 +2650,21 @@
           </p:nvSpPr>
           <p:spPr>
             <a:xfrm>
-              <a:off x="817517" y="4727786"/>
-              <a:ext cx="7799693" cy="0"/>
+              <a:off x="887106" y="3400294"/>
+              <a:ext cx="7660515" cy="0"/>
             </a:xfrm>
             <a:custGeom>
               <a:avLst/>
               <a:pathLst>
-                <a:path w="7799693" h="0">
+                <a:path w="7660515" h="0">
                   <a:moveTo>
                     <a:pt x="0" y="0"/>
                   </a:moveTo>
                   <a:lnTo>
-                    <a:pt x="7799693" y="0"/>
-                  </a:lnTo>
-                  <a:lnTo>
-                    <a:pt x="7799693" y="0"/>
+                    <a:pt x="7660515" y="0"/>
+                  </a:lnTo>
+                  <a:lnTo>
+                    <a:pt x="7660515" y="0"/>
                   </a:lnTo>
                 </a:path>
               </a:pathLst>
@@ -2701,21 +2693,21 @@
           </p:nvSpPr>
           <p:spPr>
             <a:xfrm>
-              <a:off x="817517" y="3898322"/>
-              <a:ext cx="7799693" cy="0"/>
+              <a:off x="887106" y="3100960"/>
+              <a:ext cx="7660515" cy="0"/>
             </a:xfrm>
             <a:custGeom>
               <a:avLst/>
               <a:pathLst>
-                <a:path w="7799693" h="0">
+                <a:path w="7660515" h="0">
                   <a:moveTo>
                     <a:pt x="0" y="0"/>
                   </a:moveTo>
                   <a:lnTo>
-                    <a:pt x="7799693" y="0"/>
-                  </a:lnTo>
-                  <a:lnTo>
-                    <a:pt x="7799693" y="0"/>
+                    <a:pt x="7660515" y="0"/>
+                  </a:lnTo>
+                  <a:lnTo>
+                    <a:pt x="7660515" y="0"/>
                   </a:lnTo>
                 </a:path>
               </a:pathLst>
@@ -2744,21 +2736,21 @@
           </p:nvSpPr>
           <p:spPr>
             <a:xfrm>
-              <a:off x="817517" y="3068859"/>
-              <a:ext cx="7799693" cy="0"/>
+              <a:off x="887106" y="2801626"/>
+              <a:ext cx="7660515" cy="0"/>
             </a:xfrm>
             <a:custGeom>
               <a:avLst/>
               <a:pathLst>
-                <a:path w="7799693" h="0">
+                <a:path w="7660515" h="0">
                   <a:moveTo>
                     <a:pt x="0" y="0"/>
                   </a:moveTo>
                   <a:lnTo>
-                    <a:pt x="7799693" y="0"/>
-                  </a:lnTo>
-                  <a:lnTo>
-                    <a:pt x="7799693" y="0"/>
+                    <a:pt x="7660515" y="0"/>
+                  </a:lnTo>
+                  <a:lnTo>
+                    <a:pt x="7660515" y="0"/>
                   </a:lnTo>
                 </a:path>
               </a:pathLst>
@@ -2787,21 +2779,21 @@
           </p:nvSpPr>
           <p:spPr>
             <a:xfrm>
-              <a:off x="817517" y="2239395"/>
-              <a:ext cx="7799693" cy="0"/>
+              <a:off x="887106" y="2502292"/>
+              <a:ext cx="7660515" cy="0"/>
             </a:xfrm>
             <a:custGeom>
               <a:avLst/>
               <a:pathLst>
-                <a:path w="7799693" h="0">
+                <a:path w="7660515" h="0">
                   <a:moveTo>
                     <a:pt x="0" y="0"/>
                   </a:moveTo>
                   <a:lnTo>
-                    <a:pt x="7799693" y="0"/>
-                  </a:lnTo>
-                  <a:lnTo>
-                    <a:pt x="7799693" y="0"/>
+                    <a:pt x="7660515" y="0"/>
+                  </a:lnTo>
+                  <a:lnTo>
+                    <a:pt x="7660515" y="0"/>
                   </a:lnTo>
                 </a:path>
               </a:pathLst>
@@ -2830,21 +2822,21 @@
           </p:nvSpPr>
           <p:spPr>
             <a:xfrm>
-              <a:off x="2559122" y="2073503"/>
-              <a:ext cx="0" cy="3649639"/>
+              <a:off x="887106" y="2202958"/>
+              <a:ext cx="7660515" cy="0"/>
             </a:xfrm>
             <a:custGeom>
               <a:avLst/>
               <a:pathLst>
-                <a:path w="0" h="3649639">
+                <a:path w="7660515" h="0">
                   <a:moveTo>
-                    <a:pt x="0" y="3649639"/>
+                    <a:pt x="0" y="0"/>
                   </a:moveTo>
                   <a:lnTo>
-                    <a:pt x="0" y="0"/>
-                  </a:lnTo>
-                  <a:lnTo>
-                    <a:pt x="0" y="0"/>
+                    <a:pt x="7660515" y="0"/>
+                  </a:lnTo>
+                  <a:lnTo>
+                    <a:pt x="7660515" y="0"/>
                   </a:lnTo>
                 </a:path>
               </a:pathLst>
@@ -2873,15 +2865,15 @@
           </p:nvSpPr>
           <p:spPr>
             <a:xfrm>
-              <a:off x="4613698" y="2073503"/>
-              <a:ext cx="0" cy="3649639"/>
+              <a:off x="2597634" y="2143092"/>
+              <a:ext cx="0" cy="1317069"/>
             </a:xfrm>
             <a:custGeom>
               <a:avLst/>
               <a:pathLst>
-                <a:path w="0" h="3649639">
+                <a:path w="0" h="1317069">
                   <a:moveTo>
-                    <a:pt x="0" y="3649639"/>
+                    <a:pt x="0" y="1317069"/>
                   </a:moveTo>
                   <a:lnTo>
                     <a:pt x="0" y="0"/>
@@ -2916,15 +2908,15 @@
           </p:nvSpPr>
           <p:spPr>
             <a:xfrm>
-              <a:off x="6668273" y="2073503"/>
-              <a:ext cx="0" cy="3649639"/>
+              <a:off x="4615547" y="2143092"/>
+              <a:ext cx="0" cy="1317069"/>
             </a:xfrm>
             <a:custGeom>
               <a:avLst/>
               <a:pathLst>
-                <a:path w="0" h="3649639">
+                <a:path w="0" h="1317069">
                   <a:moveTo>
-                    <a:pt x="0" y="3649639"/>
+                    <a:pt x="0" y="1317069"/>
                   </a:moveTo>
                   <a:lnTo>
                     <a:pt x="0" y="0"/>
@@ -2953,522 +2945,565 @@
         </p:sp>
         <p:sp>
           <p:nvSpPr>
-            <p:cNvPr id="20" name="pg20"/>
+            <p:cNvPr id="20" name="pl20"/>
             <p:cNvSpPr/>
             <p:nvPr/>
           </p:nvSpPr>
           <p:spPr>
             <a:xfrm>
-              <a:off x="1172049" y="2073503"/>
-              <a:ext cx="7090630" cy="3480712"/>
+              <a:off x="6633461" y="2143092"/>
+              <a:ext cx="0" cy="1317069"/>
             </a:xfrm>
             <a:custGeom>
               <a:avLst/>
               <a:pathLst>
-                <a:path w="7090630" h="3480712">
+                <a:path w="0" h="1317069">
                   <a:moveTo>
-                    <a:pt x="2326816" y="0"/>
+                    <a:pt x="0" y="1317069"/>
                   </a:moveTo>
                   <a:lnTo>
-                    <a:pt x="2363543" y="188769"/>
-                  </a:lnTo>
-                  <a:lnTo>
-                    <a:pt x="2435165" y="519903"/>
-                  </a:lnTo>
-                  <a:lnTo>
-                    <a:pt x="2506788" y="817759"/>
-                  </a:lnTo>
-                  <a:lnTo>
-                    <a:pt x="2578410" y="1085681"/>
-                  </a:lnTo>
-                  <a:lnTo>
-                    <a:pt x="2650033" y="1326678"/>
-                  </a:lnTo>
-                  <a:lnTo>
-                    <a:pt x="2721655" y="1543456"/>
-                  </a:lnTo>
-                  <a:lnTo>
-                    <a:pt x="2793278" y="1738448"/>
-                  </a:lnTo>
-                  <a:lnTo>
-                    <a:pt x="2864901" y="1913844"/>
-                  </a:lnTo>
-                  <a:lnTo>
-                    <a:pt x="2936523" y="2071614"/>
-                  </a:lnTo>
-                  <a:lnTo>
-                    <a:pt x="3008146" y="2213528"/>
-                  </a:lnTo>
-                  <a:lnTo>
-                    <a:pt x="3079768" y="2341181"/>
-                  </a:lnTo>
-                  <a:lnTo>
-                    <a:pt x="3151391" y="2456004"/>
-                  </a:lnTo>
-                  <a:lnTo>
-                    <a:pt x="3223013" y="2559289"/>
-                  </a:lnTo>
-                  <a:lnTo>
-                    <a:pt x="3294636" y="2652194"/>
-                  </a:lnTo>
-                  <a:lnTo>
-                    <a:pt x="3366258" y="2661893"/>
-                  </a:lnTo>
-                  <a:lnTo>
-                    <a:pt x="3437881" y="2669616"/>
-                  </a:lnTo>
-                  <a:lnTo>
-                    <a:pt x="3509503" y="2677266"/>
-                  </a:lnTo>
-                  <a:lnTo>
-                    <a:pt x="3581126" y="2684845"/>
-                  </a:lnTo>
-                  <a:lnTo>
-                    <a:pt x="3652748" y="2692352"/>
-                  </a:lnTo>
-                  <a:lnTo>
-                    <a:pt x="3724371" y="2699789"/>
-                  </a:lnTo>
-                  <a:lnTo>
-                    <a:pt x="3795993" y="2707155"/>
-                  </a:lnTo>
-                  <a:lnTo>
-                    <a:pt x="3867616" y="2714453"/>
-                  </a:lnTo>
-                  <a:lnTo>
-                    <a:pt x="3939238" y="2721682"/>
-                  </a:lnTo>
-                  <a:lnTo>
-                    <a:pt x="4010861" y="2728843"/>
-                  </a:lnTo>
-                  <a:lnTo>
-                    <a:pt x="4082483" y="2735937"/>
-                  </a:lnTo>
-                  <a:lnTo>
-                    <a:pt x="4154106" y="2742964"/>
-                  </a:lnTo>
-                  <a:lnTo>
-                    <a:pt x="4225729" y="2749925"/>
-                  </a:lnTo>
-                  <a:lnTo>
-                    <a:pt x="4297351" y="2756821"/>
-                  </a:lnTo>
-                  <a:lnTo>
-                    <a:pt x="4368974" y="2763651"/>
-                  </a:lnTo>
-                  <a:lnTo>
-                    <a:pt x="4440596" y="2770418"/>
-                  </a:lnTo>
-                  <a:lnTo>
-                    <a:pt x="4512219" y="2777121"/>
-                  </a:lnTo>
-                  <a:lnTo>
-                    <a:pt x="4583841" y="2783761"/>
-                  </a:lnTo>
-                  <a:lnTo>
-                    <a:pt x="4655464" y="2790339"/>
-                  </a:lnTo>
-                  <a:lnTo>
-                    <a:pt x="4727086" y="2796855"/>
-                  </a:lnTo>
-                  <a:lnTo>
-                    <a:pt x="4798709" y="2803310"/>
-                  </a:lnTo>
-                  <a:lnTo>
-                    <a:pt x="4870331" y="2809704"/>
-                  </a:lnTo>
-                  <a:lnTo>
-                    <a:pt x="4941954" y="2816037"/>
-                  </a:lnTo>
-                  <a:lnTo>
-                    <a:pt x="5013576" y="2822312"/>
-                  </a:lnTo>
-                  <a:lnTo>
-                    <a:pt x="5085199" y="2828527"/>
-                  </a:lnTo>
-                  <a:lnTo>
-                    <a:pt x="5156821" y="2834684"/>
-                  </a:lnTo>
-                  <a:lnTo>
-                    <a:pt x="5228444" y="2840784"/>
-                  </a:lnTo>
-                  <a:lnTo>
-                    <a:pt x="5300066" y="2846825"/>
-                  </a:lnTo>
-                  <a:lnTo>
-                    <a:pt x="5371689" y="2852810"/>
-                  </a:lnTo>
-                  <a:lnTo>
-                    <a:pt x="5443311" y="2858739"/>
-                  </a:lnTo>
-                  <a:lnTo>
-                    <a:pt x="5514934" y="2864612"/>
-                  </a:lnTo>
-                  <a:lnTo>
-                    <a:pt x="5586557" y="2870430"/>
-                  </a:lnTo>
-                  <a:lnTo>
-                    <a:pt x="5658179" y="2876194"/>
-                  </a:lnTo>
-                  <a:lnTo>
-                    <a:pt x="5729802" y="2881903"/>
-                  </a:lnTo>
-                  <a:lnTo>
-                    <a:pt x="5801424" y="2887558"/>
-                  </a:lnTo>
-                  <a:lnTo>
-                    <a:pt x="5873047" y="2893161"/>
-                  </a:lnTo>
-                  <a:lnTo>
-                    <a:pt x="5944669" y="2898710"/>
-                  </a:lnTo>
-                  <a:lnTo>
-                    <a:pt x="6016292" y="2904208"/>
-                  </a:lnTo>
-                  <a:lnTo>
-                    <a:pt x="6087914" y="2909654"/>
-                  </a:lnTo>
-                  <a:lnTo>
-                    <a:pt x="6159537" y="2915048"/>
-                  </a:lnTo>
-                  <a:lnTo>
-                    <a:pt x="6231159" y="2920392"/>
-                  </a:lnTo>
-                  <a:lnTo>
-                    <a:pt x="6302782" y="2925686"/>
-                  </a:lnTo>
-                  <a:lnTo>
-                    <a:pt x="6374404" y="2930930"/>
-                  </a:lnTo>
-                  <a:lnTo>
-                    <a:pt x="6446027" y="2936125"/>
-                  </a:lnTo>
-                  <a:lnTo>
-                    <a:pt x="6517649" y="2941271"/>
-                  </a:lnTo>
-                  <a:lnTo>
-                    <a:pt x="6589272" y="2946369"/>
-                  </a:lnTo>
-                  <a:lnTo>
-                    <a:pt x="6660894" y="2951418"/>
-                  </a:lnTo>
-                  <a:lnTo>
-                    <a:pt x="6732517" y="2956421"/>
-                  </a:lnTo>
-                  <a:lnTo>
-                    <a:pt x="6804139" y="2961376"/>
-                  </a:lnTo>
-                  <a:lnTo>
-                    <a:pt x="6875762" y="2966284"/>
-                  </a:lnTo>
-                  <a:lnTo>
-                    <a:pt x="6947385" y="2971147"/>
-                  </a:lnTo>
-                  <a:lnTo>
-                    <a:pt x="7019007" y="2975964"/>
-                  </a:lnTo>
-                  <a:lnTo>
-                    <a:pt x="7090630" y="2980735"/>
-                  </a:lnTo>
-                  <a:lnTo>
-                    <a:pt x="7090630" y="3480712"/>
-                  </a:lnTo>
-                  <a:lnTo>
-                    <a:pt x="7019007" y="3480373"/>
-                  </a:lnTo>
-                  <a:lnTo>
-                    <a:pt x="6947385" y="3479996"/>
-                  </a:lnTo>
-                  <a:lnTo>
-                    <a:pt x="6875762" y="3479577"/>
-                  </a:lnTo>
-                  <a:lnTo>
-                    <a:pt x="6804139" y="3479112"/>
-                  </a:lnTo>
-                  <a:lnTo>
-                    <a:pt x="6732517" y="3478594"/>
-                  </a:lnTo>
-                  <a:lnTo>
-                    <a:pt x="6660894" y="3478018"/>
-                  </a:lnTo>
-                  <a:lnTo>
-                    <a:pt x="6589272" y="3477378"/>
-                  </a:lnTo>
-                  <a:lnTo>
-                    <a:pt x="6517649" y="3476667"/>
-                  </a:lnTo>
-                  <a:lnTo>
-                    <a:pt x="6446027" y="3475876"/>
-                  </a:lnTo>
-                  <a:lnTo>
-                    <a:pt x="6374404" y="3474996"/>
-                  </a:lnTo>
-                  <a:lnTo>
-                    <a:pt x="6302782" y="3474019"/>
-                  </a:lnTo>
-                  <a:lnTo>
-                    <a:pt x="6231159" y="3472932"/>
-                  </a:lnTo>
-                  <a:lnTo>
-                    <a:pt x="6159537" y="3471724"/>
-                  </a:lnTo>
-                  <a:lnTo>
-                    <a:pt x="6087914" y="3470380"/>
-                  </a:lnTo>
-                  <a:lnTo>
-                    <a:pt x="6016292" y="3468887"/>
-                  </a:lnTo>
-                  <a:lnTo>
-                    <a:pt x="5944669" y="3467227"/>
-                  </a:lnTo>
-                  <a:lnTo>
-                    <a:pt x="5873047" y="3465381"/>
-                  </a:lnTo>
-                  <a:lnTo>
-                    <a:pt x="5801424" y="3463329"/>
-                  </a:lnTo>
-                  <a:lnTo>
-                    <a:pt x="5729802" y="3461048"/>
-                  </a:lnTo>
-                  <a:lnTo>
-                    <a:pt x="5658179" y="3458512"/>
-                  </a:lnTo>
-                  <a:lnTo>
-                    <a:pt x="5586557" y="3455693"/>
-                  </a:lnTo>
-                  <a:lnTo>
-                    <a:pt x="5514934" y="3452559"/>
-                  </a:lnTo>
-                  <a:lnTo>
-                    <a:pt x="5443311" y="3449075"/>
-                  </a:lnTo>
-                  <a:lnTo>
-                    <a:pt x="5371689" y="3445201"/>
-                  </a:lnTo>
-                  <a:lnTo>
-                    <a:pt x="5300066" y="3440894"/>
-                  </a:lnTo>
-                  <a:lnTo>
-                    <a:pt x="5228444" y="3436107"/>
-                  </a:lnTo>
-                  <a:lnTo>
-                    <a:pt x="5156821" y="3430784"/>
-                  </a:lnTo>
-                  <a:lnTo>
-                    <a:pt x="5085199" y="3424867"/>
-                  </a:lnTo>
-                  <a:lnTo>
-                    <a:pt x="5013576" y="3418289"/>
-                  </a:lnTo>
-                  <a:lnTo>
-                    <a:pt x="4941954" y="3410976"/>
-                  </a:lnTo>
-                  <a:lnTo>
-                    <a:pt x="4870331" y="3402846"/>
-                  </a:lnTo>
-                  <a:lnTo>
-                    <a:pt x="4798709" y="3393807"/>
-                  </a:lnTo>
-                  <a:lnTo>
-                    <a:pt x="4727086" y="3383759"/>
-                  </a:lnTo>
-                  <a:lnTo>
-                    <a:pt x="4655464" y="3372587"/>
-                  </a:lnTo>
-                  <a:lnTo>
-                    <a:pt x="4583841" y="3360168"/>
-                  </a:lnTo>
-                  <a:lnTo>
-                    <a:pt x="4512219" y="3346362"/>
-                  </a:lnTo>
-                  <a:lnTo>
-                    <a:pt x="4440596" y="3331012"/>
-                  </a:lnTo>
-                  <a:lnTo>
-                    <a:pt x="4368974" y="3313948"/>
-                  </a:lnTo>
-                  <a:lnTo>
-                    <a:pt x="4297351" y="3294978"/>
-                  </a:lnTo>
-                  <a:lnTo>
-                    <a:pt x="4225729" y="3273888"/>
-                  </a:lnTo>
-                  <a:lnTo>
-                    <a:pt x="4154106" y="3250441"/>
-                  </a:lnTo>
-                  <a:lnTo>
-                    <a:pt x="4082483" y="3224375"/>
-                  </a:lnTo>
-                  <a:lnTo>
-                    <a:pt x="4010861" y="3195397"/>
-                  </a:lnTo>
-                  <a:lnTo>
-                    <a:pt x="3939238" y="3163182"/>
-                  </a:lnTo>
-                  <a:lnTo>
-                    <a:pt x="3867616" y="3127367"/>
-                  </a:lnTo>
-                  <a:lnTo>
-                    <a:pt x="3795993" y="3087550"/>
-                  </a:lnTo>
-                  <a:lnTo>
-                    <a:pt x="3724371" y="3043286"/>
-                  </a:lnTo>
-                  <a:lnTo>
-                    <a:pt x="3652748" y="2994076"/>
-                  </a:lnTo>
-                  <a:lnTo>
-                    <a:pt x="3581126" y="2939367"/>
-                  </a:lnTo>
-                  <a:lnTo>
-                    <a:pt x="3509503" y="2878547"/>
-                  </a:lnTo>
-                  <a:lnTo>
-                    <a:pt x="3437881" y="2810932"/>
-                  </a:lnTo>
-                  <a:lnTo>
-                    <a:pt x="3366258" y="2735762"/>
-                  </a:lnTo>
-                  <a:lnTo>
-                    <a:pt x="3294636" y="2654097"/>
-                  </a:lnTo>
-                  <a:lnTo>
-                    <a:pt x="3223013" y="2646227"/>
-                  </a:lnTo>
-                  <a:lnTo>
-                    <a:pt x="3151391" y="2638282"/>
-                  </a:lnTo>
-                  <a:lnTo>
-                    <a:pt x="3079768" y="2630262"/>
-                  </a:lnTo>
-                  <a:lnTo>
-                    <a:pt x="3008146" y="2622166"/>
-                  </a:lnTo>
-                  <a:lnTo>
-                    <a:pt x="2936523" y="2613993"/>
-                  </a:lnTo>
-                  <a:lnTo>
-                    <a:pt x="2864901" y="2605742"/>
-                  </a:lnTo>
-                  <a:lnTo>
-                    <a:pt x="2793278" y="2597413"/>
-                  </a:lnTo>
-                  <a:lnTo>
-                    <a:pt x="2721655" y="2589005"/>
-                  </a:lnTo>
-                  <a:lnTo>
-                    <a:pt x="2650033" y="2580518"/>
-                  </a:lnTo>
-                  <a:lnTo>
-                    <a:pt x="2578410" y="2571950"/>
-                  </a:lnTo>
-                  <a:lnTo>
-                    <a:pt x="2506788" y="2563300"/>
-                  </a:lnTo>
-                  <a:lnTo>
-                    <a:pt x="2435165" y="2554569"/>
-                  </a:lnTo>
-                  <a:lnTo>
-                    <a:pt x="2363543" y="2545755"/>
-                  </a:lnTo>
-                  <a:lnTo>
-                    <a:pt x="2291920" y="2536857"/>
-                  </a:lnTo>
-                  <a:lnTo>
-                    <a:pt x="2220298" y="2527875"/>
-                  </a:lnTo>
-                  <a:lnTo>
-                    <a:pt x="2148675" y="2518807"/>
-                  </a:lnTo>
-                  <a:lnTo>
-                    <a:pt x="2077053" y="2509654"/>
-                  </a:lnTo>
-                  <a:lnTo>
-                    <a:pt x="2005430" y="2500414"/>
-                  </a:lnTo>
-                  <a:lnTo>
-                    <a:pt x="1933808" y="2491086"/>
-                  </a:lnTo>
-                  <a:lnTo>
-                    <a:pt x="1862185" y="2481669"/>
-                  </a:lnTo>
-                  <a:lnTo>
-                    <a:pt x="1790563" y="2472163"/>
-                  </a:lnTo>
-                  <a:lnTo>
-                    <a:pt x="1718940" y="2462567"/>
-                  </a:lnTo>
-                  <a:lnTo>
-                    <a:pt x="1647318" y="2452880"/>
-                  </a:lnTo>
-                  <a:lnTo>
-                    <a:pt x="1575695" y="2443102"/>
-                  </a:lnTo>
-                  <a:lnTo>
-                    <a:pt x="1504073" y="2433230"/>
-                  </a:lnTo>
-                  <a:lnTo>
-                    <a:pt x="1432450" y="2423265"/>
-                  </a:lnTo>
-                  <a:lnTo>
-                    <a:pt x="1360827" y="2413205"/>
-                  </a:lnTo>
-                  <a:lnTo>
-                    <a:pt x="1289205" y="2403050"/>
-                  </a:lnTo>
-                  <a:lnTo>
-                    <a:pt x="1217582" y="2392798"/>
-                  </a:lnTo>
-                  <a:lnTo>
-                    <a:pt x="1145960" y="2382449"/>
-                  </a:lnTo>
-                  <a:lnTo>
-                    <a:pt x="1074337" y="2372002"/>
-                  </a:lnTo>
-                  <a:lnTo>
-                    <a:pt x="1002715" y="2361456"/>
-                  </a:lnTo>
-                  <a:lnTo>
-                    <a:pt x="931092" y="2350810"/>
-                  </a:lnTo>
-                  <a:lnTo>
-                    <a:pt x="859470" y="2340063"/>
-                  </a:lnTo>
-                  <a:lnTo>
-                    <a:pt x="787847" y="2329214"/>
-                  </a:lnTo>
-                  <a:lnTo>
-                    <a:pt x="716225" y="2318262"/>
-                  </a:lnTo>
-                  <a:lnTo>
-                    <a:pt x="644602" y="2307206"/>
-                  </a:lnTo>
-                  <a:lnTo>
-                    <a:pt x="572980" y="2296046"/>
-                  </a:lnTo>
-                  <a:lnTo>
-                    <a:pt x="501357" y="2284779"/>
-                  </a:lnTo>
-                  <a:lnTo>
-                    <a:pt x="429735" y="2273405"/>
-                  </a:lnTo>
-                  <a:lnTo>
-                    <a:pt x="358112" y="2261924"/>
-                  </a:lnTo>
-                  <a:lnTo>
-                    <a:pt x="286490" y="2250334"/>
-                  </a:lnTo>
-                  <a:lnTo>
-                    <a:pt x="214867" y="2238634"/>
-                  </a:lnTo>
-                  <a:lnTo>
-                    <a:pt x="143245" y="2226822"/>
-                  </a:lnTo>
-                  <a:lnTo>
-                    <a:pt x="71622" y="2214899"/>
-                  </a:lnTo>
-                  <a:lnTo>
-                    <a:pt x="0" y="2202863"/>
+                    <a:pt x="0" y="0"/>
+                  </a:lnTo>
+                  <a:lnTo>
+                    <a:pt x="0" y="0"/>
+                  </a:lnTo>
+                </a:path>
+              </a:pathLst>
+            </a:custGeom>
+            <a:ln w="13550" cap="flat">
+              <a:solidFill>
+                <a:srgbClr val="EBEBEB">
+                  <a:alpha val="100000"/>
+                </a:srgbClr>
+              </a:solidFill>
+              <a:prstDash val="solid"/>
+              <a:round/>
+            </a:ln>
+          </p:spPr>
+          <p:txBody>
+            <a:bodyPr/>
+            <a:lstStyle/>
+            <a:p/>
+          </p:txBody>
+        </p:sp>
+        <p:sp>
+          <p:nvSpPr>
+            <p:cNvPr id="21" name="pg21"/>
+            <p:cNvSpPr/>
+            <p:nvPr/>
+          </p:nvSpPr>
+          <p:spPr>
+            <a:xfrm>
+              <a:off x="1235312" y="2143092"/>
+              <a:ext cx="6964104" cy="1256107"/>
+            </a:xfrm>
+            <a:custGeom>
+              <a:avLst/>
+              <a:pathLst>
+                <a:path w="6964104" h="1256107">
+                  <a:moveTo>
+                    <a:pt x="2285296" y="0"/>
+                  </a:moveTo>
+                  <a:lnTo>
+                    <a:pt x="2321368" y="68122"/>
+                  </a:lnTo>
+                  <a:lnTo>
+                    <a:pt x="2391712" y="187620"/>
+                  </a:lnTo>
+                  <a:lnTo>
+                    <a:pt x="2462057" y="295109"/>
+                  </a:lnTo>
+                  <a:lnTo>
+                    <a:pt x="2532401" y="391796"/>
+                  </a:lnTo>
+                  <a:lnTo>
+                    <a:pt x="2602746" y="478767"/>
+                  </a:lnTo>
+                  <a:lnTo>
+                    <a:pt x="2673090" y="556997"/>
+                  </a:lnTo>
+                  <a:lnTo>
+                    <a:pt x="2743435" y="627365"/>
+                  </a:lnTo>
+                  <a:lnTo>
+                    <a:pt x="2813779" y="690661"/>
+                  </a:lnTo>
+                  <a:lnTo>
+                    <a:pt x="2884124" y="747596"/>
+                  </a:lnTo>
+                  <a:lnTo>
+                    <a:pt x="2954468" y="798810"/>
+                  </a:lnTo>
+                  <a:lnTo>
+                    <a:pt x="3024813" y="844877"/>
+                  </a:lnTo>
+                  <a:lnTo>
+                    <a:pt x="3095157" y="886314"/>
+                  </a:lnTo>
+                  <a:lnTo>
+                    <a:pt x="3165502" y="923587"/>
+                  </a:lnTo>
+                  <a:lnTo>
+                    <a:pt x="3235846" y="957114"/>
+                  </a:lnTo>
+                  <a:lnTo>
+                    <a:pt x="3306191" y="960614"/>
+                  </a:lnTo>
+                  <a:lnTo>
+                    <a:pt x="3376535" y="963401"/>
+                  </a:lnTo>
+                  <a:lnTo>
+                    <a:pt x="3446880" y="966162"/>
+                  </a:lnTo>
+                  <a:lnTo>
+                    <a:pt x="3517224" y="968897"/>
+                  </a:lnTo>
+                  <a:lnTo>
+                    <a:pt x="3587569" y="971606"/>
+                  </a:lnTo>
+                  <a:lnTo>
+                    <a:pt x="3657913" y="974290"/>
+                  </a:lnTo>
+                  <a:lnTo>
+                    <a:pt x="3728257" y="976948"/>
+                  </a:lnTo>
+                  <a:lnTo>
+                    <a:pt x="3798602" y="979582"/>
+                  </a:lnTo>
+                  <a:lnTo>
+                    <a:pt x="3868946" y="982191"/>
+                  </a:lnTo>
+                  <a:lnTo>
+                    <a:pt x="3939291" y="984775"/>
+                  </a:lnTo>
+                  <a:lnTo>
+                    <a:pt x="4009635" y="987335"/>
+                  </a:lnTo>
+                  <a:lnTo>
+                    <a:pt x="4079980" y="989871"/>
+                  </a:lnTo>
+                  <a:lnTo>
+                    <a:pt x="4150324" y="992383"/>
+                  </a:lnTo>
+                  <a:lnTo>
+                    <a:pt x="4220669" y="994871"/>
+                  </a:lnTo>
+                  <a:lnTo>
+                    <a:pt x="4291013" y="997336"/>
+                  </a:lnTo>
+                  <a:lnTo>
+                    <a:pt x="4361358" y="999778"/>
+                  </a:lnTo>
+                  <a:lnTo>
+                    <a:pt x="4431702" y="1002197"/>
+                  </a:lnTo>
+                  <a:lnTo>
+                    <a:pt x="4502047" y="1004594"/>
+                  </a:lnTo>
+                  <a:lnTo>
+                    <a:pt x="4572391" y="1006967"/>
+                  </a:lnTo>
+                  <a:lnTo>
+                    <a:pt x="4642736" y="1009319"/>
+                  </a:lnTo>
+                  <a:lnTo>
+                    <a:pt x="4713080" y="1011648"/>
+                  </a:lnTo>
+                  <a:lnTo>
+                    <a:pt x="4783425" y="1013956"/>
+                  </a:lnTo>
+                  <a:lnTo>
+                    <a:pt x="4853769" y="1016241"/>
+                  </a:lnTo>
+                  <a:lnTo>
+                    <a:pt x="4924114" y="1018506"/>
+                  </a:lnTo>
+                  <a:lnTo>
+                    <a:pt x="4994458" y="1020749"/>
+                  </a:lnTo>
+                  <a:lnTo>
+                    <a:pt x="5064803" y="1022971"/>
+                  </a:lnTo>
+                  <a:lnTo>
+                    <a:pt x="5135147" y="1025172"/>
+                  </a:lnTo>
+                  <a:lnTo>
+                    <a:pt x="5205492" y="1027352"/>
+                  </a:lnTo>
+                  <a:lnTo>
+                    <a:pt x="5275836" y="1029512"/>
+                  </a:lnTo>
+                  <a:lnTo>
+                    <a:pt x="5346181" y="1031651"/>
+                  </a:lnTo>
+                  <a:lnTo>
+                    <a:pt x="5416525" y="1033771"/>
+                  </a:lnTo>
+                  <a:lnTo>
+                    <a:pt x="5486870" y="1035870"/>
+                  </a:lnTo>
+                  <a:lnTo>
+                    <a:pt x="5557214" y="1037950"/>
+                  </a:lnTo>
+                  <a:lnTo>
+                    <a:pt x="5627559" y="1040011"/>
+                  </a:lnTo>
+                  <a:lnTo>
+                    <a:pt x="5697903" y="1042052"/>
+                  </a:lnTo>
+                  <a:lnTo>
+                    <a:pt x="5768248" y="1044073"/>
+                  </a:lnTo>
+                  <a:lnTo>
+                    <a:pt x="5838592" y="1046076"/>
+                  </a:lnTo>
+                  <a:lnTo>
+                    <a:pt x="5908937" y="1048060"/>
+                  </a:lnTo>
+                  <a:lnTo>
+                    <a:pt x="5979281" y="1050025"/>
+                  </a:lnTo>
+                  <a:lnTo>
+                    <a:pt x="6049626" y="1051972"/>
+                  </a:lnTo>
+                  <a:lnTo>
+                    <a:pt x="6119970" y="1053901"/>
+                  </a:lnTo>
+                  <a:lnTo>
+                    <a:pt x="6190315" y="1055811"/>
+                  </a:lnTo>
+                  <a:lnTo>
+                    <a:pt x="6260659" y="1057703"/>
+                  </a:lnTo>
+                  <a:lnTo>
+                    <a:pt x="6331004" y="1059578"/>
+                  </a:lnTo>
+                  <a:lnTo>
+                    <a:pt x="6401348" y="1061435"/>
+                  </a:lnTo>
+                  <a:lnTo>
+                    <a:pt x="6471693" y="1063275"/>
+                  </a:lnTo>
+                  <a:lnTo>
+                    <a:pt x="6542037" y="1065097"/>
+                  </a:lnTo>
+                  <a:lnTo>
+                    <a:pt x="6612382" y="1066902"/>
+                  </a:lnTo>
+                  <a:lnTo>
+                    <a:pt x="6682726" y="1068691"/>
+                  </a:lnTo>
+                  <a:lnTo>
+                    <a:pt x="6753071" y="1070462"/>
+                  </a:lnTo>
+                  <a:lnTo>
+                    <a:pt x="6823415" y="1072217"/>
+                  </a:lnTo>
+                  <a:lnTo>
+                    <a:pt x="6893760" y="1073955"/>
+                  </a:lnTo>
+                  <a:lnTo>
+                    <a:pt x="6964104" y="1075677"/>
+                  </a:lnTo>
+                  <a:lnTo>
+                    <a:pt x="6964104" y="1256107"/>
+                  </a:lnTo>
+                  <a:lnTo>
+                    <a:pt x="6893760" y="1255984"/>
+                  </a:lnTo>
+                  <a:lnTo>
+                    <a:pt x="6823415" y="1255848"/>
+                  </a:lnTo>
+                  <a:lnTo>
+                    <a:pt x="6753071" y="1255697"/>
+                  </a:lnTo>
+                  <a:lnTo>
+                    <a:pt x="6682726" y="1255529"/>
+                  </a:lnTo>
+                  <a:lnTo>
+                    <a:pt x="6612382" y="1255342"/>
+                  </a:lnTo>
+                  <a:lnTo>
+                    <a:pt x="6542037" y="1255135"/>
+                  </a:lnTo>
+                  <a:lnTo>
+                    <a:pt x="6471693" y="1254904"/>
+                  </a:lnTo>
+                  <a:lnTo>
+                    <a:pt x="6401348" y="1254647"/>
+                  </a:lnTo>
+                  <a:lnTo>
+                    <a:pt x="6331004" y="1254361"/>
+                  </a:lnTo>
+                  <a:lnTo>
+                    <a:pt x="6260659" y="1254044"/>
+                  </a:lnTo>
+                  <a:lnTo>
+                    <a:pt x="6190315" y="1253691"/>
+                  </a:lnTo>
+                  <a:lnTo>
+                    <a:pt x="6119970" y="1253299"/>
+                  </a:lnTo>
+                  <a:lnTo>
+                    <a:pt x="6049626" y="1252863"/>
+                  </a:lnTo>
+                  <a:lnTo>
+                    <a:pt x="5979281" y="1252378"/>
+                  </a:lnTo>
+                  <a:lnTo>
+                    <a:pt x="5908937" y="1251839"/>
+                  </a:lnTo>
+                  <a:lnTo>
+                    <a:pt x="5838592" y="1251240"/>
+                  </a:lnTo>
+                  <a:lnTo>
+                    <a:pt x="5768248" y="1250574"/>
+                  </a:lnTo>
+                  <a:lnTo>
+                    <a:pt x="5697903" y="1249834"/>
+                  </a:lnTo>
+                  <a:lnTo>
+                    <a:pt x="5627559" y="1249011"/>
+                  </a:lnTo>
+                  <a:lnTo>
+                    <a:pt x="5557214" y="1248095"/>
+                  </a:lnTo>
+                  <a:lnTo>
+                    <a:pt x="5486870" y="1247078"/>
+                  </a:lnTo>
+                  <a:lnTo>
+                    <a:pt x="5416525" y="1245947"/>
+                  </a:lnTo>
+                  <a:lnTo>
+                    <a:pt x="5346181" y="1244690"/>
+                  </a:lnTo>
+                  <a:lnTo>
+                    <a:pt x="5275836" y="1243292"/>
+                  </a:lnTo>
+                  <a:lnTo>
+                    <a:pt x="5205492" y="1241738"/>
+                  </a:lnTo>
+                  <a:lnTo>
+                    <a:pt x="5135147" y="1240010"/>
+                  </a:lnTo>
+                  <a:lnTo>
+                    <a:pt x="5064803" y="1238089"/>
+                  </a:lnTo>
+                  <a:lnTo>
+                    <a:pt x="4994458" y="1235954"/>
+                  </a:lnTo>
+                  <a:lnTo>
+                    <a:pt x="4924114" y="1233580"/>
+                  </a:lnTo>
+                  <a:lnTo>
+                    <a:pt x="4853769" y="1230941"/>
+                  </a:lnTo>
+                  <a:lnTo>
+                    <a:pt x="4783425" y="1228007"/>
+                  </a:lnTo>
+                  <a:lnTo>
+                    <a:pt x="4713080" y="1224745"/>
+                  </a:lnTo>
+                  <a:lnTo>
+                    <a:pt x="4642736" y="1221119"/>
+                  </a:lnTo>
+                  <a:lnTo>
+                    <a:pt x="4572391" y="1217087"/>
+                  </a:lnTo>
+                  <a:lnTo>
+                    <a:pt x="4502047" y="1212605"/>
+                  </a:lnTo>
+                  <a:lnTo>
+                    <a:pt x="4431702" y="1207623"/>
+                  </a:lnTo>
+                  <a:lnTo>
+                    <a:pt x="4361358" y="1202084"/>
+                  </a:lnTo>
+                  <a:lnTo>
+                    <a:pt x="4291013" y="1195926"/>
+                  </a:lnTo>
+                  <a:lnTo>
+                    <a:pt x="4220669" y="1189080"/>
+                  </a:lnTo>
+                  <a:lnTo>
+                    <a:pt x="4150324" y="1181469"/>
+                  </a:lnTo>
+                  <a:lnTo>
+                    <a:pt x="4079980" y="1173007"/>
+                  </a:lnTo>
+                  <a:lnTo>
+                    <a:pt x="4009635" y="1163601"/>
+                  </a:lnTo>
+                  <a:lnTo>
+                    <a:pt x="3939291" y="1153143"/>
+                  </a:lnTo>
+                  <a:lnTo>
+                    <a:pt x="3868946" y="1141518"/>
+                  </a:lnTo>
+                  <a:lnTo>
+                    <a:pt x="3798602" y="1128593"/>
+                  </a:lnTo>
+                  <a:lnTo>
+                    <a:pt x="3728257" y="1114224"/>
+                  </a:lnTo>
+                  <a:lnTo>
+                    <a:pt x="3657913" y="1098250"/>
+                  </a:lnTo>
+                  <a:lnTo>
+                    <a:pt x="3587569" y="1080491"/>
+                  </a:lnTo>
+                  <a:lnTo>
+                    <a:pt x="3517224" y="1060748"/>
+                  </a:lnTo>
+                  <a:lnTo>
+                    <a:pt x="3446880" y="1038800"/>
+                  </a:lnTo>
+                  <a:lnTo>
+                    <a:pt x="3376535" y="1014399"/>
+                  </a:lnTo>
+                  <a:lnTo>
+                    <a:pt x="3306191" y="987272"/>
+                  </a:lnTo>
+                  <a:lnTo>
+                    <a:pt x="3235846" y="957801"/>
+                  </a:lnTo>
+                  <a:lnTo>
+                    <a:pt x="3165502" y="954961"/>
+                  </a:lnTo>
+                  <a:lnTo>
+                    <a:pt x="3095157" y="952094"/>
+                  </a:lnTo>
+                  <a:lnTo>
+                    <a:pt x="3024813" y="949199"/>
+                  </a:lnTo>
+                  <a:lnTo>
+                    <a:pt x="2954468" y="946278"/>
+                  </a:lnTo>
+                  <a:lnTo>
+                    <a:pt x="2884124" y="943328"/>
+                  </a:lnTo>
+                  <a:lnTo>
+                    <a:pt x="2813779" y="940351"/>
+                  </a:lnTo>
+                  <a:lnTo>
+                    <a:pt x="2743435" y="937345"/>
+                  </a:lnTo>
+                  <a:lnTo>
+                    <a:pt x="2673090" y="934311"/>
+                  </a:lnTo>
+                  <a:lnTo>
+                    <a:pt x="2602746" y="931248"/>
+                  </a:lnTo>
+                  <a:lnTo>
+                    <a:pt x="2532401" y="928156"/>
+                  </a:lnTo>
+                  <a:lnTo>
+                    <a:pt x="2462057" y="925035"/>
+                  </a:lnTo>
+                  <a:lnTo>
+                    <a:pt x="2391712" y="921884"/>
+                  </a:lnTo>
+                  <a:lnTo>
+                    <a:pt x="2321368" y="918703"/>
+                  </a:lnTo>
+                  <a:lnTo>
+                    <a:pt x="2251023" y="915492"/>
+                  </a:lnTo>
+                  <a:lnTo>
+                    <a:pt x="2180679" y="912250"/>
+                  </a:lnTo>
+                  <a:lnTo>
+                    <a:pt x="2110334" y="908978"/>
+                  </a:lnTo>
+                  <a:lnTo>
+                    <a:pt x="2039990" y="905675"/>
+                  </a:lnTo>
+                  <a:lnTo>
+                    <a:pt x="1969645" y="902340"/>
+                  </a:lnTo>
+                  <a:lnTo>
+                    <a:pt x="1899301" y="898974"/>
+                  </a:lnTo>
+                  <a:lnTo>
+                    <a:pt x="1828956" y="895576"/>
+                  </a:lnTo>
+                  <a:lnTo>
+                    <a:pt x="1758612" y="892145"/>
+                  </a:lnTo>
+                  <a:lnTo>
+                    <a:pt x="1688267" y="888682"/>
+                  </a:lnTo>
+                  <a:lnTo>
+                    <a:pt x="1617923" y="885187"/>
+                  </a:lnTo>
+                  <a:lnTo>
+                    <a:pt x="1547578" y="881658"/>
+                  </a:lnTo>
+                  <a:lnTo>
+                    <a:pt x="1477234" y="878095"/>
+                  </a:lnTo>
+                  <a:lnTo>
+                    <a:pt x="1406889" y="874499"/>
+                  </a:lnTo>
+                  <a:lnTo>
+                    <a:pt x="1336545" y="870869"/>
+                  </a:lnTo>
+                  <a:lnTo>
+                    <a:pt x="1266200" y="867204"/>
+                  </a:lnTo>
+                  <a:lnTo>
+                    <a:pt x="1195856" y="863504"/>
+                  </a:lnTo>
+                  <a:lnTo>
+                    <a:pt x="1125511" y="859770"/>
+                  </a:lnTo>
+                  <a:lnTo>
+                    <a:pt x="1055167" y="856000"/>
+                  </a:lnTo>
+                  <a:lnTo>
+                    <a:pt x="984822" y="852194"/>
+                  </a:lnTo>
+                  <a:lnTo>
+                    <a:pt x="914478" y="848352"/>
+                  </a:lnTo>
+                  <a:lnTo>
+                    <a:pt x="844133" y="844473"/>
+                  </a:lnTo>
+                  <a:lnTo>
+                    <a:pt x="773789" y="840558"/>
+                  </a:lnTo>
+                  <a:lnTo>
+                    <a:pt x="703444" y="836606"/>
+                  </a:lnTo>
+                  <a:lnTo>
+                    <a:pt x="633100" y="832616"/>
+                  </a:lnTo>
+                  <a:lnTo>
+                    <a:pt x="562755" y="828588"/>
+                  </a:lnTo>
+                  <a:lnTo>
+                    <a:pt x="492411" y="824523"/>
+                  </a:lnTo>
+                  <a:lnTo>
+                    <a:pt x="422066" y="820418"/>
+                  </a:lnTo>
+                  <a:lnTo>
+                    <a:pt x="351722" y="816275"/>
+                  </a:lnTo>
+                  <a:lnTo>
+                    <a:pt x="281377" y="812092"/>
+                  </a:lnTo>
+                  <a:lnTo>
+                    <a:pt x="211033" y="807870"/>
+                  </a:lnTo>
+                  <a:lnTo>
+                    <a:pt x="140688" y="803607"/>
+                  </a:lnTo>
+                  <a:lnTo>
+                    <a:pt x="70344" y="799305"/>
+                  </a:lnTo>
+                  <a:lnTo>
+                    <a:pt x="0" y="794961"/>
                   </a:lnTo>
                   <a:lnTo>
                     <a:pt x="0" y="0"/>
@@ -3491,547 +3526,222 @@
         </p:sp>
         <p:sp>
           <p:nvSpPr>
-            <p:cNvPr id="21" name="pl21"/>
-            <p:cNvSpPr/>
-            <p:nvPr/>
-          </p:nvSpPr>
-          <p:spPr>
-            <a:xfrm>
-              <a:off x="3498866" y="2073503"/>
-              <a:ext cx="4763813" cy="2980735"/>
-            </a:xfrm>
-            <a:custGeom>
-              <a:avLst/>
-              <a:pathLst>
-                <a:path w="4763813" h="2980735">
-                  <a:moveTo>
-                    <a:pt x="0" y="0"/>
-                  </a:moveTo>
-                  <a:lnTo>
-                    <a:pt x="36726" y="188769"/>
-                  </a:lnTo>
-                  <a:lnTo>
-                    <a:pt x="108349" y="519903"/>
-                  </a:lnTo>
-                  <a:lnTo>
-                    <a:pt x="179971" y="817759"/>
-                  </a:lnTo>
-                  <a:lnTo>
-                    <a:pt x="251594" y="1085681"/>
-                  </a:lnTo>
-                  <a:lnTo>
-                    <a:pt x="323216" y="1326678"/>
-                  </a:lnTo>
-                  <a:lnTo>
-                    <a:pt x="394839" y="1543456"/>
-                  </a:lnTo>
-                  <a:lnTo>
-                    <a:pt x="466461" y="1738448"/>
-                  </a:lnTo>
-                  <a:lnTo>
-                    <a:pt x="538084" y="1913844"/>
-                  </a:lnTo>
-                  <a:lnTo>
-                    <a:pt x="609706" y="2071614"/>
-                  </a:lnTo>
-                  <a:lnTo>
-                    <a:pt x="681329" y="2213528"/>
-                  </a:lnTo>
-                  <a:lnTo>
-                    <a:pt x="752951" y="2341181"/>
-                  </a:lnTo>
-                  <a:lnTo>
-                    <a:pt x="824574" y="2456004"/>
-                  </a:lnTo>
-                  <a:lnTo>
-                    <a:pt x="896196" y="2559289"/>
-                  </a:lnTo>
-                  <a:lnTo>
-                    <a:pt x="967819" y="2652194"/>
-                  </a:lnTo>
-                  <a:lnTo>
-                    <a:pt x="1039442" y="2661893"/>
-                  </a:lnTo>
-                  <a:lnTo>
-                    <a:pt x="1111064" y="2669616"/>
-                  </a:lnTo>
-                  <a:lnTo>
-                    <a:pt x="1182687" y="2677266"/>
-                  </a:lnTo>
-                  <a:lnTo>
-                    <a:pt x="1254309" y="2684845"/>
-                  </a:lnTo>
-                  <a:lnTo>
-                    <a:pt x="1325932" y="2692352"/>
-                  </a:lnTo>
-                  <a:lnTo>
-                    <a:pt x="1397554" y="2699789"/>
-                  </a:lnTo>
-                  <a:lnTo>
-                    <a:pt x="1469177" y="2707155"/>
-                  </a:lnTo>
-                  <a:lnTo>
-                    <a:pt x="1540799" y="2714453"/>
-                  </a:lnTo>
-                  <a:lnTo>
-                    <a:pt x="1612422" y="2721682"/>
-                  </a:lnTo>
-                  <a:lnTo>
-                    <a:pt x="1684044" y="2728843"/>
-                  </a:lnTo>
-                  <a:lnTo>
-                    <a:pt x="1755667" y="2735937"/>
-                  </a:lnTo>
-                  <a:lnTo>
-                    <a:pt x="1827289" y="2742964"/>
-                  </a:lnTo>
-                  <a:lnTo>
-                    <a:pt x="1898912" y="2749925"/>
-                  </a:lnTo>
-                  <a:lnTo>
-                    <a:pt x="1970534" y="2756821"/>
-                  </a:lnTo>
-                  <a:lnTo>
-                    <a:pt x="2042157" y="2763651"/>
-                  </a:lnTo>
-                  <a:lnTo>
-                    <a:pt x="2113779" y="2770418"/>
-                  </a:lnTo>
-                  <a:lnTo>
-                    <a:pt x="2185402" y="2777121"/>
-                  </a:lnTo>
-                  <a:lnTo>
-                    <a:pt x="2257024" y="2783761"/>
-                  </a:lnTo>
-                  <a:lnTo>
-                    <a:pt x="2328647" y="2790339"/>
-                  </a:lnTo>
-                  <a:lnTo>
-                    <a:pt x="2400270" y="2796855"/>
-                  </a:lnTo>
-                  <a:lnTo>
-                    <a:pt x="2471892" y="2803310"/>
-                  </a:lnTo>
-                  <a:lnTo>
-                    <a:pt x="2543515" y="2809704"/>
-                  </a:lnTo>
-                  <a:lnTo>
-                    <a:pt x="2615137" y="2816037"/>
-                  </a:lnTo>
-                  <a:lnTo>
-                    <a:pt x="2686760" y="2822312"/>
-                  </a:lnTo>
-                  <a:lnTo>
-                    <a:pt x="2758382" y="2828527"/>
-                  </a:lnTo>
-                  <a:lnTo>
-                    <a:pt x="2830005" y="2834684"/>
-                  </a:lnTo>
-                  <a:lnTo>
-                    <a:pt x="2901627" y="2840784"/>
-                  </a:lnTo>
-                  <a:lnTo>
-                    <a:pt x="2973250" y="2846825"/>
-                  </a:lnTo>
-                  <a:lnTo>
-                    <a:pt x="3044872" y="2852810"/>
-                  </a:lnTo>
-                  <a:lnTo>
-                    <a:pt x="3116495" y="2858739"/>
-                  </a:lnTo>
-                  <a:lnTo>
-                    <a:pt x="3188117" y="2864612"/>
-                  </a:lnTo>
-                  <a:lnTo>
-                    <a:pt x="3259740" y="2870430"/>
-                  </a:lnTo>
-                  <a:lnTo>
-                    <a:pt x="3331362" y="2876194"/>
-                  </a:lnTo>
-                  <a:lnTo>
-                    <a:pt x="3402985" y="2881903"/>
-                  </a:lnTo>
-                  <a:lnTo>
-                    <a:pt x="3474607" y="2887558"/>
-                  </a:lnTo>
-                  <a:lnTo>
-                    <a:pt x="3546230" y="2893161"/>
-                  </a:lnTo>
-                  <a:lnTo>
-                    <a:pt x="3617852" y="2898710"/>
-                  </a:lnTo>
-                  <a:lnTo>
-                    <a:pt x="3689475" y="2904208"/>
-                  </a:lnTo>
-                  <a:lnTo>
-                    <a:pt x="3761098" y="2909654"/>
-                  </a:lnTo>
-                  <a:lnTo>
-                    <a:pt x="3832720" y="2915048"/>
-                  </a:lnTo>
-                  <a:lnTo>
-                    <a:pt x="3904343" y="2920392"/>
-                  </a:lnTo>
-                  <a:lnTo>
-                    <a:pt x="3975965" y="2925686"/>
-                  </a:lnTo>
-                  <a:lnTo>
-                    <a:pt x="4047588" y="2930930"/>
-                  </a:lnTo>
-                  <a:lnTo>
-                    <a:pt x="4119210" y="2936125"/>
-                  </a:lnTo>
-                  <a:lnTo>
-                    <a:pt x="4190833" y="2941271"/>
-                  </a:lnTo>
-                  <a:lnTo>
-                    <a:pt x="4262455" y="2946369"/>
-                  </a:lnTo>
-                  <a:lnTo>
-                    <a:pt x="4334078" y="2951418"/>
-                  </a:lnTo>
-                  <a:lnTo>
-                    <a:pt x="4405700" y="2956421"/>
-                  </a:lnTo>
-                  <a:lnTo>
-                    <a:pt x="4477323" y="2961376"/>
-                  </a:lnTo>
-                  <a:lnTo>
-                    <a:pt x="4548945" y="2966284"/>
-                  </a:lnTo>
-                  <a:lnTo>
-                    <a:pt x="4620568" y="2971147"/>
-                  </a:lnTo>
-                  <a:lnTo>
-                    <a:pt x="4692190" y="2975964"/>
-                  </a:lnTo>
-                  <a:lnTo>
-                    <a:pt x="4763813" y="2980735"/>
-                  </a:lnTo>
-                </a:path>
-              </a:pathLst>
-            </a:custGeom>
-          </p:spPr>
-          <p:txBody>
-            <a:bodyPr/>
-            <a:lstStyle/>
-            <a:p/>
-          </p:txBody>
-        </p:sp>
-        <p:sp>
-          <p:nvSpPr>
             <p:cNvPr id="22" name="pl22"/>
             <p:cNvSpPr/>
             <p:nvPr/>
           </p:nvSpPr>
           <p:spPr>
             <a:xfrm>
-              <a:off x="1172049" y="4276366"/>
-              <a:ext cx="7090630" cy="1277849"/>
+              <a:off x="3520608" y="2143092"/>
+              <a:ext cx="4678807" cy="1075677"/>
             </a:xfrm>
             <a:custGeom>
               <a:avLst/>
               <a:pathLst>
-                <a:path w="7090630" h="1277849">
+                <a:path w="4678807" h="1075677">
                   <a:moveTo>
-                    <a:pt x="7090630" y="1277849"/>
+                    <a:pt x="0" y="0"/>
                   </a:moveTo>
                   <a:lnTo>
-                    <a:pt x="7019007" y="1277510"/>
-                  </a:lnTo>
-                  <a:lnTo>
-                    <a:pt x="6947385" y="1277133"/>
-                  </a:lnTo>
-                  <a:lnTo>
-                    <a:pt x="6875762" y="1276714"/>
-                  </a:lnTo>
-                  <a:lnTo>
-                    <a:pt x="6804139" y="1276248"/>
-                  </a:lnTo>
-                  <a:lnTo>
-                    <a:pt x="6732517" y="1275731"/>
-                  </a:lnTo>
-                  <a:lnTo>
-                    <a:pt x="6660894" y="1275155"/>
-                  </a:lnTo>
-                  <a:lnTo>
-                    <a:pt x="6589272" y="1274515"/>
-                  </a:lnTo>
-                  <a:lnTo>
-                    <a:pt x="6517649" y="1273803"/>
-                  </a:lnTo>
-                  <a:lnTo>
-                    <a:pt x="6446027" y="1273012"/>
-                  </a:lnTo>
-                  <a:lnTo>
-                    <a:pt x="6374404" y="1272133"/>
-                  </a:lnTo>
-                  <a:lnTo>
-                    <a:pt x="6302782" y="1271155"/>
-                  </a:lnTo>
-                  <a:lnTo>
-                    <a:pt x="6231159" y="1270069"/>
-                  </a:lnTo>
-                  <a:lnTo>
-                    <a:pt x="6159537" y="1268860"/>
-                  </a:lnTo>
-                  <a:lnTo>
-                    <a:pt x="6087914" y="1267517"/>
-                  </a:lnTo>
-                  <a:lnTo>
-                    <a:pt x="6016292" y="1266024"/>
-                  </a:lnTo>
-                  <a:lnTo>
-                    <a:pt x="5944669" y="1264364"/>
-                  </a:lnTo>
-                  <a:lnTo>
-                    <a:pt x="5873047" y="1262518"/>
-                  </a:lnTo>
-                  <a:lnTo>
-                    <a:pt x="5801424" y="1260466"/>
-                  </a:lnTo>
-                  <a:lnTo>
-                    <a:pt x="5729802" y="1258185"/>
-                  </a:lnTo>
-                  <a:lnTo>
-                    <a:pt x="5658179" y="1255649"/>
-                  </a:lnTo>
-                  <a:lnTo>
-                    <a:pt x="5586557" y="1252830"/>
-                  </a:lnTo>
-                  <a:lnTo>
-                    <a:pt x="5514934" y="1249696"/>
-                  </a:lnTo>
-                  <a:lnTo>
-                    <a:pt x="5443311" y="1246211"/>
-                  </a:lnTo>
-                  <a:lnTo>
-                    <a:pt x="5371689" y="1242338"/>
-                  </a:lnTo>
-                  <a:lnTo>
-                    <a:pt x="5300066" y="1238031"/>
-                  </a:lnTo>
-                  <a:lnTo>
-                    <a:pt x="5228444" y="1233244"/>
-                  </a:lnTo>
-                  <a:lnTo>
-                    <a:pt x="5156821" y="1227921"/>
-                  </a:lnTo>
-                  <a:lnTo>
-                    <a:pt x="5085199" y="1222004"/>
-                  </a:lnTo>
-                  <a:lnTo>
-                    <a:pt x="5013576" y="1215426"/>
-                  </a:lnTo>
-                  <a:lnTo>
-                    <a:pt x="4941954" y="1208113"/>
-                  </a:lnTo>
-                  <a:lnTo>
-                    <a:pt x="4870331" y="1199982"/>
-                  </a:lnTo>
-                  <a:lnTo>
-                    <a:pt x="4798709" y="1190944"/>
-                  </a:lnTo>
-                  <a:lnTo>
-                    <a:pt x="4727086" y="1180895"/>
-                  </a:lnTo>
-                  <a:lnTo>
-                    <a:pt x="4655464" y="1169724"/>
-                  </a:lnTo>
-                  <a:lnTo>
-                    <a:pt x="4583841" y="1157305"/>
-                  </a:lnTo>
-                  <a:lnTo>
-                    <a:pt x="4512219" y="1143498"/>
-                  </a:lnTo>
-                  <a:lnTo>
-                    <a:pt x="4440596" y="1128149"/>
-                  </a:lnTo>
-                  <a:lnTo>
-                    <a:pt x="4368974" y="1111085"/>
-                  </a:lnTo>
-                  <a:lnTo>
-                    <a:pt x="4297351" y="1092114"/>
-                  </a:lnTo>
-                  <a:lnTo>
-                    <a:pt x="4225729" y="1071024"/>
-                  </a:lnTo>
-                  <a:lnTo>
-                    <a:pt x="4154106" y="1047578"/>
-                  </a:lnTo>
-                  <a:lnTo>
-                    <a:pt x="4082483" y="1021512"/>
-                  </a:lnTo>
-                  <a:lnTo>
-                    <a:pt x="4010861" y="992534"/>
-                  </a:lnTo>
-                  <a:lnTo>
-                    <a:pt x="3939238" y="960318"/>
-                  </a:lnTo>
-                  <a:lnTo>
-                    <a:pt x="3867616" y="924504"/>
-                  </a:lnTo>
-                  <a:lnTo>
-                    <a:pt x="3795993" y="884687"/>
-                  </a:lnTo>
-                  <a:lnTo>
-                    <a:pt x="3724371" y="840423"/>
-                  </a:lnTo>
-                  <a:lnTo>
-                    <a:pt x="3652748" y="791212"/>
-                  </a:lnTo>
-                  <a:lnTo>
-                    <a:pt x="3581126" y="736504"/>
-                  </a:lnTo>
-                  <a:lnTo>
-                    <a:pt x="3509503" y="675684"/>
-                  </a:lnTo>
-                  <a:lnTo>
-                    <a:pt x="3437881" y="608068"/>
-                  </a:lnTo>
-                  <a:lnTo>
-                    <a:pt x="3366258" y="532898"/>
-                  </a:lnTo>
-                  <a:lnTo>
-                    <a:pt x="3294636" y="451234"/>
-                  </a:lnTo>
-                  <a:lnTo>
-                    <a:pt x="3223013" y="443363"/>
-                  </a:lnTo>
-                  <a:lnTo>
-                    <a:pt x="3151391" y="435419"/>
-                  </a:lnTo>
-                  <a:lnTo>
-                    <a:pt x="3079768" y="427399"/>
-                  </a:lnTo>
-                  <a:lnTo>
-                    <a:pt x="3008146" y="419302"/>
-                  </a:lnTo>
-                  <a:lnTo>
-                    <a:pt x="2936523" y="411129"/>
-                  </a:lnTo>
-                  <a:lnTo>
-                    <a:pt x="2864901" y="402879"/>
-                  </a:lnTo>
-                  <a:lnTo>
-                    <a:pt x="2793278" y="394550"/>
-                  </a:lnTo>
-                  <a:lnTo>
-                    <a:pt x="2721655" y="386142"/>
-                  </a:lnTo>
-                  <a:lnTo>
-                    <a:pt x="2650033" y="377655"/>
-                  </a:lnTo>
-                  <a:lnTo>
-                    <a:pt x="2578410" y="369087"/>
-                  </a:lnTo>
-                  <a:lnTo>
-                    <a:pt x="2506788" y="360437"/>
-                  </a:lnTo>
-                  <a:lnTo>
-                    <a:pt x="2435165" y="351706"/>
-                  </a:lnTo>
-                  <a:lnTo>
-                    <a:pt x="2363543" y="342892"/>
-                  </a:lnTo>
-                  <a:lnTo>
-                    <a:pt x="2291920" y="333994"/>
-                  </a:lnTo>
-                  <a:lnTo>
-                    <a:pt x="2220298" y="325012"/>
-                  </a:lnTo>
-                  <a:lnTo>
-                    <a:pt x="2148675" y="315944"/>
-                  </a:lnTo>
-                  <a:lnTo>
-                    <a:pt x="2077053" y="306791"/>
-                  </a:lnTo>
-                  <a:lnTo>
-                    <a:pt x="2005430" y="297550"/>
-                  </a:lnTo>
-                  <a:lnTo>
-                    <a:pt x="1933808" y="288222"/>
-                  </a:lnTo>
-                  <a:lnTo>
-                    <a:pt x="1862185" y="278806"/>
-                  </a:lnTo>
-                  <a:lnTo>
-                    <a:pt x="1790563" y="269300"/>
-                  </a:lnTo>
-                  <a:lnTo>
-                    <a:pt x="1718940" y="259704"/>
-                  </a:lnTo>
-                  <a:lnTo>
-                    <a:pt x="1647318" y="250017"/>
-                  </a:lnTo>
-                  <a:lnTo>
-                    <a:pt x="1575695" y="240238"/>
-                  </a:lnTo>
-                  <a:lnTo>
-                    <a:pt x="1504073" y="230367"/>
-                  </a:lnTo>
-                  <a:lnTo>
-                    <a:pt x="1432450" y="220401"/>
-                  </a:lnTo>
-                  <a:lnTo>
-                    <a:pt x="1360827" y="210342"/>
-                  </a:lnTo>
-                  <a:lnTo>
-                    <a:pt x="1289205" y="200186"/>
-                  </a:lnTo>
-                  <a:lnTo>
-                    <a:pt x="1217582" y="189935"/>
-                  </a:lnTo>
-                  <a:lnTo>
-                    <a:pt x="1145960" y="179586"/>
-                  </a:lnTo>
-                  <a:lnTo>
-                    <a:pt x="1074337" y="169139"/>
-                  </a:lnTo>
-                  <a:lnTo>
-                    <a:pt x="1002715" y="158593"/>
-                  </a:lnTo>
-                  <a:lnTo>
-                    <a:pt x="931092" y="147947"/>
-                  </a:lnTo>
-                  <a:lnTo>
-                    <a:pt x="859470" y="137200"/>
-                  </a:lnTo>
-                  <a:lnTo>
-                    <a:pt x="787847" y="126351"/>
-                  </a:lnTo>
-                  <a:lnTo>
-                    <a:pt x="716225" y="115399"/>
-                  </a:lnTo>
-                  <a:lnTo>
-                    <a:pt x="644602" y="104343"/>
-                  </a:lnTo>
-                  <a:lnTo>
-                    <a:pt x="572980" y="93182"/>
-                  </a:lnTo>
-                  <a:lnTo>
-                    <a:pt x="501357" y="81916"/>
-                  </a:lnTo>
-                  <a:lnTo>
-                    <a:pt x="429735" y="70542"/>
-                  </a:lnTo>
-                  <a:lnTo>
-                    <a:pt x="358112" y="59061"/>
-                  </a:lnTo>
-                  <a:lnTo>
-                    <a:pt x="286490" y="47471"/>
-                  </a:lnTo>
-                  <a:lnTo>
-                    <a:pt x="214867" y="35770"/>
-                  </a:lnTo>
-                  <a:lnTo>
-                    <a:pt x="143245" y="23959"/>
-                  </a:lnTo>
-                  <a:lnTo>
-                    <a:pt x="71622" y="12036"/>
-                  </a:lnTo>
-                  <a:lnTo>
-                    <a:pt x="0" y="0"/>
+                    <a:pt x="36071" y="68122"/>
+                  </a:lnTo>
+                  <a:lnTo>
+                    <a:pt x="106415" y="187620"/>
+                  </a:lnTo>
+                  <a:lnTo>
+                    <a:pt x="176760" y="295109"/>
+                  </a:lnTo>
+                  <a:lnTo>
+                    <a:pt x="247104" y="391796"/>
+                  </a:lnTo>
+                  <a:lnTo>
+                    <a:pt x="317449" y="478767"/>
+                  </a:lnTo>
+                  <a:lnTo>
+                    <a:pt x="387793" y="556997"/>
+                  </a:lnTo>
+                  <a:lnTo>
+                    <a:pt x="458138" y="627365"/>
+                  </a:lnTo>
+                  <a:lnTo>
+                    <a:pt x="528482" y="690661"/>
+                  </a:lnTo>
+                  <a:lnTo>
+                    <a:pt x="598827" y="747596"/>
+                  </a:lnTo>
+                  <a:lnTo>
+                    <a:pt x="669171" y="798810"/>
+                  </a:lnTo>
+                  <a:lnTo>
+                    <a:pt x="739516" y="844877"/>
+                  </a:lnTo>
+                  <a:lnTo>
+                    <a:pt x="809860" y="886314"/>
+                  </a:lnTo>
+                  <a:lnTo>
+                    <a:pt x="880205" y="923587"/>
+                  </a:lnTo>
+                  <a:lnTo>
+                    <a:pt x="950549" y="957114"/>
+                  </a:lnTo>
+                  <a:lnTo>
+                    <a:pt x="1020894" y="960614"/>
+                  </a:lnTo>
+                  <a:lnTo>
+                    <a:pt x="1091238" y="963401"/>
+                  </a:lnTo>
+                  <a:lnTo>
+                    <a:pt x="1161583" y="966162"/>
+                  </a:lnTo>
+                  <a:lnTo>
+                    <a:pt x="1231927" y="968897"/>
+                  </a:lnTo>
+                  <a:lnTo>
+                    <a:pt x="1302272" y="971606"/>
+                  </a:lnTo>
+                  <a:lnTo>
+                    <a:pt x="1372616" y="974290"/>
+                  </a:lnTo>
+                  <a:lnTo>
+                    <a:pt x="1442961" y="976948"/>
+                  </a:lnTo>
+                  <a:lnTo>
+                    <a:pt x="1513305" y="979582"/>
+                  </a:lnTo>
+                  <a:lnTo>
+                    <a:pt x="1583650" y="982191"/>
+                  </a:lnTo>
+                  <a:lnTo>
+                    <a:pt x="1653994" y="984775"/>
+                  </a:lnTo>
+                  <a:lnTo>
+                    <a:pt x="1724339" y="987335"/>
+                  </a:lnTo>
+                  <a:lnTo>
+                    <a:pt x="1794683" y="989871"/>
+                  </a:lnTo>
+                  <a:lnTo>
+                    <a:pt x="1865028" y="992383"/>
+                  </a:lnTo>
+                  <a:lnTo>
+                    <a:pt x="1935372" y="994871"/>
+                  </a:lnTo>
+                  <a:lnTo>
+                    <a:pt x="2005717" y="997336"/>
+                  </a:lnTo>
+                  <a:lnTo>
+                    <a:pt x="2076061" y="999778"/>
+                  </a:lnTo>
+                  <a:lnTo>
+                    <a:pt x="2146406" y="1002197"/>
+                  </a:lnTo>
+                  <a:lnTo>
+                    <a:pt x="2216750" y="1004594"/>
+                  </a:lnTo>
+                  <a:lnTo>
+                    <a:pt x="2287095" y="1006967"/>
+                  </a:lnTo>
+                  <a:lnTo>
+                    <a:pt x="2357439" y="1009319"/>
+                  </a:lnTo>
+                  <a:lnTo>
+                    <a:pt x="2427784" y="1011648"/>
+                  </a:lnTo>
+                  <a:lnTo>
+                    <a:pt x="2498128" y="1013956"/>
+                  </a:lnTo>
+                  <a:lnTo>
+                    <a:pt x="2568472" y="1016241"/>
+                  </a:lnTo>
+                  <a:lnTo>
+                    <a:pt x="2638817" y="1018506"/>
+                  </a:lnTo>
+                  <a:lnTo>
+                    <a:pt x="2709161" y="1020749"/>
+                  </a:lnTo>
+                  <a:lnTo>
+                    <a:pt x="2779506" y="1022971"/>
+                  </a:lnTo>
+                  <a:lnTo>
+                    <a:pt x="2849850" y="1025172"/>
+                  </a:lnTo>
+                  <a:lnTo>
+                    <a:pt x="2920195" y="1027352"/>
+                  </a:lnTo>
+                  <a:lnTo>
+                    <a:pt x="2990539" y="1029512"/>
+                  </a:lnTo>
+                  <a:lnTo>
+                    <a:pt x="3060884" y="1031651"/>
+                  </a:lnTo>
+                  <a:lnTo>
+                    <a:pt x="3131228" y="1033771"/>
+                  </a:lnTo>
+                  <a:lnTo>
+                    <a:pt x="3201573" y="1035870"/>
+                  </a:lnTo>
+                  <a:lnTo>
+                    <a:pt x="3271917" y="1037950"/>
+                  </a:lnTo>
+                  <a:lnTo>
+                    <a:pt x="3342262" y="1040011"/>
+                  </a:lnTo>
+                  <a:lnTo>
+                    <a:pt x="3412606" y="1042052"/>
+                  </a:lnTo>
+                  <a:lnTo>
+                    <a:pt x="3482951" y="1044073"/>
+                  </a:lnTo>
+                  <a:lnTo>
+                    <a:pt x="3553295" y="1046076"/>
+                  </a:lnTo>
+                  <a:lnTo>
+                    <a:pt x="3623640" y="1048060"/>
+                  </a:lnTo>
+                  <a:lnTo>
+                    <a:pt x="3693984" y="1050025"/>
+                  </a:lnTo>
+                  <a:lnTo>
+                    <a:pt x="3764329" y="1051972"/>
+                  </a:lnTo>
+                  <a:lnTo>
+                    <a:pt x="3834673" y="1053901"/>
+                  </a:lnTo>
+                  <a:lnTo>
+                    <a:pt x="3905018" y="1055811"/>
+                  </a:lnTo>
+                  <a:lnTo>
+                    <a:pt x="3975362" y="1057703"/>
+                  </a:lnTo>
+                  <a:lnTo>
+                    <a:pt x="4045707" y="1059578"/>
+                  </a:lnTo>
+                  <a:lnTo>
+                    <a:pt x="4116051" y="1061435"/>
+                  </a:lnTo>
+                  <a:lnTo>
+                    <a:pt x="4186396" y="1063275"/>
+                  </a:lnTo>
+                  <a:lnTo>
+                    <a:pt x="4256740" y="1065097"/>
+                  </a:lnTo>
+                  <a:lnTo>
+                    <a:pt x="4327085" y="1066902"/>
+                  </a:lnTo>
+                  <a:lnTo>
+                    <a:pt x="4397429" y="1068691"/>
+                  </a:lnTo>
+                  <a:lnTo>
+                    <a:pt x="4467774" y="1070462"/>
+                  </a:lnTo>
+                  <a:lnTo>
+                    <a:pt x="4538118" y="1072217"/>
+                  </a:lnTo>
+                  <a:lnTo>
+                    <a:pt x="4608463" y="1073955"/>
+                  </a:lnTo>
+                  <a:lnTo>
+                    <a:pt x="4678807" y="1075677"/>
                   </a:lnTo>
                 </a:path>
               </a:pathLst>
@@ -4051,249 +3761,574 @@
           </p:nvSpPr>
           <p:spPr>
             <a:xfrm>
-              <a:off x="2686566" y="2073503"/>
-              <a:ext cx="5576113" cy="3444679"/>
+              <a:off x="1235312" y="2938053"/>
+              <a:ext cx="6964104" cy="461145"/>
             </a:xfrm>
             <a:custGeom>
               <a:avLst/>
               <a:pathLst>
-                <a:path w="5576113" h="3444679">
+                <a:path w="6964104" h="461145">
+                  <a:moveTo>
+                    <a:pt x="6964104" y="461145"/>
+                  </a:moveTo>
+                  <a:lnTo>
+                    <a:pt x="6893760" y="461023"/>
+                  </a:lnTo>
+                  <a:lnTo>
+                    <a:pt x="6823415" y="460887"/>
+                  </a:lnTo>
+                  <a:lnTo>
+                    <a:pt x="6753071" y="460736"/>
+                  </a:lnTo>
+                  <a:lnTo>
+                    <a:pt x="6682726" y="460568"/>
+                  </a:lnTo>
+                  <a:lnTo>
+                    <a:pt x="6612382" y="460381"/>
+                  </a:lnTo>
+                  <a:lnTo>
+                    <a:pt x="6542037" y="460173"/>
+                  </a:lnTo>
+                  <a:lnTo>
+                    <a:pt x="6471693" y="459942"/>
+                  </a:lnTo>
+                  <a:lnTo>
+                    <a:pt x="6401348" y="459685"/>
+                  </a:lnTo>
+                  <a:lnTo>
+                    <a:pt x="6331004" y="459400"/>
+                  </a:lnTo>
+                  <a:lnTo>
+                    <a:pt x="6260659" y="459083"/>
+                  </a:lnTo>
+                  <a:lnTo>
+                    <a:pt x="6190315" y="458730"/>
+                  </a:lnTo>
+                  <a:lnTo>
+                    <a:pt x="6119970" y="458338"/>
+                  </a:lnTo>
+                  <a:lnTo>
+                    <a:pt x="6049626" y="457902"/>
+                  </a:lnTo>
+                  <a:lnTo>
+                    <a:pt x="5979281" y="457417"/>
+                  </a:lnTo>
+                  <a:lnTo>
+                    <a:pt x="5908937" y="456878"/>
+                  </a:lnTo>
+                  <a:lnTo>
+                    <a:pt x="5838592" y="456279"/>
+                  </a:lnTo>
+                  <a:lnTo>
+                    <a:pt x="5768248" y="455613"/>
+                  </a:lnTo>
+                  <a:lnTo>
+                    <a:pt x="5697903" y="454872"/>
+                  </a:lnTo>
+                  <a:lnTo>
+                    <a:pt x="5627559" y="454049"/>
+                  </a:lnTo>
+                  <a:lnTo>
+                    <a:pt x="5557214" y="453134"/>
+                  </a:lnTo>
+                  <a:lnTo>
+                    <a:pt x="5486870" y="452117"/>
+                  </a:lnTo>
+                  <a:lnTo>
+                    <a:pt x="5416525" y="450985"/>
+                  </a:lnTo>
+                  <a:lnTo>
+                    <a:pt x="5346181" y="449728"/>
+                  </a:lnTo>
+                  <a:lnTo>
+                    <a:pt x="5275836" y="448330"/>
+                  </a:lnTo>
+                  <a:lnTo>
+                    <a:pt x="5205492" y="446776"/>
+                  </a:lnTo>
+                  <a:lnTo>
+                    <a:pt x="5135147" y="445048"/>
+                  </a:lnTo>
+                  <a:lnTo>
+                    <a:pt x="5064803" y="443128"/>
+                  </a:lnTo>
+                  <a:lnTo>
+                    <a:pt x="4994458" y="440992"/>
+                  </a:lnTo>
+                  <a:lnTo>
+                    <a:pt x="4924114" y="438618"/>
+                  </a:lnTo>
+                  <a:lnTo>
+                    <a:pt x="4853769" y="435979"/>
+                  </a:lnTo>
+                  <a:lnTo>
+                    <a:pt x="4783425" y="433045"/>
+                  </a:lnTo>
+                  <a:lnTo>
+                    <a:pt x="4713080" y="429783"/>
+                  </a:lnTo>
+                  <a:lnTo>
+                    <a:pt x="4642736" y="426157"/>
+                  </a:lnTo>
+                  <a:lnTo>
+                    <a:pt x="4572391" y="422126"/>
+                  </a:lnTo>
+                  <a:lnTo>
+                    <a:pt x="4502047" y="417644"/>
+                  </a:lnTo>
+                  <a:lnTo>
+                    <a:pt x="4431702" y="412661"/>
+                  </a:lnTo>
+                  <a:lnTo>
+                    <a:pt x="4361358" y="407122"/>
+                  </a:lnTo>
+                  <a:lnTo>
+                    <a:pt x="4291013" y="400964"/>
+                  </a:lnTo>
+                  <a:lnTo>
+                    <a:pt x="4220669" y="394118"/>
+                  </a:lnTo>
+                  <a:lnTo>
+                    <a:pt x="4150324" y="386507"/>
+                  </a:lnTo>
+                  <a:lnTo>
+                    <a:pt x="4079980" y="378046"/>
+                  </a:lnTo>
+                  <a:lnTo>
+                    <a:pt x="4009635" y="368639"/>
+                  </a:lnTo>
+                  <a:lnTo>
+                    <a:pt x="3939291" y="358182"/>
+                  </a:lnTo>
+                  <a:lnTo>
+                    <a:pt x="3868946" y="346556"/>
+                  </a:lnTo>
+                  <a:lnTo>
+                    <a:pt x="3798602" y="333631"/>
+                  </a:lnTo>
+                  <a:lnTo>
+                    <a:pt x="3728257" y="319262"/>
+                  </a:lnTo>
+                  <a:lnTo>
+                    <a:pt x="3657913" y="303288"/>
+                  </a:lnTo>
+                  <a:lnTo>
+                    <a:pt x="3587569" y="285530"/>
+                  </a:lnTo>
+                  <a:lnTo>
+                    <a:pt x="3517224" y="265787"/>
+                  </a:lnTo>
+                  <a:lnTo>
+                    <a:pt x="3446880" y="243838"/>
+                  </a:lnTo>
+                  <a:lnTo>
+                    <a:pt x="3376535" y="219437"/>
+                  </a:lnTo>
+                  <a:lnTo>
+                    <a:pt x="3306191" y="192310"/>
+                  </a:lnTo>
+                  <a:lnTo>
+                    <a:pt x="3235846" y="162839"/>
+                  </a:lnTo>
+                  <a:lnTo>
+                    <a:pt x="3165502" y="159999"/>
+                  </a:lnTo>
+                  <a:lnTo>
+                    <a:pt x="3095157" y="157132"/>
+                  </a:lnTo>
+                  <a:lnTo>
+                    <a:pt x="3024813" y="154238"/>
+                  </a:lnTo>
+                  <a:lnTo>
+                    <a:pt x="2954468" y="151316"/>
+                  </a:lnTo>
+                  <a:lnTo>
+                    <a:pt x="2884124" y="148367"/>
+                  </a:lnTo>
+                  <a:lnTo>
+                    <a:pt x="2813779" y="145389"/>
+                  </a:lnTo>
+                  <a:lnTo>
+                    <a:pt x="2743435" y="142384"/>
+                  </a:lnTo>
+                  <a:lnTo>
+                    <a:pt x="2673090" y="139349"/>
+                  </a:lnTo>
+                  <a:lnTo>
+                    <a:pt x="2602746" y="136286"/>
+                  </a:lnTo>
+                  <a:lnTo>
+                    <a:pt x="2532401" y="133194"/>
+                  </a:lnTo>
+                  <a:lnTo>
+                    <a:pt x="2462057" y="130073"/>
+                  </a:lnTo>
+                  <a:lnTo>
+                    <a:pt x="2391712" y="126922"/>
+                  </a:lnTo>
+                  <a:lnTo>
+                    <a:pt x="2321368" y="123741"/>
+                  </a:lnTo>
+                  <a:lnTo>
+                    <a:pt x="2251023" y="120530"/>
+                  </a:lnTo>
+                  <a:lnTo>
+                    <a:pt x="2180679" y="117289"/>
+                  </a:lnTo>
+                  <a:lnTo>
+                    <a:pt x="2110334" y="114016"/>
+                  </a:lnTo>
+                  <a:lnTo>
+                    <a:pt x="2039990" y="110713"/>
+                  </a:lnTo>
+                  <a:lnTo>
+                    <a:pt x="1969645" y="107379"/>
+                  </a:lnTo>
+                  <a:lnTo>
+                    <a:pt x="1899301" y="104012"/>
+                  </a:lnTo>
+                  <a:lnTo>
+                    <a:pt x="1828956" y="100614"/>
+                  </a:lnTo>
+                  <a:lnTo>
+                    <a:pt x="1758612" y="97184"/>
+                  </a:lnTo>
+                  <a:lnTo>
+                    <a:pt x="1688267" y="93721"/>
+                  </a:lnTo>
+                  <a:lnTo>
+                    <a:pt x="1617923" y="90225"/>
+                  </a:lnTo>
+                  <a:lnTo>
+                    <a:pt x="1547578" y="86696"/>
+                  </a:lnTo>
+                  <a:lnTo>
+                    <a:pt x="1477234" y="83134"/>
+                  </a:lnTo>
+                  <a:lnTo>
+                    <a:pt x="1406889" y="79537"/>
+                  </a:lnTo>
+                  <a:lnTo>
+                    <a:pt x="1336545" y="75907"/>
+                  </a:lnTo>
+                  <a:lnTo>
+                    <a:pt x="1266200" y="72242"/>
+                  </a:lnTo>
+                  <a:lnTo>
+                    <a:pt x="1195856" y="68543"/>
+                  </a:lnTo>
+                  <a:lnTo>
+                    <a:pt x="1125511" y="64808"/>
+                  </a:lnTo>
+                  <a:lnTo>
+                    <a:pt x="1055167" y="61038"/>
+                  </a:lnTo>
+                  <a:lnTo>
+                    <a:pt x="984822" y="57232"/>
+                  </a:lnTo>
+                  <a:lnTo>
+                    <a:pt x="914478" y="53390"/>
+                  </a:lnTo>
+                  <a:lnTo>
+                    <a:pt x="844133" y="49512"/>
+                  </a:lnTo>
+                  <a:lnTo>
+                    <a:pt x="773789" y="45597"/>
+                  </a:lnTo>
+                  <a:lnTo>
+                    <a:pt x="703444" y="41644"/>
+                  </a:lnTo>
+                  <a:lnTo>
+                    <a:pt x="633100" y="37655"/>
+                  </a:lnTo>
+                  <a:lnTo>
+                    <a:pt x="562755" y="33627"/>
+                  </a:lnTo>
+                  <a:lnTo>
+                    <a:pt x="492411" y="29561"/>
+                  </a:lnTo>
+                  <a:lnTo>
+                    <a:pt x="422066" y="25457"/>
+                  </a:lnTo>
+                  <a:lnTo>
+                    <a:pt x="351722" y="21313"/>
+                  </a:lnTo>
+                  <a:lnTo>
+                    <a:pt x="281377" y="17131"/>
+                  </a:lnTo>
+                  <a:lnTo>
+                    <a:pt x="211033" y="12908"/>
+                  </a:lnTo>
+                  <a:lnTo>
+                    <a:pt x="140688" y="8646"/>
+                  </a:lnTo>
+                  <a:lnTo>
+                    <a:pt x="70344" y="4343"/>
+                  </a:lnTo>
+                  <a:lnTo>
+                    <a:pt x="0" y="0"/>
+                  </a:lnTo>
+                </a:path>
+              </a:pathLst>
+            </a:custGeom>
+          </p:spPr>
+          <p:txBody>
+            <a:bodyPr/>
+            <a:lstStyle/>
+            <a:p/>
+          </p:txBody>
+        </p:sp>
+        <p:sp>
+          <p:nvSpPr>
+            <p:cNvPr id="24" name="pl24"/>
+            <p:cNvSpPr/>
+            <p:nvPr/>
+          </p:nvSpPr>
+          <p:spPr>
+            <a:xfrm>
+              <a:off x="2722803" y="2143092"/>
+              <a:ext cx="5476612" cy="1243103"/>
+            </a:xfrm>
+            <a:custGeom>
+              <a:avLst/>
+              <a:pathLst>
+                <a:path w="5476612" h="1243103">
                   <a:moveTo>
                     <a:pt x="0" y="0"/>
                   </a:moveTo>
                   <a:lnTo>
-                    <a:pt x="61178" y="168150"/>
-                  </a:lnTo>
-                  <a:lnTo>
-                    <a:pt x="132801" y="353973"/>
-                  </a:lnTo>
-                  <a:lnTo>
-                    <a:pt x="204423" y="529381"/>
-                  </a:lnTo>
-                  <a:lnTo>
-                    <a:pt x="276046" y="694959"/>
-                  </a:lnTo>
-                  <a:lnTo>
-                    <a:pt x="347668" y="851256"/>
-                  </a:lnTo>
-                  <a:lnTo>
-                    <a:pt x="419291" y="998794"/>
-                  </a:lnTo>
-                  <a:lnTo>
-                    <a:pt x="490913" y="1138064"/>
-                  </a:lnTo>
-                  <a:lnTo>
-                    <a:pt x="562536" y="1269527"/>
-                  </a:lnTo>
-                  <a:lnTo>
-                    <a:pt x="634159" y="1393623"/>
-                  </a:lnTo>
-                  <a:lnTo>
-                    <a:pt x="705781" y="1510764"/>
-                  </a:lnTo>
-                  <a:lnTo>
-                    <a:pt x="777404" y="1621340"/>
-                  </a:lnTo>
-                  <a:lnTo>
-                    <a:pt x="849026" y="1725719"/>
-                  </a:lnTo>
-                  <a:lnTo>
-                    <a:pt x="920649" y="1824248"/>
-                  </a:lnTo>
-                  <a:lnTo>
-                    <a:pt x="992271" y="1917254"/>
-                  </a:lnTo>
-                  <a:lnTo>
-                    <a:pt x="1063894" y="2005048"/>
-                  </a:lnTo>
-                  <a:lnTo>
-                    <a:pt x="1135516" y="2087922"/>
-                  </a:lnTo>
-                  <a:lnTo>
-                    <a:pt x="1207139" y="2166151"/>
-                  </a:lnTo>
-                  <a:lnTo>
-                    <a:pt x="1278761" y="2239996"/>
-                  </a:lnTo>
-                  <a:lnTo>
-                    <a:pt x="1350384" y="2309702"/>
-                  </a:lnTo>
-                  <a:lnTo>
-                    <a:pt x="1422006" y="2375501"/>
-                  </a:lnTo>
-                  <a:lnTo>
-                    <a:pt x="1493629" y="2437613"/>
-                  </a:lnTo>
-                  <a:lnTo>
-                    <a:pt x="1565251" y="2496243"/>
-                  </a:lnTo>
-                  <a:lnTo>
-                    <a:pt x="1636874" y="2551588"/>
-                  </a:lnTo>
-                  <a:lnTo>
-                    <a:pt x="1708496" y="2603831"/>
-                  </a:lnTo>
-                  <a:lnTo>
-                    <a:pt x="1780119" y="2653146"/>
-                  </a:lnTo>
-                  <a:lnTo>
-                    <a:pt x="1851741" y="2699697"/>
-                  </a:lnTo>
-                  <a:lnTo>
-                    <a:pt x="1923364" y="2743639"/>
-                  </a:lnTo>
-                  <a:lnTo>
-                    <a:pt x="1994987" y="2785118"/>
-                  </a:lnTo>
-                  <a:lnTo>
-                    <a:pt x="2066609" y="2824273"/>
-                  </a:lnTo>
-                  <a:lnTo>
-                    <a:pt x="2138232" y="2861233"/>
-                  </a:lnTo>
-                  <a:lnTo>
-                    <a:pt x="2209854" y="2896122"/>
-                  </a:lnTo>
-                  <a:lnTo>
-                    <a:pt x="2281477" y="2929055"/>
-                  </a:lnTo>
-                  <a:lnTo>
-                    <a:pt x="2353099" y="2960143"/>
-                  </a:lnTo>
-                  <a:lnTo>
-                    <a:pt x="2424722" y="2989488"/>
-                  </a:lnTo>
-                  <a:lnTo>
-                    <a:pt x="2496344" y="3017189"/>
-                  </a:lnTo>
-                  <a:lnTo>
-                    <a:pt x="2567967" y="3043337"/>
-                  </a:lnTo>
-                  <a:lnTo>
-                    <a:pt x="2639589" y="3068020"/>
-                  </a:lnTo>
-                  <a:lnTo>
-                    <a:pt x="2711212" y="3091319"/>
-                  </a:lnTo>
-                  <a:lnTo>
-                    <a:pt x="2782834" y="3113313"/>
-                  </a:lnTo>
-                  <a:lnTo>
-                    <a:pt x="2854457" y="3134074"/>
-                  </a:lnTo>
-                  <a:lnTo>
-                    <a:pt x="2926079" y="3153671"/>
-                  </a:lnTo>
-                  <a:lnTo>
-                    <a:pt x="2997702" y="3172170"/>
-                  </a:lnTo>
-                  <a:lnTo>
-                    <a:pt x="3069324" y="3189633"/>
-                  </a:lnTo>
-                  <a:lnTo>
-                    <a:pt x="3140947" y="3206116"/>
-                  </a:lnTo>
-                  <a:lnTo>
-                    <a:pt x="3212569" y="3221676"/>
-                  </a:lnTo>
-                  <a:lnTo>
-                    <a:pt x="3284192" y="3236364"/>
-                  </a:lnTo>
-                  <a:lnTo>
-                    <a:pt x="3355814" y="3250228"/>
-                  </a:lnTo>
-                  <a:lnTo>
-                    <a:pt x="3427437" y="3263316"/>
-                  </a:lnTo>
-                  <a:lnTo>
-                    <a:pt x="3499060" y="3275670"/>
-                  </a:lnTo>
-                  <a:lnTo>
-                    <a:pt x="3570682" y="3287332"/>
-                  </a:lnTo>
-                  <a:lnTo>
-                    <a:pt x="3642305" y="3298340"/>
-                  </a:lnTo>
-                  <a:lnTo>
-                    <a:pt x="3713927" y="3308731"/>
-                  </a:lnTo>
-                  <a:lnTo>
-                    <a:pt x="3785550" y="3318540"/>
-                  </a:lnTo>
-                  <a:lnTo>
-                    <a:pt x="3857172" y="3327799"/>
-                  </a:lnTo>
-                  <a:lnTo>
-                    <a:pt x="3928795" y="3336539"/>
-                  </a:lnTo>
-                  <a:lnTo>
-                    <a:pt x="4000417" y="3344789"/>
-                  </a:lnTo>
-                  <a:lnTo>
-                    <a:pt x="4072040" y="3352577"/>
-                  </a:lnTo>
-                  <a:lnTo>
-                    <a:pt x="4143662" y="3359928"/>
-                  </a:lnTo>
-                  <a:lnTo>
-                    <a:pt x="4215285" y="3366868"/>
-                  </a:lnTo>
-                  <a:lnTo>
-                    <a:pt x="4286907" y="3373418"/>
-                  </a:lnTo>
-                  <a:lnTo>
-                    <a:pt x="4358530" y="3379601"/>
-                  </a:lnTo>
-                  <a:lnTo>
-                    <a:pt x="4430152" y="3385438"/>
-                  </a:lnTo>
-                  <a:lnTo>
-                    <a:pt x="4501775" y="3390948"/>
-                  </a:lnTo>
-                  <a:lnTo>
-                    <a:pt x="4573397" y="3396149"/>
-                  </a:lnTo>
-                  <a:lnTo>
-                    <a:pt x="4645020" y="3401058"/>
-                  </a:lnTo>
-                  <a:lnTo>
-                    <a:pt x="4716642" y="3405693"/>
-                  </a:lnTo>
-                  <a:lnTo>
-                    <a:pt x="4788265" y="3410067"/>
-                  </a:lnTo>
-                  <a:lnTo>
-                    <a:pt x="4859888" y="3414196"/>
-                  </a:lnTo>
-                  <a:lnTo>
-                    <a:pt x="4931510" y="3418094"/>
-                  </a:lnTo>
-                  <a:lnTo>
-                    <a:pt x="5003133" y="3421774"/>
-                  </a:lnTo>
-                  <a:lnTo>
-                    <a:pt x="5074755" y="3425247"/>
-                  </a:lnTo>
-                  <a:lnTo>
-                    <a:pt x="5146378" y="3428526"/>
-                  </a:lnTo>
-                  <a:lnTo>
-                    <a:pt x="5218000" y="3431621"/>
-                  </a:lnTo>
-                  <a:lnTo>
-                    <a:pt x="5289623" y="3434542"/>
-                  </a:lnTo>
-                  <a:lnTo>
-                    <a:pt x="5361245" y="3437300"/>
-                  </a:lnTo>
-                  <a:lnTo>
-                    <a:pt x="5432868" y="3439903"/>
-                  </a:lnTo>
-                  <a:lnTo>
-                    <a:pt x="5504490" y="3442360"/>
-                  </a:lnTo>
-                  <a:lnTo>
-                    <a:pt x="5576113" y="3444679"/>
+                    <a:pt x="60087" y="60681"/>
+                  </a:lnTo>
+                  <a:lnTo>
+                    <a:pt x="130431" y="127740"/>
+                  </a:lnTo>
+                  <a:lnTo>
+                    <a:pt x="200776" y="191041"/>
+                  </a:lnTo>
+                  <a:lnTo>
+                    <a:pt x="271120" y="250794"/>
+                  </a:lnTo>
+                  <a:lnTo>
+                    <a:pt x="341465" y="307198"/>
+                  </a:lnTo>
+                  <a:lnTo>
+                    <a:pt x="411809" y="360441"/>
+                  </a:lnTo>
+                  <a:lnTo>
+                    <a:pt x="482154" y="410700"/>
+                  </a:lnTo>
+                  <a:lnTo>
+                    <a:pt x="552498" y="458142"/>
+                  </a:lnTo>
+                  <a:lnTo>
+                    <a:pt x="622843" y="502926"/>
+                  </a:lnTo>
+                  <a:lnTo>
+                    <a:pt x="693187" y="545199"/>
+                  </a:lnTo>
+                  <a:lnTo>
+                    <a:pt x="763532" y="585103"/>
+                  </a:lnTo>
+                  <a:lnTo>
+                    <a:pt x="833876" y="622771"/>
+                  </a:lnTo>
+                  <a:lnTo>
+                    <a:pt x="904221" y="658328"/>
+                  </a:lnTo>
+                  <a:lnTo>
+                    <a:pt x="974565" y="691892"/>
+                  </a:lnTo>
+                  <a:lnTo>
+                    <a:pt x="1044909" y="723574"/>
+                  </a:lnTo>
+                  <a:lnTo>
+                    <a:pt x="1115254" y="753482"/>
+                  </a:lnTo>
+                  <a:lnTo>
+                    <a:pt x="1185598" y="781713"/>
+                  </a:lnTo>
+                  <a:lnTo>
+                    <a:pt x="1255943" y="808361"/>
+                  </a:lnTo>
+                  <a:lnTo>
+                    <a:pt x="1326287" y="833517"/>
+                  </a:lnTo>
+                  <a:lnTo>
+                    <a:pt x="1396632" y="857262"/>
+                  </a:lnTo>
+                  <a:lnTo>
+                    <a:pt x="1466976" y="879677"/>
+                  </a:lnTo>
+                  <a:lnTo>
+                    <a:pt x="1537321" y="900835"/>
+                  </a:lnTo>
+                  <a:lnTo>
+                    <a:pt x="1607665" y="920808"/>
+                  </a:lnTo>
+                  <a:lnTo>
+                    <a:pt x="1678010" y="939661"/>
+                  </a:lnTo>
+                  <a:lnTo>
+                    <a:pt x="1748354" y="957458"/>
+                  </a:lnTo>
+                  <a:lnTo>
+                    <a:pt x="1818699" y="974257"/>
+                  </a:lnTo>
+                  <a:lnTo>
+                    <a:pt x="1889043" y="990114"/>
+                  </a:lnTo>
+                  <a:lnTo>
+                    <a:pt x="1959388" y="1005083"/>
+                  </a:lnTo>
+                  <a:lnTo>
+                    <a:pt x="2029732" y="1019213"/>
+                  </a:lnTo>
+                  <a:lnTo>
+                    <a:pt x="2100077" y="1032551"/>
+                  </a:lnTo>
+                  <a:lnTo>
+                    <a:pt x="2170421" y="1045142"/>
+                  </a:lnTo>
+                  <a:lnTo>
+                    <a:pt x="2240766" y="1057027"/>
+                  </a:lnTo>
+                  <a:lnTo>
+                    <a:pt x="2311110" y="1068246"/>
+                  </a:lnTo>
+                  <a:lnTo>
+                    <a:pt x="2381455" y="1078836"/>
+                  </a:lnTo>
+                  <a:lnTo>
+                    <a:pt x="2451799" y="1088832"/>
+                  </a:lnTo>
+                  <a:lnTo>
+                    <a:pt x="2522144" y="1098269"/>
+                  </a:lnTo>
+                  <a:lnTo>
+                    <a:pt x="2592488" y="1107176"/>
+                  </a:lnTo>
+                  <a:lnTo>
+                    <a:pt x="2662833" y="1115584"/>
+                  </a:lnTo>
+                  <a:lnTo>
+                    <a:pt x="2733177" y="1123521"/>
+                  </a:lnTo>
+                  <a:lnTo>
+                    <a:pt x="2803522" y="1131013"/>
+                  </a:lnTo>
+                  <a:lnTo>
+                    <a:pt x="2873866" y="1138085"/>
+                  </a:lnTo>
+                  <a:lnTo>
+                    <a:pt x="2944211" y="1144761"/>
+                  </a:lnTo>
+                  <a:lnTo>
+                    <a:pt x="3014555" y="1151063"/>
+                  </a:lnTo>
+                  <a:lnTo>
+                    <a:pt x="3084900" y="1157012"/>
+                  </a:lnTo>
+                  <a:lnTo>
+                    <a:pt x="3155244" y="1162627"/>
+                  </a:lnTo>
+                  <a:lnTo>
+                    <a:pt x="3225589" y="1167927"/>
+                  </a:lnTo>
+                  <a:lnTo>
+                    <a:pt x="3295933" y="1172931"/>
+                  </a:lnTo>
+                  <a:lnTo>
+                    <a:pt x="3366278" y="1177654"/>
+                  </a:lnTo>
+                  <a:lnTo>
+                    <a:pt x="3436622" y="1182112"/>
+                  </a:lnTo>
+                  <a:lnTo>
+                    <a:pt x="3506967" y="1186320"/>
+                  </a:lnTo>
+                  <a:lnTo>
+                    <a:pt x="3577311" y="1190293"/>
+                  </a:lnTo>
+                  <a:lnTo>
+                    <a:pt x="3647656" y="1194043"/>
+                  </a:lnTo>
+                  <a:lnTo>
+                    <a:pt x="3718000" y="1197583"/>
+                  </a:lnTo>
+                  <a:lnTo>
+                    <a:pt x="3788345" y="1200924"/>
+                  </a:lnTo>
+                  <a:lnTo>
+                    <a:pt x="3858689" y="1204078"/>
+                  </a:lnTo>
+                  <a:lnTo>
+                    <a:pt x="3929034" y="1207055"/>
+                  </a:lnTo>
+                  <a:lnTo>
+                    <a:pt x="3999378" y="1209866"/>
+                  </a:lnTo>
+                  <a:lnTo>
+                    <a:pt x="4069723" y="1212519"/>
+                  </a:lnTo>
+                  <a:lnTo>
+                    <a:pt x="4140067" y="1215023"/>
+                  </a:lnTo>
+                  <a:lnTo>
+                    <a:pt x="4210412" y="1217387"/>
+                  </a:lnTo>
+                  <a:lnTo>
+                    <a:pt x="4280756" y="1219618"/>
+                  </a:lnTo>
+                  <a:lnTo>
+                    <a:pt x="4351101" y="1221725"/>
+                  </a:lnTo>
+                  <a:lnTo>
+                    <a:pt x="4421445" y="1223713"/>
+                  </a:lnTo>
+                  <a:lnTo>
+                    <a:pt x="4491790" y="1225590"/>
+                  </a:lnTo>
+                  <a:lnTo>
+                    <a:pt x="4562134" y="1227362"/>
+                  </a:lnTo>
+                  <a:lnTo>
+                    <a:pt x="4632479" y="1229034"/>
+                  </a:lnTo>
+                  <a:lnTo>
+                    <a:pt x="4702823" y="1230613"/>
+                  </a:lnTo>
+                  <a:lnTo>
+                    <a:pt x="4773167" y="1232103"/>
+                  </a:lnTo>
+                  <a:lnTo>
+                    <a:pt x="4843512" y="1233510"/>
+                  </a:lnTo>
+                  <a:lnTo>
+                    <a:pt x="4913856" y="1234837"/>
+                  </a:lnTo>
+                  <a:lnTo>
+                    <a:pt x="4984201" y="1236091"/>
+                  </a:lnTo>
+                  <a:lnTo>
+                    <a:pt x="5054545" y="1237274"/>
+                  </a:lnTo>
+                  <a:lnTo>
+                    <a:pt x="5124890" y="1238391"/>
+                  </a:lnTo>
+                  <a:lnTo>
+                    <a:pt x="5195234" y="1239445"/>
+                  </a:lnTo>
+                  <a:lnTo>
+                    <a:pt x="5265579" y="1240440"/>
+                  </a:lnTo>
+                  <a:lnTo>
+                    <a:pt x="5335923" y="1241380"/>
+                  </a:lnTo>
+                  <a:lnTo>
+                    <a:pt x="5406268" y="1242266"/>
+                  </a:lnTo>
+                  <a:lnTo>
+                    <a:pt x="5476612" y="1243103"/>
                   </a:lnTo>
                 </a:path>
               </a:pathLst>
@@ -4316,27 +4351,27 @@
         </p:sp>
         <p:sp>
           <p:nvSpPr>
-            <p:cNvPr id="24" name="pl24"/>
+            <p:cNvPr id="25" name="pl25"/>
             <p:cNvSpPr/>
             <p:nvPr/>
           </p:nvSpPr>
           <p:spPr>
             <a:xfrm>
-              <a:off x="817517" y="4727786"/>
-              <a:ext cx="7799693" cy="0"/>
+              <a:off x="887106" y="3100960"/>
+              <a:ext cx="7660515" cy="0"/>
             </a:xfrm>
             <a:custGeom>
               <a:avLst/>
               <a:pathLst>
-                <a:path w="7799693" h="0">
+                <a:path w="7660515" h="0">
                   <a:moveTo>
                     <a:pt x="0" y="0"/>
                   </a:moveTo>
                   <a:lnTo>
-                    <a:pt x="7799693" y="0"/>
-                  </a:lnTo>
-                  <a:lnTo>
-                    <a:pt x="7799693" y="0"/>
+                    <a:pt x="7660515" y="0"/>
+                  </a:lnTo>
+                  <a:lnTo>
+                    <a:pt x="7660515" y="0"/>
                   </a:lnTo>
                 </a:path>
               </a:pathLst>
@@ -4359,21 +4394,21 @@
         </p:sp>
         <p:sp>
           <p:nvSpPr>
-            <p:cNvPr id="25" name="pl25"/>
+            <p:cNvPr id="26" name="pl26"/>
             <p:cNvSpPr/>
             <p:nvPr/>
           </p:nvSpPr>
           <p:spPr>
             <a:xfrm>
-              <a:off x="4468386" y="2073503"/>
-              <a:ext cx="0" cy="3649639"/>
+              <a:off x="4472829" y="2143092"/>
+              <a:ext cx="0" cy="1317069"/>
             </a:xfrm>
             <a:custGeom>
               <a:avLst/>
               <a:pathLst>
-                <a:path w="0" h="3649639">
+                <a:path w="0" h="1317069">
                   <a:moveTo>
-                    <a:pt x="0" y="3649639"/>
+                    <a:pt x="0" y="1317069"/>
                   </a:moveTo>
                   <a:lnTo>
                     <a:pt x="0" y="0"/>
@@ -4402,13 +4437,13 @@
         </p:sp>
         <p:sp>
           <p:nvSpPr>
-            <p:cNvPr id="26" name="tx26"/>
+            <p:cNvPr id="27" name="tx27"/>
             <p:cNvSpPr/>
             <p:nvPr/>
           </p:nvSpPr>
           <p:spPr>
             <a:xfrm>
-              <a:off x="692708" y="5517199"/>
+              <a:off x="762297" y="3360243"/>
               <a:ext cx="62179" cy="80101"/>
             </a:xfrm>
             <a:prstGeom prst="rect">
@@ -4448,13 +4483,13 @@
         </p:sp>
         <p:sp>
           <p:nvSpPr>
-            <p:cNvPr id="27" name="tx27"/>
+            <p:cNvPr id="28" name="tx28"/>
             <p:cNvSpPr/>
             <p:nvPr/>
           </p:nvSpPr>
           <p:spPr>
             <a:xfrm>
-              <a:off x="692708" y="4687735"/>
+              <a:off x="762297" y="3060909"/>
               <a:ext cx="62179" cy="80101"/>
             </a:xfrm>
             <a:prstGeom prst="rect">
@@ -4494,13 +4529,13 @@
         </p:sp>
         <p:sp>
           <p:nvSpPr>
-            <p:cNvPr id="28" name="tx28"/>
+            <p:cNvPr id="29" name="tx29"/>
             <p:cNvSpPr/>
             <p:nvPr/>
           </p:nvSpPr>
           <p:spPr>
             <a:xfrm>
-              <a:off x="692708" y="3858272"/>
+              <a:off x="762297" y="2761575"/>
               <a:ext cx="62179" cy="80101"/>
             </a:xfrm>
             <a:prstGeom prst="rect">
@@ -4540,13 +4575,13 @@
         </p:sp>
         <p:sp>
           <p:nvSpPr>
-            <p:cNvPr id="29" name="tx29"/>
+            <p:cNvPr id="30" name="tx30"/>
             <p:cNvSpPr/>
             <p:nvPr/>
           </p:nvSpPr>
           <p:spPr>
             <a:xfrm>
-              <a:off x="692708" y="3028808"/>
+              <a:off x="762297" y="2462242"/>
               <a:ext cx="62179" cy="80101"/>
             </a:xfrm>
             <a:prstGeom prst="rect">
@@ -4586,13 +4621,13 @@
         </p:sp>
         <p:sp>
           <p:nvSpPr>
-            <p:cNvPr id="30" name="tx30"/>
+            <p:cNvPr id="31" name="tx31"/>
             <p:cNvSpPr/>
             <p:nvPr/>
           </p:nvSpPr>
           <p:spPr>
             <a:xfrm>
-              <a:off x="692708" y="2199345"/>
+              <a:off x="762297" y="2162908"/>
               <a:ext cx="62179" cy="80101"/>
             </a:xfrm>
             <a:prstGeom prst="rect">
@@ -4632,13 +4667,13 @@
         </p:sp>
         <p:sp>
           <p:nvSpPr>
-            <p:cNvPr id="31" name="tx31"/>
+            <p:cNvPr id="32" name="tx32"/>
             <p:cNvSpPr/>
             <p:nvPr/>
           </p:nvSpPr>
           <p:spPr>
             <a:xfrm>
-              <a:off x="2478335" y="5785772"/>
+              <a:off x="2516846" y="3522791"/>
               <a:ext cx="161574" cy="80101"/>
             </a:xfrm>
             <a:prstGeom prst="rect">
@@ -4678,13 +4713,13 @@
         </p:sp>
         <p:sp>
           <p:nvSpPr>
-            <p:cNvPr id="32" name="tx32"/>
+            <p:cNvPr id="33" name="tx33"/>
             <p:cNvSpPr/>
             <p:nvPr/>
           </p:nvSpPr>
           <p:spPr>
             <a:xfrm>
-              <a:off x="4582608" y="5785772"/>
+              <a:off x="4584458" y="3522791"/>
               <a:ext cx="62179" cy="80101"/>
             </a:xfrm>
             <a:prstGeom prst="rect">
@@ -4724,13 +4759,13 @@
         </p:sp>
         <p:sp>
           <p:nvSpPr>
-            <p:cNvPr id="33" name="tx33"/>
+            <p:cNvPr id="34" name="tx34"/>
             <p:cNvSpPr/>
             <p:nvPr/>
           </p:nvSpPr>
           <p:spPr>
             <a:xfrm>
-              <a:off x="6606094" y="5785772"/>
+              <a:off x="6571282" y="3522791"/>
               <a:ext cx="124358" cy="80101"/>
             </a:xfrm>
             <a:prstGeom prst="rect">
@@ -4770,13 +4805,13 @@
         </p:sp>
         <p:sp>
           <p:nvSpPr>
-            <p:cNvPr id="34" name="tx34"/>
+            <p:cNvPr id="35" name="tx35"/>
             <p:cNvSpPr/>
             <p:nvPr/>
           </p:nvSpPr>
           <p:spPr>
             <a:xfrm>
-              <a:off x="2928340" y="5925448"/>
+              <a:off x="2928340" y="3662467"/>
               <a:ext cx="3578047" cy="100218"/>
             </a:xfrm>
             <a:prstGeom prst="rect">
@@ -4816,13 +4851,13 @@
         </p:sp>
         <p:sp>
           <p:nvSpPr>
-            <p:cNvPr id="35" name="tx35"/>
+            <p:cNvPr id="36" name="tx36"/>
             <p:cNvSpPr/>
             <p:nvPr/>
           </p:nvSpPr>
           <p:spPr>
             <a:xfrm rot="-5400000">
-              <a:off x="68446" y="3848213"/>
+              <a:off x="138035" y="2751517"/>
               <a:ext cx="1016904" cy="100218"/>
             </a:xfrm>
             <a:prstGeom prst="rect">
@@ -4862,13 +4897,13 @@
         </p:sp>
         <p:sp>
           <p:nvSpPr>
-            <p:cNvPr id="36" name="tx36"/>
+            <p:cNvPr id="37" name="tx37"/>
             <p:cNvSpPr/>
             <p:nvPr/>
           </p:nvSpPr>
           <p:spPr>
             <a:xfrm>
-              <a:off x="817517" y="1896563"/>
+              <a:off x="887106" y="1966152"/>
               <a:ext cx="6385163" cy="82021"/>
             </a:xfrm>
             <a:prstGeom prst="rect">
@@ -4908,13 +4943,3494 @@
         </p:sp>
         <p:sp>
           <p:nvSpPr>
-            <p:cNvPr id="37" name="tx37"/>
+            <p:cNvPr id="38" name="tx38"/>
             <p:cNvSpPr/>
             <p:nvPr/>
           </p:nvSpPr>
           <p:spPr>
             <a:xfrm>
-              <a:off x="817517" y="1669789"/>
+              <a:off x="887106" y="1739378"/>
+              <a:ext cx="3536807" cy="120152"/>
+            </a:xfrm>
+            <a:prstGeom prst="rect">
+              <a:avLst/>
+            </a:prstGeom>
+            <a:noFill/>
+          </p:spPr>
+          <p:txBody>
+            <a:bodyPr lIns="0" rIns="0" tIns="0" bIns="0" anchorCtr="1" anchor="ctr" wrap="none"/>
+            <a:lstStyle/>
+            <a:p>
+              <a:pPr algn="l" marL="0" marR="0" indent="0">
+                <a:lnSpc>
+                  <a:spcPts val="1320"/>
+                </a:lnSpc>
+                <a:spcBef>
+                  <a:spcPts val="0"/>
+                </a:spcBef>
+                <a:spcAft>
+                  <a:spcPts val="0"/>
+                </a:spcAft>
+              </a:pPr>
+              <a:r>
+                <a:rPr sz="1320">
+                  <a:solidFill>
+                    <a:srgbClr val="000000">
+                      <a:alpha val="100000"/>
+                    </a:srgbClr>
+                  </a:solidFill>
+                  <a:latin typeface="Helvetica"/>
+                  <a:cs typeface="Helvetica"/>
+                </a:rPr>
+                <a:t>Electrolyte Abnormalities (Carboplatin AUC ≥ 3)</a:t>
+              </a:r>
+            </a:p>
+          </p:txBody>
+        </p:sp>
+        <p:sp>
+          <p:nvSpPr>
+            <p:cNvPr id="39" name="pl39"/>
+            <p:cNvSpPr/>
+            <p:nvPr/>
+          </p:nvSpPr>
+          <p:spPr>
+            <a:xfrm>
+              <a:off x="887106" y="5444019"/>
+              <a:ext cx="7660515" cy="0"/>
+            </a:xfrm>
+            <a:custGeom>
+              <a:avLst/>
+              <a:pathLst>
+                <a:path w="7660515" h="0">
+                  <a:moveTo>
+                    <a:pt x="0" y="0"/>
+                  </a:moveTo>
+                  <a:lnTo>
+                    <a:pt x="7660515" y="0"/>
+                  </a:lnTo>
+                  <a:lnTo>
+                    <a:pt x="7660515" y="0"/>
+                  </a:lnTo>
+                </a:path>
+              </a:pathLst>
+            </a:custGeom>
+            <a:ln w="6775" cap="flat">
+              <a:solidFill>
+                <a:srgbClr val="EBEBEB">
+                  <a:alpha val="100000"/>
+                </a:srgbClr>
+              </a:solidFill>
+              <a:prstDash val="solid"/>
+              <a:round/>
+            </a:ln>
+          </p:spPr>
+          <p:txBody>
+            <a:bodyPr/>
+            <a:lstStyle/>
+            <a:p/>
+          </p:txBody>
+        </p:sp>
+        <p:sp>
+          <p:nvSpPr>
+            <p:cNvPr id="40" name="pl40"/>
+            <p:cNvSpPr/>
+            <p:nvPr/>
+          </p:nvSpPr>
+          <p:spPr>
+            <a:xfrm>
+              <a:off x="887106" y="5144686"/>
+              <a:ext cx="7660515" cy="0"/>
+            </a:xfrm>
+            <a:custGeom>
+              <a:avLst/>
+              <a:pathLst>
+                <a:path w="7660515" h="0">
+                  <a:moveTo>
+                    <a:pt x="0" y="0"/>
+                  </a:moveTo>
+                  <a:lnTo>
+                    <a:pt x="7660515" y="0"/>
+                  </a:lnTo>
+                  <a:lnTo>
+                    <a:pt x="7660515" y="0"/>
+                  </a:lnTo>
+                </a:path>
+              </a:pathLst>
+            </a:custGeom>
+            <a:ln w="6775" cap="flat">
+              <a:solidFill>
+                <a:srgbClr val="EBEBEB">
+                  <a:alpha val="100000"/>
+                </a:srgbClr>
+              </a:solidFill>
+              <a:prstDash val="solid"/>
+              <a:round/>
+            </a:ln>
+          </p:spPr>
+          <p:txBody>
+            <a:bodyPr/>
+            <a:lstStyle/>
+            <a:p/>
+          </p:txBody>
+        </p:sp>
+        <p:sp>
+          <p:nvSpPr>
+            <p:cNvPr id="41" name="pl41"/>
+            <p:cNvSpPr/>
+            <p:nvPr/>
+          </p:nvSpPr>
+          <p:spPr>
+            <a:xfrm>
+              <a:off x="887106" y="4845352"/>
+              <a:ext cx="7660515" cy="0"/>
+            </a:xfrm>
+            <a:custGeom>
+              <a:avLst/>
+              <a:pathLst>
+                <a:path w="7660515" h="0">
+                  <a:moveTo>
+                    <a:pt x="0" y="0"/>
+                  </a:moveTo>
+                  <a:lnTo>
+                    <a:pt x="7660515" y="0"/>
+                  </a:lnTo>
+                  <a:lnTo>
+                    <a:pt x="7660515" y="0"/>
+                  </a:lnTo>
+                </a:path>
+              </a:pathLst>
+            </a:custGeom>
+            <a:ln w="6775" cap="flat">
+              <a:solidFill>
+                <a:srgbClr val="EBEBEB">
+                  <a:alpha val="100000"/>
+                </a:srgbClr>
+              </a:solidFill>
+              <a:prstDash val="solid"/>
+              <a:round/>
+            </a:ln>
+          </p:spPr>
+          <p:txBody>
+            <a:bodyPr/>
+            <a:lstStyle/>
+            <a:p/>
+          </p:txBody>
+        </p:sp>
+        <p:sp>
+          <p:nvSpPr>
+            <p:cNvPr id="42" name="pl42"/>
+            <p:cNvSpPr/>
+            <p:nvPr/>
+          </p:nvSpPr>
+          <p:spPr>
+            <a:xfrm>
+              <a:off x="887106" y="4546018"/>
+              <a:ext cx="7660515" cy="0"/>
+            </a:xfrm>
+            <a:custGeom>
+              <a:avLst/>
+              <a:pathLst>
+                <a:path w="7660515" h="0">
+                  <a:moveTo>
+                    <a:pt x="0" y="0"/>
+                  </a:moveTo>
+                  <a:lnTo>
+                    <a:pt x="7660515" y="0"/>
+                  </a:lnTo>
+                  <a:lnTo>
+                    <a:pt x="7660515" y="0"/>
+                  </a:lnTo>
+                </a:path>
+              </a:pathLst>
+            </a:custGeom>
+            <a:ln w="6775" cap="flat">
+              <a:solidFill>
+                <a:srgbClr val="EBEBEB">
+                  <a:alpha val="100000"/>
+                </a:srgbClr>
+              </a:solidFill>
+              <a:prstDash val="solid"/>
+              <a:round/>
+            </a:ln>
+          </p:spPr>
+          <p:txBody>
+            <a:bodyPr/>
+            <a:lstStyle/>
+            <a:p/>
+          </p:txBody>
+        </p:sp>
+        <p:sp>
+          <p:nvSpPr>
+            <p:cNvPr id="43" name="pl43"/>
+            <p:cNvSpPr/>
+            <p:nvPr/>
+          </p:nvSpPr>
+          <p:spPr>
+            <a:xfrm>
+              <a:off x="983303" y="4336484"/>
+              <a:ext cx="0" cy="1317069"/>
+            </a:xfrm>
+            <a:custGeom>
+              <a:avLst/>
+              <a:pathLst>
+                <a:path w="0" h="1317069">
+                  <a:moveTo>
+                    <a:pt x="0" y="1317069"/>
+                  </a:moveTo>
+                  <a:lnTo>
+                    <a:pt x="0" y="0"/>
+                  </a:lnTo>
+                  <a:lnTo>
+                    <a:pt x="0" y="0"/>
+                  </a:lnTo>
+                </a:path>
+              </a:pathLst>
+            </a:custGeom>
+            <a:ln w="6775" cap="flat">
+              <a:solidFill>
+                <a:srgbClr val="EBEBEB">
+                  <a:alpha val="100000"/>
+                </a:srgbClr>
+              </a:solidFill>
+              <a:prstDash val="solid"/>
+              <a:round/>
+            </a:ln>
+          </p:spPr>
+          <p:txBody>
+            <a:bodyPr/>
+            <a:lstStyle/>
+            <a:p/>
+          </p:txBody>
+        </p:sp>
+        <p:sp>
+          <p:nvSpPr>
+            <p:cNvPr id="44" name="pl44"/>
+            <p:cNvSpPr/>
+            <p:nvPr/>
+          </p:nvSpPr>
+          <p:spPr>
+            <a:xfrm>
+              <a:off x="1790468" y="4336484"/>
+              <a:ext cx="0" cy="1317069"/>
+            </a:xfrm>
+            <a:custGeom>
+              <a:avLst/>
+              <a:pathLst>
+                <a:path w="0" h="1317069">
+                  <a:moveTo>
+                    <a:pt x="0" y="1317069"/>
+                  </a:moveTo>
+                  <a:lnTo>
+                    <a:pt x="0" y="0"/>
+                  </a:lnTo>
+                  <a:lnTo>
+                    <a:pt x="0" y="0"/>
+                  </a:lnTo>
+                </a:path>
+              </a:pathLst>
+            </a:custGeom>
+            <a:ln w="6775" cap="flat">
+              <a:solidFill>
+                <a:srgbClr val="EBEBEB">
+                  <a:alpha val="100000"/>
+                </a:srgbClr>
+              </a:solidFill>
+              <a:prstDash val="solid"/>
+              <a:round/>
+            </a:ln>
+          </p:spPr>
+          <p:txBody>
+            <a:bodyPr/>
+            <a:lstStyle/>
+            <a:p/>
+          </p:txBody>
+        </p:sp>
+        <p:sp>
+          <p:nvSpPr>
+            <p:cNvPr id="45" name="pl45"/>
+            <p:cNvSpPr/>
+            <p:nvPr/>
+          </p:nvSpPr>
+          <p:spPr>
+            <a:xfrm>
+              <a:off x="2597634" y="4336484"/>
+              <a:ext cx="0" cy="1317069"/>
+            </a:xfrm>
+            <a:custGeom>
+              <a:avLst/>
+              <a:pathLst>
+                <a:path w="0" h="1317069">
+                  <a:moveTo>
+                    <a:pt x="0" y="1317069"/>
+                  </a:moveTo>
+                  <a:lnTo>
+                    <a:pt x="0" y="0"/>
+                  </a:lnTo>
+                  <a:lnTo>
+                    <a:pt x="0" y="0"/>
+                  </a:lnTo>
+                </a:path>
+              </a:pathLst>
+            </a:custGeom>
+            <a:ln w="6775" cap="flat">
+              <a:solidFill>
+                <a:srgbClr val="EBEBEB">
+                  <a:alpha val="100000"/>
+                </a:srgbClr>
+              </a:solidFill>
+              <a:prstDash val="solid"/>
+              <a:round/>
+            </a:ln>
+          </p:spPr>
+          <p:txBody>
+            <a:bodyPr/>
+            <a:lstStyle/>
+            <a:p/>
+          </p:txBody>
+        </p:sp>
+        <p:sp>
+          <p:nvSpPr>
+            <p:cNvPr id="46" name="pl46"/>
+            <p:cNvSpPr/>
+            <p:nvPr/>
+          </p:nvSpPr>
+          <p:spPr>
+            <a:xfrm>
+              <a:off x="3404799" y="4336484"/>
+              <a:ext cx="0" cy="1317069"/>
+            </a:xfrm>
+            <a:custGeom>
+              <a:avLst/>
+              <a:pathLst>
+                <a:path w="0" h="1317069">
+                  <a:moveTo>
+                    <a:pt x="0" y="1317069"/>
+                  </a:moveTo>
+                  <a:lnTo>
+                    <a:pt x="0" y="0"/>
+                  </a:lnTo>
+                  <a:lnTo>
+                    <a:pt x="0" y="0"/>
+                  </a:lnTo>
+                </a:path>
+              </a:pathLst>
+            </a:custGeom>
+            <a:ln w="6775" cap="flat">
+              <a:solidFill>
+                <a:srgbClr val="EBEBEB">
+                  <a:alpha val="100000"/>
+                </a:srgbClr>
+              </a:solidFill>
+              <a:prstDash val="solid"/>
+              <a:round/>
+            </a:ln>
+          </p:spPr>
+          <p:txBody>
+            <a:bodyPr/>
+            <a:lstStyle/>
+            <a:p/>
+          </p:txBody>
+        </p:sp>
+        <p:sp>
+          <p:nvSpPr>
+            <p:cNvPr id="47" name="pl47"/>
+            <p:cNvSpPr/>
+            <p:nvPr/>
+          </p:nvSpPr>
+          <p:spPr>
+            <a:xfrm>
+              <a:off x="4211965" y="4336484"/>
+              <a:ext cx="0" cy="1317069"/>
+            </a:xfrm>
+            <a:custGeom>
+              <a:avLst/>
+              <a:pathLst>
+                <a:path w="0" h="1317069">
+                  <a:moveTo>
+                    <a:pt x="0" y="1317069"/>
+                  </a:moveTo>
+                  <a:lnTo>
+                    <a:pt x="0" y="0"/>
+                  </a:lnTo>
+                  <a:lnTo>
+                    <a:pt x="0" y="0"/>
+                  </a:lnTo>
+                </a:path>
+              </a:pathLst>
+            </a:custGeom>
+            <a:ln w="6775" cap="flat">
+              <a:solidFill>
+                <a:srgbClr val="EBEBEB">
+                  <a:alpha val="100000"/>
+                </a:srgbClr>
+              </a:solidFill>
+              <a:prstDash val="solid"/>
+              <a:round/>
+            </a:ln>
+          </p:spPr>
+          <p:txBody>
+            <a:bodyPr/>
+            <a:lstStyle/>
+            <a:p/>
+          </p:txBody>
+        </p:sp>
+        <p:sp>
+          <p:nvSpPr>
+            <p:cNvPr id="48" name="pl48"/>
+            <p:cNvSpPr/>
+            <p:nvPr/>
+          </p:nvSpPr>
+          <p:spPr>
+            <a:xfrm>
+              <a:off x="5019130" y="4336484"/>
+              <a:ext cx="0" cy="1317069"/>
+            </a:xfrm>
+            <a:custGeom>
+              <a:avLst/>
+              <a:pathLst>
+                <a:path w="0" h="1317069">
+                  <a:moveTo>
+                    <a:pt x="0" y="1317069"/>
+                  </a:moveTo>
+                  <a:lnTo>
+                    <a:pt x="0" y="0"/>
+                  </a:lnTo>
+                  <a:lnTo>
+                    <a:pt x="0" y="0"/>
+                  </a:lnTo>
+                </a:path>
+              </a:pathLst>
+            </a:custGeom>
+            <a:ln w="6775" cap="flat">
+              <a:solidFill>
+                <a:srgbClr val="EBEBEB">
+                  <a:alpha val="100000"/>
+                </a:srgbClr>
+              </a:solidFill>
+              <a:prstDash val="solid"/>
+              <a:round/>
+            </a:ln>
+          </p:spPr>
+          <p:txBody>
+            <a:bodyPr/>
+            <a:lstStyle/>
+            <a:p/>
+          </p:txBody>
+        </p:sp>
+        <p:sp>
+          <p:nvSpPr>
+            <p:cNvPr id="49" name="pl49"/>
+            <p:cNvSpPr/>
+            <p:nvPr/>
+          </p:nvSpPr>
+          <p:spPr>
+            <a:xfrm>
+              <a:off x="5826296" y="4336484"/>
+              <a:ext cx="0" cy="1317069"/>
+            </a:xfrm>
+            <a:custGeom>
+              <a:avLst/>
+              <a:pathLst>
+                <a:path w="0" h="1317069">
+                  <a:moveTo>
+                    <a:pt x="0" y="1317069"/>
+                  </a:moveTo>
+                  <a:lnTo>
+                    <a:pt x="0" y="0"/>
+                  </a:lnTo>
+                  <a:lnTo>
+                    <a:pt x="0" y="0"/>
+                  </a:lnTo>
+                </a:path>
+              </a:pathLst>
+            </a:custGeom>
+            <a:ln w="6775" cap="flat">
+              <a:solidFill>
+                <a:srgbClr val="EBEBEB">
+                  <a:alpha val="100000"/>
+                </a:srgbClr>
+              </a:solidFill>
+              <a:prstDash val="solid"/>
+              <a:round/>
+            </a:ln>
+          </p:spPr>
+          <p:txBody>
+            <a:bodyPr/>
+            <a:lstStyle/>
+            <a:p/>
+          </p:txBody>
+        </p:sp>
+        <p:sp>
+          <p:nvSpPr>
+            <p:cNvPr id="50" name="pl50"/>
+            <p:cNvSpPr/>
+            <p:nvPr/>
+          </p:nvSpPr>
+          <p:spPr>
+            <a:xfrm>
+              <a:off x="6633461" y="4336484"/>
+              <a:ext cx="0" cy="1317069"/>
+            </a:xfrm>
+            <a:custGeom>
+              <a:avLst/>
+              <a:pathLst>
+                <a:path w="0" h="1317069">
+                  <a:moveTo>
+                    <a:pt x="0" y="1317069"/>
+                  </a:moveTo>
+                  <a:lnTo>
+                    <a:pt x="0" y="0"/>
+                  </a:lnTo>
+                  <a:lnTo>
+                    <a:pt x="0" y="0"/>
+                  </a:lnTo>
+                </a:path>
+              </a:pathLst>
+            </a:custGeom>
+            <a:ln w="6775" cap="flat">
+              <a:solidFill>
+                <a:srgbClr val="EBEBEB">
+                  <a:alpha val="100000"/>
+                </a:srgbClr>
+              </a:solidFill>
+              <a:prstDash val="solid"/>
+              <a:round/>
+            </a:ln>
+          </p:spPr>
+          <p:txBody>
+            <a:bodyPr/>
+            <a:lstStyle/>
+            <a:p/>
+          </p:txBody>
+        </p:sp>
+        <p:sp>
+          <p:nvSpPr>
+            <p:cNvPr id="51" name="pl51"/>
+            <p:cNvSpPr/>
+            <p:nvPr/>
+          </p:nvSpPr>
+          <p:spPr>
+            <a:xfrm>
+              <a:off x="7440627" y="4336484"/>
+              <a:ext cx="0" cy="1317069"/>
+            </a:xfrm>
+            <a:custGeom>
+              <a:avLst/>
+              <a:pathLst>
+                <a:path w="0" h="1317069">
+                  <a:moveTo>
+                    <a:pt x="0" y="1317069"/>
+                  </a:moveTo>
+                  <a:lnTo>
+                    <a:pt x="0" y="0"/>
+                  </a:lnTo>
+                  <a:lnTo>
+                    <a:pt x="0" y="0"/>
+                  </a:lnTo>
+                </a:path>
+              </a:pathLst>
+            </a:custGeom>
+            <a:ln w="6775" cap="flat">
+              <a:solidFill>
+                <a:srgbClr val="EBEBEB">
+                  <a:alpha val="100000"/>
+                </a:srgbClr>
+              </a:solidFill>
+              <a:prstDash val="solid"/>
+              <a:round/>
+            </a:ln>
+          </p:spPr>
+          <p:txBody>
+            <a:bodyPr/>
+            <a:lstStyle/>
+            <a:p/>
+          </p:txBody>
+        </p:sp>
+        <p:sp>
+          <p:nvSpPr>
+            <p:cNvPr id="52" name="pl52"/>
+            <p:cNvSpPr/>
+            <p:nvPr/>
+          </p:nvSpPr>
+          <p:spPr>
+            <a:xfrm>
+              <a:off x="8247792" y="4336484"/>
+              <a:ext cx="0" cy="1317069"/>
+            </a:xfrm>
+            <a:custGeom>
+              <a:avLst/>
+              <a:pathLst>
+                <a:path w="0" h="1317069">
+                  <a:moveTo>
+                    <a:pt x="0" y="1317069"/>
+                  </a:moveTo>
+                  <a:lnTo>
+                    <a:pt x="0" y="0"/>
+                  </a:lnTo>
+                  <a:lnTo>
+                    <a:pt x="0" y="0"/>
+                  </a:lnTo>
+                </a:path>
+              </a:pathLst>
+            </a:custGeom>
+            <a:ln w="6775" cap="flat">
+              <a:solidFill>
+                <a:srgbClr val="EBEBEB">
+                  <a:alpha val="100000"/>
+                </a:srgbClr>
+              </a:solidFill>
+              <a:prstDash val="solid"/>
+              <a:round/>
+            </a:ln>
+          </p:spPr>
+          <p:txBody>
+            <a:bodyPr/>
+            <a:lstStyle/>
+            <a:p/>
+          </p:txBody>
+        </p:sp>
+        <p:sp>
+          <p:nvSpPr>
+            <p:cNvPr id="53" name="pl53"/>
+            <p:cNvSpPr/>
+            <p:nvPr/>
+          </p:nvSpPr>
+          <p:spPr>
+            <a:xfrm>
+              <a:off x="887106" y="5593686"/>
+              <a:ext cx="7660515" cy="0"/>
+            </a:xfrm>
+            <a:custGeom>
+              <a:avLst/>
+              <a:pathLst>
+                <a:path w="7660515" h="0">
+                  <a:moveTo>
+                    <a:pt x="0" y="0"/>
+                  </a:moveTo>
+                  <a:lnTo>
+                    <a:pt x="7660515" y="0"/>
+                  </a:lnTo>
+                  <a:lnTo>
+                    <a:pt x="7660515" y="0"/>
+                  </a:lnTo>
+                </a:path>
+              </a:pathLst>
+            </a:custGeom>
+            <a:ln w="13550" cap="flat">
+              <a:solidFill>
+                <a:srgbClr val="EBEBEB">
+                  <a:alpha val="100000"/>
+                </a:srgbClr>
+              </a:solidFill>
+              <a:prstDash val="solid"/>
+              <a:round/>
+            </a:ln>
+          </p:spPr>
+          <p:txBody>
+            <a:bodyPr/>
+            <a:lstStyle/>
+            <a:p/>
+          </p:txBody>
+        </p:sp>
+        <p:sp>
+          <p:nvSpPr>
+            <p:cNvPr id="54" name="pl54"/>
+            <p:cNvSpPr/>
+            <p:nvPr/>
+          </p:nvSpPr>
+          <p:spPr>
+            <a:xfrm>
+              <a:off x="887106" y="5294352"/>
+              <a:ext cx="7660515" cy="0"/>
+            </a:xfrm>
+            <a:custGeom>
+              <a:avLst/>
+              <a:pathLst>
+                <a:path w="7660515" h="0">
+                  <a:moveTo>
+                    <a:pt x="0" y="0"/>
+                  </a:moveTo>
+                  <a:lnTo>
+                    <a:pt x="7660515" y="0"/>
+                  </a:lnTo>
+                  <a:lnTo>
+                    <a:pt x="7660515" y="0"/>
+                  </a:lnTo>
+                </a:path>
+              </a:pathLst>
+            </a:custGeom>
+            <a:ln w="13550" cap="flat">
+              <a:solidFill>
+                <a:srgbClr val="EBEBEB">
+                  <a:alpha val="100000"/>
+                </a:srgbClr>
+              </a:solidFill>
+              <a:prstDash val="solid"/>
+              <a:round/>
+            </a:ln>
+          </p:spPr>
+          <p:txBody>
+            <a:bodyPr/>
+            <a:lstStyle/>
+            <a:p/>
+          </p:txBody>
+        </p:sp>
+        <p:sp>
+          <p:nvSpPr>
+            <p:cNvPr id="55" name="pl55"/>
+            <p:cNvSpPr/>
+            <p:nvPr/>
+          </p:nvSpPr>
+          <p:spPr>
+            <a:xfrm>
+              <a:off x="887106" y="4995019"/>
+              <a:ext cx="7660515" cy="0"/>
+            </a:xfrm>
+            <a:custGeom>
+              <a:avLst/>
+              <a:pathLst>
+                <a:path w="7660515" h="0">
+                  <a:moveTo>
+                    <a:pt x="0" y="0"/>
+                  </a:moveTo>
+                  <a:lnTo>
+                    <a:pt x="7660515" y="0"/>
+                  </a:lnTo>
+                  <a:lnTo>
+                    <a:pt x="7660515" y="0"/>
+                  </a:lnTo>
+                </a:path>
+              </a:pathLst>
+            </a:custGeom>
+            <a:ln w="13550" cap="flat">
+              <a:solidFill>
+                <a:srgbClr val="EBEBEB">
+                  <a:alpha val="100000"/>
+                </a:srgbClr>
+              </a:solidFill>
+              <a:prstDash val="solid"/>
+              <a:round/>
+            </a:ln>
+          </p:spPr>
+          <p:txBody>
+            <a:bodyPr/>
+            <a:lstStyle/>
+            <a:p/>
+          </p:txBody>
+        </p:sp>
+        <p:sp>
+          <p:nvSpPr>
+            <p:cNvPr id="56" name="pl56"/>
+            <p:cNvSpPr/>
+            <p:nvPr/>
+          </p:nvSpPr>
+          <p:spPr>
+            <a:xfrm>
+              <a:off x="887106" y="4695685"/>
+              <a:ext cx="7660515" cy="0"/>
+            </a:xfrm>
+            <a:custGeom>
+              <a:avLst/>
+              <a:pathLst>
+                <a:path w="7660515" h="0">
+                  <a:moveTo>
+                    <a:pt x="0" y="0"/>
+                  </a:moveTo>
+                  <a:lnTo>
+                    <a:pt x="7660515" y="0"/>
+                  </a:lnTo>
+                  <a:lnTo>
+                    <a:pt x="7660515" y="0"/>
+                  </a:lnTo>
+                </a:path>
+              </a:pathLst>
+            </a:custGeom>
+            <a:ln w="13550" cap="flat">
+              <a:solidFill>
+                <a:srgbClr val="EBEBEB">
+                  <a:alpha val="100000"/>
+                </a:srgbClr>
+              </a:solidFill>
+              <a:prstDash val="solid"/>
+              <a:round/>
+            </a:ln>
+          </p:spPr>
+          <p:txBody>
+            <a:bodyPr/>
+            <a:lstStyle/>
+            <a:p/>
+          </p:txBody>
+        </p:sp>
+        <p:sp>
+          <p:nvSpPr>
+            <p:cNvPr id="57" name="pl57"/>
+            <p:cNvSpPr/>
+            <p:nvPr/>
+          </p:nvSpPr>
+          <p:spPr>
+            <a:xfrm>
+              <a:off x="887106" y="4396351"/>
+              <a:ext cx="7660515" cy="0"/>
+            </a:xfrm>
+            <a:custGeom>
+              <a:avLst/>
+              <a:pathLst>
+                <a:path w="7660515" h="0">
+                  <a:moveTo>
+                    <a:pt x="0" y="0"/>
+                  </a:moveTo>
+                  <a:lnTo>
+                    <a:pt x="7660515" y="0"/>
+                  </a:lnTo>
+                  <a:lnTo>
+                    <a:pt x="7660515" y="0"/>
+                  </a:lnTo>
+                </a:path>
+              </a:pathLst>
+            </a:custGeom>
+            <a:ln w="13550" cap="flat">
+              <a:solidFill>
+                <a:srgbClr val="EBEBEB">
+                  <a:alpha val="100000"/>
+                </a:srgbClr>
+              </a:solidFill>
+              <a:prstDash val="solid"/>
+              <a:round/>
+            </a:ln>
+          </p:spPr>
+          <p:txBody>
+            <a:bodyPr/>
+            <a:lstStyle/>
+            <a:p/>
+          </p:txBody>
+        </p:sp>
+        <p:sp>
+          <p:nvSpPr>
+            <p:cNvPr id="58" name="pl58"/>
+            <p:cNvSpPr/>
+            <p:nvPr/>
+          </p:nvSpPr>
+          <p:spPr>
+            <a:xfrm>
+              <a:off x="1386885" y="4336484"/>
+              <a:ext cx="0" cy="1317069"/>
+            </a:xfrm>
+            <a:custGeom>
+              <a:avLst/>
+              <a:pathLst>
+                <a:path w="0" h="1317069">
+                  <a:moveTo>
+                    <a:pt x="0" y="1317069"/>
+                  </a:moveTo>
+                  <a:lnTo>
+                    <a:pt x="0" y="0"/>
+                  </a:lnTo>
+                  <a:lnTo>
+                    <a:pt x="0" y="0"/>
+                  </a:lnTo>
+                </a:path>
+              </a:pathLst>
+            </a:custGeom>
+            <a:ln w="13550" cap="flat">
+              <a:solidFill>
+                <a:srgbClr val="EBEBEB">
+                  <a:alpha val="100000"/>
+                </a:srgbClr>
+              </a:solidFill>
+              <a:prstDash val="solid"/>
+              <a:round/>
+            </a:ln>
+          </p:spPr>
+          <p:txBody>
+            <a:bodyPr/>
+            <a:lstStyle/>
+            <a:p/>
+          </p:txBody>
+        </p:sp>
+        <p:sp>
+          <p:nvSpPr>
+            <p:cNvPr id="59" name="pl59"/>
+            <p:cNvSpPr/>
+            <p:nvPr/>
+          </p:nvSpPr>
+          <p:spPr>
+            <a:xfrm>
+              <a:off x="2194051" y="4336484"/>
+              <a:ext cx="0" cy="1317069"/>
+            </a:xfrm>
+            <a:custGeom>
+              <a:avLst/>
+              <a:pathLst>
+                <a:path w="0" h="1317069">
+                  <a:moveTo>
+                    <a:pt x="0" y="1317069"/>
+                  </a:moveTo>
+                  <a:lnTo>
+                    <a:pt x="0" y="0"/>
+                  </a:lnTo>
+                  <a:lnTo>
+                    <a:pt x="0" y="0"/>
+                  </a:lnTo>
+                </a:path>
+              </a:pathLst>
+            </a:custGeom>
+            <a:ln w="13550" cap="flat">
+              <a:solidFill>
+                <a:srgbClr val="EBEBEB">
+                  <a:alpha val="100000"/>
+                </a:srgbClr>
+              </a:solidFill>
+              <a:prstDash val="solid"/>
+              <a:round/>
+            </a:ln>
+          </p:spPr>
+          <p:txBody>
+            <a:bodyPr/>
+            <a:lstStyle/>
+            <a:p/>
+          </p:txBody>
+        </p:sp>
+        <p:sp>
+          <p:nvSpPr>
+            <p:cNvPr id="60" name="pl60"/>
+            <p:cNvSpPr/>
+            <p:nvPr/>
+          </p:nvSpPr>
+          <p:spPr>
+            <a:xfrm>
+              <a:off x="3001216" y="4336484"/>
+              <a:ext cx="0" cy="1317069"/>
+            </a:xfrm>
+            <a:custGeom>
+              <a:avLst/>
+              <a:pathLst>
+                <a:path w="0" h="1317069">
+                  <a:moveTo>
+                    <a:pt x="0" y="1317069"/>
+                  </a:moveTo>
+                  <a:lnTo>
+                    <a:pt x="0" y="0"/>
+                  </a:lnTo>
+                  <a:lnTo>
+                    <a:pt x="0" y="0"/>
+                  </a:lnTo>
+                </a:path>
+              </a:pathLst>
+            </a:custGeom>
+            <a:ln w="13550" cap="flat">
+              <a:solidFill>
+                <a:srgbClr val="EBEBEB">
+                  <a:alpha val="100000"/>
+                </a:srgbClr>
+              </a:solidFill>
+              <a:prstDash val="solid"/>
+              <a:round/>
+            </a:ln>
+          </p:spPr>
+          <p:txBody>
+            <a:bodyPr/>
+            <a:lstStyle/>
+            <a:p/>
+          </p:txBody>
+        </p:sp>
+        <p:sp>
+          <p:nvSpPr>
+            <p:cNvPr id="61" name="pl61"/>
+            <p:cNvSpPr/>
+            <p:nvPr/>
+          </p:nvSpPr>
+          <p:spPr>
+            <a:xfrm>
+              <a:off x="3808382" y="4336484"/>
+              <a:ext cx="0" cy="1317069"/>
+            </a:xfrm>
+            <a:custGeom>
+              <a:avLst/>
+              <a:pathLst>
+                <a:path w="0" h="1317069">
+                  <a:moveTo>
+                    <a:pt x="0" y="1317069"/>
+                  </a:moveTo>
+                  <a:lnTo>
+                    <a:pt x="0" y="0"/>
+                  </a:lnTo>
+                  <a:lnTo>
+                    <a:pt x="0" y="0"/>
+                  </a:lnTo>
+                </a:path>
+              </a:pathLst>
+            </a:custGeom>
+            <a:ln w="13550" cap="flat">
+              <a:solidFill>
+                <a:srgbClr val="EBEBEB">
+                  <a:alpha val="100000"/>
+                </a:srgbClr>
+              </a:solidFill>
+              <a:prstDash val="solid"/>
+              <a:round/>
+            </a:ln>
+          </p:spPr>
+          <p:txBody>
+            <a:bodyPr/>
+            <a:lstStyle/>
+            <a:p/>
+          </p:txBody>
+        </p:sp>
+        <p:sp>
+          <p:nvSpPr>
+            <p:cNvPr id="62" name="pl62"/>
+            <p:cNvSpPr/>
+            <p:nvPr/>
+          </p:nvSpPr>
+          <p:spPr>
+            <a:xfrm>
+              <a:off x="4615547" y="4336484"/>
+              <a:ext cx="0" cy="1317069"/>
+            </a:xfrm>
+            <a:custGeom>
+              <a:avLst/>
+              <a:pathLst>
+                <a:path w="0" h="1317069">
+                  <a:moveTo>
+                    <a:pt x="0" y="1317069"/>
+                  </a:moveTo>
+                  <a:lnTo>
+                    <a:pt x="0" y="0"/>
+                  </a:lnTo>
+                  <a:lnTo>
+                    <a:pt x="0" y="0"/>
+                  </a:lnTo>
+                </a:path>
+              </a:pathLst>
+            </a:custGeom>
+            <a:ln w="13550" cap="flat">
+              <a:solidFill>
+                <a:srgbClr val="EBEBEB">
+                  <a:alpha val="100000"/>
+                </a:srgbClr>
+              </a:solidFill>
+              <a:prstDash val="solid"/>
+              <a:round/>
+            </a:ln>
+          </p:spPr>
+          <p:txBody>
+            <a:bodyPr/>
+            <a:lstStyle/>
+            <a:p/>
+          </p:txBody>
+        </p:sp>
+        <p:sp>
+          <p:nvSpPr>
+            <p:cNvPr id="63" name="pl63"/>
+            <p:cNvSpPr/>
+            <p:nvPr/>
+          </p:nvSpPr>
+          <p:spPr>
+            <a:xfrm>
+              <a:off x="5422713" y="4336484"/>
+              <a:ext cx="0" cy="1317069"/>
+            </a:xfrm>
+            <a:custGeom>
+              <a:avLst/>
+              <a:pathLst>
+                <a:path w="0" h="1317069">
+                  <a:moveTo>
+                    <a:pt x="0" y="1317069"/>
+                  </a:moveTo>
+                  <a:lnTo>
+                    <a:pt x="0" y="0"/>
+                  </a:lnTo>
+                  <a:lnTo>
+                    <a:pt x="0" y="0"/>
+                  </a:lnTo>
+                </a:path>
+              </a:pathLst>
+            </a:custGeom>
+            <a:ln w="13550" cap="flat">
+              <a:solidFill>
+                <a:srgbClr val="EBEBEB">
+                  <a:alpha val="100000"/>
+                </a:srgbClr>
+              </a:solidFill>
+              <a:prstDash val="solid"/>
+              <a:round/>
+            </a:ln>
+          </p:spPr>
+          <p:txBody>
+            <a:bodyPr/>
+            <a:lstStyle/>
+            <a:p/>
+          </p:txBody>
+        </p:sp>
+        <p:sp>
+          <p:nvSpPr>
+            <p:cNvPr id="64" name="pl64"/>
+            <p:cNvSpPr/>
+            <p:nvPr/>
+          </p:nvSpPr>
+          <p:spPr>
+            <a:xfrm>
+              <a:off x="6229878" y="4336484"/>
+              <a:ext cx="0" cy="1317069"/>
+            </a:xfrm>
+            <a:custGeom>
+              <a:avLst/>
+              <a:pathLst>
+                <a:path w="0" h="1317069">
+                  <a:moveTo>
+                    <a:pt x="0" y="1317069"/>
+                  </a:moveTo>
+                  <a:lnTo>
+                    <a:pt x="0" y="0"/>
+                  </a:lnTo>
+                  <a:lnTo>
+                    <a:pt x="0" y="0"/>
+                  </a:lnTo>
+                </a:path>
+              </a:pathLst>
+            </a:custGeom>
+            <a:ln w="13550" cap="flat">
+              <a:solidFill>
+                <a:srgbClr val="EBEBEB">
+                  <a:alpha val="100000"/>
+                </a:srgbClr>
+              </a:solidFill>
+              <a:prstDash val="solid"/>
+              <a:round/>
+            </a:ln>
+          </p:spPr>
+          <p:txBody>
+            <a:bodyPr/>
+            <a:lstStyle/>
+            <a:p/>
+          </p:txBody>
+        </p:sp>
+        <p:sp>
+          <p:nvSpPr>
+            <p:cNvPr id="65" name="pl65"/>
+            <p:cNvSpPr/>
+            <p:nvPr/>
+          </p:nvSpPr>
+          <p:spPr>
+            <a:xfrm>
+              <a:off x="7037044" y="4336484"/>
+              <a:ext cx="0" cy="1317069"/>
+            </a:xfrm>
+            <a:custGeom>
+              <a:avLst/>
+              <a:pathLst>
+                <a:path w="0" h="1317069">
+                  <a:moveTo>
+                    <a:pt x="0" y="1317069"/>
+                  </a:moveTo>
+                  <a:lnTo>
+                    <a:pt x="0" y="0"/>
+                  </a:lnTo>
+                  <a:lnTo>
+                    <a:pt x="0" y="0"/>
+                  </a:lnTo>
+                </a:path>
+              </a:pathLst>
+            </a:custGeom>
+            <a:ln w="13550" cap="flat">
+              <a:solidFill>
+                <a:srgbClr val="EBEBEB">
+                  <a:alpha val="100000"/>
+                </a:srgbClr>
+              </a:solidFill>
+              <a:prstDash val="solid"/>
+              <a:round/>
+            </a:ln>
+          </p:spPr>
+          <p:txBody>
+            <a:bodyPr/>
+            <a:lstStyle/>
+            <a:p/>
+          </p:txBody>
+        </p:sp>
+        <p:sp>
+          <p:nvSpPr>
+            <p:cNvPr id="66" name="pl66"/>
+            <p:cNvSpPr/>
+            <p:nvPr/>
+          </p:nvSpPr>
+          <p:spPr>
+            <a:xfrm>
+              <a:off x="7844209" y="4336484"/>
+              <a:ext cx="0" cy="1317069"/>
+            </a:xfrm>
+            <a:custGeom>
+              <a:avLst/>
+              <a:pathLst>
+                <a:path w="0" h="1317069">
+                  <a:moveTo>
+                    <a:pt x="0" y="1317069"/>
+                  </a:moveTo>
+                  <a:lnTo>
+                    <a:pt x="0" y="0"/>
+                  </a:lnTo>
+                  <a:lnTo>
+                    <a:pt x="0" y="0"/>
+                  </a:lnTo>
+                </a:path>
+              </a:pathLst>
+            </a:custGeom>
+            <a:ln w="13550" cap="flat">
+              <a:solidFill>
+                <a:srgbClr val="EBEBEB">
+                  <a:alpha val="100000"/>
+                </a:srgbClr>
+              </a:solidFill>
+              <a:prstDash val="solid"/>
+              <a:round/>
+            </a:ln>
+          </p:spPr>
+          <p:txBody>
+            <a:bodyPr/>
+            <a:lstStyle/>
+            <a:p/>
+          </p:txBody>
+        </p:sp>
+        <p:sp>
+          <p:nvSpPr>
+            <p:cNvPr id="67" name="pg67"/>
+            <p:cNvSpPr/>
+            <p:nvPr/>
+          </p:nvSpPr>
+          <p:spPr>
+            <a:xfrm>
+              <a:off x="1235312" y="4336484"/>
+              <a:ext cx="6964104" cy="1256107"/>
+            </a:xfrm>
+            <a:custGeom>
+              <a:avLst/>
+              <a:pathLst>
+                <a:path w="6964104" h="1256107">
+                  <a:moveTo>
+                    <a:pt x="2285296" y="0"/>
+                  </a:moveTo>
+                  <a:lnTo>
+                    <a:pt x="2321368" y="68122"/>
+                  </a:lnTo>
+                  <a:lnTo>
+                    <a:pt x="2391712" y="187620"/>
+                  </a:lnTo>
+                  <a:lnTo>
+                    <a:pt x="2462057" y="295109"/>
+                  </a:lnTo>
+                  <a:lnTo>
+                    <a:pt x="2532401" y="391796"/>
+                  </a:lnTo>
+                  <a:lnTo>
+                    <a:pt x="2602746" y="478767"/>
+                  </a:lnTo>
+                  <a:lnTo>
+                    <a:pt x="2673090" y="556997"/>
+                  </a:lnTo>
+                  <a:lnTo>
+                    <a:pt x="2743435" y="627365"/>
+                  </a:lnTo>
+                  <a:lnTo>
+                    <a:pt x="2813779" y="690661"/>
+                  </a:lnTo>
+                  <a:lnTo>
+                    <a:pt x="2884124" y="747596"/>
+                  </a:lnTo>
+                  <a:lnTo>
+                    <a:pt x="2954468" y="798810"/>
+                  </a:lnTo>
+                  <a:lnTo>
+                    <a:pt x="3024813" y="844877"/>
+                  </a:lnTo>
+                  <a:lnTo>
+                    <a:pt x="3095157" y="886314"/>
+                  </a:lnTo>
+                  <a:lnTo>
+                    <a:pt x="3165502" y="923587"/>
+                  </a:lnTo>
+                  <a:lnTo>
+                    <a:pt x="3235846" y="957114"/>
+                  </a:lnTo>
+                  <a:lnTo>
+                    <a:pt x="3306191" y="960614"/>
+                  </a:lnTo>
+                  <a:lnTo>
+                    <a:pt x="3376535" y="963401"/>
+                  </a:lnTo>
+                  <a:lnTo>
+                    <a:pt x="3446880" y="966162"/>
+                  </a:lnTo>
+                  <a:lnTo>
+                    <a:pt x="3517224" y="968897"/>
+                  </a:lnTo>
+                  <a:lnTo>
+                    <a:pt x="3587569" y="971606"/>
+                  </a:lnTo>
+                  <a:lnTo>
+                    <a:pt x="3657913" y="974290"/>
+                  </a:lnTo>
+                  <a:lnTo>
+                    <a:pt x="3728257" y="976948"/>
+                  </a:lnTo>
+                  <a:lnTo>
+                    <a:pt x="3798602" y="979582"/>
+                  </a:lnTo>
+                  <a:lnTo>
+                    <a:pt x="3868946" y="982191"/>
+                  </a:lnTo>
+                  <a:lnTo>
+                    <a:pt x="3939291" y="984775"/>
+                  </a:lnTo>
+                  <a:lnTo>
+                    <a:pt x="4009635" y="987335"/>
+                  </a:lnTo>
+                  <a:lnTo>
+                    <a:pt x="4079980" y="989871"/>
+                  </a:lnTo>
+                  <a:lnTo>
+                    <a:pt x="4150324" y="992383"/>
+                  </a:lnTo>
+                  <a:lnTo>
+                    <a:pt x="4220669" y="994871"/>
+                  </a:lnTo>
+                  <a:lnTo>
+                    <a:pt x="4291013" y="997336"/>
+                  </a:lnTo>
+                  <a:lnTo>
+                    <a:pt x="4361358" y="999778"/>
+                  </a:lnTo>
+                  <a:lnTo>
+                    <a:pt x="4431702" y="1002197"/>
+                  </a:lnTo>
+                  <a:lnTo>
+                    <a:pt x="4502047" y="1004594"/>
+                  </a:lnTo>
+                  <a:lnTo>
+                    <a:pt x="4572391" y="1006967"/>
+                  </a:lnTo>
+                  <a:lnTo>
+                    <a:pt x="4642736" y="1009319"/>
+                  </a:lnTo>
+                  <a:lnTo>
+                    <a:pt x="4713080" y="1011648"/>
+                  </a:lnTo>
+                  <a:lnTo>
+                    <a:pt x="4783425" y="1013956"/>
+                  </a:lnTo>
+                  <a:lnTo>
+                    <a:pt x="4853769" y="1016241"/>
+                  </a:lnTo>
+                  <a:lnTo>
+                    <a:pt x="4924114" y="1018506"/>
+                  </a:lnTo>
+                  <a:lnTo>
+                    <a:pt x="4994458" y="1020749"/>
+                  </a:lnTo>
+                  <a:lnTo>
+                    <a:pt x="5064803" y="1022971"/>
+                  </a:lnTo>
+                  <a:lnTo>
+                    <a:pt x="5135147" y="1025172"/>
+                  </a:lnTo>
+                  <a:lnTo>
+                    <a:pt x="5205492" y="1027352"/>
+                  </a:lnTo>
+                  <a:lnTo>
+                    <a:pt x="5275836" y="1029512"/>
+                  </a:lnTo>
+                  <a:lnTo>
+                    <a:pt x="5346181" y="1031651"/>
+                  </a:lnTo>
+                  <a:lnTo>
+                    <a:pt x="5416525" y="1033771"/>
+                  </a:lnTo>
+                  <a:lnTo>
+                    <a:pt x="5486870" y="1035870"/>
+                  </a:lnTo>
+                  <a:lnTo>
+                    <a:pt x="5557214" y="1037950"/>
+                  </a:lnTo>
+                  <a:lnTo>
+                    <a:pt x="5627559" y="1040011"/>
+                  </a:lnTo>
+                  <a:lnTo>
+                    <a:pt x="5697903" y="1042052"/>
+                  </a:lnTo>
+                  <a:lnTo>
+                    <a:pt x="5768248" y="1044073"/>
+                  </a:lnTo>
+                  <a:lnTo>
+                    <a:pt x="5838592" y="1046076"/>
+                  </a:lnTo>
+                  <a:lnTo>
+                    <a:pt x="5908937" y="1048060"/>
+                  </a:lnTo>
+                  <a:lnTo>
+                    <a:pt x="5979281" y="1050025"/>
+                  </a:lnTo>
+                  <a:lnTo>
+                    <a:pt x="6049626" y="1051972"/>
+                  </a:lnTo>
+                  <a:lnTo>
+                    <a:pt x="6119970" y="1053901"/>
+                  </a:lnTo>
+                  <a:lnTo>
+                    <a:pt x="6190315" y="1055811"/>
+                  </a:lnTo>
+                  <a:lnTo>
+                    <a:pt x="6260659" y="1057703"/>
+                  </a:lnTo>
+                  <a:lnTo>
+                    <a:pt x="6331004" y="1059578"/>
+                  </a:lnTo>
+                  <a:lnTo>
+                    <a:pt x="6401348" y="1061435"/>
+                  </a:lnTo>
+                  <a:lnTo>
+                    <a:pt x="6471693" y="1063275"/>
+                  </a:lnTo>
+                  <a:lnTo>
+                    <a:pt x="6542037" y="1065097"/>
+                  </a:lnTo>
+                  <a:lnTo>
+                    <a:pt x="6612382" y="1066902"/>
+                  </a:lnTo>
+                  <a:lnTo>
+                    <a:pt x="6682726" y="1068691"/>
+                  </a:lnTo>
+                  <a:lnTo>
+                    <a:pt x="6753071" y="1070462"/>
+                  </a:lnTo>
+                  <a:lnTo>
+                    <a:pt x="6823415" y="1072217"/>
+                  </a:lnTo>
+                  <a:lnTo>
+                    <a:pt x="6893760" y="1073955"/>
+                  </a:lnTo>
+                  <a:lnTo>
+                    <a:pt x="6964104" y="1075677"/>
+                  </a:lnTo>
+                  <a:lnTo>
+                    <a:pt x="6964104" y="1256107"/>
+                  </a:lnTo>
+                  <a:lnTo>
+                    <a:pt x="6893760" y="1255984"/>
+                  </a:lnTo>
+                  <a:lnTo>
+                    <a:pt x="6823415" y="1255848"/>
+                  </a:lnTo>
+                  <a:lnTo>
+                    <a:pt x="6753071" y="1255697"/>
+                  </a:lnTo>
+                  <a:lnTo>
+                    <a:pt x="6682726" y="1255529"/>
+                  </a:lnTo>
+                  <a:lnTo>
+                    <a:pt x="6612382" y="1255342"/>
+                  </a:lnTo>
+                  <a:lnTo>
+                    <a:pt x="6542037" y="1255135"/>
+                  </a:lnTo>
+                  <a:lnTo>
+                    <a:pt x="6471693" y="1254904"/>
+                  </a:lnTo>
+                  <a:lnTo>
+                    <a:pt x="6401348" y="1254647"/>
+                  </a:lnTo>
+                  <a:lnTo>
+                    <a:pt x="6331004" y="1254361"/>
+                  </a:lnTo>
+                  <a:lnTo>
+                    <a:pt x="6260659" y="1254044"/>
+                  </a:lnTo>
+                  <a:lnTo>
+                    <a:pt x="6190315" y="1253691"/>
+                  </a:lnTo>
+                  <a:lnTo>
+                    <a:pt x="6119970" y="1253299"/>
+                  </a:lnTo>
+                  <a:lnTo>
+                    <a:pt x="6049626" y="1252863"/>
+                  </a:lnTo>
+                  <a:lnTo>
+                    <a:pt x="5979281" y="1252378"/>
+                  </a:lnTo>
+                  <a:lnTo>
+                    <a:pt x="5908937" y="1251839"/>
+                  </a:lnTo>
+                  <a:lnTo>
+                    <a:pt x="5838592" y="1251240"/>
+                  </a:lnTo>
+                  <a:lnTo>
+                    <a:pt x="5768248" y="1250574"/>
+                  </a:lnTo>
+                  <a:lnTo>
+                    <a:pt x="5697903" y="1249834"/>
+                  </a:lnTo>
+                  <a:lnTo>
+                    <a:pt x="5627559" y="1249011"/>
+                  </a:lnTo>
+                  <a:lnTo>
+                    <a:pt x="5557214" y="1248095"/>
+                  </a:lnTo>
+                  <a:lnTo>
+                    <a:pt x="5486870" y="1247078"/>
+                  </a:lnTo>
+                  <a:lnTo>
+                    <a:pt x="5416525" y="1245947"/>
+                  </a:lnTo>
+                  <a:lnTo>
+                    <a:pt x="5346181" y="1244690"/>
+                  </a:lnTo>
+                  <a:lnTo>
+                    <a:pt x="5275836" y="1243292"/>
+                  </a:lnTo>
+                  <a:lnTo>
+                    <a:pt x="5205492" y="1241738"/>
+                  </a:lnTo>
+                  <a:lnTo>
+                    <a:pt x="5135147" y="1240010"/>
+                  </a:lnTo>
+                  <a:lnTo>
+                    <a:pt x="5064803" y="1238089"/>
+                  </a:lnTo>
+                  <a:lnTo>
+                    <a:pt x="4994458" y="1235954"/>
+                  </a:lnTo>
+                  <a:lnTo>
+                    <a:pt x="4924114" y="1233580"/>
+                  </a:lnTo>
+                  <a:lnTo>
+                    <a:pt x="4853769" y="1230941"/>
+                  </a:lnTo>
+                  <a:lnTo>
+                    <a:pt x="4783425" y="1228007"/>
+                  </a:lnTo>
+                  <a:lnTo>
+                    <a:pt x="4713080" y="1224745"/>
+                  </a:lnTo>
+                  <a:lnTo>
+                    <a:pt x="4642736" y="1221119"/>
+                  </a:lnTo>
+                  <a:lnTo>
+                    <a:pt x="4572391" y="1217087"/>
+                  </a:lnTo>
+                  <a:lnTo>
+                    <a:pt x="4502047" y="1212605"/>
+                  </a:lnTo>
+                  <a:lnTo>
+                    <a:pt x="4431702" y="1207623"/>
+                  </a:lnTo>
+                  <a:lnTo>
+                    <a:pt x="4361358" y="1202084"/>
+                  </a:lnTo>
+                  <a:lnTo>
+                    <a:pt x="4291013" y="1195926"/>
+                  </a:lnTo>
+                  <a:lnTo>
+                    <a:pt x="4220669" y="1189080"/>
+                  </a:lnTo>
+                  <a:lnTo>
+                    <a:pt x="4150324" y="1181469"/>
+                  </a:lnTo>
+                  <a:lnTo>
+                    <a:pt x="4079980" y="1173007"/>
+                  </a:lnTo>
+                  <a:lnTo>
+                    <a:pt x="4009635" y="1163601"/>
+                  </a:lnTo>
+                  <a:lnTo>
+                    <a:pt x="3939291" y="1153143"/>
+                  </a:lnTo>
+                  <a:lnTo>
+                    <a:pt x="3868946" y="1141518"/>
+                  </a:lnTo>
+                  <a:lnTo>
+                    <a:pt x="3798602" y="1128593"/>
+                  </a:lnTo>
+                  <a:lnTo>
+                    <a:pt x="3728257" y="1114224"/>
+                  </a:lnTo>
+                  <a:lnTo>
+                    <a:pt x="3657913" y="1098250"/>
+                  </a:lnTo>
+                  <a:lnTo>
+                    <a:pt x="3587569" y="1080491"/>
+                  </a:lnTo>
+                  <a:lnTo>
+                    <a:pt x="3517224" y="1060748"/>
+                  </a:lnTo>
+                  <a:lnTo>
+                    <a:pt x="3446880" y="1038800"/>
+                  </a:lnTo>
+                  <a:lnTo>
+                    <a:pt x="3376535" y="1014399"/>
+                  </a:lnTo>
+                  <a:lnTo>
+                    <a:pt x="3306191" y="987272"/>
+                  </a:lnTo>
+                  <a:lnTo>
+                    <a:pt x="3235846" y="957801"/>
+                  </a:lnTo>
+                  <a:lnTo>
+                    <a:pt x="3165502" y="954961"/>
+                  </a:lnTo>
+                  <a:lnTo>
+                    <a:pt x="3095157" y="952094"/>
+                  </a:lnTo>
+                  <a:lnTo>
+                    <a:pt x="3024813" y="949199"/>
+                  </a:lnTo>
+                  <a:lnTo>
+                    <a:pt x="2954468" y="946278"/>
+                  </a:lnTo>
+                  <a:lnTo>
+                    <a:pt x="2884124" y="943328"/>
+                  </a:lnTo>
+                  <a:lnTo>
+                    <a:pt x="2813779" y="940351"/>
+                  </a:lnTo>
+                  <a:lnTo>
+                    <a:pt x="2743435" y="937345"/>
+                  </a:lnTo>
+                  <a:lnTo>
+                    <a:pt x="2673090" y="934311"/>
+                  </a:lnTo>
+                  <a:lnTo>
+                    <a:pt x="2602746" y="931248"/>
+                  </a:lnTo>
+                  <a:lnTo>
+                    <a:pt x="2532401" y="928156"/>
+                  </a:lnTo>
+                  <a:lnTo>
+                    <a:pt x="2462057" y="925035"/>
+                  </a:lnTo>
+                  <a:lnTo>
+                    <a:pt x="2391712" y="921884"/>
+                  </a:lnTo>
+                  <a:lnTo>
+                    <a:pt x="2321368" y="918703"/>
+                  </a:lnTo>
+                  <a:lnTo>
+                    <a:pt x="2251023" y="915492"/>
+                  </a:lnTo>
+                  <a:lnTo>
+                    <a:pt x="2180679" y="912250"/>
+                  </a:lnTo>
+                  <a:lnTo>
+                    <a:pt x="2110334" y="908978"/>
+                  </a:lnTo>
+                  <a:lnTo>
+                    <a:pt x="2039990" y="905675"/>
+                  </a:lnTo>
+                  <a:lnTo>
+                    <a:pt x="1969645" y="902340"/>
+                  </a:lnTo>
+                  <a:lnTo>
+                    <a:pt x="1899301" y="898974"/>
+                  </a:lnTo>
+                  <a:lnTo>
+                    <a:pt x="1828956" y="895576"/>
+                  </a:lnTo>
+                  <a:lnTo>
+                    <a:pt x="1758612" y="892145"/>
+                  </a:lnTo>
+                  <a:lnTo>
+                    <a:pt x="1688267" y="888682"/>
+                  </a:lnTo>
+                  <a:lnTo>
+                    <a:pt x="1617923" y="885187"/>
+                  </a:lnTo>
+                  <a:lnTo>
+                    <a:pt x="1547578" y="881658"/>
+                  </a:lnTo>
+                  <a:lnTo>
+                    <a:pt x="1477234" y="878095"/>
+                  </a:lnTo>
+                  <a:lnTo>
+                    <a:pt x="1406889" y="874499"/>
+                  </a:lnTo>
+                  <a:lnTo>
+                    <a:pt x="1336545" y="870869"/>
+                  </a:lnTo>
+                  <a:lnTo>
+                    <a:pt x="1266200" y="867204"/>
+                  </a:lnTo>
+                  <a:lnTo>
+                    <a:pt x="1195856" y="863504"/>
+                  </a:lnTo>
+                  <a:lnTo>
+                    <a:pt x="1125511" y="859770"/>
+                  </a:lnTo>
+                  <a:lnTo>
+                    <a:pt x="1055167" y="856000"/>
+                  </a:lnTo>
+                  <a:lnTo>
+                    <a:pt x="984822" y="852194"/>
+                  </a:lnTo>
+                  <a:lnTo>
+                    <a:pt x="914478" y="848352"/>
+                  </a:lnTo>
+                  <a:lnTo>
+                    <a:pt x="844133" y="844473"/>
+                  </a:lnTo>
+                  <a:lnTo>
+                    <a:pt x="773789" y="840558"/>
+                  </a:lnTo>
+                  <a:lnTo>
+                    <a:pt x="703444" y="836606"/>
+                  </a:lnTo>
+                  <a:lnTo>
+                    <a:pt x="633100" y="832616"/>
+                  </a:lnTo>
+                  <a:lnTo>
+                    <a:pt x="562755" y="828588"/>
+                  </a:lnTo>
+                  <a:lnTo>
+                    <a:pt x="492411" y="824523"/>
+                  </a:lnTo>
+                  <a:lnTo>
+                    <a:pt x="422066" y="820418"/>
+                  </a:lnTo>
+                  <a:lnTo>
+                    <a:pt x="351722" y="816275"/>
+                  </a:lnTo>
+                  <a:lnTo>
+                    <a:pt x="281377" y="812092"/>
+                  </a:lnTo>
+                  <a:lnTo>
+                    <a:pt x="211033" y="807870"/>
+                  </a:lnTo>
+                  <a:lnTo>
+                    <a:pt x="140688" y="803607"/>
+                  </a:lnTo>
+                  <a:lnTo>
+                    <a:pt x="70344" y="799305"/>
+                  </a:lnTo>
+                  <a:lnTo>
+                    <a:pt x="0" y="794961"/>
+                  </a:lnTo>
+                  <a:lnTo>
+                    <a:pt x="0" y="0"/>
+                  </a:lnTo>
+                  <a:close/>
+                </a:path>
+              </a:pathLst>
+            </a:custGeom>
+            <a:solidFill>
+              <a:srgbClr val="FF8C00">
+                <a:alpha val="20000"/>
+              </a:srgbClr>
+            </a:solidFill>
+          </p:spPr>
+          <p:txBody>
+            <a:bodyPr/>
+            <a:lstStyle/>
+            <a:p/>
+          </p:txBody>
+        </p:sp>
+        <p:sp>
+          <p:nvSpPr>
+            <p:cNvPr id="68" name="pl68"/>
+            <p:cNvSpPr/>
+            <p:nvPr/>
+          </p:nvSpPr>
+          <p:spPr>
+            <a:xfrm>
+              <a:off x="3520608" y="4336484"/>
+              <a:ext cx="4678807" cy="1075677"/>
+            </a:xfrm>
+            <a:custGeom>
+              <a:avLst/>
+              <a:pathLst>
+                <a:path w="4678807" h="1075677">
+                  <a:moveTo>
+                    <a:pt x="0" y="0"/>
+                  </a:moveTo>
+                  <a:lnTo>
+                    <a:pt x="36071" y="68122"/>
+                  </a:lnTo>
+                  <a:lnTo>
+                    <a:pt x="106415" y="187620"/>
+                  </a:lnTo>
+                  <a:lnTo>
+                    <a:pt x="176760" y="295109"/>
+                  </a:lnTo>
+                  <a:lnTo>
+                    <a:pt x="247104" y="391796"/>
+                  </a:lnTo>
+                  <a:lnTo>
+                    <a:pt x="317449" y="478767"/>
+                  </a:lnTo>
+                  <a:lnTo>
+                    <a:pt x="387793" y="556997"/>
+                  </a:lnTo>
+                  <a:lnTo>
+                    <a:pt x="458138" y="627365"/>
+                  </a:lnTo>
+                  <a:lnTo>
+                    <a:pt x="528482" y="690661"/>
+                  </a:lnTo>
+                  <a:lnTo>
+                    <a:pt x="598827" y="747596"/>
+                  </a:lnTo>
+                  <a:lnTo>
+                    <a:pt x="669171" y="798810"/>
+                  </a:lnTo>
+                  <a:lnTo>
+                    <a:pt x="739516" y="844877"/>
+                  </a:lnTo>
+                  <a:lnTo>
+                    <a:pt x="809860" y="886314"/>
+                  </a:lnTo>
+                  <a:lnTo>
+                    <a:pt x="880205" y="923587"/>
+                  </a:lnTo>
+                  <a:lnTo>
+                    <a:pt x="950549" y="957114"/>
+                  </a:lnTo>
+                  <a:lnTo>
+                    <a:pt x="1020894" y="960614"/>
+                  </a:lnTo>
+                  <a:lnTo>
+                    <a:pt x="1091238" y="963401"/>
+                  </a:lnTo>
+                  <a:lnTo>
+                    <a:pt x="1161583" y="966162"/>
+                  </a:lnTo>
+                  <a:lnTo>
+                    <a:pt x="1231927" y="968897"/>
+                  </a:lnTo>
+                  <a:lnTo>
+                    <a:pt x="1302272" y="971606"/>
+                  </a:lnTo>
+                  <a:lnTo>
+                    <a:pt x="1372616" y="974290"/>
+                  </a:lnTo>
+                  <a:lnTo>
+                    <a:pt x="1442961" y="976948"/>
+                  </a:lnTo>
+                  <a:lnTo>
+                    <a:pt x="1513305" y="979582"/>
+                  </a:lnTo>
+                  <a:lnTo>
+                    <a:pt x="1583650" y="982191"/>
+                  </a:lnTo>
+                  <a:lnTo>
+                    <a:pt x="1653994" y="984775"/>
+                  </a:lnTo>
+                  <a:lnTo>
+                    <a:pt x="1724339" y="987335"/>
+                  </a:lnTo>
+                  <a:lnTo>
+                    <a:pt x="1794683" y="989871"/>
+                  </a:lnTo>
+                  <a:lnTo>
+                    <a:pt x="1865028" y="992383"/>
+                  </a:lnTo>
+                  <a:lnTo>
+                    <a:pt x="1935372" y="994871"/>
+                  </a:lnTo>
+                  <a:lnTo>
+                    <a:pt x="2005717" y="997336"/>
+                  </a:lnTo>
+                  <a:lnTo>
+                    <a:pt x="2076061" y="999778"/>
+                  </a:lnTo>
+                  <a:lnTo>
+                    <a:pt x="2146406" y="1002197"/>
+                  </a:lnTo>
+                  <a:lnTo>
+                    <a:pt x="2216750" y="1004594"/>
+                  </a:lnTo>
+                  <a:lnTo>
+                    <a:pt x="2287095" y="1006967"/>
+                  </a:lnTo>
+                  <a:lnTo>
+                    <a:pt x="2357439" y="1009319"/>
+                  </a:lnTo>
+                  <a:lnTo>
+                    <a:pt x="2427784" y="1011648"/>
+                  </a:lnTo>
+                  <a:lnTo>
+                    <a:pt x="2498128" y="1013956"/>
+                  </a:lnTo>
+                  <a:lnTo>
+                    <a:pt x="2568472" y="1016241"/>
+                  </a:lnTo>
+                  <a:lnTo>
+                    <a:pt x="2638817" y="1018506"/>
+                  </a:lnTo>
+                  <a:lnTo>
+                    <a:pt x="2709161" y="1020749"/>
+                  </a:lnTo>
+                  <a:lnTo>
+                    <a:pt x="2779506" y="1022971"/>
+                  </a:lnTo>
+                  <a:lnTo>
+                    <a:pt x="2849850" y="1025172"/>
+                  </a:lnTo>
+                  <a:lnTo>
+                    <a:pt x="2920195" y="1027352"/>
+                  </a:lnTo>
+                  <a:lnTo>
+                    <a:pt x="2990539" y="1029512"/>
+                  </a:lnTo>
+                  <a:lnTo>
+                    <a:pt x="3060884" y="1031651"/>
+                  </a:lnTo>
+                  <a:lnTo>
+                    <a:pt x="3131228" y="1033771"/>
+                  </a:lnTo>
+                  <a:lnTo>
+                    <a:pt x="3201573" y="1035870"/>
+                  </a:lnTo>
+                  <a:lnTo>
+                    <a:pt x="3271917" y="1037950"/>
+                  </a:lnTo>
+                  <a:lnTo>
+                    <a:pt x="3342262" y="1040011"/>
+                  </a:lnTo>
+                  <a:lnTo>
+                    <a:pt x="3412606" y="1042052"/>
+                  </a:lnTo>
+                  <a:lnTo>
+                    <a:pt x="3482951" y="1044073"/>
+                  </a:lnTo>
+                  <a:lnTo>
+                    <a:pt x="3553295" y="1046076"/>
+                  </a:lnTo>
+                  <a:lnTo>
+                    <a:pt x="3623640" y="1048060"/>
+                  </a:lnTo>
+                  <a:lnTo>
+                    <a:pt x="3693984" y="1050025"/>
+                  </a:lnTo>
+                  <a:lnTo>
+                    <a:pt x="3764329" y="1051972"/>
+                  </a:lnTo>
+                  <a:lnTo>
+                    <a:pt x="3834673" y="1053901"/>
+                  </a:lnTo>
+                  <a:lnTo>
+                    <a:pt x="3905018" y="1055811"/>
+                  </a:lnTo>
+                  <a:lnTo>
+                    <a:pt x="3975362" y="1057703"/>
+                  </a:lnTo>
+                  <a:lnTo>
+                    <a:pt x="4045707" y="1059578"/>
+                  </a:lnTo>
+                  <a:lnTo>
+                    <a:pt x="4116051" y="1061435"/>
+                  </a:lnTo>
+                  <a:lnTo>
+                    <a:pt x="4186396" y="1063275"/>
+                  </a:lnTo>
+                  <a:lnTo>
+                    <a:pt x="4256740" y="1065097"/>
+                  </a:lnTo>
+                  <a:lnTo>
+                    <a:pt x="4327085" y="1066902"/>
+                  </a:lnTo>
+                  <a:lnTo>
+                    <a:pt x="4397429" y="1068691"/>
+                  </a:lnTo>
+                  <a:lnTo>
+                    <a:pt x="4467774" y="1070462"/>
+                  </a:lnTo>
+                  <a:lnTo>
+                    <a:pt x="4538118" y="1072217"/>
+                  </a:lnTo>
+                  <a:lnTo>
+                    <a:pt x="4608463" y="1073955"/>
+                  </a:lnTo>
+                  <a:lnTo>
+                    <a:pt x="4678807" y="1075677"/>
+                  </a:lnTo>
+                </a:path>
+              </a:pathLst>
+            </a:custGeom>
+          </p:spPr>
+          <p:txBody>
+            <a:bodyPr/>
+            <a:lstStyle/>
+            <a:p/>
+          </p:txBody>
+        </p:sp>
+        <p:sp>
+          <p:nvSpPr>
+            <p:cNvPr id="69" name="pl69"/>
+            <p:cNvSpPr/>
+            <p:nvPr/>
+          </p:nvSpPr>
+          <p:spPr>
+            <a:xfrm>
+              <a:off x="1235312" y="5131446"/>
+              <a:ext cx="6964104" cy="461145"/>
+            </a:xfrm>
+            <a:custGeom>
+              <a:avLst/>
+              <a:pathLst>
+                <a:path w="6964104" h="461145">
+                  <a:moveTo>
+                    <a:pt x="6964104" y="461145"/>
+                  </a:moveTo>
+                  <a:lnTo>
+                    <a:pt x="6893760" y="461023"/>
+                  </a:lnTo>
+                  <a:lnTo>
+                    <a:pt x="6823415" y="460887"/>
+                  </a:lnTo>
+                  <a:lnTo>
+                    <a:pt x="6753071" y="460736"/>
+                  </a:lnTo>
+                  <a:lnTo>
+                    <a:pt x="6682726" y="460568"/>
+                  </a:lnTo>
+                  <a:lnTo>
+                    <a:pt x="6612382" y="460381"/>
+                  </a:lnTo>
+                  <a:lnTo>
+                    <a:pt x="6542037" y="460173"/>
+                  </a:lnTo>
+                  <a:lnTo>
+                    <a:pt x="6471693" y="459942"/>
+                  </a:lnTo>
+                  <a:lnTo>
+                    <a:pt x="6401348" y="459685"/>
+                  </a:lnTo>
+                  <a:lnTo>
+                    <a:pt x="6331004" y="459400"/>
+                  </a:lnTo>
+                  <a:lnTo>
+                    <a:pt x="6260659" y="459083"/>
+                  </a:lnTo>
+                  <a:lnTo>
+                    <a:pt x="6190315" y="458730"/>
+                  </a:lnTo>
+                  <a:lnTo>
+                    <a:pt x="6119970" y="458338"/>
+                  </a:lnTo>
+                  <a:lnTo>
+                    <a:pt x="6049626" y="457902"/>
+                  </a:lnTo>
+                  <a:lnTo>
+                    <a:pt x="5979281" y="457417"/>
+                  </a:lnTo>
+                  <a:lnTo>
+                    <a:pt x="5908937" y="456878"/>
+                  </a:lnTo>
+                  <a:lnTo>
+                    <a:pt x="5838592" y="456279"/>
+                  </a:lnTo>
+                  <a:lnTo>
+                    <a:pt x="5768248" y="455613"/>
+                  </a:lnTo>
+                  <a:lnTo>
+                    <a:pt x="5697903" y="454872"/>
+                  </a:lnTo>
+                  <a:lnTo>
+                    <a:pt x="5627559" y="454049"/>
+                  </a:lnTo>
+                  <a:lnTo>
+                    <a:pt x="5557214" y="453134"/>
+                  </a:lnTo>
+                  <a:lnTo>
+                    <a:pt x="5486870" y="452117"/>
+                  </a:lnTo>
+                  <a:lnTo>
+                    <a:pt x="5416525" y="450985"/>
+                  </a:lnTo>
+                  <a:lnTo>
+                    <a:pt x="5346181" y="449728"/>
+                  </a:lnTo>
+                  <a:lnTo>
+                    <a:pt x="5275836" y="448330"/>
+                  </a:lnTo>
+                  <a:lnTo>
+                    <a:pt x="5205492" y="446776"/>
+                  </a:lnTo>
+                  <a:lnTo>
+                    <a:pt x="5135147" y="445048"/>
+                  </a:lnTo>
+                  <a:lnTo>
+                    <a:pt x="5064803" y="443128"/>
+                  </a:lnTo>
+                  <a:lnTo>
+                    <a:pt x="4994458" y="440992"/>
+                  </a:lnTo>
+                  <a:lnTo>
+                    <a:pt x="4924114" y="438618"/>
+                  </a:lnTo>
+                  <a:lnTo>
+                    <a:pt x="4853769" y="435979"/>
+                  </a:lnTo>
+                  <a:lnTo>
+                    <a:pt x="4783425" y="433045"/>
+                  </a:lnTo>
+                  <a:lnTo>
+                    <a:pt x="4713080" y="429783"/>
+                  </a:lnTo>
+                  <a:lnTo>
+                    <a:pt x="4642736" y="426157"/>
+                  </a:lnTo>
+                  <a:lnTo>
+                    <a:pt x="4572391" y="422126"/>
+                  </a:lnTo>
+                  <a:lnTo>
+                    <a:pt x="4502047" y="417644"/>
+                  </a:lnTo>
+                  <a:lnTo>
+                    <a:pt x="4431702" y="412661"/>
+                  </a:lnTo>
+                  <a:lnTo>
+                    <a:pt x="4361358" y="407122"/>
+                  </a:lnTo>
+                  <a:lnTo>
+                    <a:pt x="4291013" y="400964"/>
+                  </a:lnTo>
+                  <a:lnTo>
+                    <a:pt x="4220669" y="394118"/>
+                  </a:lnTo>
+                  <a:lnTo>
+                    <a:pt x="4150324" y="386507"/>
+                  </a:lnTo>
+                  <a:lnTo>
+                    <a:pt x="4079980" y="378046"/>
+                  </a:lnTo>
+                  <a:lnTo>
+                    <a:pt x="4009635" y="368639"/>
+                  </a:lnTo>
+                  <a:lnTo>
+                    <a:pt x="3939291" y="358182"/>
+                  </a:lnTo>
+                  <a:lnTo>
+                    <a:pt x="3868946" y="346556"/>
+                  </a:lnTo>
+                  <a:lnTo>
+                    <a:pt x="3798602" y="333631"/>
+                  </a:lnTo>
+                  <a:lnTo>
+                    <a:pt x="3728257" y="319262"/>
+                  </a:lnTo>
+                  <a:lnTo>
+                    <a:pt x="3657913" y="303288"/>
+                  </a:lnTo>
+                  <a:lnTo>
+                    <a:pt x="3587569" y="285530"/>
+                  </a:lnTo>
+                  <a:lnTo>
+                    <a:pt x="3517224" y="265787"/>
+                  </a:lnTo>
+                  <a:lnTo>
+                    <a:pt x="3446880" y="243838"/>
+                  </a:lnTo>
+                  <a:lnTo>
+                    <a:pt x="3376535" y="219437"/>
+                  </a:lnTo>
+                  <a:lnTo>
+                    <a:pt x="3306191" y="192310"/>
+                  </a:lnTo>
+                  <a:lnTo>
+                    <a:pt x="3235846" y="162839"/>
+                  </a:lnTo>
+                  <a:lnTo>
+                    <a:pt x="3165502" y="159999"/>
+                  </a:lnTo>
+                  <a:lnTo>
+                    <a:pt x="3095157" y="157132"/>
+                  </a:lnTo>
+                  <a:lnTo>
+                    <a:pt x="3024813" y="154238"/>
+                  </a:lnTo>
+                  <a:lnTo>
+                    <a:pt x="2954468" y="151316"/>
+                  </a:lnTo>
+                  <a:lnTo>
+                    <a:pt x="2884124" y="148367"/>
+                  </a:lnTo>
+                  <a:lnTo>
+                    <a:pt x="2813779" y="145389"/>
+                  </a:lnTo>
+                  <a:lnTo>
+                    <a:pt x="2743435" y="142384"/>
+                  </a:lnTo>
+                  <a:lnTo>
+                    <a:pt x="2673090" y="139349"/>
+                  </a:lnTo>
+                  <a:lnTo>
+                    <a:pt x="2602746" y="136286"/>
+                  </a:lnTo>
+                  <a:lnTo>
+                    <a:pt x="2532401" y="133194"/>
+                  </a:lnTo>
+                  <a:lnTo>
+                    <a:pt x="2462057" y="130073"/>
+                  </a:lnTo>
+                  <a:lnTo>
+                    <a:pt x="2391712" y="126922"/>
+                  </a:lnTo>
+                  <a:lnTo>
+                    <a:pt x="2321368" y="123741"/>
+                  </a:lnTo>
+                  <a:lnTo>
+                    <a:pt x="2251023" y="120530"/>
+                  </a:lnTo>
+                  <a:lnTo>
+                    <a:pt x="2180679" y="117289"/>
+                  </a:lnTo>
+                  <a:lnTo>
+                    <a:pt x="2110334" y="114016"/>
+                  </a:lnTo>
+                  <a:lnTo>
+                    <a:pt x="2039990" y="110713"/>
+                  </a:lnTo>
+                  <a:lnTo>
+                    <a:pt x="1969645" y="107379"/>
+                  </a:lnTo>
+                  <a:lnTo>
+                    <a:pt x="1899301" y="104012"/>
+                  </a:lnTo>
+                  <a:lnTo>
+                    <a:pt x="1828956" y="100614"/>
+                  </a:lnTo>
+                  <a:lnTo>
+                    <a:pt x="1758612" y="97184"/>
+                  </a:lnTo>
+                  <a:lnTo>
+                    <a:pt x="1688267" y="93721"/>
+                  </a:lnTo>
+                  <a:lnTo>
+                    <a:pt x="1617923" y="90225"/>
+                  </a:lnTo>
+                  <a:lnTo>
+                    <a:pt x="1547578" y="86696"/>
+                  </a:lnTo>
+                  <a:lnTo>
+                    <a:pt x="1477234" y="83134"/>
+                  </a:lnTo>
+                  <a:lnTo>
+                    <a:pt x="1406889" y="79537"/>
+                  </a:lnTo>
+                  <a:lnTo>
+                    <a:pt x="1336545" y="75907"/>
+                  </a:lnTo>
+                  <a:lnTo>
+                    <a:pt x="1266200" y="72242"/>
+                  </a:lnTo>
+                  <a:lnTo>
+                    <a:pt x="1195856" y="68543"/>
+                  </a:lnTo>
+                  <a:lnTo>
+                    <a:pt x="1125511" y="64808"/>
+                  </a:lnTo>
+                  <a:lnTo>
+                    <a:pt x="1055167" y="61038"/>
+                  </a:lnTo>
+                  <a:lnTo>
+                    <a:pt x="984822" y="57232"/>
+                  </a:lnTo>
+                  <a:lnTo>
+                    <a:pt x="914478" y="53390"/>
+                  </a:lnTo>
+                  <a:lnTo>
+                    <a:pt x="844133" y="49512"/>
+                  </a:lnTo>
+                  <a:lnTo>
+                    <a:pt x="773789" y="45597"/>
+                  </a:lnTo>
+                  <a:lnTo>
+                    <a:pt x="703444" y="41644"/>
+                  </a:lnTo>
+                  <a:lnTo>
+                    <a:pt x="633100" y="37655"/>
+                  </a:lnTo>
+                  <a:lnTo>
+                    <a:pt x="562755" y="33627"/>
+                  </a:lnTo>
+                  <a:lnTo>
+                    <a:pt x="492411" y="29561"/>
+                  </a:lnTo>
+                  <a:lnTo>
+                    <a:pt x="422066" y="25457"/>
+                  </a:lnTo>
+                  <a:lnTo>
+                    <a:pt x="351722" y="21313"/>
+                  </a:lnTo>
+                  <a:lnTo>
+                    <a:pt x="281377" y="17131"/>
+                  </a:lnTo>
+                  <a:lnTo>
+                    <a:pt x="211033" y="12908"/>
+                  </a:lnTo>
+                  <a:lnTo>
+                    <a:pt x="140688" y="8646"/>
+                  </a:lnTo>
+                  <a:lnTo>
+                    <a:pt x="70344" y="4343"/>
+                  </a:lnTo>
+                  <a:lnTo>
+                    <a:pt x="0" y="0"/>
+                  </a:lnTo>
+                </a:path>
+              </a:pathLst>
+            </a:custGeom>
+          </p:spPr>
+          <p:txBody>
+            <a:bodyPr/>
+            <a:lstStyle/>
+            <a:p/>
+          </p:txBody>
+        </p:sp>
+        <p:sp>
+          <p:nvSpPr>
+            <p:cNvPr id="70" name="pl70"/>
+            <p:cNvSpPr/>
+            <p:nvPr/>
+          </p:nvSpPr>
+          <p:spPr>
+            <a:xfrm>
+              <a:off x="2722803" y="4336484"/>
+              <a:ext cx="5476612" cy="1243103"/>
+            </a:xfrm>
+            <a:custGeom>
+              <a:avLst/>
+              <a:pathLst>
+                <a:path w="5476612" h="1243103">
+                  <a:moveTo>
+                    <a:pt x="0" y="0"/>
+                  </a:moveTo>
+                  <a:lnTo>
+                    <a:pt x="60087" y="60681"/>
+                  </a:lnTo>
+                  <a:lnTo>
+                    <a:pt x="130431" y="127740"/>
+                  </a:lnTo>
+                  <a:lnTo>
+                    <a:pt x="200776" y="191041"/>
+                  </a:lnTo>
+                  <a:lnTo>
+                    <a:pt x="271120" y="250794"/>
+                  </a:lnTo>
+                  <a:lnTo>
+                    <a:pt x="341465" y="307198"/>
+                  </a:lnTo>
+                  <a:lnTo>
+                    <a:pt x="411809" y="360441"/>
+                  </a:lnTo>
+                  <a:lnTo>
+                    <a:pt x="482154" y="410700"/>
+                  </a:lnTo>
+                  <a:lnTo>
+                    <a:pt x="552498" y="458142"/>
+                  </a:lnTo>
+                  <a:lnTo>
+                    <a:pt x="622843" y="502926"/>
+                  </a:lnTo>
+                  <a:lnTo>
+                    <a:pt x="693187" y="545199"/>
+                  </a:lnTo>
+                  <a:lnTo>
+                    <a:pt x="763532" y="585103"/>
+                  </a:lnTo>
+                  <a:lnTo>
+                    <a:pt x="833876" y="622771"/>
+                  </a:lnTo>
+                  <a:lnTo>
+                    <a:pt x="904221" y="658328"/>
+                  </a:lnTo>
+                  <a:lnTo>
+                    <a:pt x="974565" y="691892"/>
+                  </a:lnTo>
+                  <a:lnTo>
+                    <a:pt x="1044909" y="723574"/>
+                  </a:lnTo>
+                  <a:lnTo>
+                    <a:pt x="1115254" y="753482"/>
+                  </a:lnTo>
+                  <a:lnTo>
+                    <a:pt x="1185598" y="781713"/>
+                  </a:lnTo>
+                  <a:lnTo>
+                    <a:pt x="1255943" y="808361"/>
+                  </a:lnTo>
+                  <a:lnTo>
+                    <a:pt x="1326287" y="833517"/>
+                  </a:lnTo>
+                  <a:lnTo>
+                    <a:pt x="1396632" y="857262"/>
+                  </a:lnTo>
+                  <a:lnTo>
+                    <a:pt x="1466976" y="879677"/>
+                  </a:lnTo>
+                  <a:lnTo>
+                    <a:pt x="1537321" y="900835"/>
+                  </a:lnTo>
+                  <a:lnTo>
+                    <a:pt x="1607665" y="920808"/>
+                  </a:lnTo>
+                  <a:lnTo>
+                    <a:pt x="1678010" y="939661"/>
+                  </a:lnTo>
+                  <a:lnTo>
+                    <a:pt x="1748354" y="957458"/>
+                  </a:lnTo>
+                  <a:lnTo>
+                    <a:pt x="1818699" y="974257"/>
+                  </a:lnTo>
+                  <a:lnTo>
+                    <a:pt x="1889043" y="990114"/>
+                  </a:lnTo>
+                  <a:lnTo>
+                    <a:pt x="1959388" y="1005083"/>
+                  </a:lnTo>
+                  <a:lnTo>
+                    <a:pt x="2029732" y="1019213"/>
+                  </a:lnTo>
+                  <a:lnTo>
+                    <a:pt x="2100077" y="1032551"/>
+                  </a:lnTo>
+                  <a:lnTo>
+                    <a:pt x="2170421" y="1045142"/>
+                  </a:lnTo>
+                  <a:lnTo>
+                    <a:pt x="2240766" y="1057027"/>
+                  </a:lnTo>
+                  <a:lnTo>
+                    <a:pt x="2311110" y="1068246"/>
+                  </a:lnTo>
+                  <a:lnTo>
+                    <a:pt x="2381455" y="1078836"/>
+                  </a:lnTo>
+                  <a:lnTo>
+                    <a:pt x="2451799" y="1088832"/>
+                  </a:lnTo>
+                  <a:lnTo>
+                    <a:pt x="2522144" y="1098269"/>
+                  </a:lnTo>
+                  <a:lnTo>
+                    <a:pt x="2592488" y="1107176"/>
+                  </a:lnTo>
+                  <a:lnTo>
+                    <a:pt x="2662833" y="1115584"/>
+                  </a:lnTo>
+                  <a:lnTo>
+                    <a:pt x="2733177" y="1123521"/>
+                  </a:lnTo>
+                  <a:lnTo>
+                    <a:pt x="2803522" y="1131013"/>
+                  </a:lnTo>
+                  <a:lnTo>
+                    <a:pt x="2873866" y="1138085"/>
+                  </a:lnTo>
+                  <a:lnTo>
+                    <a:pt x="2944211" y="1144761"/>
+                  </a:lnTo>
+                  <a:lnTo>
+                    <a:pt x="3014555" y="1151063"/>
+                  </a:lnTo>
+                  <a:lnTo>
+                    <a:pt x="3084900" y="1157012"/>
+                  </a:lnTo>
+                  <a:lnTo>
+                    <a:pt x="3155244" y="1162627"/>
+                  </a:lnTo>
+                  <a:lnTo>
+                    <a:pt x="3225589" y="1167927"/>
+                  </a:lnTo>
+                  <a:lnTo>
+                    <a:pt x="3295933" y="1172931"/>
+                  </a:lnTo>
+                  <a:lnTo>
+                    <a:pt x="3366278" y="1177654"/>
+                  </a:lnTo>
+                  <a:lnTo>
+                    <a:pt x="3436622" y="1182112"/>
+                  </a:lnTo>
+                  <a:lnTo>
+                    <a:pt x="3506967" y="1186320"/>
+                  </a:lnTo>
+                  <a:lnTo>
+                    <a:pt x="3577311" y="1190293"/>
+                  </a:lnTo>
+                  <a:lnTo>
+                    <a:pt x="3647656" y="1194043"/>
+                  </a:lnTo>
+                  <a:lnTo>
+                    <a:pt x="3718000" y="1197583"/>
+                  </a:lnTo>
+                  <a:lnTo>
+                    <a:pt x="3788345" y="1200924"/>
+                  </a:lnTo>
+                  <a:lnTo>
+                    <a:pt x="3858689" y="1204078"/>
+                  </a:lnTo>
+                  <a:lnTo>
+                    <a:pt x="3929034" y="1207055"/>
+                  </a:lnTo>
+                  <a:lnTo>
+                    <a:pt x="3999378" y="1209866"/>
+                  </a:lnTo>
+                  <a:lnTo>
+                    <a:pt x="4069723" y="1212519"/>
+                  </a:lnTo>
+                  <a:lnTo>
+                    <a:pt x="4140067" y="1215023"/>
+                  </a:lnTo>
+                  <a:lnTo>
+                    <a:pt x="4210412" y="1217387"/>
+                  </a:lnTo>
+                  <a:lnTo>
+                    <a:pt x="4280756" y="1219618"/>
+                  </a:lnTo>
+                  <a:lnTo>
+                    <a:pt x="4351101" y="1221725"/>
+                  </a:lnTo>
+                  <a:lnTo>
+                    <a:pt x="4421445" y="1223713"/>
+                  </a:lnTo>
+                  <a:lnTo>
+                    <a:pt x="4491790" y="1225590"/>
+                  </a:lnTo>
+                  <a:lnTo>
+                    <a:pt x="4562134" y="1227362"/>
+                  </a:lnTo>
+                  <a:lnTo>
+                    <a:pt x="4632479" y="1229034"/>
+                  </a:lnTo>
+                  <a:lnTo>
+                    <a:pt x="4702823" y="1230613"/>
+                  </a:lnTo>
+                  <a:lnTo>
+                    <a:pt x="4773167" y="1232103"/>
+                  </a:lnTo>
+                  <a:lnTo>
+                    <a:pt x="4843512" y="1233510"/>
+                  </a:lnTo>
+                  <a:lnTo>
+                    <a:pt x="4913856" y="1234837"/>
+                  </a:lnTo>
+                  <a:lnTo>
+                    <a:pt x="4984201" y="1236091"/>
+                  </a:lnTo>
+                  <a:lnTo>
+                    <a:pt x="5054545" y="1237274"/>
+                  </a:lnTo>
+                  <a:lnTo>
+                    <a:pt x="5124890" y="1238391"/>
+                  </a:lnTo>
+                  <a:lnTo>
+                    <a:pt x="5195234" y="1239445"/>
+                  </a:lnTo>
+                  <a:lnTo>
+                    <a:pt x="5265579" y="1240440"/>
+                  </a:lnTo>
+                  <a:lnTo>
+                    <a:pt x="5335923" y="1241380"/>
+                  </a:lnTo>
+                  <a:lnTo>
+                    <a:pt x="5406268" y="1242266"/>
+                  </a:lnTo>
+                  <a:lnTo>
+                    <a:pt x="5476612" y="1243103"/>
+                  </a:lnTo>
+                </a:path>
+              </a:pathLst>
+            </a:custGeom>
+            <a:ln w="27101" cap="flat">
+              <a:solidFill>
+                <a:srgbClr val="FF8C00">
+                  <a:alpha val="100000"/>
+                </a:srgbClr>
+              </a:solidFill>
+              <a:prstDash val="solid"/>
+              <a:round/>
+            </a:ln>
+          </p:spPr>
+          <p:txBody>
+            <a:bodyPr/>
+            <a:lstStyle/>
+            <a:p/>
+          </p:txBody>
+        </p:sp>
+        <p:sp>
+          <p:nvSpPr>
+            <p:cNvPr id="71" name="pl71"/>
+            <p:cNvSpPr/>
+            <p:nvPr/>
+          </p:nvSpPr>
+          <p:spPr>
+            <a:xfrm>
+              <a:off x="887106" y="5294352"/>
+              <a:ext cx="7660515" cy="0"/>
+            </a:xfrm>
+            <a:custGeom>
+              <a:avLst/>
+              <a:pathLst>
+                <a:path w="7660515" h="0">
+                  <a:moveTo>
+                    <a:pt x="0" y="0"/>
+                  </a:moveTo>
+                  <a:lnTo>
+                    <a:pt x="7660515" y="0"/>
+                  </a:lnTo>
+                  <a:lnTo>
+                    <a:pt x="7660515" y="0"/>
+                  </a:lnTo>
+                </a:path>
+              </a:pathLst>
+            </a:custGeom>
+            <a:ln w="13550" cap="flat">
+              <a:solidFill>
+                <a:srgbClr val="7F7F7F">
+                  <a:alpha val="100000"/>
+                </a:srgbClr>
+              </a:solidFill>
+              <a:prstDash val="dash"/>
+              <a:round/>
+            </a:ln>
+          </p:spPr>
+          <p:txBody>
+            <a:bodyPr/>
+            <a:lstStyle/>
+            <a:p/>
+          </p:txBody>
+        </p:sp>
+        <p:sp>
+          <p:nvSpPr>
+            <p:cNvPr id="72" name="pl72"/>
+            <p:cNvSpPr/>
+            <p:nvPr/>
+          </p:nvSpPr>
+          <p:spPr>
+            <a:xfrm>
+              <a:off x="4472829" y="4336484"/>
+              <a:ext cx="0" cy="1317069"/>
+            </a:xfrm>
+            <a:custGeom>
+              <a:avLst/>
+              <a:pathLst>
+                <a:path w="0" h="1317069">
+                  <a:moveTo>
+                    <a:pt x="0" y="1317069"/>
+                  </a:moveTo>
+                  <a:lnTo>
+                    <a:pt x="0" y="0"/>
+                  </a:lnTo>
+                  <a:lnTo>
+                    <a:pt x="0" y="0"/>
+                  </a:lnTo>
+                </a:path>
+              </a:pathLst>
+            </a:custGeom>
+            <a:ln w="13550" cap="flat">
+              <a:solidFill>
+                <a:srgbClr val="666666">
+                  <a:alpha val="100000"/>
+                </a:srgbClr>
+              </a:solidFill>
+              <a:prstDash val="dot"/>
+              <a:round/>
+            </a:ln>
+          </p:spPr>
+          <p:txBody>
+            <a:bodyPr/>
+            <a:lstStyle/>
+            <a:p/>
+          </p:txBody>
+        </p:sp>
+        <p:sp>
+          <p:nvSpPr>
+            <p:cNvPr id="73" name="tx73"/>
+            <p:cNvSpPr/>
+            <p:nvPr/>
+          </p:nvSpPr>
+          <p:spPr>
+            <a:xfrm>
+              <a:off x="762297" y="5553636"/>
+              <a:ext cx="62179" cy="80101"/>
+            </a:xfrm>
+            <a:prstGeom prst="rect">
+              <a:avLst/>
+            </a:prstGeom>
+            <a:noFill/>
+          </p:spPr>
+          <p:txBody>
+            <a:bodyPr lIns="0" rIns="0" tIns="0" bIns="0" anchorCtr="1" anchor="ctr" wrap="none"/>
+            <a:lstStyle/>
+            <a:p>
+              <a:pPr algn="l" marL="0" marR="0" indent="0">
+                <a:lnSpc>
+                  <a:spcPts val="880"/>
+                </a:lnSpc>
+                <a:spcBef>
+                  <a:spcPts val="0"/>
+                </a:spcBef>
+                <a:spcAft>
+                  <a:spcPts val="0"/>
+                </a:spcAft>
+              </a:pPr>
+              <a:r>
+                <a:rPr sz="880">
+                  <a:solidFill>
+                    <a:srgbClr val="4D4D4D">
+                      <a:alpha val="100000"/>
+                    </a:srgbClr>
+                  </a:solidFill>
+                  <a:latin typeface="Helvetica"/>
+                  <a:cs typeface="Helvetica"/>
+                </a:rPr>
+                <a:t>0</a:t>
+              </a:r>
+            </a:p>
+          </p:txBody>
+        </p:sp>
+        <p:sp>
+          <p:nvSpPr>
+            <p:cNvPr id="74" name="tx74"/>
+            <p:cNvSpPr/>
+            <p:nvPr/>
+          </p:nvSpPr>
+          <p:spPr>
+            <a:xfrm>
+              <a:off x="762297" y="5254302"/>
+              <a:ext cx="62179" cy="80101"/>
+            </a:xfrm>
+            <a:prstGeom prst="rect">
+              <a:avLst/>
+            </a:prstGeom>
+            <a:noFill/>
+          </p:spPr>
+          <p:txBody>
+            <a:bodyPr lIns="0" rIns="0" tIns="0" bIns="0" anchorCtr="1" anchor="ctr" wrap="none"/>
+            <a:lstStyle/>
+            <a:p>
+              <a:pPr algn="l" marL="0" marR="0" indent="0">
+                <a:lnSpc>
+                  <a:spcPts val="880"/>
+                </a:lnSpc>
+                <a:spcBef>
+                  <a:spcPts val="0"/>
+                </a:spcBef>
+                <a:spcAft>
+                  <a:spcPts val="0"/>
+                </a:spcAft>
+              </a:pPr>
+              <a:r>
+                <a:rPr sz="880">
+                  <a:solidFill>
+                    <a:srgbClr val="4D4D4D">
+                      <a:alpha val="100000"/>
+                    </a:srgbClr>
+                  </a:solidFill>
+                  <a:latin typeface="Helvetica"/>
+                  <a:cs typeface="Helvetica"/>
+                </a:rPr>
+                <a:t>1</a:t>
+              </a:r>
+            </a:p>
+          </p:txBody>
+        </p:sp>
+        <p:sp>
+          <p:nvSpPr>
+            <p:cNvPr id="75" name="tx75"/>
+            <p:cNvSpPr/>
+            <p:nvPr/>
+          </p:nvSpPr>
+          <p:spPr>
+            <a:xfrm>
+              <a:off x="762297" y="4954968"/>
+              <a:ext cx="62179" cy="80101"/>
+            </a:xfrm>
+            <a:prstGeom prst="rect">
+              <a:avLst/>
+            </a:prstGeom>
+            <a:noFill/>
+          </p:spPr>
+          <p:txBody>
+            <a:bodyPr lIns="0" rIns="0" tIns="0" bIns="0" anchorCtr="1" anchor="ctr" wrap="none"/>
+            <a:lstStyle/>
+            <a:p>
+              <a:pPr algn="l" marL="0" marR="0" indent="0">
+                <a:lnSpc>
+                  <a:spcPts val="880"/>
+                </a:lnSpc>
+                <a:spcBef>
+                  <a:spcPts val="0"/>
+                </a:spcBef>
+                <a:spcAft>
+                  <a:spcPts val="0"/>
+                </a:spcAft>
+              </a:pPr>
+              <a:r>
+                <a:rPr sz="880">
+                  <a:solidFill>
+                    <a:srgbClr val="4D4D4D">
+                      <a:alpha val="100000"/>
+                    </a:srgbClr>
+                  </a:solidFill>
+                  <a:latin typeface="Helvetica"/>
+                  <a:cs typeface="Helvetica"/>
+                </a:rPr>
+                <a:t>2</a:t>
+              </a:r>
+            </a:p>
+          </p:txBody>
+        </p:sp>
+        <p:sp>
+          <p:nvSpPr>
+            <p:cNvPr id="76" name="tx76"/>
+            <p:cNvSpPr/>
+            <p:nvPr/>
+          </p:nvSpPr>
+          <p:spPr>
+            <a:xfrm>
+              <a:off x="762297" y="4655634"/>
+              <a:ext cx="62179" cy="80101"/>
+            </a:xfrm>
+            <a:prstGeom prst="rect">
+              <a:avLst/>
+            </a:prstGeom>
+            <a:noFill/>
+          </p:spPr>
+          <p:txBody>
+            <a:bodyPr lIns="0" rIns="0" tIns="0" bIns="0" anchorCtr="1" anchor="ctr" wrap="none"/>
+            <a:lstStyle/>
+            <a:p>
+              <a:pPr algn="l" marL="0" marR="0" indent="0">
+                <a:lnSpc>
+                  <a:spcPts val="880"/>
+                </a:lnSpc>
+                <a:spcBef>
+                  <a:spcPts val="0"/>
+                </a:spcBef>
+                <a:spcAft>
+                  <a:spcPts val="0"/>
+                </a:spcAft>
+              </a:pPr>
+              <a:r>
+                <a:rPr sz="880">
+                  <a:solidFill>
+                    <a:srgbClr val="4D4D4D">
+                      <a:alpha val="100000"/>
+                    </a:srgbClr>
+                  </a:solidFill>
+                  <a:latin typeface="Helvetica"/>
+                  <a:cs typeface="Helvetica"/>
+                </a:rPr>
+                <a:t>3</a:t>
+              </a:r>
+            </a:p>
+          </p:txBody>
+        </p:sp>
+        <p:sp>
+          <p:nvSpPr>
+            <p:cNvPr id="77" name="tx77"/>
+            <p:cNvSpPr/>
+            <p:nvPr/>
+          </p:nvSpPr>
+          <p:spPr>
+            <a:xfrm>
+              <a:off x="762297" y="4356300"/>
+              <a:ext cx="62179" cy="80101"/>
+            </a:xfrm>
+            <a:prstGeom prst="rect">
+              <a:avLst/>
+            </a:prstGeom>
+            <a:noFill/>
+          </p:spPr>
+          <p:txBody>
+            <a:bodyPr lIns="0" rIns="0" tIns="0" bIns="0" anchorCtr="1" anchor="ctr" wrap="none"/>
+            <a:lstStyle/>
+            <a:p>
+              <a:pPr algn="l" marL="0" marR="0" indent="0">
+                <a:lnSpc>
+                  <a:spcPts val="880"/>
+                </a:lnSpc>
+                <a:spcBef>
+                  <a:spcPts val="0"/>
+                </a:spcBef>
+                <a:spcAft>
+                  <a:spcPts val="0"/>
+                </a:spcAft>
+              </a:pPr>
+              <a:r>
+                <a:rPr sz="880">
+                  <a:solidFill>
+                    <a:srgbClr val="4D4D4D">
+                      <a:alpha val="100000"/>
+                    </a:srgbClr>
+                  </a:solidFill>
+                  <a:latin typeface="Helvetica"/>
+                  <a:cs typeface="Helvetica"/>
+                </a:rPr>
+                <a:t>4</a:t>
+              </a:r>
+            </a:p>
+          </p:txBody>
+        </p:sp>
+        <p:sp>
+          <p:nvSpPr>
+            <p:cNvPr id="78" name="tx78"/>
+            <p:cNvSpPr/>
+            <p:nvPr/>
+          </p:nvSpPr>
+          <p:spPr>
+            <a:xfrm>
+              <a:off x="1306098" y="5716183"/>
+              <a:ext cx="161574" cy="80101"/>
+            </a:xfrm>
+            <a:prstGeom prst="rect">
+              <a:avLst/>
+            </a:prstGeom>
+            <a:noFill/>
+          </p:spPr>
+          <p:txBody>
+            <a:bodyPr lIns="0" rIns="0" tIns="0" bIns="0" anchorCtr="1" anchor="ctr" wrap="none"/>
+            <a:lstStyle/>
+            <a:p>
+              <a:pPr algn="l" marL="0" marR="0" indent="0">
+                <a:lnSpc>
+                  <a:spcPts val="880"/>
+                </a:lnSpc>
+                <a:spcBef>
+                  <a:spcPts val="0"/>
+                </a:spcBef>
+                <a:spcAft>
+                  <a:spcPts val="0"/>
+                </a:spcAft>
+              </a:pPr>
+              <a:r>
+                <a:rPr sz="880">
+                  <a:solidFill>
+                    <a:srgbClr val="4D4D4D">
+                      <a:alpha val="100000"/>
+                    </a:srgbClr>
+                  </a:solidFill>
+                  <a:latin typeface="Helvetica"/>
+                  <a:cs typeface="Helvetica"/>
+                </a:rPr>
+                <a:t>-40</a:t>
+              </a:r>
+            </a:p>
+          </p:txBody>
+        </p:sp>
+        <p:sp>
+          <p:nvSpPr>
+            <p:cNvPr id="79" name="tx79"/>
+            <p:cNvSpPr/>
+            <p:nvPr/>
+          </p:nvSpPr>
+          <p:spPr>
+            <a:xfrm>
+              <a:off x="2113264" y="5716183"/>
+              <a:ext cx="161574" cy="80101"/>
+            </a:xfrm>
+            <a:prstGeom prst="rect">
+              <a:avLst/>
+            </a:prstGeom>
+            <a:noFill/>
+          </p:spPr>
+          <p:txBody>
+            <a:bodyPr lIns="0" rIns="0" tIns="0" bIns="0" anchorCtr="1" anchor="ctr" wrap="none"/>
+            <a:lstStyle/>
+            <a:p>
+              <a:pPr algn="l" marL="0" marR="0" indent="0">
+                <a:lnSpc>
+                  <a:spcPts val="880"/>
+                </a:lnSpc>
+                <a:spcBef>
+                  <a:spcPts val="0"/>
+                </a:spcBef>
+                <a:spcAft>
+                  <a:spcPts val="0"/>
+                </a:spcAft>
+              </a:pPr>
+              <a:r>
+                <a:rPr sz="880">
+                  <a:solidFill>
+                    <a:srgbClr val="4D4D4D">
+                      <a:alpha val="100000"/>
+                    </a:srgbClr>
+                  </a:solidFill>
+                  <a:latin typeface="Helvetica"/>
+                  <a:cs typeface="Helvetica"/>
+                </a:rPr>
+                <a:t>-30</a:t>
+              </a:r>
+            </a:p>
+          </p:txBody>
+        </p:sp>
+        <p:sp>
+          <p:nvSpPr>
+            <p:cNvPr id="80" name="tx80"/>
+            <p:cNvSpPr/>
+            <p:nvPr/>
+          </p:nvSpPr>
+          <p:spPr>
+            <a:xfrm>
+              <a:off x="2920429" y="5716183"/>
+              <a:ext cx="161574" cy="80101"/>
+            </a:xfrm>
+            <a:prstGeom prst="rect">
+              <a:avLst/>
+            </a:prstGeom>
+            <a:noFill/>
+          </p:spPr>
+          <p:txBody>
+            <a:bodyPr lIns="0" rIns="0" tIns="0" bIns="0" anchorCtr="1" anchor="ctr" wrap="none"/>
+            <a:lstStyle/>
+            <a:p>
+              <a:pPr algn="l" marL="0" marR="0" indent="0">
+                <a:lnSpc>
+                  <a:spcPts val="880"/>
+                </a:lnSpc>
+                <a:spcBef>
+                  <a:spcPts val="0"/>
+                </a:spcBef>
+                <a:spcAft>
+                  <a:spcPts val="0"/>
+                </a:spcAft>
+              </a:pPr>
+              <a:r>
+                <a:rPr sz="880">
+                  <a:solidFill>
+                    <a:srgbClr val="4D4D4D">
+                      <a:alpha val="100000"/>
+                    </a:srgbClr>
+                  </a:solidFill>
+                  <a:latin typeface="Helvetica"/>
+                  <a:cs typeface="Helvetica"/>
+                </a:rPr>
+                <a:t>-20</a:t>
+              </a:r>
+            </a:p>
+          </p:txBody>
+        </p:sp>
+        <p:sp>
+          <p:nvSpPr>
+            <p:cNvPr id="81" name="tx81"/>
+            <p:cNvSpPr/>
+            <p:nvPr/>
+          </p:nvSpPr>
+          <p:spPr>
+            <a:xfrm>
+              <a:off x="3727595" y="5716183"/>
+              <a:ext cx="161574" cy="80101"/>
+            </a:xfrm>
+            <a:prstGeom prst="rect">
+              <a:avLst/>
+            </a:prstGeom>
+            <a:noFill/>
+          </p:spPr>
+          <p:txBody>
+            <a:bodyPr lIns="0" rIns="0" tIns="0" bIns="0" anchorCtr="1" anchor="ctr" wrap="none"/>
+            <a:lstStyle/>
+            <a:p>
+              <a:pPr algn="l" marL="0" marR="0" indent="0">
+                <a:lnSpc>
+                  <a:spcPts val="880"/>
+                </a:lnSpc>
+                <a:spcBef>
+                  <a:spcPts val="0"/>
+                </a:spcBef>
+                <a:spcAft>
+                  <a:spcPts val="0"/>
+                </a:spcAft>
+              </a:pPr>
+              <a:r>
+                <a:rPr sz="880">
+                  <a:solidFill>
+                    <a:srgbClr val="4D4D4D">
+                      <a:alpha val="100000"/>
+                    </a:srgbClr>
+                  </a:solidFill>
+                  <a:latin typeface="Helvetica"/>
+                  <a:cs typeface="Helvetica"/>
+                </a:rPr>
+                <a:t>-10</a:t>
+              </a:r>
+            </a:p>
+          </p:txBody>
+        </p:sp>
+        <p:sp>
+          <p:nvSpPr>
+            <p:cNvPr id="82" name="tx82"/>
+            <p:cNvSpPr/>
+            <p:nvPr/>
+          </p:nvSpPr>
+          <p:spPr>
+            <a:xfrm>
+              <a:off x="4584458" y="5716183"/>
+              <a:ext cx="62179" cy="80101"/>
+            </a:xfrm>
+            <a:prstGeom prst="rect">
+              <a:avLst/>
+            </a:prstGeom>
+            <a:noFill/>
+          </p:spPr>
+          <p:txBody>
+            <a:bodyPr lIns="0" rIns="0" tIns="0" bIns="0" anchorCtr="1" anchor="ctr" wrap="none"/>
+            <a:lstStyle/>
+            <a:p>
+              <a:pPr algn="l" marL="0" marR="0" indent="0">
+                <a:lnSpc>
+                  <a:spcPts val="880"/>
+                </a:lnSpc>
+                <a:spcBef>
+                  <a:spcPts val="0"/>
+                </a:spcBef>
+                <a:spcAft>
+                  <a:spcPts val="0"/>
+                </a:spcAft>
+              </a:pPr>
+              <a:r>
+                <a:rPr sz="880">
+                  <a:solidFill>
+                    <a:srgbClr val="4D4D4D">
+                      <a:alpha val="100000"/>
+                    </a:srgbClr>
+                  </a:solidFill>
+                  <a:latin typeface="Helvetica"/>
+                  <a:cs typeface="Helvetica"/>
+                </a:rPr>
+                <a:t>0</a:t>
+              </a:r>
+            </a:p>
+          </p:txBody>
+        </p:sp>
+        <p:sp>
+          <p:nvSpPr>
+            <p:cNvPr id="83" name="tx83"/>
+            <p:cNvSpPr/>
+            <p:nvPr/>
+          </p:nvSpPr>
+          <p:spPr>
+            <a:xfrm>
+              <a:off x="5360534" y="5716183"/>
+              <a:ext cx="124358" cy="80101"/>
+            </a:xfrm>
+            <a:prstGeom prst="rect">
+              <a:avLst/>
+            </a:prstGeom>
+            <a:noFill/>
+          </p:spPr>
+          <p:txBody>
+            <a:bodyPr lIns="0" rIns="0" tIns="0" bIns="0" anchorCtr="1" anchor="ctr" wrap="none"/>
+            <a:lstStyle/>
+            <a:p>
+              <a:pPr algn="l" marL="0" marR="0" indent="0">
+                <a:lnSpc>
+                  <a:spcPts val="880"/>
+                </a:lnSpc>
+                <a:spcBef>
+                  <a:spcPts val="0"/>
+                </a:spcBef>
+                <a:spcAft>
+                  <a:spcPts val="0"/>
+                </a:spcAft>
+              </a:pPr>
+              <a:r>
+                <a:rPr sz="880">
+                  <a:solidFill>
+                    <a:srgbClr val="4D4D4D">
+                      <a:alpha val="100000"/>
+                    </a:srgbClr>
+                  </a:solidFill>
+                  <a:latin typeface="Helvetica"/>
+                  <a:cs typeface="Helvetica"/>
+                </a:rPr>
+                <a:t>10</a:t>
+              </a:r>
+            </a:p>
+          </p:txBody>
+        </p:sp>
+        <p:sp>
+          <p:nvSpPr>
+            <p:cNvPr id="84" name="tx84"/>
+            <p:cNvSpPr/>
+            <p:nvPr/>
+          </p:nvSpPr>
+          <p:spPr>
+            <a:xfrm>
+              <a:off x="6167699" y="5716183"/>
+              <a:ext cx="124358" cy="80101"/>
+            </a:xfrm>
+            <a:prstGeom prst="rect">
+              <a:avLst/>
+            </a:prstGeom>
+            <a:noFill/>
+          </p:spPr>
+          <p:txBody>
+            <a:bodyPr lIns="0" rIns="0" tIns="0" bIns="0" anchorCtr="1" anchor="ctr" wrap="none"/>
+            <a:lstStyle/>
+            <a:p>
+              <a:pPr algn="l" marL="0" marR="0" indent="0">
+                <a:lnSpc>
+                  <a:spcPts val="880"/>
+                </a:lnSpc>
+                <a:spcBef>
+                  <a:spcPts val="0"/>
+                </a:spcBef>
+                <a:spcAft>
+                  <a:spcPts val="0"/>
+                </a:spcAft>
+              </a:pPr>
+              <a:r>
+                <a:rPr sz="880">
+                  <a:solidFill>
+                    <a:srgbClr val="4D4D4D">
+                      <a:alpha val="100000"/>
+                    </a:srgbClr>
+                  </a:solidFill>
+                  <a:latin typeface="Helvetica"/>
+                  <a:cs typeface="Helvetica"/>
+                </a:rPr>
+                <a:t>20</a:t>
+              </a:r>
+            </a:p>
+          </p:txBody>
+        </p:sp>
+        <p:sp>
+          <p:nvSpPr>
+            <p:cNvPr id="85" name="tx85"/>
+            <p:cNvSpPr/>
+            <p:nvPr/>
+          </p:nvSpPr>
+          <p:spPr>
+            <a:xfrm>
+              <a:off x="6974865" y="5716183"/>
+              <a:ext cx="124358" cy="80101"/>
+            </a:xfrm>
+            <a:prstGeom prst="rect">
+              <a:avLst/>
+            </a:prstGeom>
+            <a:noFill/>
+          </p:spPr>
+          <p:txBody>
+            <a:bodyPr lIns="0" rIns="0" tIns="0" bIns="0" anchorCtr="1" anchor="ctr" wrap="none"/>
+            <a:lstStyle/>
+            <a:p>
+              <a:pPr algn="l" marL="0" marR="0" indent="0">
+                <a:lnSpc>
+                  <a:spcPts val="880"/>
+                </a:lnSpc>
+                <a:spcBef>
+                  <a:spcPts val="0"/>
+                </a:spcBef>
+                <a:spcAft>
+                  <a:spcPts val="0"/>
+                </a:spcAft>
+              </a:pPr>
+              <a:r>
+                <a:rPr sz="880">
+                  <a:solidFill>
+                    <a:srgbClr val="4D4D4D">
+                      <a:alpha val="100000"/>
+                    </a:srgbClr>
+                  </a:solidFill>
+                  <a:latin typeface="Helvetica"/>
+                  <a:cs typeface="Helvetica"/>
+                </a:rPr>
+                <a:t>30</a:t>
+              </a:r>
+            </a:p>
+          </p:txBody>
+        </p:sp>
+        <p:sp>
+          <p:nvSpPr>
+            <p:cNvPr id="86" name="tx86"/>
+            <p:cNvSpPr/>
+            <p:nvPr/>
+          </p:nvSpPr>
+          <p:spPr>
+            <a:xfrm>
+              <a:off x="7782030" y="5716183"/>
+              <a:ext cx="124358" cy="80101"/>
+            </a:xfrm>
+            <a:prstGeom prst="rect">
+              <a:avLst/>
+            </a:prstGeom>
+            <a:noFill/>
+          </p:spPr>
+          <p:txBody>
+            <a:bodyPr lIns="0" rIns="0" tIns="0" bIns="0" anchorCtr="1" anchor="ctr" wrap="none"/>
+            <a:lstStyle/>
+            <a:p>
+              <a:pPr algn="l" marL="0" marR="0" indent="0">
+                <a:lnSpc>
+                  <a:spcPts val="880"/>
+                </a:lnSpc>
+                <a:spcBef>
+                  <a:spcPts val="0"/>
+                </a:spcBef>
+                <a:spcAft>
+                  <a:spcPts val="0"/>
+                </a:spcAft>
+              </a:pPr>
+              <a:r>
+                <a:rPr sz="880">
+                  <a:solidFill>
+                    <a:srgbClr val="4D4D4D">
+                      <a:alpha val="100000"/>
+                    </a:srgbClr>
+                  </a:solidFill>
+                  <a:latin typeface="Helvetica"/>
+                  <a:cs typeface="Helvetica"/>
+                </a:rPr>
+                <a:t>40</a:t>
+              </a:r>
+            </a:p>
+          </p:txBody>
+        </p:sp>
+        <p:sp>
+          <p:nvSpPr>
+            <p:cNvPr id="87" name="tx87"/>
+            <p:cNvSpPr/>
+            <p:nvPr/>
+          </p:nvSpPr>
+          <p:spPr>
+            <a:xfrm>
+              <a:off x="2928340" y="5855859"/>
+              <a:ext cx="3578047" cy="100218"/>
+            </a:xfrm>
+            <a:prstGeom prst="rect">
+              <a:avLst/>
+            </a:prstGeom>
+            <a:noFill/>
+          </p:spPr>
+          <p:txBody>
+            <a:bodyPr lIns="0" rIns="0" tIns="0" bIns="0" anchorCtr="1" anchor="ctr" wrap="none"/>
+            <a:lstStyle/>
+            <a:p>
+              <a:pPr algn="l" marL="0" marR="0" indent="0">
+                <a:lnSpc>
+                  <a:spcPts val="1100"/>
+                </a:lnSpc>
+                <a:spcBef>
+                  <a:spcPts val="0"/>
+                </a:spcBef>
+                <a:spcAft>
+                  <a:spcPts val="0"/>
+                </a:spcAft>
+              </a:pPr>
+              <a:r>
+                <a:rPr sz="1100">
+                  <a:solidFill>
+                    <a:srgbClr val="000000">
+                      <a:alpha val="100000"/>
+                    </a:srgbClr>
+                  </a:solidFill>
+                  <a:latin typeface="Helvetica"/>
+                  <a:cs typeface="Helvetica"/>
+                </a:rPr>
+                <a:t>eGFR difference (%): 100 × (CKD-EPI Cr-Cys − CG) / CG</a:t>
+              </a:r>
+            </a:p>
+          </p:txBody>
+        </p:sp>
+        <p:sp>
+          <p:nvSpPr>
+            <p:cNvPr id="88" name="tx88"/>
+            <p:cNvSpPr/>
+            <p:nvPr/>
+          </p:nvSpPr>
+          <p:spPr>
+            <a:xfrm rot="-5400000">
+              <a:off x="138035" y="4944909"/>
+              <a:ext cx="1016904" cy="100218"/>
+            </a:xfrm>
+            <a:prstGeom prst="rect">
+              <a:avLst/>
+            </a:prstGeom>
+            <a:noFill/>
+          </p:spPr>
+          <p:txBody>
+            <a:bodyPr lIns="0" rIns="0" tIns="0" bIns="0" anchorCtr="1" anchor="ctr" wrap="none"/>
+            <a:lstStyle/>
+            <a:p>
+              <a:pPr algn="l" marL="0" marR="0" indent="0">
+                <a:lnSpc>
+                  <a:spcPts val="1100"/>
+                </a:lnSpc>
+                <a:spcBef>
+                  <a:spcPts val="0"/>
+                </a:spcBef>
+                <a:spcAft>
+                  <a:spcPts val="0"/>
+                </a:spcAft>
+              </a:pPr>
+              <a:r>
+                <a:rPr sz="1100">
+                  <a:solidFill>
+                    <a:srgbClr val="000000">
+                      <a:alpha val="100000"/>
+                    </a:srgbClr>
+                  </a:solidFill>
+                  <a:latin typeface="Helvetica"/>
+                  <a:cs typeface="Helvetica"/>
+                </a:rPr>
+                <a:t>subHR (95% CI)</a:t>
+              </a:r>
+            </a:p>
+          </p:txBody>
+        </p:sp>
+        <p:sp>
+          <p:nvSpPr>
+            <p:cNvPr id="89" name="tx89"/>
+            <p:cNvSpPr/>
+            <p:nvPr/>
+          </p:nvSpPr>
+          <p:spPr>
+            <a:xfrm>
+              <a:off x="887106" y="4159544"/>
+              <a:ext cx="6385163" cy="82021"/>
+            </a:xfrm>
+            <a:prstGeom prst="rect">
+              <a:avLst/>
+            </a:prstGeom>
+            <a:noFill/>
+          </p:spPr>
+          <p:txBody>
+            <a:bodyPr lIns="0" rIns="0" tIns="0" bIns="0" anchorCtr="1" anchor="ctr" wrap="none"/>
+            <a:lstStyle/>
+            <a:p>
+              <a:pPr algn="l" marL="0" marR="0" indent="0">
+                <a:lnSpc>
+                  <a:spcPts val="900"/>
+                </a:lnSpc>
+                <a:spcBef>
+                  <a:spcPts val="0"/>
+                </a:spcBef>
+                <a:spcAft>
+                  <a:spcPts val="0"/>
+                </a:spcAft>
+              </a:pPr>
+              <a:r>
+                <a:rPr sz="900">
+                  <a:solidFill>
+                    <a:srgbClr val="404040">
+                      <a:alpha val="100000"/>
+                    </a:srgbClr>
+                  </a:solidFill>
+                  <a:latin typeface="Helvetica"/>
+                  <a:cs typeface="Helvetica"/>
+                </a:rPr>
+                <a:t>subHR per 10 % decline: 1.94 (1.11-3.37), p = 0.019  |  per IQR decline (Δ = 29.5 %): 7.06 (1.38-36.21)  |  IQR: [-15.6, 13.9] %</a:t>
+              </a:r>
+            </a:p>
+          </p:txBody>
+        </p:sp>
+        <p:sp>
+          <p:nvSpPr>
+            <p:cNvPr id="90" name="tx90"/>
+            <p:cNvSpPr/>
+            <p:nvPr/>
+          </p:nvSpPr>
+          <p:spPr>
+            <a:xfrm>
+              <a:off x="887106" y="3932770"/>
               <a:ext cx="3536807" cy="120152"/>
             </a:xfrm>
             <a:prstGeom prst="rect">
